--- a/data/laporan-bnpb/omc/OMC_Karhutla_16-27Okt2026.pptx
+++ b/data/laporan-bnpb/omc/OMC_Karhutla_16-27Okt2026.pptx
@@ -7,9 +7,10 @@
   <p:sldIdLst>
     <p:sldId id="256" r:id="rId2"/>
     <p:sldId id="257" r:id="rId3"/>
+    <p:sldId id="258" r:id="rId4"/>
   </p:sldIdLst>
   <p:notesMasterIdLst>
-    <p:notesMasterId r:id="rId4"/>
+    <p:notesMasterId r:id="rId5"/>
   </p:notesMasterIdLst>
   <p:sldSz cx="12192000" cy="6858000"/>
   <p:notesSz cx="6858000" cy="12192000"/>
@@ -615,6 +616,94 @@
             <a:fld id="{F7021451-1387-4CA6-816F-3879F97B5CBC}" type="slidenum">
               <a:rPr lang="en-US"/>
               <a:t>2</a:t>
+            </a:fld>
+            <a:endParaRPr lang="en-US"/>
+          </a:p>
+        </p:txBody>
+      </p:sp>
+    </p:spTree>
+    <p:extLst>
+      <p:ext uri="{BB962C8B-B14F-4D97-AF65-F5344CB8AC3E}">
+        <p14:creationId xmlns:p14="http://schemas.microsoft.com/office/powerpoint/2010/main" val="1024086991"/>
+      </p:ext>
+    </p:extLst>
+  </p:cSld>
+  <p:clrMapOvr>
+    <a:masterClrMapping/>
+  </p:clrMapOvr>
+</p:notes>
+</file>
+
+<file path=ppt/notesSlides/notesSlide3.xml><?xml version="1.0" encoding="utf-8"?>
+<p:notes xmlns:a="http://schemas.openxmlformats.org/drawingml/2006/main" xmlns:r="http://schemas.openxmlformats.org/officeDocument/2006/relationships" xmlns:p="http://schemas.openxmlformats.org/presentationml/2006/main">
+  <p:cSld>
+    <p:spTree>
+      <p:nvGrpSpPr>
+        <p:cNvPr id="1" name=""/>
+        <p:cNvGrpSpPr/>
+        <p:nvPr/>
+      </p:nvGrpSpPr>
+      <p:grpSpPr>
+        <a:xfrm>
+          <a:off x="0" y="0"/>
+          <a:ext cx="0" cy="0"/>
+          <a:chOff x="0" y="0"/>
+          <a:chExt cx="0" cy="0"/>
+        </a:xfrm>
+      </p:grpSpPr>
+      <p:sp>
+        <p:nvSpPr>
+          <p:cNvPr id="2" name="Slide Image Placeholder 1"/>
+          <p:cNvSpPr>
+            <a:spLocks noGrp="1" noRot="1" noChangeAspect="1"/>
+          </p:cNvSpPr>
+          <p:nvPr>
+            <p:ph type="sldImg"/>
+          </p:nvPr>
+        </p:nvSpPr>
+        <p:spPr/>
+      </p:sp>
+      <p:sp>
+        <p:nvSpPr>
+          <p:cNvPr id="3" name="Notes Placeholder 2"/>
+          <p:cNvSpPr>
+            <a:spLocks noGrp="1"/>
+          </p:cNvSpPr>
+          <p:nvPr>
+            <p:ph type="body" idx="1"/>
+          </p:nvPr>
+        </p:nvSpPr>
+        <p:spPr/>
+        <p:txBody>
+          <a:bodyPr/>
+          <a:lstStyle/>
+          <a:p>
+            <a:r>
+              <a:rPr lang="en-US" dirty="0"/>
+              <a:t/>
+            </a:r>
+            <a:endParaRPr lang="en-US" dirty="0"/>
+          </a:p>
+        </p:txBody>
+      </p:sp>
+      <p:sp>
+        <p:nvSpPr>
+          <p:cNvPr id="4" name="Slide Number Placeholder 3"/>
+          <p:cNvSpPr>
+            <a:spLocks noGrp="1"/>
+          </p:cNvSpPr>
+          <p:nvPr>
+            <p:ph type="sldNum" sz="quarter" idx="10"/>
+          </p:nvPr>
+        </p:nvSpPr>
+        <p:spPr/>
+        <p:txBody>
+          <a:bodyPr/>
+          <a:lstStyle/>
+          <a:p>
+            <a:fld id="{F7021451-1387-4CA6-816F-3879F97B5CBC}" type="slidenum">
+              <a:rPr lang="en-US"/>
+              <a:t>3</a:t>
             </a:fld>
             <a:endParaRPr lang="en-US"/>
           </a:p>
@@ -2882,7 +2971,7 @@
         <p:spPr>
           <a:xfrm>
             <a:off x="676656" y="2883916"/>
-            <a:ext cx="608607" cy="182880"/>
+            <a:ext cx="542260" cy="182880"/>
           </a:xfrm>
           <a:prstGeom prst="rect">
             <a:avLst/>
@@ -2920,8 +3009,8 @@
         </p:nvSpPr>
         <p:spPr>
           <a:xfrm>
-            <a:off x="1340127" y="2883916"/>
-            <a:ext cx="873995" cy="182880"/>
+            <a:off x="1273780" y="2883916"/>
+            <a:ext cx="807648" cy="182880"/>
           </a:xfrm>
           <a:prstGeom prst="rect">
             <a:avLst/>
@@ -2959,8 +3048,8 @@
         </p:nvSpPr>
         <p:spPr>
           <a:xfrm>
-            <a:off x="2268986" y="2883916"/>
-            <a:ext cx="1006690" cy="182880"/>
+            <a:off x="2136292" y="2883916"/>
+            <a:ext cx="940342" cy="182880"/>
           </a:xfrm>
           <a:prstGeom prst="rect">
             <a:avLst/>
@@ -2998,8 +3087,8 @@
         </p:nvSpPr>
         <p:spPr>
           <a:xfrm>
-            <a:off x="3330540" y="2883916"/>
-            <a:ext cx="873995" cy="182880"/>
+            <a:off x="3131498" y="2883916"/>
+            <a:ext cx="807648" cy="182880"/>
           </a:xfrm>
           <a:prstGeom prst="rect">
             <a:avLst/>
@@ -3037,8 +3126,8 @@
         </p:nvSpPr>
         <p:spPr>
           <a:xfrm>
-            <a:off x="4259399" y="2883916"/>
-            <a:ext cx="1006690" cy="182880"/>
+            <a:off x="3994011" y="2883916"/>
+            <a:ext cx="940342" cy="182880"/>
           </a:xfrm>
           <a:prstGeom prst="rect">
             <a:avLst/>
@@ -3076,8 +3165,8 @@
         </p:nvSpPr>
         <p:spPr>
           <a:xfrm>
-            <a:off x="5320953" y="2883916"/>
-            <a:ext cx="873995" cy="182880"/>
+            <a:off x="4989217" y="2883916"/>
+            <a:ext cx="1272078" cy="182880"/>
           </a:xfrm>
           <a:prstGeom prst="rect">
             <a:avLst/>
@@ -3115,8 +3204,8 @@
         </p:nvSpPr>
         <p:spPr>
           <a:xfrm>
-            <a:off x="6249812" y="2883916"/>
-            <a:ext cx="1006690" cy="182880"/>
+            <a:off x="6316159" y="2883916"/>
+            <a:ext cx="940342" cy="182880"/>
           </a:xfrm>
           <a:prstGeom prst="rect">
             <a:avLst/>
@@ -3178,7 +3267,7 @@
         <p:spPr>
           <a:xfrm>
             <a:off x="676656" y="3112516"/>
-            <a:ext cx="608607" cy="196596"/>
+            <a:ext cx="542260" cy="196596"/>
           </a:xfrm>
           <a:prstGeom prst="rect">
             <a:avLst/>
@@ -3216,8 +3305,8 @@
         </p:nvSpPr>
         <p:spPr>
           <a:xfrm>
-            <a:off x="1340127" y="3112516"/>
-            <a:ext cx="873995" cy="196596"/>
+            <a:off x="1273780" y="3112516"/>
+            <a:ext cx="807648" cy="196596"/>
           </a:xfrm>
           <a:prstGeom prst="rect">
             <a:avLst/>
@@ -3255,8 +3344,8 @@
         </p:nvSpPr>
         <p:spPr>
           <a:xfrm>
-            <a:off x="2268986" y="3112516"/>
-            <a:ext cx="1006690" cy="196596"/>
+            <a:off x="2136292" y="3112516"/>
+            <a:ext cx="940342" cy="196596"/>
           </a:xfrm>
           <a:prstGeom prst="rect">
             <a:avLst/>
@@ -3294,8 +3383,8 @@
         </p:nvSpPr>
         <p:spPr>
           <a:xfrm>
-            <a:off x="3330540" y="3112516"/>
-            <a:ext cx="873995" cy="196596"/>
+            <a:off x="3131498" y="3112516"/>
+            <a:ext cx="807648" cy="196596"/>
           </a:xfrm>
           <a:prstGeom prst="rect">
             <a:avLst/>
@@ -3333,8 +3422,8 @@
         </p:nvSpPr>
         <p:spPr>
           <a:xfrm>
-            <a:off x="4259399" y="3112516"/>
-            <a:ext cx="1006690" cy="196596"/>
+            <a:off x="3994011" y="3112516"/>
+            <a:ext cx="940342" cy="196596"/>
           </a:xfrm>
           <a:prstGeom prst="rect">
             <a:avLst/>
@@ -3372,8 +3461,8 @@
         </p:nvSpPr>
         <p:spPr>
           <a:xfrm>
-            <a:off x="5320953" y="3112516"/>
-            <a:ext cx="873995" cy="196596"/>
+            <a:off x="4989217" y="3112516"/>
+            <a:ext cx="1272078" cy="196596"/>
           </a:xfrm>
           <a:prstGeom prst="rect">
             <a:avLst/>
@@ -3411,8 +3500,8 @@
         </p:nvSpPr>
         <p:spPr>
           <a:xfrm>
-            <a:off x="6249812" y="3112516"/>
-            <a:ext cx="1006690" cy="196596"/>
+            <a:off x="6316159" y="3112516"/>
+            <a:ext cx="940342" cy="196596"/>
           </a:xfrm>
           <a:prstGeom prst="rect">
             <a:avLst/>
@@ -3474,7 +3563,7 @@
         <p:spPr>
           <a:xfrm>
             <a:off x="676656" y="3309112"/>
-            <a:ext cx="608607" cy="196596"/>
+            <a:ext cx="542260" cy="196596"/>
           </a:xfrm>
           <a:prstGeom prst="rect">
             <a:avLst/>
@@ -3512,8 +3601,8 @@
         </p:nvSpPr>
         <p:spPr>
           <a:xfrm>
-            <a:off x="1340127" y="3309112"/>
-            <a:ext cx="873995" cy="196596"/>
+            <a:off x="1273780" y="3309112"/>
+            <a:ext cx="807648" cy="196596"/>
           </a:xfrm>
           <a:prstGeom prst="rect">
             <a:avLst/>
@@ -3551,8 +3640,8 @@
         </p:nvSpPr>
         <p:spPr>
           <a:xfrm>
-            <a:off x="2268986" y="3309112"/>
-            <a:ext cx="1006690" cy="196596"/>
+            <a:off x="2136292" y="3309112"/>
+            <a:ext cx="940342" cy="196596"/>
           </a:xfrm>
           <a:prstGeom prst="rect">
             <a:avLst/>
@@ -3590,8 +3679,8 @@
         </p:nvSpPr>
         <p:spPr>
           <a:xfrm>
-            <a:off x="3330540" y="3309112"/>
-            <a:ext cx="873995" cy="196596"/>
+            <a:off x="3131498" y="3309112"/>
+            <a:ext cx="807648" cy="196596"/>
           </a:xfrm>
           <a:prstGeom prst="rect">
             <a:avLst/>
@@ -3629,8 +3718,8 @@
         </p:nvSpPr>
         <p:spPr>
           <a:xfrm>
-            <a:off x="4259399" y="3309112"/>
-            <a:ext cx="1006690" cy="196596"/>
+            <a:off x="3994011" y="3309112"/>
+            <a:ext cx="940342" cy="196596"/>
           </a:xfrm>
           <a:prstGeom prst="rect">
             <a:avLst/>
@@ -3668,8 +3757,8 @@
         </p:nvSpPr>
         <p:spPr>
           <a:xfrm>
-            <a:off x="5320953" y="3309112"/>
-            <a:ext cx="873995" cy="196596"/>
+            <a:off x="4989217" y="3309112"/>
+            <a:ext cx="1272078" cy="196596"/>
           </a:xfrm>
           <a:prstGeom prst="rect">
             <a:avLst/>
@@ -3707,8 +3796,8 @@
         </p:nvSpPr>
         <p:spPr>
           <a:xfrm>
-            <a:off x="6249812" y="3309112"/>
-            <a:ext cx="1006690" cy="196596"/>
+            <a:off x="6316159" y="3309112"/>
+            <a:ext cx="940342" cy="196596"/>
           </a:xfrm>
           <a:prstGeom prst="rect">
             <a:avLst/>
@@ -3770,7 +3859,7 @@
         <p:spPr>
           <a:xfrm>
             <a:off x="676656" y="3505708"/>
-            <a:ext cx="608607" cy="196596"/>
+            <a:ext cx="542260" cy="196596"/>
           </a:xfrm>
           <a:prstGeom prst="rect">
             <a:avLst/>
@@ -3808,8 +3897,8 @@
         </p:nvSpPr>
         <p:spPr>
           <a:xfrm>
-            <a:off x="1340127" y="3505708"/>
-            <a:ext cx="873995" cy="196596"/>
+            <a:off x="1273780" y="3505708"/>
+            <a:ext cx="807648" cy="196596"/>
           </a:xfrm>
           <a:prstGeom prst="rect">
             <a:avLst/>
@@ -3847,8 +3936,8 @@
         </p:nvSpPr>
         <p:spPr>
           <a:xfrm>
-            <a:off x="2268986" y="3505708"/>
-            <a:ext cx="1006690" cy="196596"/>
+            <a:off x="2136292" y="3505708"/>
+            <a:ext cx="940342" cy="196596"/>
           </a:xfrm>
           <a:prstGeom prst="rect">
             <a:avLst/>
@@ -3886,8 +3975,8 @@
         </p:nvSpPr>
         <p:spPr>
           <a:xfrm>
-            <a:off x="3330540" y="3505708"/>
-            <a:ext cx="873995" cy="196596"/>
+            <a:off x="3131498" y="3505708"/>
+            <a:ext cx="807648" cy="196596"/>
           </a:xfrm>
           <a:prstGeom prst="rect">
             <a:avLst/>
@@ -3925,8 +4014,8 @@
         </p:nvSpPr>
         <p:spPr>
           <a:xfrm>
-            <a:off x="4259399" y="3505708"/>
-            <a:ext cx="1006690" cy="196596"/>
+            <a:off x="3994011" y="3505708"/>
+            <a:ext cx="940342" cy="196596"/>
           </a:xfrm>
           <a:prstGeom prst="rect">
             <a:avLst/>
@@ -3964,8 +4053,8 @@
         </p:nvSpPr>
         <p:spPr>
           <a:xfrm>
-            <a:off x="5320953" y="3505708"/>
-            <a:ext cx="873995" cy="196596"/>
+            <a:off x="4989217" y="3505708"/>
+            <a:ext cx="1272078" cy="196596"/>
           </a:xfrm>
           <a:prstGeom prst="rect">
             <a:avLst/>
@@ -4003,8 +4092,8 @@
         </p:nvSpPr>
         <p:spPr>
           <a:xfrm>
-            <a:off x="6249812" y="3505708"/>
-            <a:ext cx="1006690" cy="196596"/>
+            <a:off x="6316159" y="3505708"/>
+            <a:ext cx="940342" cy="196596"/>
           </a:xfrm>
           <a:prstGeom prst="rect">
             <a:avLst/>
@@ -4066,7 +4155,7 @@
         <p:spPr>
           <a:xfrm>
             <a:off x="676656" y="3702304"/>
-            <a:ext cx="608607" cy="196596"/>
+            <a:ext cx="542260" cy="196596"/>
           </a:xfrm>
           <a:prstGeom prst="rect">
             <a:avLst/>
@@ -4104,8 +4193,8 @@
         </p:nvSpPr>
         <p:spPr>
           <a:xfrm>
-            <a:off x="1340127" y="3702304"/>
-            <a:ext cx="873995" cy="196596"/>
+            <a:off x="1273780" y="3702304"/>
+            <a:ext cx="807648" cy="196596"/>
           </a:xfrm>
           <a:prstGeom prst="rect">
             <a:avLst/>
@@ -4143,8 +4232,8 @@
         </p:nvSpPr>
         <p:spPr>
           <a:xfrm>
-            <a:off x="2268986" y="3702304"/>
-            <a:ext cx="1006690" cy="196596"/>
+            <a:off x="2136292" y="3702304"/>
+            <a:ext cx="940342" cy="196596"/>
           </a:xfrm>
           <a:prstGeom prst="rect">
             <a:avLst/>
@@ -4182,8 +4271,8 @@
         </p:nvSpPr>
         <p:spPr>
           <a:xfrm>
-            <a:off x="3330540" y="3702304"/>
-            <a:ext cx="873995" cy="196596"/>
+            <a:off x="3131498" y="3702304"/>
+            <a:ext cx="807648" cy="196596"/>
           </a:xfrm>
           <a:prstGeom prst="rect">
             <a:avLst/>
@@ -4221,8 +4310,8 @@
         </p:nvSpPr>
         <p:spPr>
           <a:xfrm>
-            <a:off x="4259399" y="3702304"/>
-            <a:ext cx="1006690" cy="196596"/>
+            <a:off x="3994011" y="3702304"/>
+            <a:ext cx="940342" cy="196596"/>
           </a:xfrm>
           <a:prstGeom prst="rect">
             <a:avLst/>
@@ -4260,8 +4349,8 @@
         </p:nvSpPr>
         <p:spPr>
           <a:xfrm>
-            <a:off x="5320953" y="3702304"/>
-            <a:ext cx="873995" cy="196596"/>
+            <a:off x="4989217" y="3702304"/>
+            <a:ext cx="1272078" cy="196596"/>
           </a:xfrm>
           <a:prstGeom prst="rect">
             <a:avLst/>
@@ -4299,8 +4388,8 @@
         </p:nvSpPr>
         <p:spPr>
           <a:xfrm>
-            <a:off x="6249812" y="3702304"/>
-            <a:ext cx="1006690" cy="196596"/>
+            <a:off x="6316159" y="3702304"/>
+            <a:ext cx="940342" cy="196596"/>
           </a:xfrm>
           <a:prstGeom prst="rect">
             <a:avLst/>
@@ -4362,7 +4451,7 @@
         <p:spPr>
           <a:xfrm>
             <a:off x="676656" y="3898900"/>
-            <a:ext cx="608607" cy="196596"/>
+            <a:ext cx="542260" cy="196596"/>
           </a:xfrm>
           <a:prstGeom prst="rect">
             <a:avLst/>
@@ -4400,8 +4489,8 @@
         </p:nvSpPr>
         <p:spPr>
           <a:xfrm>
-            <a:off x="1340127" y="3898900"/>
-            <a:ext cx="873995" cy="196596"/>
+            <a:off x="1273780" y="3898900"/>
+            <a:ext cx="807648" cy="196596"/>
           </a:xfrm>
           <a:prstGeom prst="rect">
             <a:avLst/>
@@ -4439,8 +4528,8 @@
         </p:nvSpPr>
         <p:spPr>
           <a:xfrm>
-            <a:off x="2268986" y="3898900"/>
-            <a:ext cx="1006690" cy="196596"/>
+            <a:off x="2136292" y="3898900"/>
+            <a:ext cx="940342" cy="196596"/>
           </a:xfrm>
           <a:prstGeom prst="rect">
             <a:avLst/>
@@ -4478,8 +4567,8 @@
         </p:nvSpPr>
         <p:spPr>
           <a:xfrm>
-            <a:off x="3330540" y="3898900"/>
-            <a:ext cx="873995" cy="196596"/>
+            <a:off x="3131498" y="3898900"/>
+            <a:ext cx="807648" cy="196596"/>
           </a:xfrm>
           <a:prstGeom prst="rect">
             <a:avLst/>
@@ -4517,8 +4606,8 @@
         </p:nvSpPr>
         <p:spPr>
           <a:xfrm>
-            <a:off x="4259399" y="3898900"/>
-            <a:ext cx="1006690" cy="196596"/>
+            <a:off x="3994011" y="3898900"/>
+            <a:ext cx="940342" cy="196596"/>
           </a:xfrm>
           <a:prstGeom prst="rect">
             <a:avLst/>
@@ -4556,8 +4645,8 @@
         </p:nvSpPr>
         <p:spPr>
           <a:xfrm>
-            <a:off x="5320953" y="3898900"/>
-            <a:ext cx="873995" cy="196596"/>
+            <a:off x="4989217" y="3898900"/>
+            <a:ext cx="1272078" cy="196596"/>
           </a:xfrm>
           <a:prstGeom prst="rect">
             <a:avLst/>
@@ -4595,8 +4684,8 @@
         </p:nvSpPr>
         <p:spPr>
           <a:xfrm>
-            <a:off x="6249812" y="3898900"/>
-            <a:ext cx="1006690" cy="196596"/>
+            <a:off x="6316159" y="3898900"/>
+            <a:ext cx="940342" cy="196596"/>
           </a:xfrm>
           <a:prstGeom prst="rect">
             <a:avLst/>
@@ -4658,7 +4747,7 @@
         <p:spPr>
           <a:xfrm>
             <a:off x="676656" y="4095496"/>
-            <a:ext cx="608607" cy="196596"/>
+            <a:ext cx="542260" cy="196596"/>
           </a:xfrm>
           <a:prstGeom prst="rect">
             <a:avLst/>
@@ -4696,8 +4785,8 @@
         </p:nvSpPr>
         <p:spPr>
           <a:xfrm>
-            <a:off x="1340127" y="4095496"/>
-            <a:ext cx="873995" cy="196596"/>
+            <a:off x="1273780" y="4095496"/>
+            <a:ext cx="807648" cy="196596"/>
           </a:xfrm>
           <a:prstGeom prst="rect">
             <a:avLst/>
@@ -4735,8 +4824,8 @@
         </p:nvSpPr>
         <p:spPr>
           <a:xfrm>
-            <a:off x="2268986" y="4095496"/>
-            <a:ext cx="1006690" cy="196596"/>
+            <a:off x="2136292" y="4095496"/>
+            <a:ext cx="940342" cy="196596"/>
           </a:xfrm>
           <a:prstGeom prst="rect">
             <a:avLst/>
@@ -4774,8 +4863,8 @@
         </p:nvSpPr>
         <p:spPr>
           <a:xfrm>
-            <a:off x="3330540" y="4095496"/>
-            <a:ext cx="873995" cy="196596"/>
+            <a:off x="3131498" y="4095496"/>
+            <a:ext cx="807648" cy="196596"/>
           </a:xfrm>
           <a:prstGeom prst="rect">
             <a:avLst/>
@@ -4813,8 +4902,8 @@
         </p:nvSpPr>
         <p:spPr>
           <a:xfrm>
-            <a:off x="4259399" y="4095496"/>
-            <a:ext cx="1006690" cy="196596"/>
+            <a:off x="3994011" y="4095496"/>
+            <a:ext cx="940342" cy="196596"/>
           </a:xfrm>
           <a:prstGeom prst="rect">
             <a:avLst/>
@@ -4852,8 +4941,8 @@
         </p:nvSpPr>
         <p:spPr>
           <a:xfrm>
-            <a:off x="5320953" y="4095496"/>
-            <a:ext cx="873995" cy="196596"/>
+            <a:off x="4989217" y="4095496"/>
+            <a:ext cx="1272078" cy="196596"/>
           </a:xfrm>
           <a:prstGeom prst="rect">
             <a:avLst/>
@@ -4891,8 +4980,8 @@
         </p:nvSpPr>
         <p:spPr>
           <a:xfrm>
-            <a:off x="6249812" y="4095496"/>
-            <a:ext cx="1006690" cy="196596"/>
+            <a:off x="6316159" y="4095496"/>
+            <a:ext cx="940342" cy="196596"/>
           </a:xfrm>
           <a:prstGeom prst="rect">
             <a:avLst/>
@@ -4954,7 +5043,7 @@
         <p:spPr>
           <a:xfrm>
             <a:off x="676656" y="4292092"/>
-            <a:ext cx="608607" cy="196596"/>
+            <a:ext cx="542260" cy="196596"/>
           </a:xfrm>
           <a:prstGeom prst="rect">
             <a:avLst/>
@@ -4992,8 +5081,8 @@
         </p:nvSpPr>
         <p:spPr>
           <a:xfrm>
-            <a:off x="1340127" y="4292092"/>
-            <a:ext cx="873995" cy="196596"/>
+            <a:off x="1273780" y="4292092"/>
+            <a:ext cx="807648" cy="196596"/>
           </a:xfrm>
           <a:prstGeom prst="rect">
             <a:avLst/>
@@ -5031,8 +5120,8 @@
         </p:nvSpPr>
         <p:spPr>
           <a:xfrm>
-            <a:off x="2268986" y="4292092"/>
-            <a:ext cx="1006690" cy="196596"/>
+            <a:off x="2136292" y="4292092"/>
+            <a:ext cx="940342" cy="196596"/>
           </a:xfrm>
           <a:prstGeom prst="rect">
             <a:avLst/>
@@ -5070,8 +5159,8 @@
         </p:nvSpPr>
         <p:spPr>
           <a:xfrm>
-            <a:off x="3330540" y="4292092"/>
-            <a:ext cx="873995" cy="196596"/>
+            <a:off x="3131498" y="4292092"/>
+            <a:ext cx="807648" cy="196596"/>
           </a:xfrm>
           <a:prstGeom prst="rect">
             <a:avLst/>
@@ -5109,8 +5198,8 @@
         </p:nvSpPr>
         <p:spPr>
           <a:xfrm>
-            <a:off x="4259399" y="4292092"/>
-            <a:ext cx="1006690" cy="196596"/>
+            <a:off x="3994011" y="4292092"/>
+            <a:ext cx="940342" cy="196596"/>
           </a:xfrm>
           <a:prstGeom prst="rect">
             <a:avLst/>
@@ -5148,8 +5237,8 @@
         </p:nvSpPr>
         <p:spPr>
           <a:xfrm>
-            <a:off x="5320953" y="4292092"/>
-            <a:ext cx="873995" cy="196596"/>
+            <a:off x="4989217" y="4292092"/>
+            <a:ext cx="1272078" cy="196596"/>
           </a:xfrm>
           <a:prstGeom prst="rect">
             <a:avLst/>
@@ -5187,8 +5276,8 @@
         </p:nvSpPr>
         <p:spPr>
           <a:xfrm>
-            <a:off x="6249812" y="4292092"/>
-            <a:ext cx="1006690" cy="196596"/>
+            <a:off x="6316159" y="4292092"/>
+            <a:ext cx="940342" cy="196596"/>
           </a:xfrm>
           <a:prstGeom prst="rect">
             <a:avLst/>
@@ -5250,7 +5339,7 @@
         <p:spPr>
           <a:xfrm>
             <a:off x="676656" y="4488688"/>
-            <a:ext cx="608607" cy="196596"/>
+            <a:ext cx="542260" cy="196596"/>
           </a:xfrm>
           <a:prstGeom prst="rect">
             <a:avLst/>
@@ -5288,8 +5377,8 @@
         </p:nvSpPr>
         <p:spPr>
           <a:xfrm>
-            <a:off x="1340127" y="4488688"/>
-            <a:ext cx="873995" cy="196596"/>
+            <a:off x="1273780" y="4488688"/>
+            <a:ext cx="807648" cy="196596"/>
           </a:xfrm>
           <a:prstGeom prst="rect">
             <a:avLst/>
@@ -5327,8 +5416,8 @@
         </p:nvSpPr>
         <p:spPr>
           <a:xfrm>
-            <a:off x="2268986" y="4488688"/>
-            <a:ext cx="1006690" cy="196596"/>
+            <a:off x="2136292" y="4488688"/>
+            <a:ext cx="940342" cy="196596"/>
           </a:xfrm>
           <a:prstGeom prst="rect">
             <a:avLst/>
@@ -5366,8 +5455,8 @@
         </p:nvSpPr>
         <p:spPr>
           <a:xfrm>
-            <a:off x="3330540" y="4488688"/>
-            <a:ext cx="873995" cy="196596"/>
+            <a:off x="3131498" y="4488688"/>
+            <a:ext cx="807648" cy="196596"/>
           </a:xfrm>
           <a:prstGeom prst="rect">
             <a:avLst/>
@@ -5405,8 +5494,8 @@
         </p:nvSpPr>
         <p:spPr>
           <a:xfrm>
-            <a:off x="4259399" y="4488688"/>
-            <a:ext cx="1006690" cy="196596"/>
+            <a:off x="3994011" y="4488688"/>
+            <a:ext cx="940342" cy="196596"/>
           </a:xfrm>
           <a:prstGeom prst="rect">
             <a:avLst/>
@@ -5444,8 +5533,8 @@
         </p:nvSpPr>
         <p:spPr>
           <a:xfrm>
-            <a:off x="5320953" y="4488688"/>
-            <a:ext cx="873995" cy="196596"/>
+            <a:off x="4989217" y="4488688"/>
+            <a:ext cx="1272078" cy="196596"/>
           </a:xfrm>
           <a:prstGeom prst="rect">
             <a:avLst/>
@@ -5483,8 +5572,8 @@
         </p:nvSpPr>
         <p:spPr>
           <a:xfrm>
-            <a:off x="6249812" y="4488688"/>
-            <a:ext cx="1006690" cy="196596"/>
+            <a:off x="6316159" y="4488688"/>
+            <a:ext cx="940342" cy="196596"/>
           </a:xfrm>
           <a:prstGeom prst="rect">
             <a:avLst/>
@@ -5546,7 +5635,7 @@
         <p:spPr>
           <a:xfrm>
             <a:off x="676656" y="4685284"/>
-            <a:ext cx="608607" cy="196596"/>
+            <a:ext cx="542260" cy="196596"/>
           </a:xfrm>
           <a:prstGeom prst="rect">
             <a:avLst/>
@@ -5584,8 +5673,8 @@
         </p:nvSpPr>
         <p:spPr>
           <a:xfrm>
-            <a:off x="1340127" y="4685284"/>
-            <a:ext cx="873995" cy="196596"/>
+            <a:off x="1273780" y="4685284"/>
+            <a:ext cx="807648" cy="196596"/>
           </a:xfrm>
           <a:prstGeom prst="rect">
             <a:avLst/>
@@ -5623,8 +5712,8 @@
         </p:nvSpPr>
         <p:spPr>
           <a:xfrm>
-            <a:off x="2268986" y="4685284"/>
-            <a:ext cx="1006690" cy="196596"/>
+            <a:off x="2136292" y="4685284"/>
+            <a:ext cx="940342" cy="196596"/>
           </a:xfrm>
           <a:prstGeom prst="rect">
             <a:avLst/>
@@ -5662,8 +5751,8 @@
         </p:nvSpPr>
         <p:spPr>
           <a:xfrm>
-            <a:off x="3330540" y="4685284"/>
-            <a:ext cx="873995" cy="196596"/>
+            <a:off x="3131498" y="4685284"/>
+            <a:ext cx="807648" cy="196596"/>
           </a:xfrm>
           <a:prstGeom prst="rect">
             <a:avLst/>
@@ -5701,8 +5790,8 @@
         </p:nvSpPr>
         <p:spPr>
           <a:xfrm>
-            <a:off x="4259399" y="4685284"/>
-            <a:ext cx="1006690" cy="196596"/>
+            <a:off x="3994011" y="4685284"/>
+            <a:ext cx="940342" cy="196596"/>
           </a:xfrm>
           <a:prstGeom prst="rect">
             <a:avLst/>
@@ -5740,8 +5829,8 @@
         </p:nvSpPr>
         <p:spPr>
           <a:xfrm>
-            <a:off x="5320953" y="4685284"/>
-            <a:ext cx="873995" cy="196596"/>
+            <a:off x="4989217" y="4685284"/>
+            <a:ext cx="1272078" cy="196596"/>
           </a:xfrm>
           <a:prstGeom prst="rect">
             <a:avLst/>
@@ -5779,8 +5868,8 @@
         </p:nvSpPr>
         <p:spPr>
           <a:xfrm>
-            <a:off x="6249812" y="4685284"/>
-            <a:ext cx="1006690" cy="196596"/>
+            <a:off x="6316159" y="4685284"/>
+            <a:ext cx="940342" cy="196596"/>
           </a:xfrm>
           <a:prstGeom prst="rect">
             <a:avLst/>
@@ -5842,7 +5931,7 @@
         <p:spPr>
           <a:xfrm>
             <a:off x="676656" y="4881880"/>
-            <a:ext cx="608607" cy="196596"/>
+            <a:ext cx="542260" cy="196596"/>
           </a:xfrm>
           <a:prstGeom prst="rect">
             <a:avLst/>
@@ -5880,8 +5969,8 @@
         </p:nvSpPr>
         <p:spPr>
           <a:xfrm>
-            <a:off x="1340127" y="4881880"/>
-            <a:ext cx="873995" cy="196596"/>
+            <a:off x="1273780" y="4881880"/>
+            <a:ext cx="807648" cy="196596"/>
           </a:xfrm>
           <a:prstGeom prst="rect">
             <a:avLst/>
@@ -5919,8 +6008,8 @@
         </p:nvSpPr>
         <p:spPr>
           <a:xfrm>
-            <a:off x="2268986" y="4881880"/>
-            <a:ext cx="1006690" cy="196596"/>
+            <a:off x="2136292" y="4881880"/>
+            <a:ext cx="940342" cy="196596"/>
           </a:xfrm>
           <a:prstGeom prst="rect">
             <a:avLst/>
@@ -5958,8 +6047,8 @@
         </p:nvSpPr>
         <p:spPr>
           <a:xfrm>
-            <a:off x="3330540" y="4881880"/>
-            <a:ext cx="873995" cy="196596"/>
+            <a:off x="3131498" y="4881880"/>
+            <a:ext cx="807648" cy="196596"/>
           </a:xfrm>
           <a:prstGeom prst="rect">
             <a:avLst/>
@@ -5997,8 +6086,8 @@
         </p:nvSpPr>
         <p:spPr>
           <a:xfrm>
-            <a:off x="4259399" y="4881880"/>
-            <a:ext cx="1006690" cy="196596"/>
+            <a:off x="3994011" y="4881880"/>
+            <a:ext cx="940342" cy="196596"/>
           </a:xfrm>
           <a:prstGeom prst="rect">
             <a:avLst/>
@@ -6036,8 +6125,8 @@
         </p:nvSpPr>
         <p:spPr>
           <a:xfrm>
-            <a:off x="5320953" y="4881880"/>
-            <a:ext cx="873995" cy="196596"/>
+            <a:off x="4989217" y="4881880"/>
+            <a:ext cx="1272078" cy="196596"/>
           </a:xfrm>
           <a:prstGeom prst="rect">
             <a:avLst/>
@@ -6075,8 +6164,8 @@
         </p:nvSpPr>
         <p:spPr>
           <a:xfrm>
-            <a:off x="6249812" y="4881880"/>
-            <a:ext cx="1006690" cy="196596"/>
+            <a:off x="6316159" y="4881880"/>
+            <a:ext cx="940342" cy="196596"/>
           </a:xfrm>
           <a:prstGeom prst="rect">
             <a:avLst/>
@@ -6138,7 +6227,7 @@
         <p:spPr>
           <a:xfrm>
             <a:off x="676656" y="5078476"/>
-            <a:ext cx="608607" cy="196596"/>
+            <a:ext cx="542260" cy="196596"/>
           </a:xfrm>
           <a:prstGeom prst="rect">
             <a:avLst/>
@@ -6176,8 +6265,8 @@
         </p:nvSpPr>
         <p:spPr>
           <a:xfrm>
-            <a:off x="1340127" y="5078476"/>
-            <a:ext cx="873995" cy="196596"/>
+            <a:off x="1273780" y="5078476"/>
+            <a:ext cx="807648" cy="196596"/>
           </a:xfrm>
           <a:prstGeom prst="rect">
             <a:avLst/>
@@ -6215,8 +6304,8 @@
         </p:nvSpPr>
         <p:spPr>
           <a:xfrm>
-            <a:off x="2268986" y="5078476"/>
-            <a:ext cx="1006690" cy="196596"/>
+            <a:off x="2136292" y="5078476"/>
+            <a:ext cx="940342" cy="196596"/>
           </a:xfrm>
           <a:prstGeom prst="rect">
             <a:avLst/>
@@ -6254,8 +6343,8 @@
         </p:nvSpPr>
         <p:spPr>
           <a:xfrm>
-            <a:off x="3330540" y="5078476"/>
-            <a:ext cx="873995" cy="196596"/>
+            <a:off x="3131498" y="5078476"/>
+            <a:ext cx="807648" cy="196596"/>
           </a:xfrm>
           <a:prstGeom prst="rect">
             <a:avLst/>
@@ -6293,8 +6382,8 @@
         </p:nvSpPr>
         <p:spPr>
           <a:xfrm>
-            <a:off x="4259399" y="5078476"/>
-            <a:ext cx="1006690" cy="196596"/>
+            <a:off x="3994011" y="5078476"/>
+            <a:ext cx="940342" cy="196596"/>
           </a:xfrm>
           <a:prstGeom prst="rect">
             <a:avLst/>
@@ -6332,8 +6421,8 @@
         </p:nvSpPr>
         <p:spPr>
           <a:xfrm>
-            <a:off x="5320953" y="5078476"/>
-            <a:ext cx="873995" cy="196596"/>
+            <a:off x="4989217" y="5078476"/>
+            <a:ext cx="1272078" cy="196596"/>
           </a:xfrm>
           <a:prstGeom prst="rect">
             <a:avLst/>
@@ -6371,8 +6460,8 @@
         </p:nvSpPr>
         <p:spPr>
           <a:xfrm>
-            <a:off x="6249812" y="5078476"/>
-            <a:ext cx="1006690" cy="196596"/>
+            <a:off x="6316159" y="5078476"/>
+            <a:ext cx="940342" cy="196596"/>
           </a:xfrm>
           <a:prstGeom prst="rect">
             <a:avLst/>
@@ -6434,7 +6523,7 @@
         <p:spPr>
           <a:xfrm>
             <a:off x="676656" y="5275072"/>
-            <a:ext cx="608607" cy="196596"/>
+            <a:ext cx="542260" cy="196596"/>
           </a:xfrm>
           <a:prstGeom prst="rect">
             <a:avLst/>
@@ -6472,8 +6561,8 @@
         </p:nvSpPr>
         <p:spPr>
           <a:xfrm>
-            <a:off x="1340127" y="5275072"/>
-            <a:ext cx="873995" cy="196596"/>
+            <a:off x="1273780" y="5275072"/>
+            <a:ext cx="807648" cy="196596"/>
           </a:xfrm>
           <a:prstGeom prst="rect">
             <a:avLst/>
@@ -6511,8 +6600,8 @@
         </p:nvSpPr>
         <p:spPr>
           <a:xfrm>
-            <a:off x="2268986" y="5275072"/>
-            <a:ext cx="1006690" cy="196596"/>
+            <a:off x="2136292" y="5275072"/>
+            <a:ext cx="940342" cy="196596"/>
           </a:xfrm>
           <a:prstGeom prst="rect">
             <a:avLst/>
@@ -6550,8 +6639,8 @@
         </p:nvSpPr>
         <p:spPr>
           <a:xfrm>
-            <a:off x="3330540" y="5275072"/>
-            <a:ext cx="873995" cy="196596"/>
+            <a:off x="3131498" y="5275072"/>
+            <a:ext cx="807648" cy="196596"/>
           </a:xfrm>
           <a:prstGeom prst="rect">
             <a:avLst/>
@@ -6589,8 +6678,8 @@
         </p:nvSpPr>
         <p:spPr>
           <a:xfrm>
-            <a:off x="4259399" y="5275072"/>
-            <a:ext cx="1006690" cy="196596"/>
+            <a:off x="3994011" y="5275072"/>
+            <a:ext cx="940342" cy="196596"/>
           </a:xfrm>
           <a:prstGeom prst="rect">
             <a:avLst/>
@@ -6628,8 +6717,8 @@
         </p:nvSpPr>
         <p:spPr>
           <a:xfrm>
-            <a:off x="5320953" y="5275072"/>
-            <a:ext cx="873995" cy="196596"/>
+            <a:off x="4989217" y="5275072"/>
+            <a:ext cx="1272078" cy="196596"/>
           </a:xfrm>
           <a:prstGeom prst="rect">
             <a:avLst/>
@@ -6653,7 +6742,7 @@
                 <a:ea typeface="Roboto" pitchFamily="34" charset="-122"/>
                 <a:cs typeface="Roboto" pitchFamily="34" charset="-120"/>
               </a:rPr>
-              <a:t>Papsel 2 (2,0+0)</a:t>
+              <a:t>Papua Selatan 2 (2,0+0)</a:t>
             </a:r>
             <a:endParaRPr lang="en-US" sz="800" dirty="0"/>
           </a:p>
@@ -6667,8 +6756,8 @@
         </p:nvSpPr>
         <p:spPr>
           <a:xfrm>
-            <a:off x="6249812" y="5275072"/>
-            <a:ext cx="1006690" cy="196596"/>
+            <a:off x="6316159" y="5275072"/>
+            <a:ext cx="940342" cy="196596"/>
           </a:xfrm>
           <a:prstGeom prst="rect">
             <a:avLst/>
@@ -6752,7 +6841,7 @@
         <p:spPr>
           <a:xfrm>
             <a:off x="676656" y="5471668"/>
-            <a:ext cx="608607" cy="196596"/>
+            <a:ext cx="542260" cy="196596"/>
           </a:xfrm>
           <a:prstGeom prst="rect">
             <a:avLst/>
@@ -6790,8 +6879,8 @@
         </p:nvSpPr>
         <p:spPr>
           <a:xfrm>
-            <a:off x="1340127" y="5471668"/>
-            <a:ext cx="873995" cy="196596"/>
+            <a:off x="1273780" y="5471668"/>
+            <a:ext cx="807648" cy="196596"/>
           </a:xfrm>
           <a:prstGeom prst="rect">
             <a:avLst/>
@@ -6829,8 +6918,8 @@
         </p:nvSpPr>
         <p:spPr>
           <a:xfrm>
-            <a:off x="2268986" y="5471668"/>
-            <a:ext cx="1006690" cy="196596"/>
+            <a:off x="2136292" y="5471668"/>
+            <a:ext cx="940342" cy="196596"/>
           </a:xfrm>
           <a:prstGeom prst="rect">
             <a:avLst/>
@@ -6868,8 +6957,8 @@
         </p:nvSpPr>
         <p:spPr>
           <a:xfrm>
-            <a:off x="3330540" y="5471668"/>
-            <a:ext cx="873995" cy="196596"/>
+            <a:off x="3131498" y="5471668"/>
+            <a:ext cx="807648" cy="196596"/>
           </a:xfrm>
           <a:prstGeom prst="rect">
             <a:avLst/>
@@ -6907,8 +6996,8 @@
         </p:nvSpPr>
         <p:spPr>
           <a:xfrm>
-            <a:off x="4259399" y="5471668"/>
-            <a:ext cx="1006690" cy="196596"/>
+            <a:off x="3994011" y="5471668"/>
+            <a:ext cx="940342" cy="196596"/>
           </a:xfrm>
           <a:prstGeom prst="rect">
             <a:avLst/>
@@ -6946,8 +7035,8 @@
         </p:nvSpPr>
         <p:spPr>
           <a:xfrm>
-            <a:off x="5320953" y="5471668"/>
-            <a:ext cx="873995" cy="196596"/>
+            <a:off x="4989217" y="5471668"/>
+            <a:ext cx="1272078" cy="196596"/>
           </a:xfrm>
           <a:prstGeom prst="rect">
             <a:avLst/>
@@ -6985,8 +7074,8 @@
         </p:nvSpPr>
         <p:spPr>
           <a:xfrm>
-            <a:off x="6249812" y="5471668"/>
-            <a:ext cx="1006690" cy="196596"/>
+            <a:off x="6316159" y="5471668"/>
+            <a:ext cx="940342" cy="196596"/>
           </a:xfrm>
           <a:prstGeom prst="rect">
             <a:avLst/>
@@ -11056,6 +11145,2962 @@
             <a:fld id="{F7021451-1387-4CA6-816F-3879F97B5CBC}" type="slidenum">
               <a:rPr b="1" lang="en-US"/>
               <a:t>2</a:t>
+            </a:fld>
+            <a:endParaRPr lang="en-US"/>
+          </a:p>
+        </p:txBody>
+      </p:sp>
+    </p:spTree>
+  </p:cSld>
+  <p:clrMapOvr>
+    <a:masterClrMapping/>
+  </p:clrMapOvr>
+</p:sld>
+</file>
+
+<file path=ppt/slides/slide3.xml><?xml version="1.0" encoding="utf-8"?>
+<p:sld xmlns:a="http://schemas.openxmlformats.org/drawingml/2006/main" xmlns:r="http://schemas.openxmlformats.org/officeDocument/2006/relationships" xmlns:p="http://schemas.openxmlformats.org/presentationml/2006/main">
+  <p:cSld name="Slide 3">
+    <p:spTree>
+      <p:nvGrpSpPr>
+        <p:cNvPr id="1" name=""/>
+        <p:cNvGrpSpPr/>
+        <p:nvPr/>
+      </p:nvGrpSpPr>
+      <p:grpSpPr>
+        <a:xfrm>
+          <a:off x="0" y="0"/>
+          <a:ext cx="0" cy="0"/>
+          <a:chOff x="0" y="0"/>
+          <a:chExt cx="0" cy="0"/>
+        </a:xfrm>
+      </p:grpSpPr>
+      <p:sp>
+        <p:nvSpPr>
+          <p:cNvPr id="2" name="Text 3"/>
+          <p:cNvSpPr/>
+          <p:nvPr>
+            <p:ph idx="104" type="title" hasCustomPrompt="1"/>
+          </p:nvPr>
+        </p:nvSpPr>
+        <p:spPr>
+          <a:xfrm>
+            <a:off x="548640" y="274320"/>
+            <a:ext cx="8174736" cy="822960"/>
+          </a:xfrm>
+          <a:prstGeom prst="rect">
+            <a:avLst/>
+          </a:prstGeom>
+          <a:noFill/>
+          <a:ln/>
+        </p:spPr>
+        <p:txBody>
+          <a:bodyPr wrap="square" lIns="0" tIns="0" rIns="0" bIns="0" rtlCol="0" anchor="b"/>
+          <a:lstStyle/>
+          <a:p>
+            <a:pPr algn="l" indent="0" marL="0">
+              <a:buNone/>
+            </a:pPr>
+            <a:r>
+              <a:rPr lang="en-US" sz="2200" b="1" dirty="0">
+                <a:solidFill>
+                  <a:srgbClr val="1A1A1A"/>
+                </a:solidFill>
+                <a:latin typeface="Roboto" pitchFamily="34" charset="0"/>
+                <a:ea typeface="Roboto" pitchFamily="34" charset="-122"/>
+                <a:cs typeface="Roboto" pitchFamily="34" charset="-120"/>
+              </a:rPr>
+              <a:t>Bukti dunia: penyemaian higroskopis paling banyak menambah sekitar </a:t>
+            </a:r>
+            <a:r>
+              <a:rPr lang="en-US" sz="2200" b="1" dirty="0">
+                <a:solidFill>
+                  <a:srgbClr val="D9600B"/>
+                </a:solidFill>
+                <a:latin typeface="Roboto" pitchFamily="34" charset="0"/>
+                <a:ea typeface="Roboto" pitchFamily="34" charset="-122"/>
+                <a:cs typeface="Roboto" pitchFamily="34" charset="-120"/>
+              </a:rPr>
+              <a:t>18%</a:t>
+            </a:r>
+            <a:r>
+              <a:rPr lang="en-US" sz="2200" b="1" dirty="0">
+                <a:solidFill>
+                  <a:srgbClr val="1A1A1A"/>
+                </a:solidFill>
+                <a:latin typeface="Roboto" pitchFamily="34" charset="0"/>
+                <a:ea typeface="Roboto" pitchFamily="34" charset="-122"/>
+                <a:cs typeface="Roboto" pitchFamily="34" charset="-120"/>
+              </a:rPr>
+              <a:t> hujan, dry ice untuk asap belum terbukti</a:t>
+            </a:r>
+            <a:endParaRPr lang="en-US" sz="2200" dirty="0"/>
+          </a:p>
+        </p:txBody>
+      </p:sp>
+      <p:sp>
+        <p:nvSpPr>
+          <p:cNvPr id="3" name="Shape 1"/>
+          <p:cNvSpPr/>
+          <p:nvPr/>
+        </p:nvSpPr>
+        <p:spPr>
+          <a:xfrm>
+            <a:off x="8842248" y="886968"/>
+            <a:ext cx="2359152" cy="228600"/>
+          </a:xfrm>
+          <a:prstGeom prst="roundRect">
+            <a:avLst>
+              <a:gd name="adj" fmla="val 50000"/>
+            </a:avLst>
+          </a:prstGeom>
+          <a:solidFill>
+            <a:srgbClr val="051C2C"/>
+          </a:solidFill>
+          <a:ln/>
+        </p:spPr>
+      </p:sp>
+      <p:sp>
+        <p:nvSpPr>
+          <p:cNvPr id="4" name="Text 2"/>
+          <p:cNvSpPr/>
+          <p:nvPr/>
+        </p:nvSpPr>
+        <p:spPr>
+          <a:xfrm>
+            <a:off x="8897112" y="886968"/>
+            <a:ext cx="2249424" cy="228600"/>
+          </a:xfrm>
+          <a:prstGeom prst="rect">
+            <a:avLst/>
+          </a:prstGeom>
+          <a:noFill/>
+          <a:ln/>
+        </p:spPr>
+        <p:txBody>
+          <a:bodyPr wrap="square" lIns="0" tIns="0" rIns="0" bIns="0" rtlCol="0" anchor="ctr"/>
+          <a:lstStyle/>
+          <a:p>
+            <a:pPr algn="ctr" indent="0" marL="0">
+              <a:buNone/>
+            </a:pPr>
+            <a:endParaRPr lang="en-US" sz="800" dirty="0"/>
+          </a:p>
+        </p:txBody>
+      </p:sp>
+      <p:sp>
+        <p:nvSpPr>
+          <p:cNvPr id="5" name="Text 3"/>
+          <p:cNvSpPr/>
+          <p:nvPr/>
+        </p:nvSpPr>
+        <p:spPr>
+          <a:xfrm>
+            <a:off x="8842248" y="886968"/>
+            <a:ext cx="2359152" cy="228600"/>
+          </a:xfrm>
+          <a:prstGeom prst="rect">
+            <a:avLst/>
+          </a:prstGeom>
+          <a:noFill/>
+          <a:ln/>
+        </p:spPr>
+        <p:txBody>
+          <a:bodyPr wrap="square" lIns="0" tIns="0" rIns="0" bIns="0" rtlCol="0" anchor="ctr"/>
+          <a:lstStyle/>
+          <a:p>
+            <a:pPr algn="ctr" indent="0" marL="0">
+              <a:buNone/>
+            </a:pPr>
+            <a:r>
+              <a:rPr lang="en-US" sz="800" b="1" spc="100" kern="0" dirty="0">
+                <a:solidFill>
+                  <a:srgbClr val="AFC3DA"/>
+                </a:solidFill>
+                <a:latin typeface="Roboto" pitchFamily="34" charset="0"/>
+                <a:ea typeface="Roboto" pitchFamily="34" charset="-122"/>
+                <a:cs typeface="Roboto" pitchFamily="34" charset="-120"/>
+              </a:rPr>
+              <a:t>CUT OFF DATA</a:t>
+            </a:r>
+            <a:r>
+              <a:rPr lang="en-US" sz="900" dirty="0">
+                <a:solidFill>
+                  <a:srgbClr val="FFFFFF"/>
+                </a:solidFill>
+                <a:latin typeface="Roboto" pitchFamily="34" charset="0"/>
+                <a:ea typeface="Roboto" pitchFamily="34" charset="-122"/>
+                <a:cs typeface="Roboto" pitchFamily="34" charset="-120"/>
+              </a:rPr>
+              <a:t> </a:t>
+            </a:r>
+            <a:r>
+              <a:rPr lang="en-US" sz="900" b="1" dirty="0">
+                <a:solidFill>
+                  <a:srgbClr val="FFFFFF"/>
+                </a:solidFill>
+                <a:latin typeface="Roboto" pitchFamily="34" charset="0"/>
+                <a:ea typeface="Roboto" pitchFamily="34" charset="-122"/>
+                <a:cs typeface="Roboto" pitchFamily="34" charset="-120"/>
+              </a:rPr>
+              <a:t>27 Okt 2026</a:t>
+            </a:r>
+            <a:endParaRPr lang="en-US" sz="800" dirty="0"/>
+          </a:p>
+        </p:txBody>
+      </p:sp>
+      <p:sp>
+        <p:nvSpPr>
+          <p:cNvPr id="6" name="Shape 4"/>
+          <p:cNvSpPr/>
+          <p:nvPr/>
+        </p:nvSpPr>
+        <p:spPr>
+          <a:xfrm>
+            <a:off x="548640" y="6181344"/>
+            <a:ext cx="36576" cy="164592"/>
+          </a:xfrm>
+          <a:prstGeom prst="rect">
+            <a:avLst/>
+          </a:prstGeom>
+          <a:solidFill>
+            <a:srgbClr val="4A9BE0"/>
+          </a:solidFill>
+          <a:ln/>
+        </p:spPr>
+      </p:sp>
+      <p:sp>
+        <p:nvSpPr>
+          <p:cNvPr id="7" name="Text 5"/>
+          <p:cNvSpPr/>
+          <p:nvPr/>
+        </p:nvSpPr>
+        <p:spPr>
+          <a:xfrm>
+            <a:off x="640080" y="6163056"/>
+            <a:ext cx="11000232" cy="201168"/>
+          </a:xfrm>
+          <a:prstGeom prst="rect">
+            <a:avLst/>
+          </a:prstGeom>
+          <a:noFill/>
+          <a:ln/>
+        </p:spPr>
+        <p:txBody>
+          <a:bodyPr wrap="square" lIns="0" tIns="0" rIns="0" bIns="0" rtlCol="0" anchor="ctr"/>
+          <a:lstStyle/>
+          <a:p>
+            <a:pPr indent="0" marL="0">
+              <a:buNone/>
+            </a:pPr>
+            <a:r>
+              <a:rPr lang="en-US" sz="800" dirty="0">
+                <a:solidFill>
+                  <a:srgbClr val="6B7280"/>
+                </a:solidFill>
+                <a:latin typeface="Roboto" pitchFamily="34" charset="0"/>
+                <a:ea typeface="Roboto" pitchFamily="34" charset="-122"/>
+                <a:cs typeface="Roboto" pitchFamily="34" charset="-120"/>
+              </a:rPr>
+              <a:t>Sumber: WMO 2025; IITM 2023 (CAIPEEX-IV); Israel-4; Silverman 2003; BRIN 19 Okt 2026; BMKG Jul 2025; BNPB 21 Okt 2026. Angka CAIPEEX-IV dari siaran IITM; kebutuhan sampel adalah perkiraan kasar hitungan sendiri</a:t>
+            </a:r>
+            <a:endParaRPr lang="en-US" sz="800" dirty="0"/>
+          </a:p>
+        </p:txBody>
+      </p:sp>
+      <p:sp>
+        <p:nvSpPr>
+          <p:cNvPr id="8" name="Shape 6"/>
+          <p:cNvSpPr/>
+          <p:nvPr/>
+        </p:nvSpPr>
+        <p:spPr>
+          <a:xfrm>
+            <a:off x="548640" y="1280160"/>
+            <a:ext cx="3852756" cy="4809744"/>
+          </a:xfrm>
+          <a:prstGeom prst="roundRect">
+            <a:avLst>
+              <a:gd name="adj" fmla="val 1424"/>
+            </a:avLst>
+          </a:prstGeom>
+          <a:solidFill>
+            <a:srgbClr val="FFFFFF"/>
+          </a:solidFill>
+          <a:ln w="9525">
+            <a:solidFill>
+              <a:srgbClr val="D5DAE1"/>
+            </a:solidFill>
+            <a:prstDash val="solid"/>
+          </a:ln>
+        </p:spPr>
+      </p:sp>
+      <p:sp>
+        <p:nvSpPr>
+          <p:cNvPr id="9" name="Shape 7"/>
+          <p:cNvSpPr/>
+          <p:nvPr/>
+        </p:nvSpPr>
+        <p:spPr>
+          <a:xfrm>
+            <a:off x="548640" y="1280160"/>
+            <a:ext cx="3852756" cy="457200"/>
+          </a:xfrm>
+          <a:prstGeom prst="roundRect">
+            <a:avLst>
+              <a:gd name="adj" fmla="val 12000"/>
+            </a:avLst>
+          </a:prstGeom>
+          <a:solidFill>
+            <a:srgbClr val="E6EAF0"/>
+          </a:solidFill>
+          <a:ln/>
+        </p:spPr>
+      </p:sp>
+      <p:sp>
+        <p:nvSpPr>
+          <p:cNvPr id="10" name="Shape 8"/>
+          <p:cNvSpPr/>
+          <p:nvPr/>
+        </p:nvSpPr>
+        <p:spPr>
+          <a:xfrm>
+            <a:off x="548640" y="1508760"/>
+            <a:ext cx="3852756" cy="228600"/>
+          </a:xfrm>
+          <a:prstGeom prst="rect">
+            <a:avLst/>
+          </a:prstGeom>
+          <a:solidFill>
+            <a:srgbClr val="E6EAF0"/>
+          </a:solidFill>
+          <a:ln/>
+        </p:spPr>
+      </p:sp>
+      <p:sp>
+        <p:nvSpPr>
+          <p:cNvPr id="11" name="Shape 9"/>
+          <p:cNvSpPr/>
+          <p:nvPr/>
+        </p:nvSpPr>
+        <p:spPr>
+          <a:xfrm>
+            <a:off x="676656" y="1362456"/>
+            <a:ext cx="292608" cy="292608"/>
+          </a:xfrm>
+          <a:prstGeom prst="ellipse">
+            <a:avLst/>
+          </a:prstGeom>
+          <a:solidFill>
+            <a:srgbClr val="051C2C"/>
+          </a:solidFill>
+          <a:ln/>
+        </p:spPr>
+      </p:sp>
+      <p:pic>
+        <p:nvPicPr>
+          <p:cNvPr id="12" name="Image 0" descr="/Users/priyankaalfatehan28/.claude/skills/ppt-konsultan/mesin/cache-ikon/flask-regular-FFFFFF.png">    </p:cNvPr>
+          <p:cNvPicPr>
+            <a:picLocks noChangeAspect="1"/>
+          </p:cNvPicPr>
+          <p:nvPr/>
+        </p:nvPicPr>
+        <p:blipFill>
+          <a:blip r:embed="rId1"/>
+          <a:stretch>
+            <a:fillRect/>
+          </a:stretch>
+        </p:blipFill>
+        <p:spPr>
+          <a:xfrm>
+            <a:off x="740664" y="1426464"/>
+            <a:ext cx="164592" cy="164592"/>
+          </a:xfrm>
+          <a:prstGeom prst="rect">
+            <a:avLst/>
+          </a:prstGeom>
+        </p:spPr>
+      </p:pic>
+      <p:sp>
+        <p:nvSpPr>
+          <p:cNvPr id="13" name="Text 10"/>
+          <p:cNvSpPr/>
+          <p:nvPr/>
+        </p:nvSpPr>
+        <p:spPr>
+          <a:xfrm>
+            <a:off x="1060704" y="1280160"/>
+            <a:ext cx="3203532" cy="457200"/>
+          </a:xfrm>
+          <a:prstGeom prst="rect">
+            <a:avLst/>
+          </a:prstGeom>
+          <a:noFill/>
+          <a:ln/>
+        </p:spPr>
+        <p:txBody>
+          <a:bodyPr wrap="square" lIns="0" tIns="0" rIns="0" bIns="0" rtlCol="0" anchor="ctr"/>
+          <a:lstStyle/>
+          <a:p>
+            <a:pPr indent="0" marL="0">
+              <a:buNone/>
+            </a:pPr>
+            <a:r>
+              <a:rPr lang="en-US" sz="1000" b="1" dirty="0">
+                <a:solidFill>
+                  <a:srgbClr val="1A1A1A"/>
+                </a:solidFill>
+                <a:latin typeface="Roboto" pitchFamily="34" charset="0"/>
+                <a:ea typeface="Roboto" pitchFamily="34" charset="-122"/>
+                <a:cs typeface="Roboto" pitchFamily="34" charset="-120"/>
+              </a:rPr>
+              <a:t>Bukti studi penyemaian awan</a:t>
+            </a:r>
+            <a:endParaRPr lang="en-US" sz="1000" dirty="0"/>
+          </a:p>
+        </p:txBody>
+      </p:sp>
+      <p:sp>
+        <p:nvSpPr>
+          <p:cNvPr id="14" name="Text 11"/>
+          <p:cNvSpPr/>
+          <p:nvPr/>
+        </p:nvSpPr>
+        <p:spPr>
+          <a:xfrm>
+            <a:off x="676656" y="1828800"/>
+            <a:ext cx="808350" cy="182880"/>
+          </a:xfrm>
+          <a:prstGeom prst="rect">
+            <a:avLst/>
+          </a:prstGeom>
+          <a:noFill/>
+          <a:ln/>
+        </p:spPr>
+        <p:txBody>
+          <a:bodyPr wrap="square" lIns="0" tIns="0" rIns="0" bIns="0" rtlCol="0" anchor="ctr"/>
+          <a:lstStyle/>
+          <a:p>
+            <a:pPr algn="ctr" indent="0" marL="0">
+              <a:buNone/>
+            </a:pPr>
+            <a:r>
+              <a:rPr lang="en-US" sz="800" b="1" spc="150" kern="0" dirty="0">
+                <a:solidFill>
+                  <a:srgbClr val="6B7280"/>
+                </a:solidFill>
+                <a:latin typeface="Roboto" pitchFamily="34" charset="0"/>
+                <a:ea typeface="Roboto" pitchFamily="34" charset="-122"/>
+                <a:cs typeface="Roboto" pitchFamily="34" charset="-120"/>
+              </a:rPr>
+              <a:t>STUDI</a:t>
+            </a:r>
+            <a:endParaRPr lang="en-US" sz="800" dirty="0"/>
+          </a:p>
+        </p:txBody>
+      </p:sp>
+      <p:sp>
+        <p:nvSpPr>
+          <p:cNvPr id="15" name="Text 12"/>
+          <p:cNvSpPr/>
+          <p:nvPr/>
+        </p:nvSpPr>
+        <p:spPr>
+          <a:xfrm>
+            <a:off x="1539870" y="1828800"/>
+            <a:ext cx="1239956" cy="182880"/>
+          </a:xfrm>
+          <a:prstGeom prst="rect">
+            <a:avLst/>
+          </a:prstGeom>
+          <a:noFill/>
+          <a:ln/>
+        </p:spPr>
+        <p:txBody>
+          <a:bodyPr wrap="square" lIns="0" tIns="0" rIns="0" bIns="0" rtlCol="0" anchor="ctr"/>
+          <a:lstStyle/>
+          <a:p>
+            <a:pPr algn="ctr" indent="0" marL="0">
+              <a:buNone/>
+            </a:pPr>
+            <a:r>
+              <a:rPr lang="en-US" sz="800" b="1" spc="150" kern="0" dirty="0">
+                <a:solidFill>
+                  <a:srgbClr val="6B7280"/>
+                </a:solidFill>
+                <a:latin typeface="Roboto" pitchFamily="34" charset="0"/>
+                <a:ea typeface="Roboto" pitchFamily="34" charset="-122"/>
+                <a:cs typeface="Roboto" pitchFamily="34" charset="-120"/>
+              </a:rPr>
+              <a:t>HASIL</a:t>
+            </a:r>
+            <a:endParaRPr lang="en-US" sz="800" dirty="0"/>
+          </a:p>
+        </p:txBody>
+      </p:sp>
+      <p:sp>
+        <p:nvSpPr>
+          <p:cNvPr id="16" name="Text 13"/>
+          <p:cNvSpPr/>
+          <p:nvPr/>
+        </p:nvSpPr>
+        <p:spPr>
+          <a:xfrm>
+            <a:off x="2834690" y="1828800"/>
+            <a:ext cx="1383825" cy="182880"/>
+          </a:xfrm>
+          <a:prstGeom prst="rect">
+            <a:avLst/>
+          </a:prstGeom>
+          <a:noFill/>
+          <a:ln/>
+        </p:spPr>
+        <p:txBody>
+          <a:bodyPr wrap="square" lIns="0" tIns="0" rIns="0" bIns="0" rtlCol="0" anchor="ctr"/>
+          <a:lstStyle/>
+          <a:p>
+            <a:pPr algn="ctr" indent="0" marL="0">
+              <a:buNone/>
+            </a:pPr>
+            <a:r>
+              <a:rPr lang="en-US" sz="800" b="1" spc="150" kern="0" dirty="0">
+                <a:solidFill>
+                  <a:srgbClr val="6B7280"/>
+                </a:solidFill>
+                <a:latin typeface="Roboto" pitchFamily="34" charset="0"/>
+                <a:ea typeface="Roboto" pitchFamily="34" charset="-122"/>
+                <a:cs typeface="Roboto" pitchFamily="34" charset="-120"/>
+              </a:rPr>
+              <a:t>CATATAN</a:t>
+            </a:r>
+            <a:endParaRPr lang="en-US" sz="800" dirty="0"/>
+          </a:p>
+        </p:txBody>
+      </p:sp>
+      <p:sp>
+        <p:nvSpPr>
+          <p:cNvPr id="17" name="Shape 14"/>
+          <p:cNvSpPr/>
+          <p:nvPr/>
+        </p:nvSpPr>
+        <p:spPr>
+          <a:xfrm>
+            <a:off x="676656" y="2057400"/>
+            <a:ext cx="3596724" cy="0"/>
+          </a:xfrm>
+          <a:prstGeom prst="line">
+            <a:avLst/>
+          </a:prstGeom>
+          <a:noFill/>
+          <a:ln w="9525">
+            <a:solidFill>
+              <a:srgbClr val="1A1A1A"/>
+            </a:solidFill>
+            <a:prstDash val="solid"/>
+          </a:ln>
+        </p:spPr>
+      </p:sp>
+      <p:sp>
+        <p:nvSpPr>
+          <p:cNvPr id="18" name="Text 15"/>
+          <p:cNvSpPr/>
+          <p:nvPr/>
+        </p:nvSpPr>
+        <p:spPr>
+          <a:xfrm>
+            <a:off x="676656" y="2057400"/>
+            <a:ext cx="808350" cy="731520"/>
+          </a:xfrm>
+          <a:prstGeom prst="rect">
+            <a:avLst/>
+          </a:prstGeom>
+          <a:noFill/>
+          <a:ln/>
+        </p:spPr>
+        <p:txBody>
+          <a:bodyPr wrap="square" lIns="0" tIns="0" rIns="0" bIns="0" rtlCol="0" anchor="ctr"/>
+          <a:lstStyle/>
+          <a:p>
+            <a:pPr algn="l" indent="0" marL="0">
+              <a:buNone/>
+            </a:pPr>
+            <a:r>
+              <a:rPr lang="en-US" sz="800" b="1" dirty="0">
+                <a:solidFill>
+                  <a:srgbClr val="1A1A1A"/>
+                </a:solidFill>
+                <a:latin typeface="Roboto" pitchFamily="34" charset="0"/>
+                <a:ea typeface="Roboto" pitchFamily="34" charset="-122"/>
+                <a:cs typeface="Roboto" pitchFamily="34" charset="-120"/>
+              </a:rPr>
+              <a:t>WMO 2025</a:t>
+            </a:r>
+            <a:endParaRPr lang="en-US" sz="800" dirty="0"/>
+          </a:p>
+        </p:txBody>
+      </p:sp>
+      <p:sp>
+        <p:nvSpPr>
+          <p:cNvPr id="19" name="Text 16"/>
+          <p:cNvSpPr/>
+          <p:nvPr/>
+        </p:nvSpPr>
+        <p:spPr>
+          <a:xfrm>
+            <a:off x="1539870" y="2057400"/>
+            <a:ext cx="1239956" cy="731520"/>
+          </a:xfrm>
+          <a:prstGeom prst="rect">
+            <a:avLst/>
+          </a:prstGeom>
+          <a:noFill/>
+          <a:ln/>
+        </p:spPr>
+        <p:txBody>
+          <a:bodyPr wrap="square" lIns="0" tIns="0" rIns="0" bIns="0" rtlCol="0" anchor="ctr"/>
+          <a:lstStyle/>
+          <a:p>
+            <a:pPr algn="l" indent="0" marL="0">
+              <a:buNone/>
+            </a:pPr>
+            <a:r>
+              <a:rPr lang="en-US" sz="800" dirty="0">
+                <a:solidFill>
+                  <a:srgbClr val="2E3440"/>
+                </a:solidFill>
+                <a:latin typeface="Roboto" pitchFamily="34" charset="0"/>
+                <a:ea typeface="Roboto" pitchFamily="34" charset="-122"/>
+                <a:cs typeface="Roboto" pitchFamily="34" charset="-120"/>
+              </a:rPr>
+              <a:t>Tanpa angka persen; bukti sebab-akibat kuat hanya untuk glasiogenik awan orografik musim dingin</a:t>
+            </a:r>
+            <a:endParaRPr lang="en-US" sz="800" dirty="0"/>
+          </a:p>
+        </p:txBody>
+      </p:sp>
+      <p:sp>
+        <p:nvSpPr>
+          <p:cNvPr id="20" name="Text 17"/>
+          <p:cNvSpPr/>
+          <p:nvPr/>
+        </p:nvSpPr>
+        <p:spPr>
+          <a:xfrm>
+            <a:off x="2834690" y="2057400"/>
+            <a:ext cx="1383825" cy="731520"/>
+          </a:xfrm>
+          <a:prstGeom prst="rect">
+            <a:avLst/>
+          </a:prstGeom>
+          <a:noFill/>
+          <a:ln/>
+        </p:spPr>
+        <p:txBody>
+          <a:bodyPr wrap="square" lIns="0" tIns="0" rIns="0" bIns="0" rtlCol="0" anchor="ctr"/>
+          <a:lstStyle/>
+          <a:p>
+            <a:pPr algn="l" indent="0" marL="0">
+              <a:buNone/>
+            </a:pPr>
+            <a:r>
+              <a:rPr lang="en-US" sz="800" dirty="0">
+                <a:solidFill>
+                  <a:srgbClr val="2E3440"/>
+                </a:solidFill>
+                <a:latin typeface="Roboto" pitchFamily="34" charset="0"/>
+                <a:ea typeface="Roboto" pitchFamily="34" charset="-122"/>
+                <a:cs typeface="Roboto" pitchFamily="34" charset="-120"/>
+              </a:rPr>
+              <a:t>Awan konvektif bersinyal lemah; hasil satu uji tidak langsung berlaku di tempat lain.</a:t>
+            </a:r>
+            <a:endParaRPr lang="en-US" sz="800" dirty="0"/>
+          </a:p>
+        </p:txBody>
+      </p:sp>
+      <p:sp>
+        <p:nvSpPr>
+          <p:cNvPr id="21" name="Shape 18"/>
+          <p:cNvSpPr/>
+          <p:nvPr/>
+        </p:nvSpPr>
+        <p:spPr>
+          <a:xfrm>
+            <a:off x="676656" y="2788920"/>
+            <a:ext cx="3596724" cy="0"/>
+          </a:xfrm>
+          <a:prstGeom prst="line">
+            <a:avLst/>
+          </a:prstGeom>
+          <a:noFill/>
+          <a:ln w="6350">
+            <a:solidFill>
+              <a:srgbClr val="E3E6EA"/>
+            </a:solidFill>
+            <a:prstDash val="solid"/>
+          </a:ln>
+        </p:spPr>
+      </p:sp>
+      <p:sp>
+        <p:nvSpPr>
+          <p:cNvPr id="22" name="Text 19"/>
+          <p:cNvSpPr/>
+          <p:nvPr/>
+        </p:nvSpPr>
+        <p:spPr>
+          <a:xfrm>
+            <a:off x="676656" y="2788920"/>
+            <a:ext cx="808350" cy="731520"/>
+          </a:xfrm>
+          <a:prstGeom prst="rect">
+            <a:avLst/>
+          </a:prstGeom>
+          <a:noFill/>
+          <a:ln/>
+        </p:spPr>
+        <p:txBody>
+          <a:bodyPr wrap="square" lIns="0" tIns="0" rIns="0" bIns="0" rtlCol="0" anchor="ctr"/>
+          <a:lstStyle/>
+          <a:p>
+            <a:pPr algn="l" indent="0" marL="0">
+              <a:buNone/>
+            </a:pPr>
+            <a:r>
+              <a:rPr lang="en-US" sz="800" b="1" dirty="0">
+                <a:solidFill>
+                  <a:srgbClr val="1A1A1A"/>
+                </a:solidFill>
+                <a:latin typeface="Roboto" pitchFamily="34" charset="0"/>
+                <a:ea typeface="Roboto" pitchFamily="34" charset="-122"/>
+                <a:cs typeface="Roboto" pitchFamily="34" charset="-120"/>
+              </a:rPr>
+              <a:t>CAIPEEX-IV India 2023</a:t>
+            </a:r>
+            <a:endParaRPr lang="en-US" sz="800" dirty="0"/>
+          </a:p>
+        </p:txBody>
+      </p:sp>
+      <p:sp>
+        <p:nvSpPr>
+          <p:cNvPr id="23" name="Text 20"/>
+          <p:cNvSpPr/>
+          <p:nvPr/>
+        </p:nvSpPr>
+        <p:spPr>
+          <a:xfrm>
+            <a:off x="1539870" y="2788920"/>
+            <a:ext cx="1239956" cy="731520"/>
+          </a:xfrm>
+          <a:prstGeom prst="rect">
+            <a:avLst/>
+          </a:prstGeom>
+          <a:noFill/>
+          <a:ln/>
+        </p:spPr>
+        <p:txBody>
+          <a:bodyPr wrap="square" lIns="0" tIns="0" rIns="0" bIns="0" rtlCol="0" anchor="ctr"/>
+          <a:lstStyle/>
+          <a:p>
+            <a:pPr algn="l" indent="0" marL="0">
+              <a:buNone/>
+            </a:pPr>
+            <a:r>
+              <a:rPr lang="en-US" sz="800" dirty="0">
+                <a:solidFill>
+                  <a:srgbClr val="2E3440"/>
+                </a:solidFill>
+                <a:latin typeface="Roboto" pitchFamily="34" charset="0"/>
+                <a:ea typeface="Roboto" pitchFamily="34" charset="-122"/>
+                <a:cs typeface="Roboto" pitchFamily="34" charset="-120"/>
+              </a:rPr>
+              <a:t>+18 ±2,6% hujan rata-rata di area 100 km2 hilir</a:t>
+            </a:r>
+            <a:endParaRPr lang="en-US" sz="800" dirty="0"/>
+          </a:p>
+        </p:txBody>
+      </p:sp>
+      <p:sp>
+        <p:nvSpPr>
+          <p:cNvPr id="24" name="Text 21"/>
+          <p:cNvSpPr/>
+          <p:nvPr/>
+        </p:nvSpPr>
+        <p:spPr>
+          <a:xfrm>
+            <a:off x="2834690" y="2788920"/>
+            <a:ext cx="1383825" cy="731520"/>
+          </a:xfrm>
+          <a:prstGeom prst="rect">
+            <a:avLst/>
+          </a:prstGeom>
+          <a:noFill/>
+          <a:ln/>
+        </p:spPr>
+        <p:txBody>
+          <a:bodyPr wrap="square" lIns="0" tIns="0" rIns="0" bIns="0" rtlCol="0" anchor="ctr"/>
+          <a:lstStyle/>
+          <a:p>
+            <a:pPr algn="l" indent="0" marL="0">
+              <a:buNone/>
+            </a:pPr>
+            <a:r>
+              <a:rPr lang="en-US" sz="800" dirty="0">
+                <a:solidFill>
+                  <a:srgbClr val="2E3440"/>
+                </a:solidFill>
+                <a:latin typeface="Roboto" pitchFamily="34" charset="0"/>
+                <a:ea typeface="Roboto" pitchFamily="34" charset="-122"/>
+                <a:cs typeface="Roboto" pitchFamily="34" charset="-120"/>
+              </a:rPr>
+              <a:t>Higroskopis, acak, 150 semai dan 122 tanpa semai; satu lokasi di bayangan hujan Ghats Barat.</a:t>
+            </a:r>
+            <a:endParaRPr lang="en-US" sz="800" dirty="0"/>
+          </a:p>
+        </p:txBody>
+      </p:sp>
+      <p:sp>
+        <p:nvSpPr>
+          <p:cNvPr id="25" name="Shape 22"/>
+          <p:cNvSpPr/>
+          <p:nvPr/>
+        </p:nvSpPr>
+        <p:spPr>
+          <a:xfrm>
+            <a:off x="676656" y="3520440"/>
+            <a:ext cx="3596724" cy="0"/>
+          </a:xfrm>
+          <a:prstGeom prst="line">
+            <a:avLst/>
+          </a:prstGeom>
+          <a:noFill/>
+          <a:ln w="6350">
+            <a:solidFill>
+              <a:srgbClr val="E3E6EA"/>
+            </a:solidFill>
+            <a:prstDash val="solid"/>
+          </a:ln>
+        </p:spPr>
+      </p:sp>
+      <p:sp>
+        <p:nvSpPr>
+          <p:cNvPr id="26" name="Text 23"/>
+          <p:cNvSpPr/>
+          <p:nvPr/>
+        </p:nvSpPr>
+        <p:spPr>
+          <a:xfrm>
+            <a:off x="676656" y="3520440"/>
+            <a:ext cx="808350" cy="731520"/>
+          </a:xfrm>
+          <a:prstGeom prst="rect">
+            <a:avLst/>
+          </a:prstGeom>
+          <a:noFill/>
+          <a:ln/>
+        </p:spPr>
+        <p:txBody>
+          <a:bodyPr wrap="square" lIns="0" tIns="0" rIns="0" bIns="0" rtlCol="0" anchor="ctr"/>
+          <a:lstStyle/>
+          <a:p>
+            <a:pPr algn="l" indent="0" marL="0">
+              <a:buNone/>
+            </a:pPr>
+            <a:r>
+              <a:rPr lang="en-US" sz="800" b="1" dirty="0">
+                <a:solidFill>
+                  <a:srgbClr val="1A1A1A"/>
+                </a:solidFill>
+                <a:latin typeface="Roboto" pitchFamily="34" charset="0"/>
+                <a:ea typeface="Roboto" pitchFamily="34" charset="-122"/>
+                <a:cs typeface="Roboto" pitchFamily="34" charset="-120"/>
+              </a:rPr>
+              <a:t>Israel-4 2013 sampai 2020</a:t>
+            </a:r>
+            <a:endParaRPr lang="en-US" sz="800" dirty="0"/>
+          </a:p>
+        </p:txBody>
+      </p:sp>
+      <p:sp>
+        <p:nvSpPr>
+          <p:cNvPr id="27" name="Text 24"/>
+          <p:cNvSpPr/>
+          <p:nvPr/>
+        </p:nvSpPr>
+        <p:spPr>
+          <a:xfrm>
+            <a:off x="1539870" y="3520440"/>
+            <a:ext cx="1239956" cy="731520"/>
+          </a:xfrm>
+          <a:prstGeom prst="rect">
+            <a:avLst/>
+          </a:prstGeom>
+          <a:noFill/>
+          <a:ln/>
+        </p:spPr>
+        <p:txBody>
+          <a:bodyPr wrap="square" lIns="0" tIns="0" rIns="0" bIns="0" rtlCol="0" anchor="ctr"/>
+          <a:lstStyle/>
+          <a:p>
+            <a:pPr algn="l" indent="0" marL="0">
+              <a:buNone/>
+            </a:pPr>
+            <a:r>
+              <a:rPr lang="en-US" sz="800" dirty="0">
+                <a:solidFill>
+                  <a:srgbClr val="2E3440"/>
+                </a:solidFill>
+                <a:latin typeface="Roboto" pitchFamily="34" charset="0"/>
+                <a:ea typeface="Roboto" pitchFamily="34" charset="-122"/>
+                <a:cs typeface="Roboto" pitchFamily="34" charset="-120"/>
+              </a:rPr>
+              <a:t>+1,8%, p = 0,4, selang 95% -11% sampai 16%</a:t>
+            </a:r>
+            <a:endParaRPr lang="en-US" sz="800" dirty="0"/>
+          </a:p>
+        </p:txBody>
+      </p:sp>
+      <p:sp>
+        <p:nvSpPr>
+          <p:cNvPr id="28" name="Text 25"/>
+          <p:cNvSpPr/>
+          <p:nvPr/>
+        </p:nvSpPr>
+        <p:spPr>
+          <a:xfrm>
+            <a:off x="2834690" y="3520440"/>
+            <a:ext cx="1383825" cy="731520"/>
+          </a:xfrm>
+          <a:prstGeom prst="rect">
+            <a:avLst/>
+          </a:prstGeom>
+          <a:noFill/>
+          <a:ln/>
+        </p:spPr>
+        <p:txBody>
+          <a:bodyPr wrap="square" lIns="0" tIns="0" rIns="0" bIns="0" rtlCol="0" anchor="ctr"/>
+          <a:lstStyle/>
+          <a:p>
+            <a:pPr algn="l" indent="0" marL="0">
+              <a:buNone/>
+            </a:pPr>
+            <a:r>
+              <a:rPr lang="en-US" sz="800" dirty="0">
+                <a:solidFill>
+                  <a:srgbClr val="2E3440"/>
+                </a:solidFill>
+                <a:latin typeface="Roboto" pitchFamily="34" charset="0"/>
+                <a:ea typeface="Roboto" pitchFamily="34" charset="-122"/>
+                <a:cs typeface="Roboto" pitchFamily="34" charset="-120"/>
+              </a:rPr>
+              <a:t>Uji acak dengan AgI; efek tidak terdeteksi.</a:t>
+            </a:r>
+            <a:endParaRPr lang="en-US" sz="800" dirty="0"/>
+          </a:p>
+        </p:txBody>
+      </p:sp>
+      <p:sp>
+        <p:nvSpPr>
+          <p:cNvPr id="29" name="Shape 26"/>
+          <p:cNvSpPr/>
+          <p:nvPr/>
+        </p:nvSpPr>
+        <p:spPr>
+          <a:xfrm>
+            <a:off x="676656" y="4251960"/>
+            <a:ext cx="3596724" cy="0"/>
+          </a:xfrm>
+          <a:prstGeom prst="line">
+            <a:avLst/>
+          </a:prstGeom>
+          <a:noFill/>
+          <a:ln w="6350">
+            <a:solidFill>
+              <a:srgbClr val="E3E6EA"/>
+            </a:solidFill>
+            <a:prstDash val="solid"/>
+          </a:ln>
+        </p:spPr>
+      </p:sp>
+      <p:sp>
+        <p:nvSpPr>
+          <p:cNvPr id="30" name="Text 27"/>
+          <p:cNvSpPr/>
+          <p:nvPr/>
+        </p:nvSpPr>
+        <p:spPr>
+          <a:xfrm>
+            <a:off x="676656" y="4251960"/>
+            <a:ext cx="808350" cy="731520"/>
+          </a:xfrm>
+          <a:prstGeom prst="rect">
+            <a:avLst/>
+          </a:prstGeom>
+          <a:noFill/>
+          <a:ln/>
+        </p:spPr>
+        <p:txBody>
+          <a:bodyPr wrap="square" lIns="0" tIns="0" rIns="0" bIns="0" rtlCol="0" anchor="ctr"/>
+          <a:lstStyle/>
+          <a:p>
+            <a:pPr algn="l" indent="0" marL="0">
+              <a:buNone/>
+            </a:pPr>
+            <a:r>
+              <a:rPr lang="en-US" sz="800" b="1" dirty="0">
+                <a:solidFill>
+                  <a:srgbClr val="1A1A1A"/>
+                </a:solidFill>
+                <a:latin typeface="Roboto" pitchFamily="34" charset="0"/>
+                <a:ea typeface="Roboto" pitchFamily="34" charset="-122"/>
+                <a:cs typeface="Roboto" pitchFamily="34" charset="-120"/>
+              </a:rPr>
+              <a:t>Silverman 2003</a:t>
+            </a:r>
+            <a:endParaRPr lang="en-US" sz="800" dirty="0"/>
+          </a:p>
+        </p:txBody>
+      </p:sp>
+      <p:sp>
+        <p:nvSpPr>
+          <p:cNvPr id="31" name="Text 28"/>
+          <p:cNvSpPr/>
+          <p:nvPr/>
+        </p:nvSpPr>
+        <p:spPr>
+          <a:xfrm>
+            <a:off x="1539870" y="4251960"/>
+            <a:ext cx="1239956" cy="731520"/>
+          </a:xfrm>
+          <a:prstGeom prst="rect">
+            <a:avLst/>
+          </a:prstGeom>
+          <a:noFill/>
+          <a:ln/>
+        </p:spPr>
+        <p:txBody>
+          <a:bodyPr wrap="square" lIns="0" tIns="0" rIns="0" bIns="0" rtlCol="0" anchor="ctr"/>
+          <a:lstStyle/>
+          <a:p>
+            <a:pPr algn="l" indent="0" marL="0">
+              <a:buNone/>
+            </a:pPr>
+            <a:r>
+              <a:rPr lang="en-US" sz="800" dirty="0">
+                <a:solidFill>
+                  <a:srgbClr val="2E3440"/>
+                </a:solidFill>
+                <a:latin typeface="Roboto" pitchFamily="34" charset="0"/>
+                <a:ea typeface="Roboto" pitchFamily="34" charset="-122"/>
+                <a:cs typeface="Roboto" pitchFamily="34" charset="-120"/>
+              </a:rPr>
+              <a:t>Empat uji higroskopis acak belum terbukti</a:t>
+            </a:r>
+            <a:endParaRPr lang="en-US" sz="800" dirty="0"/>
+          </a:p>
+        </p:txBody>
+      </p:sp>
+      <p:sp>
+        <p:nvSpPr>
+          <p:cNvPr id="32" name="Text 29"/>
+          <p:cNvSpPr/>
+          <p:nvPr/>
+        </p:nvSpPr>
+        <p:spPr>
+          <a:xfrm>
+            <a:off x="2834690" y="4251960"/>
+            <a:ext cx="1383825" cy="731520"/>
+          </a:xfrm>
+          <a:prstGeom prst="rect">
+            <a:avLst/>
+          </a:prstGeom>
+          <a:noFill/>
+          <a:ln/>
+        </p:spPr>
+        <p:txBody>
+          <a:bodyPr wrap="square" lIns="0" tIns="0" rIns="0" bIns="0" rtlCol="0" anchor="ctr"/>
+          <a:lstStyle/>
+          <a:p>
+            <a:pPr algn="l" indent="0" marL="0">
+              <a:buNone/>
+            </a:pPr>
+            <a:r>
+              <a:rPr lang="en-US" sz="800" dirty="0">
+                <a:solidFill>
+                  <a:srgbClr val="2E3440"/>
+                </a:solidFill>
+                <a:latin typeface="Roboto" pitchFamily="34" charset="0"/>
+                <a:ea typeface="Roboto" pitchFamily="34" charset="-122"/>
+                <a:cs typeface="Roboto" pitchFamily="34" charset="-120"/>
+              </a:rPr>
+              <a:t>Belum memberi bukti statistik maupun fisik.</a:t>
+            </a:r>
+            <a:endParaRPr lang="en-US" sz="800" dirty="0"/>
+          </a:p>
+        </p:txBody>
+      </p:sp>
+      <p:sp>
+        <p:nvSpPr>
+          <p:cNvPr id="33" name="Shape 30"/>
+          <p:cNvSpPr/>
+          <p:nvPr/>
+        </p:nvSpPr>
+        <p:spPr>
+          <a:xfrm>
+            <a:off x="676656" y="4983480"/>
+            <a:ext cx="3596724" cy="0"/>
+          </a:xfrm>
+          <a:prstGeom prst="line">
+            <a:avLst/>
+          </a:prstGeom>
+          <a:noFill/>
+          <a:ln w="6350">
+            <a:solidFill>
+              <a:srgbClr val="E3E6EA"/>
+            </a:solidFill>
+            <a:prstDash val="solid"/>
+          </a:ln>
+        </p:spPr>
+      </p:sp>
+      <p:sp>
+        <p:nvSpPr>
+          <p:cNvPr id="34" name="Text 31"/>
+          <p:cNvSpPr/>
+          <p:nvPr/>
+        </p:nvSpPr>
+        <p:spPr>
+          <a:xfrm>
+            <a:off x="676656" y="4983480"/>
+            <a:ext cx="808350" cy="731520"/>
+          </a:xfrm>
+          <a:prstGeom prst="rect">
+            <a:avLst/>
+          </a:prstGeom>
+          <a:noFill/>
+          <a:ln/>
+        </p:spPr>
+        <p:txBody>
+          <a:bodyPr wrap="square" lIns="0" tIns="0" rIns="0" bIns="0" rtlCol="0" anchor="ctr"/>
+          <a:lstStyle/>
+          <a:p>
+            <a:pPr algn="l" indent="0" marL="0">
+              <a:buNone/>
+            </a:pPr>
+            <a:r>
+              <a:rPr lang="en-US" sz="800" b="1" dirty="0">
+                <a:solidFill>
+                  <a:srgbClr val="1A1A1A"/>
+                </a:solidFill>
+                <a:latin typeface="Roboto" pitchFamily="34" charset="0"/>
+                <a:ea typeface="Roboto" pitchFamily="34" charset="-122"/>
+                <a:cs typeface="Roboto" pitchFamily="34" charset="-120"/>
+              </a:rPr>
+              <a:t>Dry ice untuk asap</a:t>
+            </a:r>
+            <a:endParaRPr lang="en-US" sz="800" dirty="0"/>
+          </a:p>
+        </p:txBody>
+      </p:sp>
+      <p:sp>
+        <p:nvSpPr>
+          <p:cNvPr id="35" name="Text 32"/>
+          <p:cNvSpPr/>
+          <p:nvPr/>
+        </p:nvSpPr>
+        <p:spPr>
+          <a:xfrm>
+            <a:off x="1539870" y="4983480"/>
+            <a:ext cx="1239956" cy="731520"/>
+          </a:xfrm>
+          <a:prstGeom prst="rect">
+            <a:avLst/>
+          </a:prstGeom>
+          <a:noFill/>
+          <a:ln/>
+        </p:spPr>
+        <p:txBody>
+          <a:bodyPr wrap="square" lIns="0" tIns="0" rIns="0" bIns="0" rtlCol="0" anchor="ctr"/>
+          <a:lstStyle/>
+          <a:p>
+            <a:pPr algn="l" indent="0" marL="0">
+              <a:buNone/>
+            </a:pPr>
+            <a:r>
+              <a:rPr lang="en-US" sz="800" dirty="0">
+                <a:solidFill>
+                  <a:srgbClr val="2E3440"/>
+                </a:solidFill>
+                <a:latin typeface="Roboto" pitchFamily="34" charset="0"/>
+                <a:ea typeface="Roboto" pitchFamily="34" charset="-122"/>
+                <a:cs typeface="Roboto" pitchFamily="34" charset="-120"/>
+              </a:rPr>
+              <a:t>Tidak ada bukti; terbukti hanya untuk kabut super-dingin</a:t>
+            </a:r>
+            <a:endParaRPr lang="en-US" sz="800" dirty="0"/>
+          </a:p>
+        </p:txBody>
+      </p:sp>
+      <p:sp>
+        <p:nvSpPr>
+          <p:cNvPr id="36" name="Text 33"/>
+          <p:cNvSpPr/>
+          <p:nvPr/>
+        </p:nvSpPr>
+        <p:spPr>
+          <a:xfrm>
+            <a:off x="2834690" y="4983480"/>
+            <a:ext cx="1383825" cy="731520"/>
+          </a:xfrm>
+          <a:prstGeom prst="rect">
+            <a:avLst/>
+          </a:prstGeom>
+          <a:noFill/>
+          <a:ln/>
+        </p:spPr>
+        <p:txBody>
+          <a:bodyPr wrap="square" lIns="0" tIns="0" rIns="0" bIns="0" rtlCol="0" anchor="ctr"/>
+          <a:lstStyle/>
+          <a:p>
+            <a:pPr algn="l" indent="0" marL="0">
+              <a:buNone/>
+            </a:pPr>
+            <a:r>
+              <a:rPr lang="en-US" sz="800" dirty="0">
+                <a:solidFill>
+                  <a:srgbClr val="2E3440"/>
+                </a:solidFill>
+                <a:latin typeface="Roboto" pitchFamily="34" charset="0"/>
+                <a:ea typeface="Roboto" pitchFamily="34" charset="-122"/>
+                <a:cs typeface="Roboto" pitchFamily="34" charset="-120"/>
+              </a:rPr>
+              <a:t>BRIN 19 Okt 2026 menyebut pembongkaran inversi masih hipotesis ilmiah.</a:t>
+            </a:r>
+            <a:endParaRPr lang="en-US" sz="800" dirty="0"/>
+          </a:p>
+        </p:txBody>
+      </p:sp>
+      <p:sp>
+        <p:nvSpPr>
+          <p:cNvPr id="37" name="Shape 34"/>
+          <p:cNvSpPr/>
+          <p:nvPr/>
+        </p:nvSpPr>
+        <p:spPr>
+          <a:xfrm>
+            <a:off x="4538556" y="1280160"/>
+            <a:ext cx="3408207" cy="4809744"/>
+          </a:xfrm>
+          <a:prstGeom prst="roundRect">
+            <a:avLst>
+              <a:gd name="adj" fmla="val 1610"/>
+            </a:avLst>
+          </a:prstGeom>
+          <a:solidFill>
+            <a:srgbClr val="FFFFFF"/>
+          </a:solidFill>
+          <a:ln w="9525">
+            <a:solidFill>
+              <a:srgbClr val="D5DAE1"/>
+            </a:solidFill>
+            <a:prstDash val="solid"/>
+          </a:ln>
+        </p:spPr>
+      </p:sp>
+      <p:sp>
+        <p:nvSpPr>
+          <p:cNvPr id="38" name="Shape 35"/>
+          <p:cNvSpPr/>
+          <p:nvPr/>
+        </p:nvSpPr>
+        <p:spPr>
+          <a:xfrm>
+            <a:off x="4538556" y="1280160"/>
+            <a:ext cx="3408207" cy="457200"/>
+          </a:xfrm>
+          <a:prstGeom prst="roundRect">
+            <a:avLst>
+              <a:gd name="adj" fmla="val 12000"/>
+            </a:avLst>
+          </a:prstGeom>
+          <a:solidFill>
+            <a:srgbClr val="E6EAF0"/>
+          </a:solidFill>
+          <a:ln/>
+        </p:spPr>
+      </p:sp>
+      <p:sp>
+        <p:nvSpPr>
+          <p:cNvPr id="39" name="Shape 36"/>
+          <p:cNvSpPr/>
+          <p:nvPr/>
+        </p:nvSpPr>
+        <p:spPr>
+          <a:xfrm>
+            <a:off x="4538556" y="1508760"/>
+            <a:ext cx="3408207" cy="228600"/>
+          </a:xfrm>
+          <a:prstGeom prst="rect">
+            <a:avLst/>
+          </a:prstGeom>
+          <a:solidFill>
+            <a:srgbClr val="E6EAF0"/>
+          </a:solidFill>
+          <a:ln/>
+        </p:spPr>
+      </p:sp>
+      <p:sp>
+        <p:nvSpPr>
+          <p:cNvPr id="40" name="Shape 37"/>
+          <p:cNvSpPr/>
+          <p:nvPr/>
+        </p:nvSpPr>
+        <p:spPr>
+          <a:xfrm>
+            <a:off x="4666572" y="1362456"/>
+            <a:ext cx="292608" cy="292608"/>
+          </a:xfrm>
+          <a:prstGeom prst="ellipse">
+            <a:avLst/>
+          </a:prstGeom>
+          <a:solidFill>
+            <a:srgbClr val="051C2C"/>
+          </a:solidFill>
+          <a:ln/>
+        </p:spPr>
+      </p:sp>
+      <p:pic>
+        <p:nvPicPr>
+          <p:cNvPr id="41" name="Image 1" descr="/Users/priyankaalfatehan28/.claude/skills/ppt-konsultan/mesin/cache-ikon/scales-regular-FFFFFF.png">    </p:cNvPr>
+          <p:cNvPicPr>
+            <a:picLocks noChangeAspect="1"/>
+          </p:cNvPicPr>
+          <p:nvPr/>
+        </p:nvPicPr>
+        <p:blipFill>
+          <a:blip r:embed="rId2"/>
+          <a:stretch>
+            <a:fillRect/>
+          </a:stretch>
+        </p:blipFill>
+        <p:spPr>
+          <a:xfrm>
+            <a:off x="4730580" y="1426464"/>
+            <a:ext cx="164592" cy="164592"/>
+          </a:xfrm>
+          <a:prstGeom prst="rect">
+            <a:avLst/>
+          </a:prstGeom>
+        </p:spPr>
+      </p:pic>
+      <p:sp>
+        <p:nvSpPr>
+          <p:cNvPr id="42" name="Text 38"/>
+          <p:cNvSpPr/>
+          <p:nvPr/>
+        </p:nvSpPr>
+        <p:spPr>
+          <a:xfrm>
+            <a:off x="5050620" y="1280160"/>
+            <a:ext cx="2758983" cy="457200"/>
+          </a:xfrm>
+          <a:prstGeom prst="rect">
+            <a:avLst/>
+          </a:prstGeom>
+          <a:noFill/>
+          <a:ln/>
+        </p:spPr>
+        <p:txBody>
+          <a:bodyPr wrap="square" lIns="0" tIns="0" rIns="0" bIns="0" rtlCol="0" anchor="ctr"/>
+          <a:lstStyle/>
+          <a:p>
+            <a:pPr indent="0" marL="0">
+              <a:buNone/>
+            </a:pPr>
+            <a:r>
+              <a:rPr lang="en-US" sz="1000" b="1" dirty="0">
+                <a:solidFill>
+                  <a:srgbClr val="1A1A1A"/>
+                </a:solidFill>
+                <a:latin typeface="Roboto" pitchFamily="34" charset="0"/>
+                <a:ea typeface="Roboto" pitchFamily="34" charset="-122"/>
+                <a:cs typeface="Roboto" pitchFamily="34" charset="-120"/>
+              </a:rPr>
+              <a:t>Klaim keberhasilan dan buktinya</a:t>
+            </a:r>
+            <a:endParaRPr lang="en-US" sz="1000" dirty="0"/>
+          </a:p>
+        </p:txBody>
+      </p:sp>
+      <p:sp>
+        <p:nvSpPr>
+          <p:cNvPr id="43" name="Text 39"/>
+          <p:cNvSpPr/>
+          <p:nvPr/>
+        </p:nvSpPr>
+        <p:spPr>
+          <a:xfrm>
+            <a:off x="4666572" y="1828800"/>
+            <a:ext cx="1269049" cy="182880"/>
+          </a:xfrm>
+          <a:prstGeom prst="rect">
+            <a:avLst/>
+          </a:prstGeom>
+          <a:noFill/>
+          <a:ln/>
+        </p:spPr>
+        <p:txBody>
+          <a:bodyPr wrap="square" lIns="0" tIns="0" rIns="0" bIns="0" rtlCol="0" anchor="ctr"/>
+          <a:lstStyle/>
+          <a:p>
+            <a:pPr algn="ctr" indent="0" marL="0">
+              <a:buNone/>
+            </a:pPr>
+            <a:r>
+              <a:rPr lang="en-US" sz="800" b="1" spc="150" kern="0" dirty="0">
+                <a:solidFill>
+                  <a:srgbClr val="6B7280"/>
+                </a:solidFill>
+                <a:latin typeface="Roboto" pitchFamily="34" charset="0"/>
+                <a:ea typeface="Roboto" pitchFamily="34" charset="-122"/>
+                <a:cs typeface="Roboto" pitchFamily="34" charset="-120"/>
+              </a:rPr>
+              <a:t>KLAIM</a:t>
+            </a:r>
+            <a:endParaRPr lang="en-US" sz="800" dirty="0"/>
+          </a:p>
+        </p:txBody>
+      </p:sp>
+      <p:sp>
+        <p:nvSpPr>
+          <p:cNvPr id="44" name="Text 40"/>
+          <p:cNvSpPr/>
+          <p:nvPr/>
+        </p:nvSpPr>
+        <p:spPr>
+          <a:xfrm>
+            <a:off x="5990485" y="1828800"/>
+            <a:ext cx="953832" cy="182880"/>
+          </a:xfrm>
+          <a:prstGeom prst="rect">
+            <a:avLst/>
+          </a:prstGeom>
+          <a:noFill/>
+          <a:ln/>
+        </p:spPr>
+        <p:txBody>
+          <a:bodyPr wrap="square" lIns="0" tIns="0" rIns="0" bIns="0" rtlCol="0" anchor="ctr"/>
+          <a:lstStyle/>
+          <a:p>
+            <a:pPr algn="ctr" indent="0" marL="0">
+              <a:buNone/>
+            </a:pPr>
+            <a:r>
+              <a:rPr lang="en-US" sz="800" b="1" spc="150" kern="0" dirty="0">
+                <a:solidFill>
+                  <a:srgbClr val="6B7280"/>
+                </a:solidFill>
+                <a:latin typeface="Roboto" pitchFamily="34" charset="0"/>
+                <a:ea typeface="Roboto" pitchFamily="34" charset="-122"/>
+                <a:cs typeface="Roboto" pitchFamily="34" charset="-120"/>
+              </a:rPr>
+              <a:t>CARA HITUNG</a:t>
+            </a:r>
+            <a:endParaRPr lang="en-US" sz="800" dirty="0"/>
+          </a:p>
+        </p:txBody>
+      </p:sp>
+      <p:sp>
+        <p:nvSpPr>
+          <p:cNvPr id="45" name="Text 41"/>
+          <p:cNvSpPr/>
+          <p:nvPr/>
+        </p:nvSpPr>
+        <p:spPr>
+          <a:xfrm>
+            <a:off x="6999181" y="1828800"/>
+            <a:ext cx="764701" cy="182880"/>
+          </a:xfrm>
+          <a:prstGeom prst="rect">
+            <a:avLst/>
+          </a:prstGeom>
+          <a:noFill/>
+          <a:ln/>
+        </p:spPr>
+        <p:txBody>
+          <a:bodyPr wrap="square" lIns="0" tIns="0" rIns="0" bIns="0" rtlCol="0" anchor="ctr"/>
+          <a:lstStyle/>
+          <a:p>
+            <a:pPr algn="ctr" indent="0" marL="0">
+              <a:buNone/>
+            </a:pPr>
+            <a:r>
+              <a:rPr lang="en-US" sz="800" b="1" spc="150" kern="0" dirty="0">
+                <a:solidFill>
+                  <a:srgbClr val="6B7280"/>
+                </a:solidFill>
+                <a:latin typeface="Roboto" pitchFamily="34" charset="0"/>
+                <a:ea typeface="Roboto" pitchFamily="34" charset="-122"/>
+                <a:cs typeface="Roboto" pitchFamily="34" charset="-120"/>
+              </a:rPr>
+              <a:t>STATUS</a:t>
+            </a:r>
+            <a:endParaRPr lang="en-US" sz="800" dirty="0"/>
+          </a:p>
+        </p:txBody>
+      </p:sp>
+      <p:sp>
+        <p:nvSpPr>
+          <p:cNvPr id="46" name="Shape 42"/>
+          <p:cNvSpPr/>
+          <p:nvPr/>
+        </p:nvSpPr>
+        <p:spPr>
+          <a:xfrm>
+            <a:off x="4666572" y="2057400"/>
+            <a:ext cx="3152175" cy="0"/>
+          </a:xfrm>
+          <a:prstGeom prst="line">
+            <a:avLst/>
+          </a:prstGeom>
+          <a:noFill/>
+          <a:ln w="9525">
+            <a:solidFill>
+              <a:srgbClr val="1A1A1A"/>
+            </a:solidFill>
+            <a:prstDash val="solid"/>
+          </a:ln>
+        </p:spPr>
+      </p:sp>
+      <p:sp>
+        <p:nvSpPr>
+          <p:cNvPr id="47" name="Text 43"/>
+          <p:cNvSpPr/>
+          <p:nvPr/>
+        </p:nvSpPr>
+        <p:spPr>
+          <a:xfrm>
+            <a:off x="4666572" y="2057400"/>
+            <a:ext cx="1269049" cy="731520"/>
+          </a:xfrm>
+          <a:prstGeom prst="rect">
+            <a:avLst/>
+          </a:prstGeom>
+          <a:noFill/>
+          <a:ln/>
+        </p:spPr>
+        <p:txBody>
+          <a:bodyPr wrap="square" lIns="0" tIns="0" rIns="0" bIns="0" rtlCol="0" anchor="ctr"/>
+          <a:lstStyle/>
+          <a:p>
+            <a:pPr algn="l" indent="0" marL="0">
+              <a:buNone/>
+            </a:pPr>
+            <a:r>
+              <a:rPr lang="en-US" sz="800" b="1" dirty="0">
+                <a:solidFill>
+                  <a:srgbClr val="1A1A1A"/>
+                </a:solidFill>
+                <a:latin typeface="Roboto" pitchFamily="34" charset="0"/>
+                <a:ea typeface="Roboto" pitchFamily="34" charset="-122"/>
+                <a:cs typeface="Roboto" pitchFamily="34" charset="-120"/>
+              </a:rPr>
+              <a:t>BMKG Jul 2025: keberhasilan penyemaian 85 sampai 100%</a:t>
+            </a:r>
+            <a:endParaRPr lang="en-US" sz="800" dirty="0"/>
+          </a:p>
+        </p:txBody>
+      </p:sp>
+      <p:sp>
+        <p:nvSpPr>
+          <p:cNvPr id="48" name="Text 44"/>
+          <p:cNvSpPr/>
+          <p:nvPr/>
+        </p:nvSpPr>
+        <p:spPr>
+          <a:xfrm>
+            <a:off x="5990485" y="2057400"/>
+            <a:ext cx="953832" cy="731520"/>
+          </a:xfrm>
+          <a:prstGeom prst="rect">
+            <a:avLst/>
+          </a:prstGeom>
+          <a:noFill/>
+          <a:ln/>
+        </p:spPr>
+        <p:txBody>
+          <a:bodyPr wrap="square" lIns="0" tIns="0" rIns="0" bIns="0" rtlCol="0" anchor="ctr"/>
+          <a:lstStyle/>
+          <a:p>
+            <a:pPr algn="l" indent="0" marL="0">
+              <a:buNone/>
+            </a:pPr>
+            <a:r>
+              <a:rPr lang="en-US" sz="800" dirty="0">
+                <a:solidFill>
+                  <a:srgbClr val="2E3440"/>
+                </a:solidFill>
+                <a:latin typeface="Roboto" pitchFamily="34" charset="0"/>
+                <a:ea typeface="Roboto" pitchFamily="34" charset="-122"/>
+                <a:cs typeface="Roboto" pitchFamily="34" charset="-120"/>
+              </a:rPr>
+              <a:t>Keberhasilan tidak didefinisikan</a:t>
+            </a:r>
+            <a:endParaRPr lang="en-US" sz="800" dirty="0"/>
+          </a:p>
+        </p:txBody>
+      </p:sp>
+      <p:sp>
+        <p:nvSpPr>
+          <p:cNvPr id="49" name="Text 45"/>
+          <p:cNvSpPr/>
+          <p:nvPr/>
+        </p:nvSpPr>
+        <p:spPr>
+          <a:xfrm>
+            <a:off x="6999181" y="2057400"/>
+            <a:ext cx="764701" cy="731520"/>
+          </a:xfrm>
+          <a:prstGeom prst="rect">
+            <a:avLst/>
+          </a:prstGeom>
+          <a:noFill/>
+          <a:ln/>
+        </p:spPr>
+        <p:txBody>
+          <a:bodyPr wrap="square" lIns="0" tIns="0" rIns="0" bIns="0" rtlCol="0" anchor="ctr"/>
+          <a:lstStyle/>
+          <a:p>
+            <a:pPr algn="l" indent="0" marL="0">
+              <a:buNone/>
+            </a:pPr>
+            <a:r>
+              <a:rPr lang="en-US" sz="800" dirty="0">
+                <a:solidFill>
+                  <a:srgbClr val="2E3440"/>
+                </a:solidFill>
+                <a:latin typeface="Roboto" pitchFamily="34" charset="0"/>
+                <a:ea typeface="Roboto" pitchFamily="34" charset="-122"/>
+                <a:cs typeface="Roboto" pitchFamily="34" charset="-120"/>
+              </a:rPr>
+              <a:t>Klaim, tidak dapat diverifikasi</a:t>
+            </a:r>
+            <a:endParaRPr lang="en-US" sz="800" dirty="0"/>
+          </a:p>
+        </p:txBody>
+      </p:sp>
+      <p:sp>
+        <p:nvSpPr>
+          <p:cNvPr id="50" name="Shape 46"/>
+          <p:cNvSpPr/>
+          <p:nvPr/>
+        </p:nvSpPr>
+        <p:spPr>
+          <a:xfrm>
+            <a:off x="4666572" y="2788920"/>
+            <a:ext cx="3152175" cy="0"/>
+          </a:xfrm>
+          <a:prstGeom prst="line">
+            <a:avLst/>
+          </a:prstGeom>
+          <a:noFill/>
+          <a:ln w="6350">
+            <a:solidFill>
+              <a:srgbClr val="E3E6EA"/>
+            </a:solidFill>
+            <a:prstDash val="solid"/>
+          </a:ln>
+        </p:spPr>
+      </p:sp>
+      <p:sp>
+        <p:nvSpPr>
+          <p:cNvPr id="51" name="Text 47"/>
+          <p:cNvSpPr/>
+          <p:nvPr/>
+        </p:nvSpPr>
+        <p:spPr>
+          <a:xfrm>
+            <a:off x="4666572" y="2788920"/>
+            <a:ext cx="1269049" cy="731520"/>
+          </a:xfrm>
+          <a:prstGeom prst="rect">
+            <a:avLst/>
+          </a:prstGeom>
+          <a:noFill/>
+          <a:ln/>
+        </p:spPr>
+        <p:txBody>
+          <a:bodyPr wrap="square" lIns="0" tIns="0" rIns="0" bIns="0" rtlCol="0" anchor="ctr"/>
+          <a:lstStyle/>
+          <a:p>
+            <a:pPr algn="l" indent="0" marL="0">
+              <a:buNone/>
+            </a:pPr>
+            <a:r>
+              <a:rPr lang="en-US" sz="800" b="1" dirty="0">
+                <a:solidFill>
+                  <a:srgbClr val="1A1A1A"/>
+                </a:solidFill>
+                <a:latin typeface="Roboto" pitchFamily="34" charset="0"/>
+                <a:ea typeface="Roboto" pitchFamily="34" charset="-122"/>
+                <a:cs typeface="Roboto" pitchFamily="34" charset="-120"/>
+              </a:rPr>
+              <a:t>BMKG: karhutla turun rata-rata 23% (2016 sampai 2019)</a:t>
+            </a:r>
+            <a:endParaRPr lang="en-US" sz="800" dirty="0"/>
+          </a:p>
+        </p:txBody>
+      </p:sp>
+      <p:sp>
+        <p:nvSpPr>
+          <p:cNvPr id="52" name="Text 48"/>
+          <p:cNvSpPr/>
+          <p:nvPr/>
+        </p:nvSpPr>
+        <p:spPr>
+          <a:xfrm>
+            <a:off x="5990485" y="2788920"/>
+            <a:ext cx="953832" cy="731520"/>
+          </a:xfrm>
+          <a:prstGeom prst="rect">
+            <a:avLst/>
+          </a:prstGeom>
+          <a:noFill/>
+          <a:ln/>
+        </p:spPr>
+        <p:txBody>
+          <a:bodyPr wrap="square" lIns="0" tIns="0" rIns="0" bIns="0" rtlCol="0" anchor="ctr"/>
+          <a:lstStyle/>
+          <a:p>
+            <a:pPr algn="l" indent="0" marL="0">
+              <a:buNone/>
+            </a:pPr>
+            <a:r>
+              <a:rPr lang="en-US" sz="800" dirty="0">
+                <a:solidFill>
+                  <a:srgbClr val="2E3440"/>
+                </a:solidFill>
+                <a:latin typeface="Roboto" pitchFamily="34" charset="0"/>
+                <a:ea typeface="Roboto" pitchFamily="34" charset="-122"/>
+                <a:cs typeface="Roboto" pitchFamily="34" charset="-120"/>
+              </a:rPr>
+              <a:t>Baseline, metrik, dan data tidak disebut</a:t>
+            </a:r>
+            <a:endParaRPr lang="en-US" sz="800" dirty="0"/>
+          </a:p>
+        </p:txBody>
+      </p:sp>
+      <p:sp>
+        <p:nvSpPr>
+          <p:cNvPr id="53" name="Text 49"/>
+          <p:cNvSpPr/>
+          <p:nvPr/>
+        </p:nvSpPr>
+        <p:spPr>
+          <a:xfrm>
+            <a:off x="6999181" y="2788920"/>
+            <a:ext cx="764701" cy="731520"/>
+          </a:xfrm>
+          <a:prstGeom prst="rect">
+            <a:avLst/>
+          </a:prstGeom>
+          <a:noFill/>
+          <a:ln/>
+        </p:spPr>
+        <p:txBody>
+          <a:bodyPr wrap="square" lIns="0" tIns="0" rIns="0" bIns="0" rtlCol="0" anchor="ctr"/>
+          <a:lstStyle/>
+          <a:p>
+            <a:pPr algn="l" indent="0" marL="0">
+              <a:buNone/>
+            </a:pPr>
+            <a:r>
+              <a:rPr lang="en-US" sz="800" dirty="0">
+                <a:solidFill>
+                  <a:srgbClr val="2E3440"/>
+                </a:solidFill>
+                <a:latin typeface="Roboto" pitchFamily="34" charset="0"/>
+                <a:ea typeface="Roboto" pitchFamily="34" charset="-122"/>
+                <a:cs typeface="Roboto" pitchFamily="34" charset="-120"/>
+              </a:rPr>
+              <a:t>Klaim, tidak dapat diverifikasi</a:t>
+            </a:r>
+            <a:endParaRPr lang="en-US" sz="800" dirty="0"/>
+          </a:p>
+        </p:txBody>
+      </p:sp>
+      <p:sp>
+        <p:nvSpPr>
+          <p:cNvPr id="54" name="Shape 50"/>
+          <p:cNvSpPr/>
+          <p:nvPr/>
+        </p:nvSpPr>
+        <p:spPr>
+          <a:xfrm>
+            <a:off x="4666572" y="3520440"/>
+            <a:ext cx="3152175" cy="0"/>
+          </a:xfrm>
+          <a:prstGeom prst="line">
+            <a:avLst/>
+          </a:prstGeom>
+          <a:noFill/>
+          <a:ln w="6350">
+            <a:solidFill>
+              <a:srgbClr val="E3E6EA"/>
+            </a:solidFill>
+            <a:prstDash val="solid"/>
+          </a:ln>
+        </p:spPr>
+      </p:sp>
+      <p:sp>
+        <p:nvSpPr>
+          <p:cNvPr id="55" name="Text 51"/>
+          <p:cNvSpPr/>
+          <p:nvPr/>
+        </p:nvSpPr>
+        <p:spPr>
+          <a:xfrm>
+            <a:off x="4666572" y="3520440"/>
+            <a:ext cx="1269049" cy="731520"/>
+          </a:xfrm>
+          <a:prstGeom prst="rect">
+            <a:avLst/>
+          </a:prstGeom>
+          <a:noFill/>
+          <a:ln/>
+        </p:spPr>
+        <p:txBody>
+          <a:bodyPr wrap="square" lIns="0" tIns="0" rIns="0" bIns="0" rtlCol="0" anchor="ctr"/>
+          <a:lstStyle/>
+          <a:p>
+            <a:pPr algn="l" indent="0" marL="0">
+              <a:buNone/>
+            </a:pPr>
+            <a:r>
+              <a:rPr lang="en-US" sz="800" b="1" dirty="0">
+                <a:solidFill>
+                  <a:srgbClr val="1A1A1A"/>
+                </a:solidFill>
+                <a:latin typeface="Roboto" pitchFamily="34" charset="0"/>
+                <a:ea typeface="Roboto" pitchFamily="34" charset="-122"/>
+                <a:cs typeface="Roboto" pitchFamily="34" charset="-120"/>
+              </a:rPr>
+              <a:t>BNPB 21 Okt 2026: hujan di 3 dari 4 provinsi, jarak pandang 1.000 m ke 7.000 m</a:t>
+            </a:r>
+            <a:endParaRPr lang="en-US" sz="800" dirty="0"/>
+          </a:p>
+        </p:txBody>
+      </p:sp>
+      <p:sp>
+        <p:nvSpPr>
+          <p:cNvPr id="56" name="Text 52"/>
+          <p:cNvSpPr/>
+          <p:nvPr/>
+        </p:nvSpPr>
+        <p:spPr>
+          <a:xfrm>
+            <a:off x="5990485" y="3520440"/>
+            <a:ext cx="953832" cy="731520"/>
+          </a:xfrm>
+          <a:prstGeom prst="rect">
+            <a:avLst/>
+          </a:prstGeom>
+          <a:noFill/>
+          <a:ln/>
+        </p:spPr>
+        <p:txBody>
+          <a:bodyPr wrap="square" lIns="0" tIns="0" rIns="0" bIns="0" rtlCol="0" anchor="ctr"/>
+          <a:lstStyle/>
+          <a:p>
+            <a:pPr algn="l" indent="0" marL="0">
+              <a:buNone/>
+            </a:pPr>
+            <a:r>
+              <a:rPr lang="en-US" sz="800" dirty="0">
+                <a:solidFill>
+                  <a:srgbClr val="2E3440"/>
+                </a:solidFill>
+                <a:latin typeface="Roboto" pitchFamily="34" charset="0"/>
+                <a:ea typeface="Roboto" pitchFamily="34" charset="-122"/>
+                <a:cs typeface="Roboto" pitchFamily="34" charset="-120"/>
+              </a:rPr>
+              <a:t>Hitungan kabupaten, sortie, jarak pandang; tanpa kontrol</a:t>
+            </a:r>
+            <a:endParaRPr lang="en-US" sz="800" dirty="0"/>
+          </a:p>
+        </p:txBody>
+      </p:sp>
+      <p:sp>
+        <p:nvSpPr>
+          <p:cNvPr id="57" name="Text 53"/>
+          <p:cNvSpPr/>
+          <p:nvPr/>
+        </p:nvSpPr>
+        <p:spPr>
+          <a:xfrm>
+            <a:off x="6999181" y="3520440"/>
+            <a:ext cx="764701" cy="731520"/>
+          </a:xfrm>
+          <a:prstGeom prst="rect">
+            <a:avLst/>
+          </a:prstGeom>
+          <a:noFill/>
+          <a:ln/>
+        </p:spPr>
+        <p:txBody>
+          <a:bodyPr wrap="square" lIns="0" tIns="0" rIns="0" bIns="0" rtlCol="0" anchor="ctr"/>
+          <a:lstStyle/>
+          <a:p>
+            <a:pPr algn="l" indent="0" marL="0">
+              <a:buNone/>
+            </a:pPr>
+            <a:r>
+              <a:rPr lang="en-US" sz="800" dirty="0">
+                <a:solidFill>
+                  <a:srgbClr val="2E3440"/>
+                </a:solidFill>
+                <a:latin typeface="Roboto" pitchFamily="34" charset="0"/>
+                <a:ea typeface="Roboto" pitchFamily="34" charset="-122"/>
+                <a:cs typeface="Roboto" pitchFamily="34" charset="-120"/>
+              </a:rPr>
+              <a:t>Ukuran proses, efek tidak terukur</a:t>
+            </a:r>
+            <a:endParaRPr lang="en-US" sz="800" dirty="0"/>
+          </a:p>
+        </p:txBody>
+      </p:sp>
+      <p:sp>
+        <p:nvSpPr>
+          <p:cNvPr id="58" name="Shape 54"/>
+          <p:cNvSpPr/>
+          <p:nvPr/>
+        </p:nvSpPr>
+        <p:spPr>
+          <a:xfrm>
+            <a:off x="4666572" y="4251960"/>
+            <a:ext cx="3152175" cy="0"/>
+          </a:xfrm>
+          <a:prstGeom prst="line">
+            <a:avLst/>
+          </a:prstGeom>
+          <a:noFill/>
+          <a:ln w="6350">
+            <a:solidFill>
+              <a:srgbClr val="E3E6EA"/>
+            </a:solidFill>
+            <a:prstDash val="solid"/>
+          </a:ln>
+        </p:spPr>
+      </p:sp>
+      <p:sp>
+        <p:nvSpPr>
+          <p:cNvPr id="59" name="Text 55"/>
+          <p:cNvSpPr/>
+          <p:nvPr/>
+        </p:nvSpPr>
+        <p:spPr>
+          <a:xfrm>
+            <a:off x="4666572" y="4251960"/>
+            <a:ext cx="1269049" cy="731520"/>
+          </a:xfrm>
+          <a:prstGeom prst="rect">
+            <a:avLst/>
+          </a:prstGeom>
+          <a:noFill/>
+          <a:ln/>
+        </p:spPr>
+        <p:txBody>
+          <a:bodyPr wrap="square" lIns="0" tIns="0" rIns="0" bIns="0" rtlCol="0" anchor="ctr"/>
+          <a:lstStyle/>
+          <a:p>
+            <a:pPr algn="l" indent="0" marL="0">
+              <a:buNone/>
+            </a:pPr>
+            <a:r>
+              <a:rPr lang="en-US" sz="800" b="1" dirty="0">
+                <a:solidFill>
+                  <a:srgbClr val="1A1A1A"/>
+                </a:solidFill>
+                <a:latin typeface="Roboto" pitchFamily="34" charset="0"/>
+                <a:ea typeface="Roboto" pitchFamily="34" charset="-122"/>
+                <a:cs typeface="Roboto" pitchFamily="34" charset="-120"/>
+              </a:rPr>
+              <a:t>BMKG Sep 2026: Kalbar 27 sortie berhasil memicu hujan</a:t>
+            </a:r>
+            <a:endParaRPr lang="en-US" sz="800" dirty="0"/>
+          </a:p>
+        </p:txBody>
+      </p:sp>
+      <p:sp>
+        <p:nvSpPr>
+          <p:cNvPr id="60" name="Text 56"/>
+          <p:cNvSpPr/>
+          <p:nvPr/>
+        </p:nvSpPr>
+        <p:spPr>
+          <a:xfrm>
+            <a:off x="5990485" y="4251960"/>
+            <a:ext cx="953832" cy="731520"/>
+          </a:xfrm>
+          <a:prstGeom prst="rect">
+            <a:avLst/>
+          </a:prstGeom>
+          <a:noFill/>
+          <a:ln/>
+        </p:spPr>
+        <p:txBody>
+          <a:bodyPr wrap="square" lIns="0" tIns="0" rIns="0" bIns="0" rtlCol="0" anchor="ctr"/>
+          <a:lstStyle/>
+          <a:p>
+            <a:pPr algn="l" indent="0" marL="0">
+              <a:buNone/>
+            </a:pPr>
+            <a:r>
+              <a:rPr lang="en-US" sz="800" dirty="0">
+                <a:solidFill>
+                  <a:srgbClr val="2E3440"/>
+                </a:solidFill>
+                <a:latin typeface="Roboto" pitchFamily="34" charset="0"/>
+                <a:ea typeface="Roboto" pitchFamily="34" charset="-122"/>
+                <a:cs typeface="Roboto" pitchFamily="34" charset="-120"/>
+              </a:rPr>
+              <a:t>Tanpa metrik</a:t>
+            </a:r>
+            <a:endParaRPr lang="en-US" sz="800" dirty="0"/>
+          </a:p>
+        </p:txBody>
+      </p:sp>
+      <p:sp>
+        <p:nvSpPr>
+          <p:cNvPr id="61" name="Text 57"/>
+          <p:cNvSpPr/>
+          <p:nvPr/>
+        </p:nvSpPr>
+        <p:spPr>
+          <a:xfrm>
+            <a:off x="6999181" y="4251960"/>
+            <a:ext cx="764701" cy="731520"/>
+          </a:xfrm>
+          <a:prstGeom prst="rect">
+            <a:avLst/>
+          </a:prstGeom>
+          <a:noFill/>
+          <a:ln/>
+        </p:spPr>
+        <p:txBody>
+          <a:bodyPr wrap="square" lIns="0" tIns="0" rIns="0" bIns="0" rtlCol="0" anchor="ctr"/>
+          <a:lstStyle/>
+          <a:p>
+            <a:pPr algn="l" indent="0" marL="0">
+              <a:buNone/>
+            </a:pPr>
+            <a:r>
+              <a:rPr lang="en-US" sz="800" dirty="0">
+                <a:solidFill>
+                  <a:srgbClr val="2E3440"/>
+                </a:solidFill>
+                <a:latin typeface="Roboto" pitchFamily="34" charset="0"/>
+                <a:ea typeface="Roboto" pitchFamily="34" charset="-122"/>
+                <a:cs typeface="Roboto" pitchFamily="34" charset="-120"/>
+              </a:rPr>
+              <a:t>Klaim</a:t>
+            </a:r>
+            <a:endParaRPr lang="en-US" sz="800" dirty="0"/>
+          </a:p>
+        </p:txBody>
+      </p:sp>
+      <p:sp>
+        <p:nvSpPr>
+          <p:cNvPr id="62" name="Shape 58"/>
+          <p:cNvSpPr/>
+          <p:nvPr/>
+        </p:nvSpPr>
+        <p:spPr>
+          <a:xfrm>
+            <a:off x="4666572" y="4983480"/>
+            <a:ext cx="3152175" cy="0"/>
+          </a:xfrm>
+          <a:prstGeom prst="line">
+            <a:avLst/>
+          </a:prstGeom>
+          <a:noFill/>
+          <a:ln w="6350">
+            <a:solidFill>
+              <a:srgbClr val="E3E6EA"/>
+            </a:solidFill>
+            <a:prstDash val="solid"/>
+          </a:ln>
+        </p:spPr>
+      </p:sp>
+      <p:sp>
+        <p:nvSpPr>
+          <p:cNvPr id="63" name="Text 59"/>
+          <p:cNvSpPr/>
+          <p:nvPr/>
+        </p:nvSpPr>
+        <p:spPr>
+          <a:xfrm>
+            <a:off x="4666572" y="4983480"/>
+            <a:ext cx="1269049" cy="731520"/>
+          </a:xfrm>
+          <a:prstGeom prst="rect">
+            <a:avLst/>
+          </a:prstGeom>
+          <a:noFill/>
+          <a:ln/>
+        </p:spPr>
+        <p:txBody>
+          <a:bodyPr wrap="square" lIns="0" tIns="0" rIns="0" bIns="0" rtlCol="0" anchor="ctr"/>
+          <a:lstStyle/>
+          <a:p>
+            <a:pPr algn="l" indent="0" marL="0">
+              <a:buNone/>
+            </a:pPr>
+            <a:r>
+              <a:rPr lang="en-US" sz="800" b="1" dirty="0">
+                <a:solidFill>
+                  <a:srgbClr val="1A1A1A"/>
+                </a:solidFill>
+                <a:latin typeface="Roboto" pitchFamily="34" charset="0"/>
+                <a:ea typeface="Roboto" pitchFamily="34" charset="-122"/>
+                <a:cs typeface="Roboto" pitchFamily="34" charset="-120"/>
+              </a:rPr>
+              <a:t>Pola umum</a:t>
+            </a:r>
+            <a:endParaRPr lang="en-US" sz="800" dirty="0"/>
+          </a:p>
+        </p:txBody>
+      </p:sp>
+      <p:sp>
+        <p:nvSpPr>
+          <p:cNvPr id="64" name="Text 60"/>
+          <p:cNvSpPr/>
+          <p:nvPr/>
+        </p:nvSpPr>
+        <p:spPr>
+          <a:xfrm>
+            <a:off x="5990485" y="4983480"/>
+            <a:ext cx="953832" cy="731520"/>
+          </a:xfrm>
+          <a:prstGeom prst="rect">
+            <a:avLst/>
+          </a:prstGeom>
+          <a:noFill/>
+          <a:ln/>
+        </p:spPr>
+        <p:txBody>
+          <a:bodyPr wrap="square" lIns="0" tIns="0" rIns="0" bIns="0" rtlCol="0" anchor="ctr"/>
+          <a:lstStyle/>
+          <a:p>
+            <a:pPr algn="l" indent="0" marL="0">
+              <a:buNone/>
+            </a:pPr>
+            <a:r>
+              <a:rPr lang="en-US" sz="800" dirty="0">
+                <a:solidFill>
+                  <a:srgbClr val="2E3440"/>
+                </a:solidFill>
+                <a:latin typeface="Roboto" pitchFamily="34" charset="0"/>
+                <a:ea typeface="Roboto" pitchFamily="34" charset="-122"/>
+                <a:cs typeface="Roboto" pitchFamily="34" charset="-120"/>
+              </a:rPr>
+              <a:t>Hari atau kabupaten hujan tanpa pembanding</a:t>
+            </a:r>
+            <a:endParaRPr lang="en-US" sz="800" dirty="0"/>
+          </a:p>
+        </p:txBody>
+      </p:sp>
+      <p:sp>
+        <p:nvSpPr>
+          <p:cNvPr id="65" name="Text 61"/>
+          <p:cNvSpPr/>
+          <p:nvPr/>
+        </p:nvSpPr>
+        <p:spPr>
+          <a:xfrm>
+            <a:off x="6999181" y="4983480"/>
+            <a:ext cx="764701" cy="731520"/>
+          </a:xfrm>
+          <a:prstGeom prst="rect">
+            <a:avLst/>
+          </a:prstGeom>
+          <a:noFill/>
+          <a:ln/>
+        </p:spPr>
+        <p:txBody>
+          <a:bodyPr wrap="square" lIns="0" tIns="0" rIns="0" bIns="0" rtlCol="0" anchor="ctr"/>
+          <a:lstStyle/>
+          <a:p>
+            <a:pPr algn="l" indent="0" marL="0">
+              <a:buNone/>
+            </a:pPr>
+            <a:r>
+              <a:rPr lang="en-US" sz="800" dirty="0">
+                <a:solidFill>
+                  <a:srgbClr val="2E3440"/>
+                </a:solidFill>
+                <a:latin typeface="Roboto" pitchFamily="34" charset="0"/>
+                <a:ea typeface="Roboto" pitchFamily="34" charset="-122"/>
+                <a:cs typeface="Roboto" pitchFamily="34" charset="-120"/>
+              </a:rPr>
+              <a:t>Hujan di musim peralihan tampak sukses tanpa semai</a:t>
+            </a:r>
+            <a:endParaRPr lang="en-US" sz="800" dirty="0"/>
+          </a:p>
+        </p:txBody>
+      </p:sp>
+      <p:sp>
+        <p:nvSpPr>
+          <p:cNvPr id="66" name="Shape 62"/>
+          <p:cNvSpPr/>
+          <p:nvPr/>
+        </p:nvSpPr>
+        <p:spPr>
+          <a:xfrm>
+            <a:off x="8083922" y="1280160"/>
+            <a:ext cx="3556390" cy="4809744"/>
+          </a:xfrm>
+          <a:prstGeom prst="roundRect">
+            <a:avLst>
+              <a:gd name="adj" fmla="val 1543"/>
+            </a:avLst>
+          </a:prstGeom>
+          <a:solidFill>
+            <a:srgbClr val="FFFFFF"/>
+          </a:solidFill>
+          <a:ln w="9525">
+            <a:solidFill>
+              <a:srgbClr val="D5DAE1"/>
+            </a:solidFill>
+            <a:prstDash val="solid"/>
+          </a:ln>
+        </p:spPr>
+      </p:sp>
+      <p:sp>
+        <p:nvSpPr>
+          <p:cNvPr id="67" name="Shape 63"/>
+          <p:cNvSpPr/>
+          <p:nvPr/>
+        </p:nvSpPr>
+        <p:spPr>
+          <a:xfrm>
+            <a:off x="8083922" y="1280160"/>
+            <a:ext cx="3556390" cy="457200"/>
+          </a:xfrm>
+          <a:prstGeom prst="roundRect">
+            <a:avLst>
+              <a:gd name="adj" fmla="val 12000"/>
+            </a:avLst>
+          </a:prstGeom>
+          <a:solidFill>
+            <a:srgbClr val="E6EAF0"/>
+          </a:solidFill>
+          <a:ln/>
+        </p:spPr>
+      </p:sp>
+      <p:sp>
+        <p:nvSpPr>
+          <p:cNvPr id="68" name="Shape 64"/>
+          <p:cNvSpPr/>
+          <p:nvPr/>
+        </p:nvSpPr>
+        <p:spPr>
+          <a:xfrm>
+            <a:off x="8083922" y="1508760"/>
+            <a:ext cx="3556390" cy="228600"/>
+          </a:xfrm>
+          <a:prstGeom prst="rect">
+            <a:avLst/>
+          </a:prstGeom>
+          <a:solidFill>
+            <a:srgbClr val="E6EAF0"/>
+          </a:solidFill>
+          <a:ln/>
+        </p:spPr>
+      </p:sp>
+      <p:sp>
+        <p:nvSpPr>
+          <p:cNvPr id="69" name="Shape 65"/>
+          <p:cNvSpPr/>
+          <p:nvPr/>
+        </p:nvSpPr>
+        <p:spPr>
+          <a:xfrm>
+            <a:off x="8211938" y="1362456"/>
+            <a:ext cx="292608" cy="292608"/>
+          </a:xfrm>
+          <a:prstGeom prst="ellipse">
+            <a:avLst/>
+          </a:prstGeom>
+          <a:solidFill>
+            <a:srgbClr val="051C2C"/>
+          </a:solidFill>
+          <a:ln/>
+        </p:spPr>
+      </p:sp>
+      <p:pic>
+        <p:nvPicPr>
+          <p:cNvPr id="70" name="Image 2" descr="/Users/priyankaalfatehan28/.claude/skills/ppt-konsultan/mesin/cache-ikon/list-checks-regular-FFFFFF.png">    </p:cNvPr>
+          <p:cNvPicPr>
+            <a:picLocks noChangeAspect="1"/>
+          </p:cNvPicPr>
+          <p:nvPr/>
+        </p:nvPicPr>
+        <p:blipFill>
+          <a:blip r:embed="rId3"/>
+          <a:stretch>
+            <a:fillRect/>
+          </a:stretch>
+        </p:blipFill>
+        <p:spPr>
+          <a:xfrm>
+            <a:off x="8275946" y="1426464"/>
+            <a:ext cx="164592" cy="164592"/>
+          </a:xfrm>
+          <a:prstGeom prst="rect">
+            <a:avLst/>
+          </a:prstGeom>
+        </p:spPr>
+      </p:pic>
+      <p:sp>
+        <p:nvSpPr>
+          <p:cNvPr id="71" name="Text 66"/>
+          <p:cNvSpPr/>
+          <p:nvPr/>
+        </p:nvSpPr>
+        <p:spPr>
+          <a:xfrm>
+            <a:off x="8595986" y="1280160"/>
+            <a:ext cx="2907166" cy="457200"/>
+          </a:xfrm>
+          <a:prstGeom prst="rect">
+            <a:avLst/>
+          </a:prstGeom>
+          <a:noFill/>
+          <a:ln/>
+        </p:spPr>
+        <p:txBody>
+          <a:bodyPr wrap="square" lIns="0" tIns="0" rIns="0" bIns="0" rtlCol="0" anchor="ctr"/>
+          <a:lstStyle/>
+          <a:p>
+            <a:pPr indent="0" marL="0">
+              <a:buNone/>
+            </a:pPr>
+            <a:r>
+              <a:rPr lang="en-US" sz="1000" b="1" dirty="0">
+                <a:solidFill>
+                  <a:srgbClr val="1A1A1A"/>
+                </a:solidFill>
+                <a:latin typeface="Roboto" pitchFamily="34" charset="0"/>
+                <a:ea typeface="Roboto" pitchFamily="34" charset="-122"/>
+                <a:cs typeface="Roboto" pitchFamily="34" charset="-120"/>
+              </a:rPr>
+              <a:t>Kesimpulan untuk OMC Oktober 2026</a:t>
+            </a:r>
+            <a:endParaRPr lang="en-US" sz="1000" dirty="0"/>
+          </a:p>
+        </p:txBody>
+      </p:sp>
+      <p:sp>
+        <p:nvSpPr>
+          <p:cNvPr id="72" name="Text 67"/>
+          <p:cNvSpPr/>
+          <p:nvPr/>
+        </p:nvSpPr>
+        <p:spPr>
+          <a:xfrm>
+            <a:off x="8211938" y="1828800"/>
+            <a:ext cx="1188720" cy="365760"/>
+          </a:xfrm>
+          <a:prstGeom prst="rect">
+            <a:avLst/>
+          </a:prstGeom>
+          <a:noFill/>
+          <a:ln/>
+        </p:spPr>
+        <p:txBody>
+          <a:bodyPr wrap="square" lIns="0" tIns="0" rIns="0" bIns="0" rtlCol="0" anchor="ctr"/>
+          <a:lstStyle/>
+          <a:p>
+            <a:pPr indent="0" marL="0">
+              <a:buNone/>
+            </a:pPr>
+            <a:r>
+              <a:rPr lang="en-US" sz="1400" b="1" dirty="0">
+                <a:solidFill>
+                  <a:srgbClr val="D9600B"/>
+                </a:solidFill>
+                <a:latin typeface="Roboto" pitchFamily="34" charset="0"/>
+                <a:ea typeface="Roboto" pitchFamily="34" charset="-122"/>
+                <a:cs typeface="Roboto" pitchFamily="34" charset="-120"/>
+              </a:rPr>
+              <a:t>7 dari 7</a:t>
+            </a:r>
+            <a:endParaRPr lang="en-US" sz="1400" dirty="0"/>
+          </a:p>
+        </p:txBody>
+      </p:sp>
+      <p:sp>
+        <p:nvSpPr>
+          <p:cNvPr id="73" name="Text 68"/>
+          <p:cNvSpPr/>
+          <p:nvPr/>
+        </p:nvSpPr>
+        <p:spPr>
+          <a:xfrm>
+            <a:off x="9446378" y="1828800"/>
+            <a:ext cx="2065918" cy="365760"/>
+          </a:xfrm>
+          <a:prstGeom prst="rect">
+            <a:avLst/>
+          </a:prstGeom>
+          <a:noFill/>
+          <a:ln/>
+        </p:spPr>
+        <p:txBody>
+          <a:bodyPr wrap="square" lIns="0" tIns="0" rIns="0" bIns="0" rtlCol="0" anchor="ctr"/>
+          <a:lstStyle/>
+          <a:p>
+            <a:pPr indent="0" marL="0">
+              <a:buNone/>
+            </a:pPr>
+            <a:r>
+              <a:rPr lang="en-US" sz="800" dirty="0">
+                <a:solidFill>
+                  <a:srgbClr val="2E3440"/>
+                </a:solidFill>
+                <a:latin typeface="Roboto" pitchFamily="34" charset="0"/>
+                <a:ea typeface="Roboto" pitchFamily="34" charset="-122"/>
+                <a:cs typeface="Roboto" pitchFamily="34" charset="-120"/>
+              </a:rPr>
+              <a:t>hari operasi Kalbar dengan hujan di Ketapang</a:t>
+            </a:r>
+            <a:endParaRPr lang="en-US" sz="800" dirty="0"/>
+          </a:p>
+        </p:txBody>
+      </p:sp>
+      <p:sp>
+        <p:nvSpPr>
+          <p:cNvPr id="74" name="Shape 69"/>
+          <p:cNvSpPr/>
+          <p:nvPr/>
+        </p:nvSpPr>
+        <p:spPr>
+          <a:xfrm>
+            <a:off x="8211938" y="2221992"/>
+            <a:ext cx="3300358" cy="0"/>
+          </a:xfrm>
+          <a:prstGeom prst="line">
+            <a:avLst/>
+          </a:prstGeom>
+          <a:noFill/>
+          <a:ln w="6350">
+            <a:solidFill>
+              <a:srgbClr val="E3E6EA"/>
+            </a:solidFill>
+            <a:prstDash val="solid"/>
+          </a:ln>
+        </p:spPr>
+      </p:sp>
+      <p:sp>
+        <p:nvSpPr>
+          <p:cNvPr id="75" name="Text 70"/>
+          <p:cNvSpPr/>
+          <p:nvPr/>
+        </p:nvSpPr>
+        <p:spPr>
+          <a:xfrm>
+            <a:off x="8211938" y="2249424"/>
+            <a:ext cx="1188720" cy="365760"/>
+          </a:xfrm>
+          <a:prstGeom prst="rect">
+            <a:avLst/>
+          </a:prstGeom>
+          <a:noFill/>
+          <a:ln/>
+        </p:spPr>
+        <p:txBody>
+          <a:bodyPr wrap="square" lIns="0" tIns="0" rIns="0" bIns="0" rtlCol="0" anchor="ctr"/>
+          <a:lstStyle/>
+          <a:p>
+            <a:pPr indent="0" marL="0">
+              <a:buNone/>
+            </a:pPr>
+            <a:r>
+              <a:rPr lang="en-US" sz="1400" b="1" dirty="0">
+                <a:solidFill>
+                  <a:srgbClr val="051C2C"/>
+                </a:solidFill>
+                <a:latin typeface="Roboto" pitchFamily="34" charset="0"/>
+                <a:ea typeface="Roboto" pitchFamily="34" charset="-122"/>
+                <a:cs typeface="Roboto" pitchFamily="34" charset="-120"/>
+              </a:rPr>
+              <a:t>6 dari 11</a:t>
+            </a:r>
+            <a:endParaRPr lang="en-US" sz="1400" dirty="0"/>
+          </a:p>
+        </p:txBody>
+      </p:sp>
+      <p:sp>
+        <p:nvSpPr>
+          <p:cNvPr id="76" name="Text 71"/>
+          <p:cNvSpPr/>
+          <p:nvPr/>
+        </p:nvSpPr>
+        <p:spPr>
+          <a:xfrm>
+            <a:off x="9446378" y="2249424"/>
+            <a:ext cx="2065918" cy="365760"/>
+          </a:xfrm>
+          <a:prstGeom prst="rect">
+            <a:avLst/>
+          </a:prstGeom>
+          <a:noFill/>
+          <a:ln/>
+        </p:spPr>
+        <p:txBody>
+          <a:bodyPr wrap="square" lIns="0" tIns="0" rIns="0" bIns="0" rtlCol="0" anchor="ctr"/>
+          <a:lstStyle/>
+          <a:p>
+            <a:pPr indent="0" marL="0">
+              <a:buNone/>
+            </a:pPr>
+            <a:r>
+              <a:rPr lang="en-US" sz="800" dirty="0">
+                <a:solidFill>
+                  <a:srgbClr val="2E3440"/>
+                </a:solidFill>
+                <a:latin typeface="Roboto" pitchFamily="34" charset="0"/>
+                <a:ea typeface="Roboto" pitchFamily="34" charset="-122"/>
+                <a:cs typeface="Roboto" pitchFamily="34" charset="-120"/>
+              </a:rPr>
+              <a:t>hari operasi Kalteng dengan hujan di Kotawaringin Barat</a:t>
+            </a:r>
+            <a:endParaRPr lang="en-US" sz="800" dirty="0"/>
+          </a:p>
+        </p:txBody>
+      </p:sp>
+      <p:sp>
+        <p:nvSpPr>
+          <p:cNvPr id="77" name="Shape 72"/>
+          <p:cNvSpPr/>
+          <p:nvPr/>
+        </p:nvSpPr>
+        <p:spPr>
+          <a:xfrm>
+            <a:off x="8211938" y="2642616"/>
+            <a:ext cx="3300358" cy="0"/>
+          </a:xfrm>
+          <a:prstGeom prst="line">
+            <a:avLst/>
+          </a:prstGeom>
+          <a:noFill/>
+          <a:ln w="6350">
+            <a:solidFill>
+              <a:srgbClr val="E3E6EA"/>
+            </a:solidFill>
+            <a:prstDash val="solid"/>
+          </a:ln>
+        </p:spPr>
+      </p:sp>
+      <p:sp>
+        <p:nvSpPr>
+          <p:cNvPr id="78" name="Text 73"/>
+          <p:cNvSpPr/>
+          <p:nvPr/>
+        </p:nvSpPr>
+        <p:spPr>
+          <a:xfrm>
+            <a:off x="8211938" y="2670048"/>
+            <a:ext cx="1188720" cy="365760"/>
+          </a:xfrm>
+          <a:prstGeom prst="rect">
+            <a:avLst/>
+          </a:prstGeom>
+          <a:noFill/>
+          <a:ln/>
+        </p:spPr>
+        <p:txBody>
+          <a:bodyPr wrap="square" lIns="0" tIns="0" rIns="0" bIns="0" rtlCol="0" anchor="ctr"/>
+          <a:lstStyle/>
+          <a:p>
+            <a:pPr indent="0" marL="0">
+              <a:buNone/>
+            </a:pPr>
+            <a:r>
+              <a:rPr lang="en-US" sz="1400" b="1" dirty="0">
+                <a:solidFill>
+                  <a:srgbClr val="051C2C"/>
+                </a:solidFill>
+                <a:latin typeface="Roboto" pitchFamily="34" charset="0"/>
+                <a:ea typeface="Roboto" pitchFamily="34" charset="-122"/>
+                <a:cs typeface="Roboto" pitchFamily="34" charset="-120"/>
+              </a:rPr>
+              <a:t>sekitar 700</a:t>
+            </a:r>
+            <a:endParaRPr lang="en-US" sz="1400" dirty="0"/>
+          </a:p>
+        </p:txBody>
+      </p:sp>
+      <p:sp>
+        <p:nvSpPr>
+          <p:cNvPr id="79" name="Text 74"/>
+          <p:cNvSpPr/>
+          <p:nvPr/>
+        </p:nvSpPr>
+        <p:spPr>
+          <a:xfrm>
+            <a:off x="9446378" y="2670048"/>
+            <a:ext cx="2065918" cy="365760"/>
+          </a:xfrm>
+          <a:prstGeom prst="rect">
+            <a:avLst/>
+          </a:prstGeom>
+          <a:noFill/>
+          <a:ln/>
+        </p:spPr>
+        <p:txBody>
+          <a:bodyPr wrap="square" lIns="0" tIns="0" rIns="0" bIns="0" rtlCol="0" anchor="ctr"/>
+          <a:lstStyle/>
+          <a:p>
+            <a:pPr indent="0" marL="0">
+              <a:buNone/>
+            </a:pPr>
+            <a:r>
+              <a:rPr lang="en-US" sz="800" dirty="0">
+                <a:solidFill>
+                  <a:srgbClr val="2E3440"/>
+                </a:solidFill>
+                <a:latin typeface="Roboto" pitchFamily="34" charset="0"/>
+                <a:ea typeface="Roboto" pitchFamily="34" charset="-122"/>
+                <a:cs typeface="Roboto" pitchFamily="34" charset="-120"/>
+              </a:rPr>
+              <a:t>kasus per kelompok untuk mendeteksi efek 15% (perkiraan kasar)</a:t>
+            </a:r>
+            <a:endParaRPr lang="en-US" sz="800" dirty="0"/>
+          </a:p>
+        </p:txBody>
+      </p:sp>
+      <p:sp>
+        <p:nvSpPr>
+          <p:cNvPr id="80" name="Shape 75"/>
+          <p:cNvSpPr/>
+          <p:nvPr/>
+        </p:nvSpPr>
+        <p:spPr>
+          <a:xfrm>
+            <a:off x="8211938" y="3063240"/>
+            <a:ext cx="3300358" cy="0"/>
+          </a:xfrm>
+          <a:prstGeom prst="line">
+            <a:avLst/>
+          </a:prstGeom>
+          <a:noFill/>
+          <a:ln w="6350">
+            <a:solidFill>
+              <a:srgbClr val="E3E6EA"/>
+            </a:solidFill>
+            <a:prstDash val="solid"/>
+          </a:ln>
+        </p:spPr>
+      </p:sp>
+      <p:sp>
+        <p:nvSpPr>
+          <p:cNvPr id="81" name="Text 76"/>
+          <p:cNvSpPr/>
+          <p:nvPr/>
+        </p:nvSpPr>
+        <p:spPr>
+          <a:xfrm>
+            <a:off x="8211938" y="3090672"/>
+            <a:ext cx="1188720" cy="365760"/>
+          </a:xfrm>
+          <a:prstGeom prst="rect">
+            <a:avLst/>
+          </a:prstGeom>
+          <a:noFill/>
+          <a:ln/>
+        </p:spPr>
+        <p:txBody>
+          <a:bodyPr wrap="square" lIns="0" tIns="0" rIns="0" bIns="0" rtlCol="0" anchor="ctr"/>
+          <a:lstStyle/>
+          <a:p>
+            <a:pPr indent="0" marL="0">
+              <a:buNone/>
+            </a:pPr>
+            <a:r>
+              <a:rPr lang="en-US" sz="1400" b="1" dirty="0">
+                <a:solidFill>
+                  <a:srgbClr val="051C2C"/>
+                </a:solidFill>
+                <a:latin typeface="Roboto" pitchFamily="34" charset="0"/>
+                <a:ea typeface="Roboto" pitchFamily="34" charset="-122"/>
+                <a:cs typeface="Roboto" pitchFamily="34" charset="-120"/>
+              </a:rPr>
+              <a:t>11 hari</a:t>
+            </a:r>
+            <a:endParaRPr lang="en-US" sz="1400" dirty="0"/>
+          </a:p>
+        </p:txBody>
+      </p:sp>
+      <p:sp>
+        <p:nvSpPr>
+          <p:cNvPr id="82" name="Text 77"/>
+          <p:cNvSpPr/>
+          <p:nvPr/>
+        </p:nvSpPr>
+        <p:spPr>
+          <a:xfrm>
+            <a:off x="9446378" y="3090672"/>
+            <a:ext cx="2065918" cy="365760"/>
+          </a:xfrm>
+          <a:prstGeom prst="rect">
+            <a:avLst/>
+          </a:prstGeom>
+          <a:noFill/>
+          <a:ln/>
+        </p:spPr>
+        <p:txBody>
+          <a:bodyPr wrap="square" lIns="0" tIns="0" rIns="0" bIns="0" rtlCol="0" anchor="ctr"/>
+          <a:lstStyle/>
+          <a:p>
+            <a:pPr indent="0" marL="0">
+              <a:buNone/>
+            </a:pPr>
+            <a:r>
+              <a:rPr lang="en-US" sz="800" dirty="0">
+                <a:solidFill>
+                  <a:srgbClr val="2E3440"/>
+                </a:solidFill>
+                <a:latin typeface="Roboto" pitchFamily="34" charset="0"/>
+                <a:ea typeface="Roboto" pitchFamily="34" charset="-122"/>
+                <a:cs typeface="Roboto" pitchFamily="34" charset="-120"/>
+              </a:rPr>
+              <a:t>operasi Kalteng dan Sumsel, jauh di bawah kebutuhan sampel</a:t>
+            </a:r>
+            <a:endParaRPr lang="en-US" sz="800" dirty="0"/>
+          </a:p>
+        </p:txBody>
+      </p:sp>
+      <p:sp>
+        <p:nvSpPr>
+          <p:cNvPr id="83" name="Text 78"/>
+          <p:cNvSpPr/>
+          <p:nvPr/>
+        </p:nvSpPr>
+        <p:spPr>
+          <a:xfrm>
+            <a:off x="8211938" y="3639312"/>
+            <a:ext cx="3300358" cy="1577340"/>
+          </a:xfrm>
+          <a:prstGeom prst="rect">
+            <a:avLst/>
+          </a:prstGeom>
+          <a:noFill/>
+          <a:ln/>
+        </p:spPr>
+        <p:txBody>
+          <a:bodyPr wrap="square" lIns="0" tIns="0" rIns="0" bIns="0" rtlCol="0" anchor="t"/>
+          <a:lstStyle/>
+          <a:p>
+            <a:pPr marL="114300" indent="-114300">
+              <a:buSzPct val="100000"/>
+              <a:buChar char="•"/>
+            </a:pPr>
+            <a:r>
+              <a:rPr lang="en-US" sz="800" b="1" dirty="0">
+                <a:solidFill>
+                  <a:srgbClr val="1A1A1A"/>
+                </a:solidFill>
+                <a:latin typeface="Roboto" pitchFamily="34" charset="0"/>
+                <a:ea typeface="Roboto" pitchFamily="34" charset="-122"/>
+                <a:cs typeface="Roboto" pitchFamily="34" charset="-120"/>
+              </a:rPr>
+              <a:t>Yang bisa dikatakan:</a:t>
+            </a:r>
+            <a:r>
+              <a:rPr lang="en-US" sz="800" dirty="0">
+                <a:solidFill>
+                  <a:srgbClr val="2E3440"/>
+                </a:solidFill>
+                <a:latin typeface="Roboto" pitchFamily="34" charset="0"/>
+                <a:ea typeface="Roboto" pitchFamily="34" charset="-122"/>
+                <a:cs typeface="Roboto" pitchFamily="34" charset="-120"/>
+              </a:rPr>
+              <a:t> hujan dilaporkan di wilayah sasaran pada sejumlah hari operasi (slide 2).</a:t>
+            </a:r>
+            <a:endParaRPr lang="en-US" sz="800" dirty="0"/>
+          </a:p>
+          <a:p>
+            <a:pPr marL="114300" indent="-114300">
+              <a:spcBef>
+                <a:spcPts val="400"/>
+              </a:spcBef>
+              <a:buSzPct val="100000"/>
+              <a:buChar char="•"/>
+            </a:pPr>
+            <a:r>
+              <a:rPr lang="en-US" sz="800" b="1" dirty="0">
+                <a:solidFill>
+                  <a:srgbClr val="1A1A1A"/>
+                </a:solidFill>
+                <a:latin typeface="Roboto" pitchFamily="34" charset="0"/>
+                <a:ea typeface="Roboto" pitchFamily="34" charset="-122"/>
+                <a:cs typeface="Roboto" pitchFamily="34" charset="-120"/>
+              </a:rPr>
+              <a:t>Yang tidak bisa dikatakan:</a:t>
+            </a:r>
+            <a:r>
+              <a:rPr lang="en-US" sz="800" dirty="0">
+                <a:solidFill>
+                  <a:srgbClr val="2E3440"/>
+                </a:solidFill>
+                <a:latin typeface="Roboto" pitchFamily="34" charset="0"/>
+                <a:ea typeface="Roboto" pitchFamily="34" charset="-122"/>
+                <a:cs typeface="Roboto" pitchFamily="34" charset="-120"/>
+              </a:rPr>
+              <a:t> persentase hujan akibat OMC. Wilayah yang tidak disemai sebagai pembanding belum ada, dan Oktober adalah musim peralihan.</a:t>
+            </a:r>
+            <a:endParaRPr lang="en-US" sz="800" dirty="0"/>
+          </a:p>
+          <a:p>
+            <a:pPr marL="114300" indent="-114300">
+              <a:spcBef>
+                <a:spcPts val="400"/>
+              </a:spcBef>
+              <a:buSzPct val="100000"/>
+              <a:buChar char="•"/>
+            </a:pPr>
+            <a:r>
+              <a:rPr lang="en-US" sz="800" b="1" dirty="0">
+                <a:solidFill>
+                  <a:srgbClr val="1A1A1A"/>
+                </a:solidFill>
+                <a:latin typeface="Roboto" pitchFamily="34" charset="0"/>
+                <a:ea typeface="Roboto" pitchFamily="34" charset="-122"/>
+                <a:cs typeface="Roboto" pitchFamily="34" charset="-120"/>
+              </a:rPr>
+              <a:t>Kebutuhan data:</a:t>
+            </a:r>
+            <a:r>
+              <a:rPr lang="en-US" sz="800" dirty="0">
+                <a:solidFill>
+                  <a:srgbClr val="2E3440"/>
+                </a:solidFill>
+                <a:latin typeface="Roboto" pitchFamily="34" charset="0"/>
+                <a:ea typeface="Roboto" pitchFamily="34" charset="-122"/>
+                <a:cs typeface="Roboto" pitchFamily="34" charset="-120"/>
+              </a:rPr>
+              <a:t> mendeteksi efek sekitar 15% butuh ratusan kab-hari per kelompok; 11 hari operasi tidak cukup.</a:t>
+            </a:r>
+            <a:endParaRPr lang="en-US" sz="800" dirty="0"/>
+          </a:p>
+          <a:p>
+            <a:pPr marL="114300" indent="-114300">
+              <a:spcBef>
+                <a:spcPts val="400"/>
+              </a:spcBef>
+              <a:buSzPct val="100000"/>
+              <a:buChar char="•"/>
+            </a:pPr>
+            <a:r>
+              <a:rPr lang="en-US" sz="800" b="1" dirty="0">
+                <a:solidFill>
+                  <a:srgbClr val="1A1A1A"/>
+                </a:solidFill>
+                <a:latin typeface="Roboto" pitchFamily="34" charset="0"/>
+                <a:ea typeface="Roboto" pitchFamily="34" charset="-122"/>
+                <a:cs typeface="Roboto" pitchFamily="34" charset="-120"/>
+              </a:rPr>
+              <a:t>Ke depan:</a:t>
+            </a:r>
+            <a:r>
+              <a:rPr lang="en-US" sz="800" dirty="0">
+                <a:solidFill>
+                  <a:srgbClr val="2E3440"/>
+                </a:solidFill>
+                <a:latin typeface="Roboto" pitchFamily="34" charset="0"/>
+                <a:ea typeface="Roboto" pitchFamily="34" charset="-122"/>
+                <a:cs typeface="Roboto" pitchFamily="34" charset="-120"/>
+              </a:rPr>
+              <a:t> catat jam dan koordinat lintasan semai tiap sortie, tetapkan wilayah kontrol tiap hari, pulihkan arsip PM2,5 BMKG.</a:t>
+            </a:r>
+            <a:endParaRPr lang="en-US" sz="800" dirty="0"/>
+          </a:p>
+          <a:p>
+            <a:pPr marL="114300" indent="-114300">
+              <a:spcBef>
+                <a:spcPts val="400"/>
+              </a:spcBef>
+              <a:buSzPct val="100000"/>
+              <a:buChar char="•"/>
+            </a:pPr>
+            <a:r>
+              <a:rPr lang="en-US" sz="800" b="1" dirty="0">
+                <a:solidFill>
+                  <a:srgbClr val="1A1A1A"/>
+                </a:solidFill>
+                <a:latin typeface="Roboto" pitchFamily="34" charset="0"/>
+                <a:ea typeface="Roboto" pitchFamily="34" charset="-122"/>
+                <a:cs typeface="Roboto" pitchFamily="34" charset="-120"/>
+              </a:rPr>
+              <a:t>Sedang dihitung:</a:t>
+            </a:r>
+            <a:r>
+              <a:rPr lang="en-US" sz="800" dirty="0">
+                <a:solidFill>
+                  <a:srgbClr val="2E3440"/>
+                </a:solidFill>
+                <a:latin typeface="Roboto" pitchFamily="34" charset="0"/>
+                <a:ea typeface="Roboto" pitchFamily="34" charset="-122"/>
+                <a:cs typeface="Roboto" pitchFamily="34" charset="-120"/>
+              </a:rPr>
+              <a:t> uji wilayah sasaran lawan kontrol dengan data satelit; hasilnya ditambahkan.</a:t>
+            </a:r>
+            <a:endParaRPr lang="en-US" sz="800" dirty="0"/>
+          </a:p>
+        </p:txBody>
+      </p:sp>
+      <p:sp>
+        <p:nvSpPr>
+          <p:cNvPr id="25" name="Slide Number Placeholder 0"/>
+          <p:cNvSpPr>
+            <a:spLocks noGrp="1"/>
+          </p:cNvSpPr>
+          <p:nvPr>
+            <p:ph type="sldNum" sz="quarter" idx="4294967295"/>
+          </p:nvPr>
+        </p:nvSpPr>
+        <p:spPr>
+          <a:xfrm>
+            <a:off x="11091672" y="6510020"/>
+            <a:ext cx="548640" cy="219456"/>
+          </a:xfrm>
+          <a:prstGeom prst="rect">
+            <a:avLst/>
+          </a:prstGeom>
+          <a:extLst>
+            <a:ext uri="{C572A759-6A51-4108-AA02-DFA0A04FC94B}">
+              <ma14:wrappingTextBoxFlag xmlns:ma14="http://schemas.microsoft.com/office/mac/drawingml/2011/main" val="0"/>
+            </a:ext>
+          </a:extLst>
+        </p:spPr>
+        <p:txBody>
+          <a:bodyPr/>
+          <a:lstStyle>
+            <a:lvl1pPr>
+              <a:defRPr sz="800">
+                <a:solidFill>
+                  <a:srgbClr val="1A1A1A"/>
+                </a:solidFill>
+                <a:latin typeface="Roboto"/>
+                <a:ea typeface="Roboto"/>
+                <a:cs typeface="Roboto"/>
+              </a:defRPr>
+            </a:lvl1pPr>
+          </a:lstStyle>
+          <a:p>
+            <a:pPr algn="r"/>
+            <a:fld id="{F7021451-1387-4CA6-816F-3879F97B5CBC}" type="slidenum">
+              <a:rPr b="1" lang="en-US"/>
+              <a:t>3</a:t>
             </a:fld>
             <a:endParaRPr lang="en-US"/>
           </a:p>

--- a/data/laporan-bnpb/omc/OMC_Karhutla_16-27Okt2026.pptx
+++ b/data/laporan-bnpb/omc/OMC_Karhutla_16-27Okt2026.pptx
@@ -107,6 +107,259 @@
     </a:lvl9pPr>
   </p:defaultTextStyle>
 </p:presentation>
+</file>
+
+<file path=ppt/charts/chart1.xml><?xml version="1.0" encoding="utf-8"?>
+<c:chartSpace xmlns:c="http://schemas.openxmlformats.org/drawingml/2006/chart" xmlns:a="http://schemas.openxmlformats.org/drawingml/2006/main" xmlns:r="http://schemas.openxmlformats.org/officeDocument/2006/relationships">
+  <c:date1904 val="0"/>
+  <c:roundedCorners val="1"/>
+  <c:chart>
+    <c:autoTitleDeleted val="1"/>
+    <c:plotArea>
+      <c:layout>
+        <c:manualLayout>
+          <c:layoutTarget val="inner"/>
+          <c:xMode val="edge"/>
+          <c:yMode val="edge"/>
+          <c:x val="0.3"/>
+          <c:y val="0.02"/>
+          <c:w val="0.52"/>
+          <c:h val="0.96"/>
+        </c:manualLayout>
+      </c:layout>
+      <c:barChart>
+        <c:barDir val="bar"/>
+        <c:grouping val="clustered"/>
+        <c:varyColors val="0"/>
+        <c:ser>
+          <c:idx val="0"/>
+          <c:order val="0"/>
+          <c:tx>
+            <c:strRef>
+              <c:f>Sheet1!$B$1</c:f>
+              <c:strCache>
+                <c:ptCount val="1"/>
+                <c:pt idx="0">
+                  <c:v>Tambahan hujan</c:v>
+                </c:pt>
+              </c:strCache>
+            </c:strRef>
+          </c:tx>
+          <c:spPr>
+            <a:solidFill>
+              <a:srgbClr val="D9600B"/>
+            </a:solidFill>
+            <a:effectLst/>
+          </c:spPr>
+          <c:invertIfNegative val="0"/>
+          <c:dLbls>
+            <c:numFmt formatCode="#,##0.0" sourceLinked="0"/>
+            <c:txPr>
+              <a:bodyPr/>
+              <a:lstStyle/>
+              <a:p>
+                <a:pPr>
+                  <a:defRPr b="0" i="0" strike="noStrike" sz="1000" u="none">
+                    <a:solidFill>
+                      <a:srgbClr val="1A1A1A"/>
+                    </a:solidFill>
+                    <a:latin typeface="Roboto"/>
+                  </a:defRPr>
+                </a:pPr>
+              </a:p>
+            </c:txPr>
+            <c:showLegendKey val="0"/>
+            <c:showVal val="1"/>
+            <c:showCatName val="0"/>
+            <c:showSerName val="0"/>
+            <c:showPercent val="0"/>
+            <c:showBubbleSize val="0"/>
+            <c:showLeaderLines val="0"/>
+          </c:dLbls>
+          <c:dPt>
+            <c:idx val="0"/>
+            <c:invertIfNegative val="0"/>
+            <c:bubble3D val="0"/>
+            <c:spPr>
+              <a:solidFill>
+                <a:srgbClr val="D9600B"/>
+              </a:solidFill>
+              <a:effectLst/>
+            </c:spPr>
+          </c:dPt>
+          <c:dPt>
+            <c:idx val="1"/>
+            <c:invertIfNegative val="0"/>
+            <c:bubble3D val="0"/>
+            <c:spPr>
+              <a:solidFill>
+                <a:srgbClr val="A9B4C2"/>
+              </a:solidFill>
+              <a:effectLst/>
+            </c:spPr>
+          </c:dPt>
+          <c:cat>
+            <c:multiLvlStrRef>
+              <c:f>Sheet1!$A$2:$A$3</c:f>
+              <c:multiLvlStrCache>
+                <c:ptCount val="2"/>
+                <c:lvl>
+                  <c:pt idx="0">
+                    <c:v>India CAIPEEX-IV 2023</c:v>
+                  </c:pt>
+                  <c:pt idx="1">
+                    <c:v>Israel-4 2013 sampai 2020</c:v>
+                  </c:pt>
+                </c:lvl>
+              </c:multiLvlStrCache>
+            </c:multiLvlStrRef>
+          </c:cat>
+          <c:val>
+            <c:numRef>
+              <c:f>Sheet1!$B$2:$B$3</c:f>
+              <c:numCache>
+                <c:formatCode>General</c:formatCode>
+                <c:ptCount val="2"/>
+                <c:pt idx="0">
+                  <c:v>18</c:v>
+                </c:pt>
+                <c:pt idx="1">
+                  <c:v>1.8</c:v>
+                </c:pt>
+              </c:numCache>
+            </c:numRef>
+          </c:val>
+        </c:ser>
+        <c:dLbls>
+          <c:numFmt formatCode="#,##0.0" sourceLinked="0"/>
+          <c:txPr>
+            <a:bodyPr/>
+            <a:lstStyle/>
+            <a:p>
+              <a:pPr>
+                <a:defRPr b="0" i="0" strike="noStrike" sz="1000" u="none">
+                  <a:solidFill>
+                    <a:srgbClr val="1A1A1A"/>
+                  </a:solidFill>
+                  <a:latin typeface="Roboto"/>
+                </a:defRPr>
+              </a:pPr>
+            </a:p>
+          </c:txPr>
+          <c:showLegendKey val="0"/>
+          <c:showVal val="1"/>
+          <c:showCatName val="0"/>
+          <c:showSerName val="0"/>
+          <c:showPercent val="0"/>
+          <c:showBubbleSize val="0"/>
+          <c:showLeaderLines val="0"/>
+        </c:dLbls>
+        <c:gapWidth val="55"/>
+        <c:overlap val="0"/>
+        <c:axId val="2094734554"/>
+        <c:axId val="2094734552"/>
+        <c:axId val="2094734556"/>
+      </c:barChart>
+      <c:catAx>
+        <c:axId val="2094734554"/>
+        <c:scaling>
+          <c:orientation val="maxMin"/>
+        </c:scaling>
+        <c:delete val="0"/>
+        <c:axPos val="l"/>
+        <c:numFmt formatCode="General" sourceLinked="1"/>
+        <c:majorTickMark val="out"/>
+        <c:minorTickMark val="none"/>
+        <c:tickLblPos val="nextTo"/>
+        <c:spPr>
+          <a:ln w="12700" cap="flat">
+            <a:solidFill>
+              <a:srgbClr val="BFBFBF"/>
+            </a:solidFill>
+            <a:prstDash val="solid"/>
+            <a:round/>
+          </a:ln>
+        </c:spPr>
+        <c:txPr>
+          <a:bodyPr/>
+          <a:lstStyle/>
+          <a:p>
+            <a:pPr>
+              <a:defRPr sz="1000" b="0" i="0" u="none" strike="noStrike">
+                <a:solidFill>
+                  <a:srgbClr val="6B7280"/>
+                </a:solidFill>
+                <a:latin typeface="Roboto"/>
+              </a:defRPr>
+            </a:pPr>
+            <a:endParaRPr lang="en-US"/>
+          </a:p>
+        </c:txPr>
+        <c:crossAx val="2094734552"/>
+        <c:crosses val="autoZero"/>
+        <c:auto val="1"/>
+        <c:lblAlgn val="ctr"/>
+        <c:noMultiLvlLbl val="1"/>
+      </c:catAx>
+      <c:valAx>
+        <c:axId val="2094734552"/>
+        <c:scaling>
+          <c:orientation val="minMax"/>
+        </c:scaling>
+        <c:delete val="1"/>
+        <c:axPos val="b"/>
+        <c:numFmt formatCode="General" sourceLinked="0"/>
+        <c:majorTickMark val="out"/>
+        <c:minorTickMark val="none"/>
+        <c:tickLblPos val="low"/>
+        <c:spPr>
+          <a:ln w="12700" cap="flat">
+            <a:noFill/>
+            <a:prstDash val="solid"/>
+            <a:round/>
+          </a:ln>
+        </c:spPr>
+        <c:txPr>
+          <a:bodyPr/>
+          <a:lstStyle/>
+          <a:p>
+            <a:pPr>
+              <a:defRPr sz="1000" b="0" i="0" u="none" strike="noStrike">
+                <a:solidFill>
+                  <a:srgbClr val="000000"/>
+                </a:solidFill>
+                <a:latin typeface="Roboto"/>
+              </a:defRPr>
+            </a:pPr>
+            <a:endParaRPr lang="en-US"/>
+          </a:p>
+        </c:txPr>
+        <c:crossAx val="2094734554"/>
+        <c:crosses val="autoZero"/>
+        <c:crossBetween val="between"/>
+      </c:valAx>
+      <c:spPr>
+        <a:noFill/>
+        <a:ln>
+          <a:noFill/>
+        </a:ln>
+        <a:effectLst/>
+      </c:spPr>
+    </c:plotArea>
+    <c:plotVisOnly val="1"/>
+    <c:dispBlanksAs val="span"/>
+  </c:chart>
+  <c:spPr>
+    <a:noFill/>
+    <a:ln>
+      <a:noFill/>
+    </a:ln>
+    <a:effectLst/>
+  </c:spPr>
+  <c:externalData r:id="rId1">
+    <c:autoUpdate val="0"/>
+  </c:externalData>
+</c:chartSpace>
 </file>
 
 <file path=ppt/notesMasters/notesMaster1.xml><?xml version="1.0" encoding="utf-8"?>
@@ -1931,7 +2184,7 @@
                 <a:ea typeface="Roboto" pitchFamily="34" charset="-122"/>
                 <a:cs typeface="Roboto" pitchFamily="34" charset="-120"/>
               </a:rPr>
-              <a:t> dengan 102,0 ton NaCl dan 53,6 ton dry ice</a:t>
+              <a:t> dengan 106,0 ton NaCl dan 53,6 ton dry ice</a:t>
             </a:r>
             <a:endParaRPr lang="en-US" sz="2200" dirty="0"/>
           </a:p>
@@ -2056,8 +2309,8 @@
         </p:nvSpPr>
         <p:spPr>
           <a:xfrm>
-            <a:off x="548640" y="6181344"/>
-            <a:ext cx="36576" cy="164592"/>
+            <a:off x="548640" y="6199632"/>
+            <a:ext cx="45720" cy="219456"/>
           </a:xfrm>
           <a:prstGeom prst="rect">
             <a:avLst/>
@@ -2093,17 +2346,28 @@
               <a:buNone/>
             </a:pPr>
             <a:r>
-              <a:rPr lang="en-US" sz="800" dirty="0">
-                <a:solidFill>
-                  <a:srgbClr val="6B7280"/>
-                </a:solidFill>
-                <a:latin typeface="Roboto" pitchFamily="34" charset="0"/>
-                <a:ea typeface="Roboto" pitchFamily="34" charset="-122"/>
-                <a:cs typeface="Roboto" pitchFamily="34" charset="-120"/>
-              </a:rPr>
-              <a:t>Sumber: Laporan Penanganan Karhutla BNPB 17–27 Okt 2026; Resume Posko Terpadu OMC 27 Okt 2026; BPBD Jatim. Sortie (ton NaCl + ton dry ice). Lampung 22 Okt 1 sortie, bahan tidak tertulis</a:t>
-            </a:r>
-            <a:endParaRPr lang="en-US" sz="800" dirty="0"/>
+              <a:rPr lang="en-US" sz="900" b="1" dirty="0">
+                <a:solidFill>
+                  <a:srgbClr val="1A1A1A"/>
+                </a:solidFill>
+                <a:latin typeface="Roboto" pitchFamily="34" charset="0"/>
+                <a:ea typeface="Roboto" pitchFamily="34" charset="-122"/>
+                <a:cs typeface="Roboto" pitchFamily="34" charset="-120"/>
+              </a:rPr>
+              <a:t>Sumber: </a:t>
+            </a:r>
+            <a:r>
+              <a:rPr lang="en-US" sz="900" i="1" dirty="0">
+                <a:solidFill>
+                  <a:srgbClr val="1A1A1A"/>
+                </a:solidFill>
+                <a:latin typeface="Roboto" pitchFamily="34" charset="0"/>
+                <a:ea typeface="Roboto" pitchFamily="34" charset="-122"/>
+                <a:cs typeface="Roboto" pitchFamily="34" charset="-120"/>
+              </a:rPr>
+              <a:t>Laporan Penanganan Karhutla BNPB 17–27 Okt 2026; Resume Posko Terpadu OMC 27 Okt 2026; BPBD Jatim</a:t>
+            </a:r>
+            <a:endParaRPr lang="en-US" sz="900" dirty="0"/>
           </a:p>
         </p:txBody>
       </p:sp>
@@ -2467,7 +2731,7 @@
                 <a:ea typeface="Roboto" pitchFamily="34" charset="-122"/>
                 <a:cs typeface="Roboto" pitchFamily="34" charset="-120"/>
               </a:rPr>
-              <a:t>102,0 ton</a:t>
+              <a:t>106,0 ton</a:t>
             </a:r>
             <a:endParaRPr lang="en-US" sz="1600" dirty="0"/>
           </a:p>
@@ -2971,7 +3235,7 @@
         <p:spPr>
           <a:xfrm>
             <a:off x="676656" y="2883916"/>
-            <a:ext cx="542260" cy="182880"/>
+            <a:ext cx="674954" cy="182880"/>
           </a:xfrm>
           <a:prstGeom prst="rect">
             <a:avLst/>
@@ -2987,9 +3251,9 @@
               <a:buNone/>
             </a:pPr>
             <a:r>
-              <a:rPr lang="en-US" sz="800" b="1" spc="150" kern="0" dirty="0">
-                <a:solidFill>
-                  <a:srgbClr val="6B7280"/>
+              <a:rPr lang="en-US" sz="800" b="1" dirty="0">
+                <a:solidFill>
+                  <a:srgbClr val="1A1A1A"/>
                 </a:solidFill>
                 <a:latin typeface="Roboto" pitchFamily="34" charset="0"/>
                 <a:ea typeface="Roboto" pitchFamily="34" charset="-122"/>
@@ -3009,7 +3273,85 @@
         </p:nvSpPr>
         <p:spPr>
           <a:xfrm>
-            <a:off x="1273780" y="2883916"/>
+            <a:off x="1406474" y="2883916"/>
+            <a:ext cx="741301" cy="182880"/>
+          </a:xfrm>
+          <a:prstGeom prst="rect">
+            <a:avLst/>
+          </a:prstGeom>
+          <a:noFill/>
+          <a:ln/>
+        </p:spPr>
+        <p:txBody>
+          <a:bodyPr wrap="square" lIns="0" tIns="0" rIns="0" bIns="0" rtlCol="0" anchor="ctr"/>
+          <a:lstStyle/>
+          <a:p>
+            <a:pPr algn="ctr" indent="0" marL="0">
+              <a:buNone/>
+            </a:pPr>
+            <a:r>
+              <a:rPr lang="en-US" sz="800" b="1" dirty="0">
+                <a:solidFill>
+                  <a:srgbClr val="1A1A1A"/>
+                </a:solidFill>
+                <a:latin typeface="Roboto" pitchFamily="34" charset="0"/>
+                <a:ea typeface="Roboto" pitchFamily="34" charset="-122"/>
+                <a:cs typeface="Roboto" pitchFamily="34" charset="-120"/>
+              </a:rPr>
+              <a:t>KALBAR</a:t>
+            </a:r>
+            <a:endParaRPr lang="en-US" sz="800" dirty="0"/>
+          </a:p>
+        </p:txBody>
+      </p:sp>
+      <p:sp>
+        <p:nvSpPr>
+          <p:cNvPr id="40" name="Text 32"/>
+          <p:cNvSpPr/>
+          <p:nvPr/>
+        </p:nvSpPr>
+        <p:spPr>
+          <a:xfrm>
+            <a:off x="2202639" y="2883916"/>
+            <a:ext cx="940342" cy="182880"/>
+          </a:xfrm>
+          <a:prstGeom prst="rect">
+            <a:avLst/>
+          </a:prstGeom>
+          <a:noFill/>
+          <a:ln/>
+        </p:spPr>
+        <p:txBody>
+          <a:bodyPr wrap="square" lIns="0" tIns="0" rIns="0" bIns="0" rtlCol="0" anchor="ctr"/>
+          <a:lstStyle/>
+          <a:p>
+            <a:pPr algn="ctr" indent="0" marL="0">
+              <a:buNone/>
+            </a:pPr>
+            <a:r>
+              <a:rPr lang="en-US" sz="800" b="1" dirty="0">
+                <a:solidFill>
+                  <a:srgbClr val="1A1A1A"/>
+                </a:solidFill>
+                <a:latin typeface="Roboto" pitchFamily="34" charset="0"/>
+                <a:ea typeface="Roboto" pitchFamily="34" charset="-122"/>
+                <a:cs typeface="Roboto" pitchFamily="34" charset="-120"/>
+              </a:rPr>
+              <a:t>KALTENG</a:t>
+            </a:r>
+            <a:endParaRPr lang="en-US" sz="800" dirty="0"/>
+          </a:p>
+        </p:txBody>
+      </p:sp>
+      <p:sp>
+        <p:nvSpPr>
+          <p:cNvPr id="41" name="Text 33"/>
+          <p:cNvSpPr/>
+          <p:nvPr/>
+        </p:nvSpPr>
+        <p:spPr>
+          <a:xfrm>
+            <a:off x="3197846" y="2883916"/>
             <a:ext cx="807648" cy="182880"/>
           </a:xfrm>
           <a:prstGeom prst="rect">
@@ -3026,29 +3368,29 @@
               <a:buNone/>
             </a:pPr>
             <a:r>
-              <a:rPr lang="en-US" sz="800" b="1" spc="150" kern="0" dirty="0">
-                <a:solidFill>
-                  <a:srgbClr val="6B7280"/>
-                </a:solidFill>
-                <a:latin typeface="Roboto" pitchFamily="34" charset="0"/>
-                <a:ea typeface="Roboto" pitchFamily="34" charset="-122"/>
-                <a:cs typeface="Roboto" pitchFamily="34" charset="-120"/>
-              </a:rPr>
-              <a:t>KALBAR</a:t>
-            </a:r>
-            <a:endParaRPr lang="en-US" sz="800" dirty="0"/>
-          </a:p>
-        </p:txBody>
-      </p:sp>
-      <p:sp>
-        <p:nvSpPr>
-          <p:cNvPr id="40" name="Text 32"/>
-          <p:cNvSpPr/>
-          <p:nvPr/>
-        </p:nvSpPr>
-        <p:spPr>
-          <a:xfrm>
-            <a:off x="2136292" y="2883916"/>
+              <a:rPr lang="en-US" sz="800" b="1" dirty="0">
+                <a:solidFill>
+                  <a:srgbClr val="1A1A1A"/>
+                </a:solidFill>
+                <a:latin typeface="Roboto" pitchFamily="34" charset="0"/>
+                <a:ea typeface="Roboto" pitchFamily="34" charset="-122"/>
+                <a:cs typeface="Roboto" pitchFamily="34" charset="-120"/>
+              </a:rPr>
+              <a:t>KALSEL</a:t>
+            </a:r>
+            <a:endParaRPr lang="en-US" sz="800" dirty="0"/>
+          </a:p>
+        </p:txBody>
+      </p:sp>
+      <p:sp>
+        <p:nvSpPr>
+          <p:cNvPr id="42" name="Text 34"/>
+          <p:cNvSpPr/>
+          <p:nvPr/>
+        </p:nvSpPr>
+        <p:spPr>
+          <a:xfrm>
+            <a:off x="4060358" y="2883916"/>
             <a:ext cx="940342" cy="182880"/>
           </a:xfrm>
           <a:prstGeom prst="rect">
@@ -3065,30 +3407,30 @@
               <a:buNone/>
             </a:pPr>
             <a:r>
-              <a:rPr lang="en-US" sz="800" b="1" spc="150" kern="0" dirty="0">
-                <a:solidFill>
-                  <a:srgbClr val="6B7280"/>
-                </a:solidFill>
-                <a:latin typeface="Roboto" pitchFamily="34" charset="0"/>
-                <a:ea typeface="Roboto" pitchFamily="34" charset="-122"/>
-                <a:cs typeface="Roboto" pitchFamily="34" charset="-120"/>
-              </a:rPr>
-              <a:t>KALTENG</a:t>
-            </a:r>
-            <a:endParaRPr lang="en-US" sz="800" dirty="0"/>
-          </a:p>
-        </p:txBody>
-      </p:sp>
-      <p:sp>
-        <p:nvSpPr>
-          <p:cNvPr id="41" name="Text 33"/>
-          <p:cNvSpPr/>
-          <p:nvPr/>
-        </p:nvSpPr>
-        <p:spPr>
-          <a:xfrm>
-            <a:off x="3131498" y="2883916"/>
-            <a:ext cx="807648" cy="182880"/>
+              <a:rPr lang="en-US" sz="800" b="1" dirty="0">
+                <a:solidFill>
+                  <a:srgbClr val="1A1A1A"/>
+                </a:solidFill>
+                <a:latin typeface="Roboto" pitchFamily="34" charset="0"/>
+                <a:ea typeface="Roboto" pitchFamily="34" charset="-122"/>
+                <a:cs typeface="Roboto" pitchFamily="34" charset="-120"/>
+              </a:rPr>
+              <a:t>SUMSEL</a:t>
+            </a:r>
+            <a:endParaRPr lang="en-US" sz="800" dirty="0"/>
+          </a:p>
+        </p:txBody>
+      </p:sp>
+      <p:sp>
+        <p:nvSpPr>
+          <p:cNvPr id="43" name="Text 35"/>
+          <p:cNvSpPr/>
+          <p:nvPr/>
+        </p:nvSpPr>
+        <p:spPr>
+          <a:xfrm>
+            <a:off x="5055564" y="2883916"/>
+            <a:ext cx="1272078" cy="182880"/>
           </a:xfrm>
           <a:prstGeom prst="rect">
             <a:avLst/>
@@ -3104,30 +3446,30 @@
               <a:buNone/>
             </a:pPr>
             <a:r>
-              <a:rPr lang="en-US" sz="800" b="1" spc="150" kern="0" dirty="0">
-                <a:solidFill>
-                  <a:srgbClr val="6B7280"/>
-                </a:solidFill>
-                <a:latin typeface="Roboto" pitchFamily="34" charset="0"/>
-                <a:ea typeface="Roboto" pitchFamily="34" charset="-122"/>
-                <a:cs typeface="Roboto" pitchFamily="34" charset="-120"/>
-              </a:rPr>
-              <a:t>KALSEL</a:t>
-            </a:r>
-            <a:endParaRPr lang="en-US" sz="800" dirty="0"/>
-          </a:p>
-        </p:txBody>
-      </p:sp>
-      <p:sp>
-        <p:nvSpPr>
-          <p:cNvPr id="42" name="Text 34"/>
-          <p:cNvSpPr/>
-          <p:nvPr/>
-        </p:nvSpPr>
-        <p:spPr>
-          <a:xfrm>
-            <a:off x="3994011" y="2883916"/>
-            <a:ext cx="940342" cy="182880"/>
+              <a:rPr lang="en-US" sz="800" b="1" dirty="0">
+                <a:solidFill>
+                  <a:srgbClr val="1A1A1A"/>
+                </a:solidFill>
+                <a:latin typeface="Roboto" pitchFamily="34" charset="0"/>
+                <a:ea typeface="Roboto" pitchFamily="34" charset="-122"/>
+                <a:cs typeface="Roboto" pitchFamily="34" charset="-120"/>
+              </a:rPr>
+              <a:t>LAINNYA</a:t>
+            </a:r>
+            <a:endParaRPr lang="en-US" sz="800" dirty="0"/>
+          </a:p>
+        </p:txBody>
+      </p:sp>
+      <p:sp>
+        <p:nvSpPr>
+          <p:cNvPr id="44" name="Text 36"/>
+          <p:cNvSpPr/>
+          <p:nvPr/>
+        </p:nvSpPr>
+        <p:spPr>
+          <a:xfrm>
+            <a:off x="6382506" y="2883916"/>
+            <a:ext cx="873995" cy="182880"/>
           </a:xfrm>
           <a:prstGeom prst="rect">
             <a:avLst/>
@@ -3143,87 +3485,9 @@
               <a:buNone/>
             </a:pPr>
             <a:r>
-              <a:rPr lang="en-US" sz="800" b="1" spc="150" kern="0" dirty="0">
-                <a:solidFill>
-                  <a:srgbClr val="6B7280"/>
-                </a:solidFill>
-                <a:latin typeface="Roboto" pitchFamily="34" charset="0"/>
-                <a:ea typeface="Roboto" pitchFamily="34" charset="-122"/>
-                <a:cs typeface="Roboto" pitchFamily="34" charset="-120"/>
-              </a:rPr>
-              <a:t>SUMSEL</a:t>
-            </a:r>
-            <a:endParaRPr lang="en-US" sz="800" dirty="0"/>
-          </a:p>
-        </p:txBody>
-      </p:sp>
-      <p:sp>
-        <p:nvSpPr>
-          <p:cNvPr id="43" name="Text 35"/>
-          <p:cNvSpPr/>
-          <p:nvPr/>
-        </p:nvSpPr>
-        <p:spPr>
-          <a:xfrm>
-            <a:off x="4989217" y="2883916"/>
-            <a:ext cx="1272078" cy="182880"/>
-          </a:xfrm>
-          <a:prstGeom prst="rect">
-            <a:avLst/>
-          </a:prstGeom>
-          <a:noFill/>
-          <a:ln/>
-        </p:spPr>
-        <p:txBody>
-          <a:bodyPr wrap="square" lIns="0" tIns="0" rIns="0" bIns="0" rtlCol="0" anchor="ctr"/>
-          <a:lstStyle/>
-          <a:p>
-            <a:pPr algn="ctr" indent="0" marL="0">
-              <a:buNone/>
-            </a:pPr>
-            <a:r>
-              <a:rPr lang="en-US" sz="800" b="1" spc="150" kern="0" dirty="0">
-                <a:solidFill>
-                  <a:srgbClr val="6B7280"/>
-                </a:solidFill>
-                <a:latin typeface="Roboto" pitchFamily="34" charset="0"/>
-                <a:ea typeface="Roboto" pitchFamily="34" charset="-122"/>
-                <a:cs typeface="Roboto" pitchFamily="34" charset="-120"/>
-              </a:rPr>
-              <a:t>LAINNYA</a:t>
-            </a:r>
-            <a:endParaRPr lang="en-US" sz="800" dirty="0"/>
-          </a:p>
-        </p:txBody>
-      </p:sp>
-      <p:sp>
-        <p:nvSpPr>
-          <p:cNvPr id="44" name="Text 36"/>
-          <p:cNvSpPr/>
-          <p:nvPr/>
-        </p:nvSpPr>
-        <p:spPr>
-          <a:xfrm>
-            <a:off x="6316159" y="2883916"/>
-            <a:ext cx="940342" cy="182880"/>
-          </a:xfrm>
-          <a:prstGeom prst="rect">
-            <a:avLst/>
-          </a:prstGeom>
-          <a:noFill/>
-          <a:ln/>
-        </p:spPr>
-        <p:txBody>
-          <a:bodyPr wrap="square" lIns="0" tIns="0" rIns="0" bIns="0" rtlCol="0" anchor="ctr"/>
-          <a:lstStyle/>
-          <a:p>
-            <a:pPr algn="ctr" indent="0" marL="0">
-              <a:buNone/>
-            </a:pPr>
-            <a:r>
-              <a:rPr lang="en-US" sz="800" b="1" spc="150" kern="0" dirty="0">
-                <a:solidFill>
-                  <a:srgbClr val="6B7280"/>
+              <a:rPr lang="en-US" sz="800" b="1" dirty="0">
+                <a:solidFill>
+                  <a:srgbClr val="1A1A1A"/>
                 </a:solidFill>
                 <a:latin typeface="Roboto" pitchFamily="34" charset="0"/>
                 <a:ea typeface="Roboto" pitchFamily="34" charset="-122"/>
@@ -3267,7 +3531,7 @@
         <p:spPr>
           <a:xfrm>
             <a:off x="676656" y="3112516"/>
-            <a:ext cx="542260" cy="196596"/>
+            <a:ext cx="674954" cy="196596"/>
           </a:xfrm>
           <a:prstGeom prst="rect">
             <a:avLst/>
@@ -3305,7 +3569,85 @@
         </p:nvSpPr>
         <p:spPr>
           <a:xfrm>
-            <a:off x="1273780" y="3112516"/>
+            <a:off x="1406474" y="3112516"/>
+            <a:ext cx="741301" cy="196596"/>
+          </a:xfrm>
+          <a:prstGeom prst="rect">
+            <a:avLst/>
+          </a:prstGeom>
+          <a:noFill/>
+          <a:ln/>
+        </p:spPr>
+        <p:txBody>
+          <a:bodyPr wrap="square" lIns="0" tIns="0" rIns="0" bIns="0" rtlCol="0" anchor="ctr"/>
+          <a:lstStyle/>
+          <a:p>
+            <a:pPr algn="ctr" indent="0" marL="0">
+              <a:buNone/>
+            </a:pPr>
+            <a:r>
+              <a:rPr lang="en-US" sz="800" dirty="0">
+                <a:solidFill>
+                  <a:srgbClr val="2E3440"/>
+                </a:solidFill>
+                <a:latin typeface="Roboto" pitchFamily="34" charset="0"/>
+                <a:ea typeface="Roboto" pitchFamily="34" charset="-122"/>
+                <a:cs typeface="Roboto" pitchFamily="34" charset="-120"/>
+              </a:rPr>
+              <a:t>2 (1,8+0)</a:t>
+            </a:r>
+            <a:endParaRPr lang="en-US" sz="800" dirty="0"/>
+          </a:p>
+        </p:txBody>
+      </p:sp>
+      <p:sp>
+        <p:nvSpPr>
+          <p:cNvPr id="48" name="Text 40"/>
+          <p:cNvSpPr/>
+          <p:nvPr/>
+        </p:nvSpPr>
+        <p:spPr>
+          <a:xfrm>
+            <a:off x="2202639" y="3112516"/>
+            <a:ext cx="940342" cy="196596"/>
+          </a:xfrm>
+          <a:prstGeom prst="rect">
+            <a:avLst/>
+          </a:prstGeom>
+          <a:noFill/>
+          <a:ln/>
+        </p:spPr>
+        <p:txBody>
+          <a:bodyPr wrap="square" lIns="0" tIns="0" rIns="0" bIns="0" rtlCol="0" anchor="ctr"/>
+          <a:lstStyle/>
+          <a:p>
+            <a:pPr algn="ctr" indent="0" marL="0">
+              <a:buNone/>
+            </a:pPr>
+            <a:r>
+              <a:rPr lang="en-US" sz="800" dirty="0">
+                <a:solidFill>
+                  <a:srgbClr val="2E3440"/>
+                </a:solidFill>
+                <a:latin typeface="Roboto" pitchFamily="34" charset="0"/>
+                <a:ea typeface="Roboto" pitchFamily="34" charset="-122"/>
+                <a:cs typeface="Roboto" pitchFamily="34" charset="-120"/>
+              </a:rPr>
+              <a:t>4 (4,0+0)</a:t>
+            </a:r>
+            <a:endParaRPr lang="en-US" sz="800" dirty="0"/>
+          </a:p>
+        </p:txBody>
+      </p:sp>
+      <p:sp>
+        <p:nvSpPr>
+          <p:cNvPr id="49" name="Text 41"/>
+          <p:cNvSpPr/>
+          <p:nvPr/>
+        </p:nvSpPr>
+        <p:spPr>
+          <a:xfrm>
+            <a:off x="3197846" y="3112516"/>
             <a:ext cx="807648" cy="196596"/>
           </a:xfrm>
           <a:prstGeom prst="rect">
@@ -3330,21 +3672,21 @@
                 <a:ea typeface="Roboto" pitchFamily="34" charset="-122"/>
                 <a:cs typeface="Roboto" pitchFamily="34" charset="-120"/>
               </a:rPr>
-              <a:t>2 (1,8+0)</a:t>
-            </a:r>
-            <a:endParaRPr lang="en-US" sz="800" dirty="0"/>
-          </a:p>
-        </p:txBody>
-      </p:sp>
-      <p:sp>
-        <p:nvSpPr>
-          <p:cNvPr id="48" name="Text 40"/>
-          <p:cNvSpPr/>
-          <p:nvPr/>
-        </p:nvSpPr>
-        <p:spPr>
-          <a:xfrm>
-            <a:off x="2136292" y="3112516"/>
+              <a:t>1 (1,0+0)</a:t>
+            </a:r>
+            <a:endParaRPr lang="en-US" sz="800" dirty="0"/>
+          </a:p>
+        </p:txBody>
+      </p:sp>
+      <p:sp>
+        <p:nvSpPr>
+          <p:cNvPr id="50" name="Text 42"/>
+          <p:cNvSpPr/>
+          <p:nvPr/>
+        </p:nvSpPr>
+        <p:spPr>
+          <a:xfrm>
+            <a:off x="4060358" y="3112516"/>
             <a:ext cx="940342" cy="196596"/>
           </a:xfrm>
           <a:prstGeom prst="rect">
@@ -3369,22 +3711,22 @@
                 <a:ea typeface="Roboto" pitchFamily="34" charset="-122"/>
                 <a:cs typeface="Roboto" pitchFamily="34" charset="-120"/>
               </a:rPr>
-              <a:t>4 (4,0+0)</a:t>
-            </a:r>
-            <a:endParaRPr lang="en-US" sz="800" dirty="0"/>
-          </a:p>
-        </p:txBody>
-      </p:sp>
-      <p:sp>
-        <p:nvSpPr>
-          <p:cNvPr id="49" name="Text 41"/>
-          <p:cNvSpPr/>
-          <p:nvPr/>
-        </p:nvSpPr>
-        <p:spPr>
-          <a:xfrm>
-            <a:off x="3131498" y="3112516"/>
-            <a:ext cx="807648" cy="196596"/>
+              <a:t>2 (0+1,6)</a:t>
+            </a:r>
+            <a:endParaRPr lang="en-US" sz="800" dirty="0"/>
+          </a:p>
+        </p:txBody>
+      </p:sp>
+      <p:sp>
+        <p:nvSpPr>
+          <p:cNvPr id="51" name="Text 43"/>
+          <p:cNvSpPr/>
+          <p:nvPr/>
+        </p:nvSpPr>
+        <p:spPr>
+          <a:xfrm>
+            <a:off x="5055564" y="3112516"/>
+            <a:ext cx="1272078" cy="196596"/>
           </a:xfrm>
           <a:prstGeom prst="rect">
             <a:avLst/>
@@ -3408,84 +3750,6 @@
                 <a:ea typeface="Roboto" pitchFamily="34" charset="-122"/>
                 <a:cs typeface="Roboto" pitchFamily="34" charset="-120"/>
               </a:rPr>
-              <a:t>1 (1,0+0)</a:t>
-            </a:r>
-            <a:endParaRPr lang="en-US" sz="800" dirty="0"/>
-          </a:p>
-        </p:txBody>
-      </p:sp>
-      <p:sp>
-        <p:nvSpPr>
-          <p:cNvPr id="50" name="Text 42"/>
-          <p:cNvSpPr/>
-          <p:nvPr/>
-        </p:nvSpPr>
-        <p:spPr>
-          <a:xfrm>
-            <a:off x="3994011" y="3112516"/>
-            <a:ext cx="940342" cy="196596"/>
-          </a:xfrm>
-          <a:prstGeom prst="rect">
-            <a:avLst/>
-          </a:prstGeom>
-          <a:noFill/>
-          <a:ln/>
-        </p:spPr>
-        <p:txBody>
-          <a:bodyPr wrap="square" lIns="0" tIns="0" rIns="0" bIns="0" rtlCol="0" anchor="ctr"/>
-          <a:lstStyle/>
-          <a:p>
-            <a:pPr algn="ctr" indent="0" marL="0">
-              <a:buNone/>
-            </a:pPr>
-            <a:r>
-              <a:rPr lang="en-US" sz="800" dirty="0">
-                <a:solidFill>
-                  <a:srgbClr val="2E3440"/>
-                </a:solidFill>
-                <a:latin typeface="Roboto" pitchFamily="34" charset="0"/>
-                <a:ea typeface="Roboto" pitchFamily="34" charset="-122"/>
-                <a:cs typeface="Roboto" pitchFamily="34" charset="-120"/>
-              </a:rPr>
-              <a:t>2 (0+1,6)</a:t>
-            </a:r>
-            <a:endParaRPr lang="en-US" sz="800" dirty="0"/>
-          </a:p>
-        </p:txBody>
-      </p:sp>
-      <p:sp>
-        <p:nvSpPr>
-          <p:cNvPr id="51" name="Text 43"/>
-          <p:cNvSpPr/>
-          <p:nvPr/>
-        </p:nvSpPr>
-        <p:spPr>
-          <a:xfrm>
-            <a:off x="4989217" y="3112516"/>
-            <a:ext cx="1272078" cy="196596"/>
-          </a:xfrm>
-          <a:prstGeom prst="rect">
-            <a:avLst/>
-          </a:prstGeom>
-          <a:noFill/>
-          <a:ln/>
-        </p:spPr>
-        <p:txBody>
-          <a:bodyPr wrap="square" lIns="0" tIns="0" rIns="0" bIns="0" rtlCol="0" anchor="ctr"/>
-          <a:lstStyle/>
-          <a:p>
-            <a:pPr algn="ctr" indent="0" marL="0">
-              <a:buNone/>
-            </a:pPr>
-            <a:r>
-              <a:rPr lang="en-US" sz="800" dirty="0">
-                <a:solidFill>
-                  <a:srgbClr val="2E3440"/>
-                </a:solidFill>
-                <a:latin typeface="Roboto" pitchFamily="34" charset="0"/>
-                <a:ea typeface="Roboto" pitchFamily="34" charset="-122"/>
-                <a:cs typeface="Roboto" pitchFamily="34" charset="-120"/>
-              </a:rPr>
               <a:t>0</a:t>
             </a:r>
             <a:endParaRPr lang="en-US" sz="800" dirty="0"/>
@@ -3500,8 +3764,8 @@
         </p:nvSpPr>
         <p:spPr>
           <a:xfrm>
-            <a:off x="6316159" y="3112516"/>
-            <a:ext cx="940342" cy="196596"/>
+            <a:off x="6382506" y="3112516"/>
+            <a:ext cx="873995" cy="196596"/>
           </a:xfrm>
           <a:prstGeom prst="rect">
             <a:avLst/>
@@ -3563,7 +3827,7 @@
         <p:spPr>
           <a:xfrm>
             <a:off x="676656" y="3309112"/>
-            <a:ext cx="542260" cy="196596"/>
+            <a:ext cx="674954" cy="196596"/>
           </a:xfrm>
           <a:prstGeom prst="rect">
             <a:avLst/>
@@ -3601,7 +3865,85 @@
         </p:nvSpPr>
         <p:spPr>
           <a:xfrm>
-            <a:off x="1273780" y="3309112"/>
+            <a:off x="1406474" y="3309112"/>
+            <a:ext cx="741301" cy="196596"/>
+          </a:xfrm>
+          <a:prstGeom prst="rect">
+            <a:avLst/>
+          </a:prstGeom>
+          <a:noFill/>
+          <a:ln/>
+        </p:spPr>
+        <p:txBody>
+          <a:bodyPr wrap="square" lIns="0" tIns="0" rIns="0" bIns="0" rtlCol="0" anchor="ctr"/>
+          <a:lstStyle/>
+          <a:p>
+            <a:pPr algn="ctr" indent="0" marL="0">
+              <a:buNone/>
+            </a:pPr>
+            <a:r>
+              <a:rPr lang="en-US" sz="800" dirty="0">
+                <a:solidFill>
+                  <a:srgbClr val="2E3440"/>
+                </a:solidFill>
+                <a:latin typeface="Roboto" pitchFamily="34" charset="0"/>
+                <a:ea typeface="Roboto" pitchFamily="34" charset="-122"/>
+                <a:cs typeface="Roboto" pitchFamily="34" charset="-120"/>
+              </a:rPr>
+              <a:t>1 (1,0+0)</a:t>
+            </a:r>
+            <a:endParaRPr lang="en-US" sz="800" dirty="0"/>
+          </a:p>
+        </p:txBody>
+      </p:sp>
+      <p:sp>
+        <p:nvSpPr>
+          <p:cNvPr id="56" name="Text 48"/>
+          <p:cNvSpPr/>
+          <p:nvPr/>
+        </p:nvSpPr>
+        <p:spPr>
+          <a:xfrm>
+            <a:off x="2202639" y="3309112"/>
+            <a:ext cx="940342" cy="196596"/>
+          </a:xfrm>
+          <a:prstGeom prst="rect">
+            <a:avLst/>
+          </a:prstGeom>
+          <a:noFill/>
+          <a:ln/>
+        </p:spPr>
+        <p:txBody>
+          <a:bodyPr wrap="square" lIns="0" tIns="0" rIns="0" bIns="0" rtlCol="0" anchor="ctr"/>
+          <a:lstStyle/>
+          <a:p>
+            <a:pPr algn="ctr" indent="0" marL="0">
+              <a:buNone/>
+            </a:pPr>
+            <a:r>
+              <a:rPr lang="en-US" sz="800" dirty="0">
+                <a:solidFill>
+                  <a:srgbClr val="2E3440"/>
+                </a:solidFill>
+                <a:latin typeface="Roboto" pitchFamily="34" charset="0"/>
+                <a:ea typeface="Roboto" pitchFamily="34" charset="-122"/>
+                <a:cs typeface="Roboto" pitchFamily="34" charset="-120"/>
+              </a:rPr>
+              <a:t>2 (2,0+0)</a:t>
+            </a:r>
+            <a:endParaRPr lang="en-US" sz="800" dirty="0"/>
+          </a:p>
+        </p:txBody>
+      </p:sp>
+      <p:sp>
+        <p:nvSpPr>
+          <p:cNvPr id="57" name="Text 49"/>
+          <p:cNvSpPr/>
+          <p:nvPr/>
+        </p:nvSpPr>
+        <p:spPr>
+          <a:xfrm>
+            <a:off x="3197846" y="3309112"/>
             <a:ext cx="807648" cy="196596"/>
           </a:xfrm>
           <a:prstGeom prst="rect">
@@ -3634,13 +3976,13 @@
       </p:sp>
       <p:sp>
         <p:nvSpPr>
-          <p:cNvPr id="56" name="Text 48"/>
-          <p:cNvSpPr/>
-          <p:nvPr/>
-        </p:nvSpPr>
-        <p:spPr>
-          <a:xfrm>
-            <a:off x="2136292" y="3309112"/>
+          <p:cNvPr id="58" name="Text 50"/>
+          <p:cNvSpPr/>
+          <p:nvPr/>
+        </p:nvSpPr>
+        <p:spPr>
+          <a:xfrm>
+            <a:off x="4060358" y="3309112"/>
             <a:ext cx="940342" cy="196596"/>
           </a:xfrm>
           <a:prstGeom prst="rect">
@@ -3665,22 +4007,22 @@
                 <a:ea typeface="Roboto" pitchFamily="34" charset="-122"/>
                 <a:cs typeface="Roboto" pitchFamily="34" charset="-120"/>
               </a:rPr>
-              <a:t>2 (2,0+0)</a:t>
-            </a:r>
-            <a:endParaRPr lang="en-US" sz="800" dirty="0"/>
-          </a:p>
-        </p:txBody>
-      </p:sp>
-      <p:sp>
-        <p:nvSpPr>
-          <p:cNvPr id="57" name="Text 49"/>
-          <p:cNvSpPr/>
-          <p:nvPr/>
-        </p:nvSpPr>
-        <p:spPr>
-          <a:xfrm>
-            <a:off x="3131498" y="3309112"/>
-            <a:ext cx="807648" cy="196596"/>
+              <a:t>3 (0,8+1,6)</a:t>
+            </a:r>
+            <a:endParaRPr lang="en-US" sz="800" dirty="0"/>
+          </a:p>
+        </p:txBody>
+      </p:sp>
+      <p:sp>
+        <p:nvSpPr>
+          <p:cNvPr id="59" name="Text 51"/>
+          <p:cNvSpPr/>
+          <p:nvPr/>
+        </p:nvSpPr>
+        <p:spPr>
+          <a:xfrm>
+            <a:off x="5055564" y="3309112"/>
+            <a:ext cx="1272078" cy="196596"/>
           </a:xfrm>
           <a:prstGeom prst="rect">
             <a:avLst/>
@@ -3704,84 +4046,6 @@
                 <a:ea typeface="Roboto" pitchFamily="34" charset="-122"/>
                 <a:cs typeface="Roboto" pitchFamily="34" charset="-120"/>
               </a:rPr>
-              <a:t>1 (1,0+0)</a:t>
-            </a:r>
-            <a:endParaRPr lang="en-US" sz="800" dirty="0"/>
-          </a:p>
-        </p:txBody>
-      </p:sp>
-      <p:sp>
-        <p:nvSpPr>
-          <p:cNvPr id="58" name="Text 50"/>
-          <p:cNvSpPr/>
-          <p:nvPr/>
-        </p:nvSpPr>
-        <p:spPr>
-          <a:xfrm>
-            <a:off x="3994011" y="3309112"/>
-            <a:ext cx="940342" cy="196596"/>
-          </a:xfrm>
-          <a:prstGeom prst="rect">
-            <a:avLst/>
-          </a:prstGeom>
-          <a:noFill/>
-          <a:ln/>
-        </p:spPr>
-        <p:txBody>
-          <a:bodyPr wrap="square" lIns="0" tIns="0" rIns="0" bIns="0" rtlCol="0" anchor="ctr"/>
-          <a:lstStyle/>
-          <a:p>
-            <a:pPr algn="ctr" indent="0" marL="0">
-              <a:buNone/>
-            </a:pPr>
-            <a:r>
-              <a:rPr lang="en-US" sz="800" dirty="0">
-                <a:solidFill>
-                  <a:srgbClr val="2E3440"/>
-                </a:solidFill>
-                <a:latin typeface="Roboto" pitchFamily="34" charset="0"/>
-                <a:ea typeface="Roboto" pitchFamily="34" charset="-122"/>
-                <a:cs typeface="Roboto" pitchFamily="34" charset="-120"/>
-              </a:rPr>
-              <a:t>3 (0,8+1,6)</a:t>
-            </a:r>
-            <a:endParaRPr lang="en-US" sz="800" dirty="0"/>
-          </a:p>
-        </p:txBody>
-      </p:sp>
-      <p:sp>
-        <p:nvSpPr>
-          <p:cNvPr id="59" name="Text 51"/>
-          <p:cNvSpPr/>
-          <p:nvPr/>
-        </p:nvSpPr>
-        <p:spPr>
-          <a:xfrm>
-            <a:off x="4989217" y="3309112"/>
-            <a:ext cx="1272078" cy="196596"/>
-          </a:xfrm>
-          <a:prstGeom prst="rect">
-            <a:avLst/>
-          </a:prstGeom>
-          <a:noFill/>
-          <a:ln/>
-        </p:spPr>
-        <p:txBody>
-          <a:bodyPr wrap="square" lIns="0" tIns="0" rIns="0" bIns="0" rtlCol="0" anchor="ctr"/>
-          <a:lstStyle/>
-          <a:p>
-            <a:pPr algn="ctr" indent="0" marL="0">
-              <a:buNone/>
-            </a:pPr>
-            <a:r>
-              <a:rPr lang="en-US" sz="800" dirty="0">
-                <a:solidFill>
-                  <a:srgbClr val="2E3440"/>
-                </a:solidFill>
-                <a:latin typeface="Roboto" pitchFamily="34" charset="0"/>
-                <a:ea typeface="Roboto" pitchFamily="34" charset="-122"/>
-                <a:cs typeface="Roboto" pitchFamily="34" charset="-120"/>
-              </a:rPr>
               <a:t>0</a:t>
             </a:r>
             <a:endParaRPr lang="en-US" sz="800" dirty="0"/>
@@ -3796,8 +4060,8 @@
         </p:nvSpPr>
         <p:spPr>
           <a:xfrm>
-            <a:off x="6316159" y="3309112"/>
-            <a:ext cx="940342" cy="196596"/>
+            <a:off x="6382506" y="3309112"/>
+            <a:ext cx="873995" cy="196596"/>
           </a:xfrm>
           <a:prstGeom prst="rect">
             <a:avLst/>
@@ -3859,7 +4123,7 @@
         <p:spPr>
           <a:xfrm>
             <a:off x="676656" y="3505708"/>
-            <a:ext cx="542260" cy="196596"/>
+            <a:ext cx="674954" cy="196596"/>
           </a:xfrm>
           <a:prstGeom prst="rect">
             <a:avLst/>
@@ -3897,7 +4161,85 @@
         </p:nvSpPr>
         <p:spPr>
           <a:xfrm>
-            <a:off x="1273780" y="3505708"/>
+            <a:off x="1406474" y="3505708"/>
+            <a:ext cx="741301" cy="196596"/>
+          </a:xfrm>
+          <a:prstGeom prst="rect">
+            <a:avLst/>
+          </a:prstGeom>
+          <a:noFill/>
+          <a:ln/>
+        </p:spPr>
+        <p:txBody>
+          <a:bodyPr wrap="square" lIns="0" tIns="0" rIns="0" bIns="0" rtlCol="0" anchor="ctr"/>
+          <a:lstStyle/>
+          <a:p>
+            <a:pPr algn="ctr" indent="0" marL="0">
+              <a:buNone/>
+            </a:pPr>
+            <a:r>
+              <a:rPr lang="en-US" sz="800" dirty="0">
+                <a:solidFill>
+                  <a:srgbClr val="2E3440"/>
+                </a:solidFill>
+                <a:latin typeface="Roboto" pitchFamily="34" charset="0"/>
+                <a:ea typeface="Roboto" pitchFamily="34" charset="-122"/>
+                <a:cs typeface="Roboto" pitchFamily="34" charset="-120"/>
+              </a:rPr>
+              <a:t>1 (1,0+0)</a:t>
+            </a:r>
+            <a:endParaRPr lang="en-US" sz="800" dirty="0"/>
+          </a:p>
+        </p:txBody>
+      </p:sp>
+      <p:sp>
+        <p:nvSpPr>
+          <p:cNvPr id="64" name="Text 56"/>
+          <p:cNvSpPr/>
+          <p:nvPr/>
+        </p:nvSpPr>
+        <p:spPr>
+          <a:xfrm>
+            <a:off x="2202639" y="3505708"/>
+            <a:ext cx="940342" cy="196596"/>
+          </a:xfrm>
+          <a:prstGeom prst="rect">
+            <a:avLst/>
+          </a:prstGeom>
+          <a:noFill/>
+          <a:ln/>
+        </p:spPr>
+        <p:txBody>
+          <a:bodyPr wrap="square" lIns="0" tIns="0" rIns="0" bIns="0" rtlCol="0" anchor="ctr"/>
+          <a:lstStyle/>
+          <a:p>
+            <a:pPr algn="ctr" indent="0" marL="0">
+              <a:buNone/>
+            </a:pPr>
+            <a:r>
+              <a:rPr lang="en-US" sz="800" dirty="0">
+                <a:solidFill>
+                  <a:srgbClr val="2E3440"/>
+                </a:solidFill>
+                <a:latin typeface="Roboto" pitchFamily="34" charset="0"/>
+                <a:ea typeface="Roboto" pitchFamily="34" charset="-122"/>
+                <a:cs typeface="Roboto" pitchFamily="34" charset="-120"/>
+              </a:rPr>
+              <a:t>2 (2,0+0)</a:t>
+            </a:r>
+            <a:endParaRPr lang="en-US" sz="800" dirty="0"/>
+          </a:p>
+        </p:txBody>
+      </p:sp>
+      <p:sp>
+        <p:nvSpPr>
+          <p:cNvPr id="65" name="Text 57"/>
+          <p:cNvSpPr/>
+          <p:nvPr/>
+        </p:nvSpPr>
+        <p:spPr>
+          <a:xfrm>
+            <a:off x="3197846" y="3505708"/>
             <a:ext cx="807648" cy="196596"/>
           </a:xfrm>
           <a:prstGeom prst="rect">
@@ -3922,21 +4264,21 @@
                 <a:ea typeface="Roboto" pitchFamily="34" charset="-122"/>
                 <a:cs typeface="Roboto" pitchFamily="34" charset="-120"/>
               </a:rPr>
-              <a:t>1 (1,0+0)</a:t>
-            </a:r>
-            <a:endParaRPr lang="en-US" sz="800" dirty="0"/>
-          </a:p>
-        </p:txBody>
-      </p:sp>
-      <p:sp>
-        <p:nvSpPr>
-          <p:cNvPr id="64" name="Text 56"/>
-          <p:cNvSpPr/>
-          <p:nvPr/>
-        </p:nvSpPr>
-        <p:spPr>
-          <a:xfrm>
-            <a:off x="2136292" y="3505708"/>
+              <a:t>2 (2,0+0)</a:t>
+            </a:r>
+            <a:endParaRPr lang="en-US" sz="800" dirty="0"/>
+          </a:p>
+        </p:txBody>
+      </p:sp>
+      <p:sp>
+        <p:nvSpPr>
+          <p:cNvPr id="66" name="Text 58"/>
+          <p:cNvSpPr/>
+          <p:nvPr/>
+        </p:nvSpPr>
+        <p:spPr>
+          <a:xfrm>
+            <a:off x="4060358" y="3505708"/>
             <a:ext cx="940342" cy="196596"/>
           </a:xfrm>
           <a:prstGeom prst="rect">
@@ -3961,22 +4303,22 @@
                 <a:ea typeface="Roboto" pitchFamily="34" charset="-122"/>
                 <a:cs typeface="Roboto" pitchFamily="34" charset="-120"/>
               </a:rPr>
-              <a:t>2 (2,0+0)</a:t>
-            </a:r>
-            <a:endParaRPr lang="en-US" sz="800" dirty="0"/>
-          </a:p>
-        </p:txBody>
-      </p:sp>
-      <p:sp>
-        <p:nvSpPr>
-          <p:cNvPr id="65" name="Text 57"/>
-          <p:cNvSpPr/>
-          <p:nvPr/>
-        </p:nvSpPr>
-        <p:spPr>
-          <a:xfrm>
-            <a:off x="3131498" y="3505708"/>
-            <a:ext cx="807648" cy="196596"/>
+              <a:t>4 (0,8+2,4)</a:t>
+            </a:r>
+            <a:endParaRPr lang="en-US" sz="800" dirty="0"/>
+          </a:p>
+        </p:txBody>
+      </p:sp>
+      <p:sp>
+        <p:nvSpPr>
+          <p:cNvPr id="67" name="Text 59"/>
+          <p:cNvSpPr/>
+          <p:nvPr/>
+        </p:nvSpPr>
+        <p:spPr>
+          <a:xfrm>
+            <a:off x="5055564" y="3505708"/>
+            <a:ext cx="1272078" cy="196596"/>
           </a:xfrm>
           <a:prstGeom prst="rect">
             <a:avLst/>
@@ -4000,84 +4342,6 @@
                 <a:ea typeface="Roboto" pitchFamily="34" charset="-122"/>
                 <a:cs typeface="Roboto" pitchFamily="34" charset="-120"/>
               </a:rPr>
-              <a:t>2 (2,0+0)</a:t>
-            </a:r>
-            <a:endParaRPr lang="en-US" sz="800" dirty="0"/>
-          </a:p>
-        </p:txBody>
-      </p:sp>
-      <p:sp>
-        <p:nvSpPr>
-          <p:cNvPr id="66" name="Text 58"/>
-          <p:cNvSpPr/>
-          <p:nvPr/>
-        </p:nvSpPr>
-        <p:spPr>
-          <a:xfrm>
-            <a:off x="3994011" y="3505708"/>
-            <a:ext cx="940342" cy="196596"/>
-          </a:xfrm>
-          <a:prstGeom prst="rect">
-            <a:avLst/>
-          </a:prstGeom>
-          <a:noFill/>
-          <a:ln/>
-        </p:spPr>
-        <p:txBody>
-          <a:bodyPr wrap="square" lIns="0" tIns="0" rIns="0" bIns="0" rtlCol="0" anchor="ctr"/>
-          <a:lstStyle/>
-          <a:p>
-            <a:pPr algn="ctr" indent="0" marL="0">
-              <a:buNone/>
-            </a:pPr>
-            <a:r>
-              <a:rPr lang="en-US" sz="800" dirty="0">
-                <a:solidFill>
-                  <a:srgbClr val="2E3440"/>
-                </a:solidFill>
-                <a:latin typeface="Roboto" pitchFamily="34" charset="0"/>
-                <a:ea typeface="Roboto" pitchFamily="34" charset="-122"/>
-                <a:cs typeface="Roboto" pitchFamily="34" charset="-120"/>
-              </a:rPr>
-              <a:t>4 (0,8+2,4)</a:t>
-            </a:r>
-            <a:endParaRPr lang="en-US" sz="800" dirty="0"/>
-          </a:p>
-        </p:txBody>
-      </p:sp>
-      <p:sp>
-        <p:nvSpPr>
-          <p:cNvPr id="67" name="Text 59"/>
-          <p:cNvSpPr/>
-          <p:nvPr/>
-        </p:nvSpPr>
-        <p:spPr>
-          <a:xfrm>
-            <a:off x="4989217" y="3505708"/>
-            <a:ext cx="1272078" cy="196596"/>
-          </a:xfrm>
-          <a:prstGeom prst="rect">
-            <a:avLst/>
-          </a:prstGeom>
-          <a:noFill/>
-          <a:ln/>
-        </p:spPr>
-        <p:txBody>
-          <a:bodyPr wrap="square" lIns="0" tIns="0" rIns="0" bIns="0" rtlCol="0" anchor="ctr"/>
-          <a:lstStyle/>
-          <a:p>
-            <a:pPr algn="ctr" indent="0" marL="0">
-              <a:buNone/>
-            </a:pPr>
-            <a:r>
-              <a:rPr lang="en-US" sz="800" dirty="0">
-                <a:solidFill>
-                  <a:srgbClr val="2E3440"/>
-                </a:solidFill>
-                <a:latin typeface="Roboto" pitchFamily="34" charset="0"/>
-                <a:ea typeface="Roboto" pitchFamily="34" charset="-122"/>
-                <a:cs typeface="Roboto" pitchFamily="34" charset="-120"/>
-              </a:rPr>
               <a:t>0</a:t>
             </a:r>
             <a:endParaRPr lang="en-US" sz="800" dirty="0"/>
@@ -4092,8 +4356,8 @@
         </p:nvSpPr>
         <p:spPr>
           <a:xfrm>
-            <a:off x="6316159" y="3505708"/>
-            <a:ext cx="940342" cy="196596"/>
+            <a:off x="6382506" y="3505708"/>
+            <a:ext cx="873995" cy="196596"/>
           </a:xfrm>
           <a:prstGeom prst="rect">
             <a:avLst/>
@@ -4155,7 +4419,7 @@
         <p:spPr>
           <a:xfrm>
             <a:off x="676656" y="3702304"/>
-            <a:ext cx="542260" cy="196596"/>
+            <a:ext cx="674954" cy="196596"/>
           </a:xfrm>
           <a:prstGeom prst="rect">
             <a:avLst/>
@@ -4193,7 +4457,85 @@
         </p:nvSpPr>
         <p:spPr>
           <a:xfrm>
-            <a:off x="1273780" y="3702304"/>
+            <a:off x="1406474" y="3702304"/>
+            <a:ext cx="741301" cy="196596"/>
+          </a:xfrm>
+          <a:prstGeom prst="rect">
+            <a:avLst/>
+          </a:prstGeom>
+          <a:noFill/>
+          <a:ln/>
+        </p:spPr>
+        <p:txBody>
+          <a:bodyPr wrap="square" lIns="0" tIns="0" rIns="0" bIns="0" rtlCol="0" anchor="ctr"/>
+          <a:lstStyle/>
+          <a:p>
+            <a:pPr algn="ctr" indent="0" marL="0">
+              <a:buNone/>
+            </a:pPr>
+            <a:r>
+              <a:rPr lang="en-US" sz="800" dirty="0">
+                <a:solidFill>
+                  <a:srgbClr val="2E3440"/>
+                </a:solidFill>
+                <a:latin typeface="Roboto" pitchFamily="34" charset="0"/>
+                <a:ea typeface="Roboto" pitchFamily="34" charset="-122"/>
+                <a:cs typeface="Roboto" pitchFamily="34" charset="-120"/>
+              </a:rPr>
+              <a:t>2 (1,8+0)</a:t>
+            </a:r>
+            <a:endParaRPr lang="en-US" sz="800" dirty="0"/>
+          </a:p>
+        </p:txBody>
+      </p:sp>
+      <p:sp>
+        <p:nvSpPr>
+          <p:cNvPr id="72" name="Text 64"/>
+          <p:cNvSpPr/>
+          <p:nvPr/>
+        </p:nvSpPr>
+        <p:spPr>
+          <a:xfrm>
+            <a:off x="2202639" y="3702304"/>
+            <a:ext cx="940342" cy="196596"/>
+          </a:xfrm>
+          <a:prstGeom prst="rect">
+            <a:avLst/>
+          </a:prstGeom>
+          <a:noFill/>
+          <a:ln/>
+        </p:spPr>
+        <p:txBody>
+          <a:bodyPr wrap="square" lIns="0" tIns="0" rIns="0" bIns="0" rtlCol="0" anchor="ctr"/>
+          <a:lstStyle/>
+          <a:p>
+            <a:pPr algn="ctr" indent="0" marL="0">
+              <a:buNone/>
+            </a:pPr>
+            <a:r>
+              <a:rPr lang="en-US" sz="800" dirty="0">
+                <a:solidFill>
+                  <a:srgbClr val="2E3440"/>
+                </a:solidFill>
+                <a:latin typeface="Roboto" pitchFamily="34" charset="0"/>
+                <a:ea typeface="Roboto" pitchFamily="34" charset="-122"/>
+                <a:cs typeface="Roboto" pitchFamily="34" charset="-120"/>
+              </a:rPr>
+              <a:t>5 (3,8+0,8)</a:t>
+            </a:r>
+            <a:endParaRPr lang="en-US" sz="800" dirty="0"/>
+          </a:p>
+        </p:txBody>
+      </p:sp>
+      <p:sp>
+        <p:nvSpPr>
+          <p:cNvPr id="73" name="Text 65"/>
+          <p:cNvSpPr/>
+          <p:nvPr/>
+        </p:nvSpPr>
+        <p:spPr>
+          <a:xfrm>
+            <a:off x="3197846" y="3702304"/>
             <a:ext cx="807648" cy="196596"/>
           </a:xfrm>
           <a:prstGeom prst="rect">
@@ -4218,21 +4560,21 @@
                 <a:ea typeface="Roboto" pitchFamily="34" charset="-122"/>
                 <a:cs typeface="Roboto" pitchFamily="34" charset="-120"/>
               </a:rPr>
-              <a:t>2 (1,8+0)</a:t>
-            </a:r>
-            <a:endParaRPr lang="en-US" sz="800" dirty="0"/>
-          </a:p>
-        </p:txBody>
-      </p:sp>
-      <p:sp>
-        <p:nvSpPr>
-          <p:cNvPr id="72" name="Text 64"/>
-          <p:cNvSpPr/>
-          <p:nvPr/>
-        </p:nvSpPr>
-        <p:spPr>
-          <a:xfrm>
-            <a:off x="2136292" y="3702304"/>
+              <a:t>1 (1,0+0)</a:t>
+            </a:r>
+            <a:endParaRPr lang="en-US" sz="800" dirty="0"/>
+          </a:p>
+        </p:txBody>
+      </p:sp>
+      <p:sp>
+        <p:nvSpPr>
+          <p:cNvPr id="74" name="Text 66"/>
+          <p:cNvSpPr/>
+          <p:nvPr/>
+        </p:nvSpPr>
+        <p:spPr>
+          <a:xfrm>
+            <a:off x="4060358" y="3702304"/>
             <a:ext cx="940342" cy="196596"/>
           </a:xfrm>
           <a:prstGeom prst="rect">
@@ -4257,22 +4599,22 @@
                 <a:ea typeface="Roboto" pitchFamily="34" charset="-122"/>
                 <a:cs typeface="Roboto" pitchFamily="34" charset="-120"/>
               </a:rPr>
-              <a:t>5 (3,8+0,8)</a:t>
-            </a:r>
-            <a:endParaRPr lang="en-US" sz="800" dirty="0"/>
-          </a:p>
-        </p:txBody>
-      </p:sp>
-      <p:sp>
-        <p:nvSpPr>
-          <p:cNvPr id="73" name="Text 65"/>
-          <p:cNvSpPr/>
-          <p:nvPr/>
-        </p:nvSpPr>
-        <p:spPr>
-          <a:xfrm>
-            <a:off x="3131498" y="3702304"/>
-            <a:ext cx="807648" cy="196596"/>
+              <a:t>3 (0,8+1,6)</a:t>
+            </a:r>
+            <a:endParaRPr lang="en-US" sz="800" dirty="0"/>
+          </a:p>
+        </p:txBody>
+      </p:sp>
+      <p:sp>
+        <p:nvSpPr>
+          <p:cNvPr id="75" name="Text 67"/>
+          <p:cNvSpPr/>
+          <p:nvPr/>
+        </p:nvSpPr>
+        <p:spPr>
+          <a:xfrm>
+            <a:off x="5055564" y="3702304"/>
+            <a:ext cx="1272078" cy="196596"/>
           </a:xfrm>
           <a:prstGeom prst="rect">
             <a:avLst/>
@@ -4296,84 +4638,6 @@
                 <a:ea typeface="Roboto" pitchFamily="34" charset="-122"/>
                 <a:cs typeface="Roboto" pitchFamily="34" charset="-120"/>
               </a:rPr>
-              <a:t>1 (1,0+0)</a:t>
-            </a:r>
-            <a:endParaRPr lang="en-US" sz="800" dirty="0"/>
-          </a:p>
-        </p:txBody>
-      </p:sp>
-      <p:sp>
-        <p:nvSpPr>
-          <p:cNvPr id="74" name="Text 66"/>
-          <p:cNvSpPr/>
-          <p:nvPr/>
-        </p:nvSpPr>
-        <p:spPr>
-          <a:xfrm>
-            <a:off x="3994011" y="3702304"/>
-            <a:ext cx="940342" cy="196596"/>
-          </a:xfrm>
-          <a:prstGeom prst="rect">
-            <a:avLst/>
-          </a:prstGeom>
-          <a:noFill/>
-          <a:ln/>
-        </p:spPr>
-        <p:txBody>
-          <a:bodyPr wrap="square" lIns="0" tIns="0" rIns="0" bIns="0" rtlCol="0" anchor="ctr"/>
-          <a:lstStyle/>
-          <a:p>
-            <a:pPr algn="ctr" indent="0" marL="0">
-              <a:buNone/>
-            </a:pPr>
-            <a:r>
-              <a:rPr lang="en-US" sz="800" dirty="0">
-                <a:solidFill>
-                  <a:srgbClr val="2E3440"/>
-                </a:solidFill>
-                <a:latin typeface="Roboto" pitchFamily="34" charset="0"/>
-                <a:ea typeface="Roboto" pitchFamily="34" charset="-122"/>
-                <a:cs typeface="Roboto" pitchFamily="34" charset="-120"/>
-              </a:rPr>
-              <a:t>3 (0,8+1,6)</a:t>
-            </a:r>
-            <a:endParaRPr lang="en-US" sz="800" dirty="0"/>
-          </a:p>
-        </p:txBody>
-      </p:sp>
-      <p:sp>
-        <p:nvSpPr>
-          <p:cNvPr id="75" name="Text 67"/>
-          <p:cNvSpPr/>
-          <p:nvPr/>
-        </p:nvSpPr>
-        <p:spPr>
-          <a:xfrm>
-            <a:off x="4989217" y="3702304"/>
-            <a:ext cx="1272078" cy="196596"/>
-          </a:xfrm>
-          <a:prstGeom prst="rect">
-            <a:avLst/>
-          </a:prstGeom>
-          <a:noFill/>
-          <a:ln/>
-        </p:spPr>
-        <p:txBody>
-          <a:bodyPr wrap="square" lIns="0" tIns="0" rIns="0" bIns="0" rtlCol="0" anchor="ctr"/>
-          <a:lstStyle/>
-          <a:p>
-            <a:pPr algn="ctr" indent="0" marL="0">
-              <a:buNone/>
-            </a:pPr>
-            <a:r>
-              <a:rPr lang="en-US" sz="800" dirty="0">
-                <a:solidFill>
-                  <a:srgbClr val="2E3440"/>
-                </a:solidFill>
-                <a:latin typeface="Roboto" pitchFamily="34" charset="0"/>
-                <a:ea typeface="Roboto" pitchFamily="34" charset="-122"/>
-                <a:cs typeface="Roboto" pitchFamily="34" charset="-120"/>
-              </a:rPr>
               <a:t>0</a:t>
             </a:r>
             <a:endParaRPr lang="en-US" sz="800" dirty="0"/>
@@ -4388,8 +4652,8 @@
         </p:nvSpPr>
         <p:spPr>
           <a:xfrm>
-            <a:off x="6316159" y="3702304"/>
-            <a:ext cx="940342" cy="196596"/>
+            <a:off x="6382506" y="3702304"/>
+            <a:ext cx="873995" cy="196596"/>
           </a:xfrm>
           <a:prstGeom prst="rect">
             <a:avLst/>
@@ -4451,7 +4715,7 @@
         <p:spPr>
           <a:xfrm>
             <a:off x="676656" y="3898900"/>
-            <a:ext cx="542260" cy="196596"/>
+            <a:ext cx="674954" cy="196596"/>
           </a:xfrm>
           <a:prstGeom prst="rect">
             <a:avLst/>
@@ -4489,7 +4753,85 @@
         </p:nvSpPr>
         <p:spPr>
           <a:xfrm>
-            <a:off x="1273780" y="3898900"/>
+            <a:off x="1406474" y="3898900"/>
+            <a:ext cx="741301" cy="196596"/>
+          </a:xfrm>
+          <a:prstGeom prst="rect">
+            <a:avLst/>
+          </a:prstGeom>
+          <a:noFill/>
+          <a:ln/>
+        </p:spPr>
+        <p:txBody>
+          <a:bodyPr wrap="square" lIns="0" tIns="0" rIns="0" bIns="0" rtlCol="0" anchor="ctr"/>
+          <a:lstStyle/>
+          <a:p>
+            <a:pPr algn="ctr" indent="0" marL="0">
+              <a:buNone/>
+            </a:pPr>
+            <a:r>
+              <a:rPr lang="en-US" sz="800" dirty="0">
+                <a:solidFill>
+                  <a:srgbClr val="2E3440"/>
+                </a:solidFill>
+                <a:latin typeface="Roboto" pitchFamily="34" charset="0"/>
+                <a:ea typeface="Roboto" pitchFamily="34" charset="-122"/>
+                <a:cs typeface="Roboto" pitchFamily="34" charset="-120"/>
+              </a:rPr>
+              <a:t>1 (1,0+0)</a:t>
+            </a:r>
+            <a:endParaRPr lang="en-US" sz="800" dirty="0"/>
+          </a:p>
+        </p:txBody>
+      </p:sp>
+      <p:sp>
+        <p:nvSpPr>
+          <p:cNvPr id="80" name="Text 72"/>
+          <p:cNvSpPr/>
+          <p:nvPr/>
+        </p:nvSpPr>
+        <p:spPr>
+          <a:xfrm>
+            <a:off x="2202639" y="3898900"/>
+            <a:ext cx="940342" cy="196596"/>
+          </a:xfrm>
+          <a:prstGeom prst="rect">
+            <a:avLst/>
+          </a:prstGeom>
+          <a:noFill/>
+          <a:ln/>
+        </p:spPr>
+        <p:txBody>
+          <a:bodyPr wrap="square" lIns="0" tIns="0" rIns="0" bIns="0" rtlCol="0" anchor="ctr"/>
+          <a:lstStyle/>
+          <a:p>
+            <a:pPr algn="ctr" indent="0" marL="0">
+              <a:buNone/>
+            </a:pPr>
+            <a:r>
+              <a:rPr lang="en-US" sz="800" dirty="0">
+                <a:solidFill>
+                  <a:srgbClr val="2E3440"/>
+                </a:solidFill>
+                <a:latin typeface="Roboto" pitchFamily="34" charset="0"/>
+                <a:ea typeface="Roboto" pitchFamily="34" charset="-122"/>
+                <a:cs typeface="Roboto" pitchFamily="34" charset="-120"/>
+              </a:rPr>
+              <a:t>6 (0,8+3,9)</a:t>
+            </a:r>
+            <a:endParaRPr lang="en-US" sz="800" dirty="0"/>
+          </a:p>
+        </p:txBody>
+      </p:sp>
+      <p:sp>
+        <p:nvSpPr>
+          <p:cNvPr id="81" name="Text 73"/>
+          <p:cNvSpPr/>
+          <p:nvPr/>
+        </p:nvSpPr>
+        <p:spPr>
+          <a:xfrm>
+            <a:off x="3197846" y="3898900"/>
             <a:ext cx="807648" cy="196596"/>
           </a:xfrm>
           <a:prstGeom prst="rect">
@@ -4514,21 +4856,21 @@
                 <a:ea typeface="Roboto" pitchFamily="34" charset="-122"/>
                 <a:cs typeface="Roboto" pitchFamily="34" charset="-120"/>
               </a:rPr>
-              <a:t>1 (1,0+0)</a:t>
-            </a:r>
-            <a:endParaRPr lang="en-US" sz="800" dirty="0"/>
-          </a:p>
-        </p:txBody>
-      </p:sp>
-      <p:sp>
-        <p:nvSpPr>
-          <p:cNvPr id="80" name="Text 72"/>
-          <p:cNvSpPr/>
-          <p:nvPr/>
-        </p:nvSpPr>
-        <p:spPr>
-          <a:xfrm>
-            <a:off x="2136292" y="3898900"/>
+              <a:t>0</a:t>
+            </a:r>
+            <a:endParaRPr lang="en-US" sz="800" dirty="0"/>
+          </a:p>
+        </p:txBody>
+      </p:sp>
+      <p:sp>
+        <p:nvSpPr>
+          <p:cNvPr id="82" name="Text 74"/>
+          <p:cNvSpPr/>
+          <p:nvPr/>
+        </p:nvSpPr>
+        <p:spPr>
+          <a:xfrm>
+            <a:off x="4060358" y="3898900"/>
             <a:ext cx="940342" cy="196596"/>
           </a:xfrm>
           <a:prstGeom prst="rect">
@@ -4553,22 +4895,22 @@
                 <a:ea typeface="Roboto" pitchFamily="34" charset="-122"/>
                 <a:cs typeface="Roboto" pitchFamily="34" charset="-120"/>
               </a:rPr>
-              <a:t>6 (0,8+3,9)</a:t>
-            </a:r>
-            <a:endParaRPr lang="en-US" sz="800" dirty="0"/>
-          </a:p>
-        </p:txBody>
-      </p:sp>
-      <p:sp>
-        <p:nvSpPr>
-          <p:cNvPr id="81" name="Text 73"/>
-          <p:cNvSpPr/>
-          <p:nvPr/>
-        </p:nvSpPr>
-        <p:spPr>
-          <a:xfrm>
-            <a:off x="3131498" y="3898900"/>
-            <a:ext cx="807648" cy="196596"/>
+              <a:t>1 (0+0,8)</a:t>
+            </a:r>
+            <a:endParaRPr lang="en-US" sz="800" dirty="0"/>
+          </a:p>
+        </p:txBody>
+      </p:sp>
+      <p:sp>
+        <p:nvSpPr>
+          <p:cNvPr id="83" name="Text 75"/>
+          <p:cNvSpPr/>
+          <p:nvPr/>
+        </p:nvSpPr>
+        <p:spPr>
+          <a:xfrm>
+            <a:off x="5055564" y="3898900"/>
+            <a:ext cx="1272078" cy="196596"/>
           </a:xfrm>
           <a:prstGeom prst="rect">
             <a:avLst/>
@@ -4600,92 +4942,14 @@
       </p:sp>
       <p:sp>
         <p:nvSpPr>
-          <p:cNvPr id="82" name="Text 74"/>
-          <p:cNvSpPr/>
-          <p:nvPr/>
-        </p:nvSpPr>
-        <p:spPr>
-          <a:xfrm>
-            <a:off x="3994011" y="3898900"/>
-            <a:ext cx="940342" cy="196596"/>
-          </a:xfrm>
-          <a:prstGeom prst="rect">
-            <a:avLst/>
-          </a:prstGeom>
-          <a:noFill/>
-          <a:ln/>
-        </p:spPr>
-        <p:txBody>
-          <a:bodyPr wrap="square" lIns="0" tIns="0" rIns="0" bIns="0" rtlCol="0" anchor="ctr"/>
-          <a:lstStyle/>
-          <a:p>
-            <a:pPr algn="ctr" indent="0" marL="0">
-              <a:buNone/>
-            </a:pPr>
-            <a:r>
-              <a:rPr lang="en-US" sz="800" dirty="0">
-                <a:solidFill>
-                  <a:srgbClr val="2E3440"/>
-                </a:solidFill>
-                <a:latin typeface="Roboto" pitchFamily="34" charset="0"/>
-                <a:ea typeface="Roboto" pitchFamily="34" charset="-122"/>
-                <a:cs typeface="Roboto" pitchFamily="34" charset="-120"/>
-              </a:rPr>
-              <a:t>1 (0+0,8)</a:t>
-            </a:r>
-            <a:endParaRPr lang="en-US" sz="800" dirty="0"/>
-          </a:p>
-        </p:txBody>
-      </p:sp>
-      <p:sp>
-        <p:nvSpPr>
-          <p:cNvPr id="83" name="Text 75"/>
-          <p:cNvSpPr/>
-          <p:nvPr/>
-        </p:nvSpPr>
-        <p:spPr>
-          <a:xfrm>
-            <a:off x="4989217" y="3898900"/>
-            <a:ext cx="1272078" cy="196596"/>
-          </a:xfrm>
-          <a:prstGeom prst="rect">
-            <a:avLst/>
-          </a:prstGeom>
-          <a:noFill/>
-          <a:ln/>
-        </p:spPr>
-        <p:txBody>
-          <a:bodyPr wrap="square" lIns="0" tIns="0" rIns="0" bIns="0" rtlCol="0" anchor="ctr"/>
-          <a:lstStyle/>
-          <a:p>
-            <a:pPr algn="ctr" indent="0" marL="0">
-              <a:buNone/>
-            </a:pPr>
-            <a:r>
-              <a:rPr lang="en-US" sz="800" dirty="0">
-                <a:solidFill>
-                  <a:srgbClr val="2E3440"/>
-                </a:solidFill>
-                <a:latin typeface="Roboto" pitchFamily="34" charset="0"/>
-                <a:ea typeface="Roboto" pitchFamily="34" charset="-122"/>
-                <a:cs typeface="Roboto" pitchFamily="34" charset="-120"/>
-              </a:rPr>
-              <a:t>0</a:t>
-            </a:r>
-            <a:endParaRPr lang="en-US" sz="800" dirty="0"/>
-          </a:p>
-        </p:txBody>
-      </p:sp>
-      <p:sp>
-        <p:nvSpPr>
           <p:cNvPr id="84" name="Text 76"/>
           <p:cNvSpPr/>
           <p:nvPr/>
         </p:nvSpPr>
         <p:spPr>
           <a:xfrm>
-            <a:off x="6316159" y="3898900"/>
-            <a:ext cx="940342" cy="196596"/>
+            <a:off x="6382506" y="3898900"/>
+            <a:ext cx="873995" cy="196596"/>
           </a:xfrm>
           <a:prstGeom prst="rect">
             <a:avLst/>
@@ -4747,7 +5011,7 @@
         <p:spPr>
           <a:xfrm>
             <a:off x="676656" y="4095496"/>
-            <a:ext cx="542260" cy="196596"/>
+            <a:ext cx="674954" cy="196596"/>
           </a:xfrm>
           <a:prstGeom prst="rect">
             <a:avLst/>
@@ -4785,7 +5049,85 @@
         </p:nvSpPr>
         <p:spPr>
           <a:xfrm>
-            <a:off x="1273780" y="4095496"/>
+            <a:off x="1406474" y="4095496"/>
+            <a:ext cx="741301" cy="196596"/>
+          </a:xfrm>
+          <a:prstGeom prst="rect">
+            <a:avLst/>
+          </a:prstGeom>
+          <a:noFill/>
+          <a:ln/>
+        </p:spPr>
+        <p:txBody>
+          <a:bodyPr wrap="square" lIns="0" tIns="0" rIns="0" bIns="0" rtlCol="0" anchor="ctr"/>
+          <a:lstStyle/>
+          <a:p>
+            <a:pPr algn="ctr" indent="0" marL="0">
+              <a:buNone/>
+            </a:pPr>
+            <a:r>
+              <a:rPr lang="en-US" sz="800" dirty="0">
+                <a:solidFill>
+                  <a:srgbClr val="2E3440"/>
+                </a:solidFill>
+                <a:latin typeface="Roboto" pitchFamily="34" charset="0"/>
+                <a:ea typeface="Roboto" pitchFamily="34" charset="-122"/>
+                <a:cs typeface="Roboto" pitchFamily="34" charset="-120"/>
+              </a:rPr>
+              <a:t>2 (1,8+0)</a:t>
+            </a:r>
+            <a:endParaRPr lang="en-US" sz="800" dirty="0"/>
+          </a:p>
+        </p:txBody>
+      </p:sp>
+      <p:sp>
+        <p:nvSpPr>
+          <p:cNvPr id="88" name="Text 80"/>
+          <p:cNvSpPr/>
+          <p:nvPr/>
+        </p:nvSpPr>
+        <p:spPr>
+          <a:xfrm>
+            <a:off x="2202639" y="4095496"/>
+            <a:ext cx="940342" cy="196596"/>
+          </a:xfrm>
+          <a:prstGeom prst="rect">
+            <a:avLst/>
+          </a:prstGeom>
+          <a:noFill/>
+          <a:ln/>
+        </p:spPr>
+        <p:txBody>
+          <a:bodyPr wrap="square" lIns="0" tIns="0" rIns="0" bIns="0" rtlCol="0" anchor="ctr"/>
+          <a:lstStyle/>
+          <a:p>
+            <a:pPr algn="ctr" indent="0" marL="0">
+              <a:buNone/>
+            </a:pPr>
+            <a:r>
+              <a:rPr lang="en-US" sz="800" dirty="0">
+                <a:solidFill>
+                  <a:srgbClr val="2E3440"/>
+                </a:solidFill>
+                <a:latin typeface="Roboto" pitchFamily="34" charset="0"/>
+                <a:ea typeface="Roboto" pitchFamily="34" charset="-122"/>
+                <a:cs typeface="Roboto" pitchFamily="34" charset="-120"/>
+              </a:rPr>
+              <a:t>9 (3,8+4,4)</a:t>
+            </a:r>
+            <a:endParaRPr lang="en-US" sz="800" dirty="0"/>
+          </a:p>
+        </p:txBody>
+      </p:sp>
+      <p:sp>
+        <p:nvSpPr>
+          <p:cNvPr id="89" name="Text 81"/>
+          <p:cNvSpPr/>
+          <p:nvPr/>
+        </p:nvSpPr>
+        <p:spPr>
+          <a:xfrm>
+            <a:off x="3197846" y="4095496"/>
             <a:ext cx="807648" cy="196596"/>
           </a:xfrm>
           <a:prstGeom prst="rect">
@@ -4810,21 +5152,21 @@
                 <a:ea typeface="Roboto" pitchFamily="34" charset="-122"/>
                 <a:cs typeface="Roboto" pitchFamily="34" charset="-120"/>
               </a:rPr>
-              <a:t>2 (1,8+0)</a:t>
-            </a:r>
-            <a:endParaRPr lang="en-US" sz="800" dirty="0"/>
-          </a:p>
-        </p:txBody>
-      </p:sp>
-      <p:sp>
-        <p:nvSpPr>
-          <p:cNvPr id="88" name="Text 80"/>
-          <p:cNvSpPr/>
-          <p:nvPr/>
-        </p:nvSpPr>
-        <p:spPr>
-          <a:xfrm>
-            <a:off x="2136292" y="4095496"/>
+              <a:t>1 (1,0+0)</a:t>
+            </a:r>
+            <a:endParaRPr lang="en-US" sz="800" dirty="0"/>
+          </a:p>
+        </p:txBody>
+      </p:sp>
+      <p:sp>
+        <p:nvSpPr>
+          <p:cNvPr id="90" name="Text 82"/>
+          <p:cNvSpPr/>
+          <p:nvPr/>
+        </p:nvSpPr>
+        <p:spPr>
+          <a:xfrm>
+            <a:off x="4060358" y="4095496"/>
             <a:ext cx="940342" cy="196596"/>
           </a:xfrm>
           <a:prstGeom prst="rect">
@@ -4849,22 +5191,22 @@
                 <a:ea typeface="Roboto" pitchFamily="34" charset="-122"/>
                 <a:cs typeface="Roboto" pitchFamily="34" charset="-120"/>
               </a:rPr>
-              <a:t>9 (3,8+4,4)</a:t>
-            </a:r>
-            <a:endParaRPr lang="en-US" sz="800" dirty="0"/>
-          </a:p>
-        </p:txBody>
-      </p:sp>
-      <p:sp>
-        <p:nvSpPr>
-          <p:cNvPr id="89" name="Text 81"/>
-          <p:cNvSpPr/>
-          <p:nvPr/>
-        </p:nvSpPr>
-        <p:spPr>
-          <a:xfrm>
-            <a:off x="3131498" y="4095496"/>
-            <a:ext cx="807648" cy="196596"/>
+              <a:t>6 (0,8+4,0)</a:t>
+            </a:r>
+            <a:endParaRPr lang="en-US" sz="800" dirty="0"/>
+          </a:p>
+        </p:txBody>
+      </p:sp>
+      <p:sp>
+        <p:nvSpPr>
+          <p:cNvPr id="91" name="Text 83"/>
+          <p:cNvSpPr/>
+          <p:nvPr/>
+        </p:nvSpPr>
+        <p:spPr>
+          <a:xfrm>
+            <a:off x="5055564" y="4095496"/>
+            <a:ext cx="1272078" cy="196596"/>
           </a:xfrm>
           <a:prstGeom prst="rect">
             <a:avLst/>
@@ -4888,84 +5230,6 @@
                 <a:ea typeface="Roboto" pitchFamily="34" charset="-122"/>
                 <a:cs typeface="Roboto" pitchFamily="34" charset="-120"/>
               </a:rPr>
-              <a:t>1 (1,0+0)</a:t>
-            </a:r>
-            <a:endParaRPr lang="en-US" sz="800" dirty="0"/>
-          </a:p>
-        </p:txBody>
-      </p:sp>
-      <p:sp>
-        <p:nvSpPr>
-          <p:cNvPr id="90" name="Text 82"/>
-          <p:cNvSpPr/>
-          <p:nvPr/>
-        </p:nvSpPr>
-        <p:spPr>
-          <a:xfrm>
-            <a:off x="3994011" y="4095496"/>
-            <a:ext cx="940342" cy="196596"/>
-          </a:xfrm>
-          <a:prstGeom prst="rect">
-            <a:avLst/>
-          </a:prstGeom>
-          <a:noFill/>
-          <a:ln/>
-        </p:spPr>
-        <p:txBody>
-          <a:bodyPr wrap="square" lIns="0" tIns="0" rIns="0" bIns="0" rtlCol="0" anchor="ctr"/>
-          <a:lstStyle/>
-          <a:p>
-            <a:pPr algn="ctr" indent="0" marL="0">
-              <a:buNone/>
-            </a:pPr>
-            <a:r>
-              <a:rPr lang="en-US" sz="800" dirty="0">
-                <a:solidFill>
-                  <a:srgbClr val="2E3440"/>
-                </a:solidFill>
-                <a:latin typeface="Roboto" pitchFamily="34" charset="0"/>
-                <a:ea typeface="Roboto" pitchFamily="34" charset="-122"/>
-                <a:cs typeface="Roboto" pitchFamily="34" charset="-120"/>
-              </a:rPr>
-              <a:t>6 (0,8+4,0)</a:t>
-            </a:r>
-            <a:endParaRPr lang="en-US" sz="800" dirty="0"/>
-          </a:p>
-        </p:txBody>
-      </p:sp>
-      <p:sp>
-        <p:nvSpPr>
-          <p:cNvPr id="91" name="Text 83"/>
-          <p:cNvSpPr/>
-          <p:nvPr/>
-        </p:nvSpPr>
-        <p:spPr>
-          <a:xfrm>
-            <a:off x="4989217" y="4095496"/>
-            <a:ext cx="1272078" cy="196596"/>
-          </a:xfrm>
-          <a:prstGeom prst="rect">
-            <a:avLst/>
-          </a:prstGeom>
-          <a:noFill/>
-          <a:ln/>
-        </p:spPr>
-        <p:txBody>
-          <a:bodyPr wrap="square" lIns="0" tIns="0" rIns="0" bIns="0" rtlCol="0" anchor="ctr"/>
-          <a:lstStyle/>
-          <a:p>
-            <a:pPr algn="ctr" indent="0" marL="0">
-              <a:buNone/>
-            </a:pPr>
-            <a:r>
-              <a:rPr lang="en-US" sz="800" dirty="0">
-                <a:solidFill>
-                  <a:srgbClr val="2E3440"/>
-                </a:solidFill>
-                <a:latin typeface="Roboto" pitchFamily="34" charset="0"/>
-                <a:ea typeface="Roboto" pitchFamily="34" charset="-122"/>
-                <a:cs typeface="Roboto" pitchFamily="34" charset="-120"/>
-              </a:rPr>
               <a:t>0</a:t>
             </a:r>
             <a:endParaRPr lang="en-US" sz="800" dirty="0"/>
@@ -4980,8 +5244,8 @@
         </p:nvSpPr>
         <p:spPr>
           <a:xfrm>
-            <a:off x="6316159" y="4095496"/>
-            <a:ext cx="940342" cy="196596"/>
+            <a:off x="6382506" y="4095496"/>
+            <a:ext cx="873995" cy="196596"/>
           </a:xfrm>
           <a:prstGeom prst="rect">
             <a:avLst/>
@@ -5043,7 +5307,7 @@
         <p:spPr>
           <a:xfrm>
             <a:off x="676656" y="4292092"/>
-            <a:ext cx="542260" cy="196596"/>
+            <a:ext cx="674954" cy="196596"/>
           </a:xfrm>
           <a:prstGeom prst="rect">
             <a:avLst/>
@@ -5081,7 +5345,85 @@
         </p:nvSpPr>
         <p:spPr>
           <a:xfrm>
-            <a:off x="1273780" y="4292092"/>
+            <a:off x="1406474" y="4292092"/>
+            <a:ext cx="741301" cy="196596"/>
+          </a:xfrm>
+          <a:prstGeom prst="rect">
+            <a:avLst/>
+          </a:prstGeom>
+          <a:noFill/>
+          <a:ln/>
+        </p:spPr>
+        <p:txBody>
+          <a:bodyPr wrap="square" lIns="0" tIns="0" rIns="0" bIns="0" rtlCol="0" anchor="ctr"/>
+          <a:lstStyle/>
+          <a:p>
+            <a:pPr algn="ctr" indent="0" marL="0">
+              <a:buNone/>
+            </a:pPr>
+            <a:r>
+              <a:rPr lang="en-US" sz="800" dirty="0">
+                <a:solidFill>
+                  <a:srgbClr val="2E3440"/>
+                </a:solidFill>
+                <a:latin typeface="Roboto" pitchFamily="34" charset="0"/>
+                <a:ea typeface="Roboto" pitchFamily="34" charset="-122"/>
+                <a:cs typeface="Roboto" pitchFamily="34" charset="-120"/>
+              </a:rPr>
+              <a:t>0</a:t>
+            </a:r>
+            <a:endParaRPr lang="en-US" sz="800" dirty="0"/>
+          </a:p>
+        </p:txBody>
+      </p:sp>
+      <p:sp>
+        <p:nvSpPr>
+          <p:cNvPr id="96" name="Text 88"/>
+          <p:cNvSpPr/>
+          <p:nvPr/>
+        </p:nvSpPr>
+        <p:spPr>
+          <a:xfrm>
+            <a:off x="2202639" y="4292092"/>
+            <a:ext cx="940342" cy="196596"/>
+          </a:xfrm>
+          <a:prstGeom prst="rect">
+            <a:avLst/>
+          </a:prstGeom>
+          <a:noFill/>
+          <a:ln/>
+        </p:spPr>
+        <p:txBody>
+          <a:bodyPr wrap="square" lIns="0" tIns="0" rIns="0" bIns="0" rtlCol="0" anchor="ctr"/>
+          <a:lstStyle/>
+          <a:p>
+            <a:pPr algn="ctr" indent="0" marL="0">
+              <a:buNone/>
+            </a:pPr>
+            <a:r>
+              <a:rPr lang="en-US" sz="800" dirty="0">
+                <a:solidFill>
+                  <a:srgbClr val="2E3440"/>
+                </a:solidFill>
+                <a:latin typeface="Roboto" pitchFamily="34" charset="0"/>
+                <a:ea typeface="Roboto" pitchFamily="34" charset="-122"/>
+                <a:cs typeface="Roboto" pitchFamily="34" charset="-120"/>
+              </a:rPr>
+              <a:t>7 (1,0+5,0)</a:t>
+            </a:r>
+            <a:endParaRPr lang="en-US" sz="800" dirty="0"/>
+          </a:p>
+        </p:txBody>
+      </p:sp>
+      <p:sp>
+        <p:nvSpPr>
+          <p:cNvPr id="97" name="Text 89"/>
+          <p:cNvSpPr/>
+          <p:nvPr/>
+        </p:nvSpPr>
+        <p:spPr>
+          <a:xfrm>
+            <a:off x="3197846" y="4292092"/>
             <a:ext cx="807648" cy="196596"/>
           </a:xfrm>
           <a:prstGeom prst="rect">
@@ -5114,13 +5456,13 @@
       </p:sp>
       <p:sp>
         <p:nvSpPr>
-          <p:cNvPr id="96" name="Text 88"/>
-          <p:cNvSpPr/>
-          <p:nvPr/>
-        </p:nvSpPr>
-        <p:spPr>
-          <a:xfrm>
-            <a:off x="2136292" y="4292092"/>
+          <p:cNvPr id="98" name="Text 90"/>
+          <p:cNvSpPr/>
+          <p:nvPr/>
+        </p:nvSpPr>
+        <p:spPr>
+          <a:xfrm>
+            <a:off x="4060358" y="4292092"/>
             <a:ext cx="940342" cy="196596"/>
           </a:xfrm>
           <a:prstGeom prst="rect">
@@ -5145,22 +5487,22 @@
                 <a:ea typeface="Roboto" pitchFamily="34" charset="-122"/>
                 <a:cs typeface="Roboto" pitchFamily="34" charset="-120"/>
               </a:rPr>
-              <a:t>7 (1,0+5,0)</a:t>
-            </a:r>
-            <a:endParaRPr lang="en-US" sz="800" dirty="0"/>
-          </a:p>
-        </p:txBody>
-      </p:sp>
-      <p:sp>
-        <p:nvSpPr>
-          <p:cNvPr id="97" name="Text 89"/>
-          <p:cNvSpPr/>
-          <p:nvPr/>
-        </p:nvSpPr>
-        <p:spPr>
-          <a:xfrm>
-            <a:off x="3131498" y="4292092"/>
-            <a:ext cx="807648" cy="196596"/>
+              <a:t>9 (1,8+5,8)</a:t>
+            </a:r>
+            <a:endParaRPr lang="en-US" sz="800" dirty="0"/>
+          </a:p>
+        </p:txBody>
+      </p:sp>
+      <p:sp>
+        <p:nvSpPr>
+          <p:cNvPr id="99" name="Text 91"/>
+          <p:cNvSpPr/>
+          <p:nvPr/>
+        </p:nvSpPr>
+        <p:spPr>
+          <a:xfrm>
+            <a:off x="5055564" y="4292092"/>
+            <a:ext cx="1272078" cy="196596"/>
           </a:xfrm>
           <a:prstGeom prst="rect">
             <a:avLst/>
@@ -5184,84 +5526,6 @@
                 <a:ea typeface="Roboto" pitchFamily="34" charset="-122"/>
                 <a:cs typeface="Roboto" pitchFamily="34" charset="-120"/>
               </a:rPr>
-              <a:t>0</a:t>
-            </a:r>
-            <a:endParaRPr lang="en-US" sz="800" dirty="0"/>
-          </a:p>
-        </p:txBody>
-      </p:sp>
-      <p:sp>
-        <p:nvSpPr>
-          <p:cNvPr id="98" name="Text 90"/>
-          <p:cNvSpPr/>
-          <p:nvPr/>
-        </p:nvSpPr>
-        <p:spPr>
-          <a:xfrm>
-            <a:off x="3994011" y="4292092"/>
-            <a:ext cx="940342" cy="196596"/>
-          </a:xfrm>
-          <a:prstGeom prst="rect">
-            <a:avLst/>
-          </a:prstGeom>
-          <a:noFill/>
-          <a:ln/>
-        </p:spPr>
-        <p:txBody>
-          <a:bodyPr wrap="square" lIns="0" tIns="0" rIns="0" bIns="0" rtlCol="0" anchor="ctr"/>
-          <a:lstStyle/>
-          <a:p>
-            <a:pPr algn="ctr" indent="0" marL="0">
-              <a:buNone/>
-            </a:pPr>
-            <a:r>
-              <a:rPr lang="en-US" sz="800" dirty="0">
-                <a:solidFill>
-                  <a:srgbClr val="2E3440"/>
-                </a:solidFill>
-                <a:latin typeface="Roboto" pitchFamily="34" charset="0"/>
-                <a:ea typeface="Roboto" pitchFamily="34" charset="-122"/>
-                <a:cs typeface="Roboto" pitchFamily="34" charset="-120"/>
-              </a:rPr>
-              <a:t>9 (1,8+5,8)</a:t>
-            </a:r>
-            <a:endParaRPr lang="en-US" sz="800" dirty="0"/>
-          </a:p>
-        </p:txBody>
-      </p:sp>
-      <p:sp>
-        <p:nvSpPr>
-          <p:cNvPr id="99" name="Text 91"/>
-          <p:cNvSpPr/>
-          <p:nvPr/>
-        </p:nvSpPr>
-        <p:spPr>
-          <a:xfrm>
-            <a:off x="4989217" y="4292092"/>
-            <a:ext cx="1272078" cy="196596"/>
-          </a:xfrm>
-          <a:prstGeom prst="rect">
-            <a:avLst/>
-          </a:prstGeom>
-          <a:noFill/>
-          <a:ln/>
-        </p:spPr>
-        <p:txBody>
-          <a:bodyPr wrap="square" lIns="0" tIns="0" rIns="0" bIns="0" rtlCol="0" anchor="ctr"/>
-          <a:lstStyle/>
-          <a:p>
-            <a:pPr algn="ctr" indent="0" marL="0">
-              <a:buNone/>
-            </a:pPr>
-            <a:r>
-              <a:rPr lang="en-US" sz="800" dirty="0">
-                <a:solidFill>
-                  <a:srgbClr val="2E3440"/>
-                </a:solidFill>
-                <a:latin typeface="Roboto" pitchFamily="34" charset="0"/>
-                <a:ea typeface="Roboto" pitchFamily="34" charset="-122"/>
-                <a:cs typeface="Roboto" pitchFamily="34" charset="-120"/>
-              </a:rPr>
               <a:t>Lampung 1</a:t>
             </a:r>
             <a:endParaRPr lang="en-US" sz="800" dirty="0"/>
@@ -5276,8 +5540,8 @@
         </p:nvSpPr>
         <p:spPr>
           <a:xfrm>
-            <a:off x="6316159" y="4292092"/>
-            <a:ext cx="940342" cy="196596"/>
+            <a:off x="6382506" y="4292092"/>
+            <a:ext cx="873995" cy="196596"/>
           </a:xfrm>
           <a:prstGeom prst="rect">
             <a:avLst/>
@@ -5339,7 +5603,7 @@
         <p:spPr>
           <a:xfrm>
             <a:off x="676656" y="4488688"/>
-            <a:ext cx="542260" cy="196596"/>
+            <a:ext cx="674954" cy="196596"/>
           </a:xfrm>
           <a:prstGeom prst="rect">
             <a:avLst/>
@@ -5377,7 +5641,85 @@
         </p:nvSpPr>
         <p:spPr>
           <a:xfrm>
-            <a:off x="1273780" y="4488688"/>
+            <a:off x="1406474" y="4488688"/>
+            <a:ext cx="741301" cy="196596"/>
+          </a:xfrm>
+          <a:prstGeom prst="rect">
+            <a:avLst/>
+          </a:prstGeom>
+          <a:noFill/>
+          <a:ln/>
+        </p:spPr>
+        <p:txBody>
+          <a:bodyPr wrap="square" lIns="0" tIns="0" rIns="0" bIns="0" rtlCol="0" anchor="ctr"/>
+          <a:lstStyle/>
+          <a:p>
+            <a:pPr algn="ctr" indent="0" marL="0">
+              <a:buNone/>
+            </a:pPr>
+            <a:r>
+              <a:rPr lang="en-US" sz="800" dirty="0">
+                <a:solidFill>
+                  <a:srgbClr val="2E3440"/>
+                </a:solidFill>
+                <a:latin typeface="Roboto" pitchFamily="34" charset="0"/>
+                <a:ea typeface="Roboto" pitchFamily="34" charset="-122"/>
+                <a:cs typeface="Roboto" pitchFamily="34" charset="-120"/>
+              </a:rPr>
+              <a:t>1 (1,0+0)</a:t>
+            </a:r>
+            <a:endParaRPr lang="en-US" sz="800" dirty="0"/>
+          </a:p>
+        </p:txBody>
+      </p:sp>
+      <p:sp>
+        <p:nvSpPr>
+          <p:cNvPr id="104" name="Text 96"/>
+          <p:cNvSpPr/>
+          <p:nvPr/>
+        </p:nvSpPr>
+        <p:spPr>
+          <a:xfrm>
+            <a:off x="2202639" y="4488688"/>
+            <a:ext cx="940342" cy="196596"/>
+          </a:xfrm>
+          <a:prstGeom prst="rect">
+            <a:avLst/>
+          </a:prstGeom>
+          <a:noFill/>
+          <a:ln/>
+        </p:spPr>
+        <p:txBody>
+          <a:bodyPr wrap="square" lIns="0" tIns="0" rIns="0" bIns="0" rtlCol="0" anchor="ctr"/>
+          <a:lstStyle/>
+          <a:p>
+            <a:pPr algn="ctr" indent="0" marL="0">
+              <a:buNone/>
+            </a:pPr>
+            <a:r>
+              <a:rPr lang="en-US" sz="800" dirty="0">
+                <a:solidFill>
+                  <a:srgbClr val="2E3440"/>
+                </a:solidFill>
+                <a:latin typeface="Roboto" pitchFamily="34" charset="0"/>
+                <a:ea typeface="Roboto" pitchFamily="34" charset="-122"/>
+                <a:cs typeface="Roboto" pitchFamily="34" charset="-120"/>
+              </a:rPr>
+              <a:t>8 (2,0+5,2)</a:t>
+            </a:r>
+            <a:endParaRPr lang="en-US" sz="800" dirty="0"/>
+          </a:p>
+        </p:txBody>
+      </p:sp>
+      <p:sp>
+        <p:nvSpPr>
+          <p:cNvPr id="105" name="Text 97"/>
+          <p:cNvSpPr/>
+          <p:nvPr/>
+        </p:nvSpPr>
+        <p:spPr>
+          <a:xfrm>
+            <a:off x="3197846" y="4488688"/>
             <a:ext cx="807648" cy="196596"/>
           </a:xfrm>
           <a:prstGeom prst="rect">
@@ -5410,13 +5752,13 @@
       </p:sp>
       <p:sp>
         <p:nvSpPr>
-          <p:cNvPr id="104" name="Text 96"/>
-          <p:cNvSpPr/>
-          <p:nvPr/>
-        </p:nvSpPr>
-        <p:spPr>
-          <a:xfrm>
-            <a:off x="2136292" y="4488688"/>
+          <p:cNvPr id="106" name="Text 98"/>
+          <p:cNvSpPr/>
+          <p:nvPr/>
+        </p:nvSpPr>
+        <p:spPr>
+          <a:xfrm>
+            <a:off x="4060358" y="4488688"/>
             <a:ext cx="940342" cy="196596"/>
           </a:xfrm>
           <a:prstGeom prst="rect">
@@ -5441,22 +5783,22 @@
                 <a:ea typeface="Roboto" pitchFamily="34" charset="-122"/>
                 <a:cs typeface="Roboto" pitchFamily="34" charset="-120"/>
               </a:rPr>
-              <a:t>8 (2,0+5,2)</a:t>
-            </a:r>
-            <a:endParaRPr lang="en-US" sz="800" dirty="0"/>
-          </a:p>
-        </p:txBody>
-      </p:sp>
-      <p:sp>
-        <p:nvSpPr>
-          <p:cNvPr id="105" name="Text 97"/>
-          <p:cNvSpPr/>
-          <p:nvPr/>
-        </p:nvSpPr>
-        <p:spPr>
-          <a:xfrm>
-            <a:off x="3131498" y="4488688"/>
-            <a:ext cx="807648" cy="196596"/>
+              <a:t>7 (2,2+4,9)</a:t>
+            </a:r>
+            <a:endParaRPr lang="en-US" sz="800" dirty="0"/>
+          </a:p>
+        </p:txBody>
+      </p:sp>
+      <p:sp>
+        <p:nvSpPr>
+          <p:cNvPr id="107" name="Text 99"/>
+          <p:cNvSpPr/>
+          <p:nvPr/>
+        </p:nvSpPr>
+        <p:spPr>
+          <a:xfrm>
+            <a:off x="5055564" y="4488688"/>
+            <a:ext cx="1272078" cy="196596"/>
           </a:xfrm>
           <a:prstGeom prst="rect">
             <a:avLst/>
@@ -5480,22 +5822,22 @@
                 <a:ea typeface="Roboto" pitchFamily="34" charset="-122"/>
                 <a:cs typeface="Roboto" pitchFamily="34" charset="-120"/>
               </a:rPr>
-              <a:t>1 (1,0+0)</a:t>
-            </a:r>
-            <a:endParaRPr lang="en-US" sz="800" dirty="0"/>
-          </a:p>
-        </p:txBody>
-      </p:sp>
-      <p:sp>
-        <p:nvSpPr>
-          <p:cNvPr id="106" name="Text 98"/>
-          <p:cNvSpPr/>
-          <p:nvPr/>
-        </p:nvSpPr>
-        <p:spPr>
-          <a:xfrm>
-            <a:off x="3994011" y="4488688"/>
-            <a:ext cx="940342" cy="196596"/>
+              <a:t>Lampung (2,0+0)</a:t>
+            </a:r>
+            <a:endParaRPr lang="en-US" sz="800" dirty="0"/>
+          </a:p>
+        </p:txBody>
+      </p:sp>
+      <p:sp>
+        <p:nvSpPr>
+          <p:cNvPr id="108" name="Text 100"/>
+          <p:cNvSpPr/>
+          <p:nvPr/>
+        </p:nvSpPr>
+        <p:spPr>
+          <a:xfrm>
+            <a:off x="6382506" y="4488688"/>
+            <a:ext cx="873995" cy="196596"/>
           </a:xfrm>
           <a:prstGeom prst="rect">
             <a:avLst/>
@@ -5519,85 +5861,7 @@
                 <a:ea typeface="Roboto" pitchFamily="34" charset="-122"/>
                 <a:cs typeface="Roboto" pitchFamily="34" charset="-120"/>
               </a:rPr>
-              <a:t>7 (2,2+4,9)</a:t>
-            </a:r>
-            <a:endParaRPr lang="en-US" sz="800" dirty="0"/>
-          </a:p>
-        </p:txBody>
-      </p:sp>
-      <p:sp>
-        <p:nvSpPr>
-          <p:cNvPr id="107" name="Text 99"/>
-          <p:cNvSpPr/>
-          <p:nvPr/>
-        </p:nvSpPr>
-        <p:spPr>
-          <a:xfrm>
-            <a:off x="4989217" y="4488688"/>
-            <a:ext cx="1272078" cy="196596"/>
-          </a:xfrm>
-          <a:prstGeom prst="rect">
-            <a:avLst/>
-          </a:prstGeom>
-          <a:noFill/>
-          <a:ln/>
-        </p:spPr>
-        <p:txBody>
-          <a:bodyPr wrap="square" lIns="0" tIns="0" rIns="0" bIns="0" rtlCol="0" anchor="ctr"/>
-          <a:lstStyle/>
-          <a:p>
-            <a:pPr algn="ctr" indent="0" marL="0">
-              <a:buNone/>
-            </a:pPr>
-            <a:r>
-              <a:rPr lang="en-US" sz="800" dirty="0">
-                <a:solidFill>
-                  <a:srgbClr val="2E3440"/>
-                </a:solidFill>
-                <a:latin typeface="Roboto" pitchFamily="34" charset="0"/>
-                <a:ea typeface="Roboto" pitchFamily="34" charset="-122"/>
-                <a:cs typeface="Roboto" pitchFamily="34" charset="-120"/>
-              </a:rPr>
-              <a:t>0</a:t>
-            </a:r>
-            <a:endParaRPr lang="en-US" sz="800" dirty="0"/>
-          </a:p>
-        </p:txBody>
-      </p:sp>
-      <p:sp>
-        <p:nvSpPr>
-          <p:cNvPr id="108" name="Text 100"/>
-          <p:cNvSpPr/>
-          <p:nvPr/>
-        </p:nvSpPr>
-        <p:spPr>
-          <a:xfrm>
-            <a:off x="6316159" y="4488688"/>
-            <a:ext cx="940342" cy="196596"/>
-          </a:xfrm>
-          <a:prstGeom prst="rect">
-            <a:avLst/>
-          </a:prstGeom>
-          <a:noFill/>
-          <a:ln/>
-        </p:spPr>
-        <p:txBody>
-          <a:bodyPr wrap="square" lIns="0" tIns="0" rIns="0" bIns="0" rtlCol="0" anchor="ctr"/>
-          <a:lstStyle/>
-          <a:p>
-            <a:pPr algn="ctr" indent="0" marL="0">
-              <a:buNone/>
-            </a:pPr>
-            <a:r>
-              <a:rPr lang="en-US" sz="800" dirty="0">
-                <a:solidFill>
-                  <a:srgbClr val="2E3440"/>
-                </a:solidFill>
-                <a:latin typeface="Roboto" pitchFamily="34" charset="0"/>
-                <a:ea typeface="Roboto" pitchFamily="34" charset="-122"/>
-                <a:cs typeface="Roboto" pitchFamily="34" charset="-120"/>
-              </a:rPr>
-              <a:t>17 (6,2+10,1)</a:t>
+              <a:t>17 (8,2+10,1)</a:t>
             </a:r>
             <a:endParaRPr lang="en-US" sz="800" dirty="0"/>
           </a:p>
@@ -5635,7 +5899,7 @@
         <p:spPr>
           <a:xfrm>
             <a:off x="676656" y="4685284"/>
-            <a:ext cx="542260" cy="196596"/>
+            <a:ext cx="674954" cy="196596"/>
           </a:xfrm>
           <a:prstGeom prst="rect">
             <a:avLst/>
@@ -5673,7 +5937,85 @@
         </p:nvSpPr>
         <p:spPr>
           <a:xfrm>
-            <a:off x="1273780" y="4685284"/>
+            <a:off x="1406474" y="4685284"/>
+            <a:ext cx="741301" cy="196596"/>
+          </a:xfrm>
+          <a:prstGeom prst="rect">
+            <a:avLst/>
+          </a:prstGeom>
+          <a:noFill/>
+          <a:ln/>
+        </p:spPr>
+        <p:txBody>
+          <a:bodyPr wrap="square" lIns="0" tIns="0" rIns="0" bIns="0" rtlCol="0" anchor="ctr"/>
+          <a:lstStyle/>
+          <a:p>
+            <a:pPr algn="ctr" indent="0" marL="0">
+              <a:buNone/>
+            </a:pPr>
+            <a:r>
+              <a:rPr lang="en-US" sz="800" dirty="0">
+                <a:solidFill>
+                  <a:srgbClr val="2E3440"/>
+                </a:solidFill>
+                <a:latin typeface="Roboto" pitchFamily="34" charset="0"/>
+                <a:ea typeface="Roboto" pitchFamily="34" charset="-122"/>
+                <a:cs typeface="Roboto" pitchFamily="34" charset="-120"/>
+              </a:rPr>
+              <a:t>0</a:t>
+            </a:r>
+            <a:endParaRPr lang="en-US" sz="800" dirty="0"/>
+          </a:p>
+        </p:txBody>
+      </p:sp>
+      <p:sp>
+        <p:nvSpPr>
+          <p:cNvPr id="112" name="Text 104"/>
+          <p:cNvSpPr/>
+          <p:nvPr/>
+        </p:nvSpPr>
+        <p:spPr>
+          <a:xfrm>
+            <a:off x="2202639" y="4685284"/>
+            <a:ext cx="940342" cy="196596"/>
+          </a:xfrm>
+          <a:prstGeom prst="rect">
+            <a:avLst/>
+          </a:prstGeom>
+          <a:noFill/>
+          <a:ln/>
+        </p:spPr>
+        <p:txBody>
+          <a:bodyPr wrap="square" lIns="0" tIns="0" rIns="0" bIns="0" rtlCol="0" anchor="ctr"/>
+          <a:lstStyle/>
+          <a:p>
+            <a:pPr algn="ctr" indent="0" marL="0">
+              <a:buNone/>
+            </a:pPr>
+            <a:r>
+              <a:rPr lang="en-US" sz="800" dirty="0">
+                <a:solidFill>
+                  <a:srgbClr val="2E3440"/>
+                </a:solidFill>
+                <a:latin typeface="Roboto" pitchFamily="34" charset="0"/>
+                <a:ea typeface="Roboto" pitchFamily="34" charset="-122"/>
+                <a:cs typeface="Roboto" pitchFamily="34" charset="-120"/>
+              </a:rPr>
+              <a:t>8 (3,0+4,5)</a:t>
+            </a:r>
+            <a:endParaRPr lang="en-US" sz="800" dirty="0"/>
+          </a:p>
+        </p:txBody>
+      </p:sp>
+      <p:sp>
+        <p:nvSpPr>
+          <p:cNvPr id="113" name="Text 105"/>
+          <p:cNvSpPr/>
+          <p:nvPr/>
+        </p:nvSpPr>
+        <p:spPr>
+          <a:xfrm>
+            <a:off x="3197846" y="4685284"/>
             <a:ext cx="807648" cy="196596"/>
           </a:xfrm>
           <a:prstGeom prst="rect">
@@ -5698,21 +6040,21 @@
                 <a:ea typeface="Roboto" pitchFamily="34" charset="-122"/>
                 <a:cs typeface="Roboto" pitchFamily="34" charset="-120"/>
               </a:rPr>
-              <a:t>0</a:t>
-            </a:r>
-            <a:endParaRPr lang="en-US" sz="800" dirty="0"/>
-          </a:p>
-        </p:txBody>
-      </p:sp>
-      <p:sp>
-        <p:nvSpPr>
-          <p:cNvPr id="112" name="Text 104"/>
-          <p:cNvSpPr/>
-          <p:nvPr/>
-        </p:nvSpPr>
-        <p:spPr>
-          <a:xfrm>
-            <a:off x="2136292" y="4685284"/>
+              <a:t>2 (2,0+0)</a:t>
+            </a:r>
+            <a:endParaRPr lang="en-US" sz="800" dirty="0"/>
+          </a:p>
+        </p:txBody>
+      </p:sp>
+      <p:sp>
+        <p:nvSpPr>
+          <p:cNvPr id="114" name="Text 106"/>
+          <p:cNvSpPr/>
+          <p:nvPr/>
+        </p:nvSpPr>
+        <p:spPr>
+          <a:xfrm>
+            <a:off x="4060358" y="4685284"/>
             <a:ext cx="940342" cy="196596"/>
           </a:xfrm>
           <a:prstGeom prst="rect">
@@ -5737,22 +6079,22 @@
                 <a:ea typeface="Roboto" pitchFamily="34" charset="-122"/>
                 <a:cs typeface="Roboto" pitchFamily="34" charset="-120"/>
               </a:rPr>
-              <a:t>8 (3,0+4,5)</a:t>
-            </a:r>
-            <a:endParaRPr lang="en-US" sz="800" dirty="0"/>
-          </a:p>
-        </p:txBody>
-      </p:sp>
-      <p:sp>
-        <p:nvSpPr>
-          <p:cNvPr id="113" name="Text 105"/>
-          <p:cNvSpPr/>
-          <p:nvPr/>
-        </p:nvSpPr>
-        <p:spPr>
-          <a:xfrm>
-            <a:off x="3131498" y="4685284"/>
-            <a:ext cx="807648" cy="196596"/>
+              <a:t>8 (8,8+3,3)</a:t>
+            </a:r>
+            <a:endParaRPr lang="en-US" sz="800" dirty="0"/>
+          </a:p>
+        </p:txBody>
+      </p:sp>
+      <p:sp>
+        <p:nvSpPr>
+          <p:cNvPr id="115" name="Text 107"/>
+          <p:cNvSpPr/>
+          <p:nvPr/>
+        </p:nvSpPr>
+        <p:spPr>
+          <a:xfrm>
+            <a:off x="5055564" y="4685284"/>
+            <a:ext cx="1272078" cy="196596"/>
           </a:xfrm>
           <a:prstGeom prst="rect">
             <a:avLst/>
@@ -5776,22 +6118,22 @@
                 <a:ea typeface="Roboto" pitchFamily="34" charset="-122"/>
                 <a:cs typeface="Roboto" pitchFamily="34" charset="-120"/>
               </a:rPr>
-              <a:t>2 (2,0+0)</a:t>
-            </a:r>
-            <a:endParaRPr lang="en-US" sz="800" dirty="0"/>
-          </a:p>
-        </p:txBody>
-      </p:sp>
-      <p:sp>
-        <p:nvSpPr>
-          <p:cNvPr id="114" name="Text 106"/>
-          <p:cNvSpPr/>
-          <p:nvPr/>
-        </p:nvSpPr>
-        <p:spPr>
-          <a:xfrm>
-            <a:off x="3994011" y="4685284"/>
-            <a:ext cx="940342" cy="196596"/>
+              <a:t>Lampung (2,0+0)</a:t>
+            </a:r>
+            <a:endParaRPr lang="en-US" sz="800" dirty="0"/>
+          </a:p>
+        </p:txBody>
+      </p:sp>
+      <p:sp>
+        <p:nvSpPr>
+          <p:cNvPr id="116" name="Text 108"/>
+          <p:cNvSpPr/>
+          <p:nvPr/>
+        </p:nvSpPr>
+        <p:spPr>
+          <a:xfrm>
+            <a:off x="6382506" y="4685284"/>
+            <a:ext cx="873995" cy="196596"/>
           </a:xfrm>
           <a:prstGeom prst="rect">
             <a:avLst/>
@@ -5815,85 +6157,7 @@
                 <a:ea typeface="Roboto" pitchFamily="34" charset="-122"/>
                 <a:cs typeface="Roboto" pitchFamily="34" charset="-120"/>
               </a:rPr>
-              <a:t>8 (8,8+3,3)</a:t>
-            </a:r>
-            <a:endParaRPr lang="en-US" sz="800" dirty="0"/>
-          </a:p>
-        </p:txBody>
-      </p:sp>
-      <p:sp>
-        <p:nvSpPr>
-          <p:cNvPr id="115" name="Text 107"/>
-          <p:cNvSpPr/>
-          <p:nvPr/>
-        </p:nvSpPr>
-        <p:spPr>
-          <a:xfrm>
-            <a:off x="4989217" y="4685284"/>
-            <a:ext cx="1272078" cy="196596"/>
-          </a:xfrm>
-          <a:prstGeom prst="rect">
-            <a:avLst/>
-          </a:prstGeom>
-          <a:noFill/>
-          <a:ln/>
-        </p:spPr>
-        <p:txBody>
-          <a:bodyPr wrap="square" lIns="0" tIns="0" rIns="0" bIns="0" rtlCol="0" anchor="ctr"/>
-          <a:lstStyle/>
-          <a:p>
-            <a:pPr algn="ctr" indent="0" marL="0">
-              <a:buNone/>
-            </a:pPr>
-            <a:r>
-              <a:rPr lang="en-US" sz="800" dirty="0">
-                <a:solidFill>
-                  <a:srgbClr val="2E3440"/>
-                </a:solidFill>
-                <a:latin typeface="Roboto" pitchFamily="34" charset="0"/>
-                <a:ea typeface="Roboto" pitchFamily="34" charset="-122"/>
-                <a:cs typeface="Roboto" pitchFamily="34" charset="-120"/>
-              </a:rPr>
-              <a:t>0</a:t>
-            </a:r>
-            <a:endParaRPr lang="en-US" sz="800" dirty="0"/>
-          </a:p>
-        </p:txBody>
-      </p:sp>
-      <p:sp>
-        <p:nvSpPr>
-          <p:cNvPr id="116" name="Text 108"/>
-          <p:cNvSpPr/>
-          <p:nvPr/>
-        </p:nvSpPr>
-        <p:spPr>
-          <a:xfrm>
-            <a:off x="6316159" y="4685284"/>
-            <a:ext cx="940342" cy="196596"/>
-          </a:xfrm>
-          <a:prstGeom prst="rect">
-            <a:avLst/>
-          </a:prstGeom>
-          <a:noFill/>
-          <a:ln/>
-        </p:spPr>
-        <p:txBody>
-          <a:bodyPr wrap="square" lIns="0" tIns="0" rIns="0" bIns="0" rtlCol="0" anchor="ctr"/>
-          <a:lstStyle/>
-          <a:p>
-            <a:pPr algn="ctr" indent="0" marL="0">
-              <a:buNone/>
-            </a:pPr>
-            <a:r>
-              <a:rPr lang="en-US" sz="800" dirty="0">
-                <a:solidFill>
-                  <a:srgbClr val="2E3440"/>
-                </a:solidFill>
-                <a:latin typeface="Roboto" pitchFamily="34" charset="0"/>
-                <a:ea typeface="Roboto" pitchFamily="34" charset="-122"/>
-                <a:cs typeface="Roboto" pitchFamily="34" charset="-120"/>
-              </a:rPr>
-              <a:t>18 (13,8+7,8)</a:t>
+              <a:t>18 (15,8+7,8)</a:t>
             </a:r>
             <a:endParaRPr lang="en-US" sz="800" dirty="0"/>
           </a:p>
@@ -5931,7 +6195,7 @@
         <p:spPr>
           <a:xfrm>
             <a:off x="676656" y="4881880"/>
-            <a:ext cx="542260" cy="196596"/>
+            <a:ext cx="674954" cy="196596"/>
           </a:xfrm>
           <a:prstGeom prst="rect">
             <a:avLst/>
@@ -5969,7 +6233,85 @@
         </p:nvSpPr>
         <p:spPr>
           <a:xfrm>
-            <a:off x="1273780" y="4881880"/>
+            <a:off x="1406474" y="4881880"/>
+            <a:ext cx="741301" cy="196596"/>
+          </a:xfrm>
+          <a:prstGeom prst="rect">
+            <a:avLst/>
+          </a:prstGeom>
+          <a:noFill/>
+          <a:ln/>
+        </p:spPr>
+        <p:txBody>
+          <a:bodyPr wrap="square" lIns="0" tIns="0" rIns="0" bIns="0" rtlCol="0" anchor="ctr"/>
+          <a:lstStyle/>
+          <a:p>
+            <a:pPr algn="ctr" indent="0" marL="0">
+              <a:buNone/>
+            </a:pPr>
+            <a:r>
+              <a:rPr lang="en-US" sz="800" dirty="0">
+                <a:solidFill>
+                  <a:srgbClr val="2E3440"/>
+                </a:solidFill>
+                <a:latin typeface="Roboto" pitchFamily="34" charset="0"/>
+                <a:ea typeface="Roboto" pitchFamily="34" charset="-122"/>
+                <a:cs typeface="Roboto" pitchFamily="34" charset="-120"/>
+              </a:rPr>
+              <a:t>–</a:t>
+            </a:r>
+            <a:endParaRPr lang="en-US" sz="800" dirty="0"/>
+          </a:p>
+        </p:txBody>
+      </p:sp>
+      <p:sp>
+        <p:nvSpPr>
+          <p:cNvPr id="120" name="Text 112"/>
+          <p:cNvSpPr/>
+          <p:nvPr/>
+        </p:nvSpPr>
+        <p:spPr>
+          <a:xfrm>
+            <a:off x="2202639" y="4881880"/>
+            <a:ext cx="940342" cy="196596"/>
+          </a:xfrm>
+          <a:prstGeom prst="rect">
+            <a:avLst/>
+          </a:prstGeom>
+          <a:noFill/>
+          <a:ln/>
+        </p:spPr>
+        <p:txBody>
+          <a:bodyPr wrap="square" lIns="0" tIns="0" rIns="0" bIns="0" rtlCol="0" anchor="ctr"/>
+          <a:lstStyle/>
+          <a:p>
+            <a:pPr algn="ctr" indent="0" marL="0">
+              <a:buNone/>
+            </a:pPr>
+            <a:r>
+              <a:rPr lang="en-US" sz="800" dirty="0">
+                <a:solidFill>
+                  <a:srgbClr val="2E3440"/>
+                </a:solidFill>
+                <a:latin typeface="Roboto" pitchFamily="34" charset="0"/>
+                <a:ea typeface="Roboto" pitchFamily="34" charset="-122"/>
+                <a:cs typeface="Roboto" pitchFamily="34" charset="-120"/>
+              </a:rPr>
+              <a:t>–</a:t>
+            </a:r>
+            <a:endParaRPr lang="en-US" sz="800" dirty="0"/>
+          </a:p>
+        </p:txBody>
+      </p:sp>
+      <p:sp>
+        <p:nvSpPr>
+          <p:cNvPr id="121" name="Text 113"/>
+          <p:cNvSpPr/>
+          <p:nvPr/>
+        </p:nvSpPr>
+        <p:spPr>
+          <a:xfrm>
+            <a:off x="3197846" y="4881880"/>
             <a:ext cx="807648" cy="196596"/>
           </a:xfrm>
           <a:prstGeom prst="rect">
@@ -6002,13 +6344,13 @@
       </p:sp>
       <p:sp>
         <p:nvSpPr>
-          <p:cNvPr id="120" name="Text 112"/>
-          <p:cNvSpPr/>
-          <p:nvPr/>
-        </p:nvSpPr>
-        <p:spPr>
-          <a:xfrm>
-            <a:off x="2136292" y="4881880"/>
+          <p:cNvPr id="122" name="Text 114"/>
+          <p:cNvSpPr/>
+          <p:nvPr/>
+        </p:nvSpPr>
+        <p:spPr>
+          <a:xfrm>
+            <a:off x="4060358" y="4881880"/>
             <a:ext cx="940342" cy="196596"/>
           </a:xfrm>
           <a:prstGeom prst="rect">
@@ -6041,14 +6383,14 @@
       </p:sp>
       <p:sp>
         <p:nvSpPr>
-          <p:cNvPr id="121" name="Text 113"/>
-          <p:cNvSpPr/>
-          <p:nvPr/>
-        </p:nvSpPr>
-        <p:spPr>
-          <a:xfrm>
-            <a:off x="3131498" y="4881880"/>
-            <a:ext cx="807648" cy="196596"/>
+          <p:cNvPr id="123" name="Text 115"/>
+          <p:cNvSpPr/>
+          <p:nvPr/>
+        </p:nvSpPr>
+        <p:spPr>
+          <a:xfrm>
+            <a:off x="5055564" y="4881880"/>
+            <a:ext cx="1272078" cy="196596"/>
           </a:xfrm>
           <a:prstGeom prst="rect">
             <a:avLst/>
@@ -6080,92 +6422,14 @@
       </p:sp>
       <p:sp>
         <p:nvSpPr>
-          <p:cNvPr id="122" name="Text 114"/>
-          <p:cNvSpPr/>
-          <p:nvPr/>
-        </p:nvSpPr>
-        <p:spPr>
-          <a:xfrm>
-            <a:off x="3994011" y="4881880"/>
-            <a:ext cx="940342" cy="196596"/>
-          </a:xfrm>
-          <a:prstGeom prst="rect">
-            <a:avLst/>
-          </a:prstGeom>
-          <a:noFill/>
-          <a:ln/>
-        </p:spPr>
-        <p:txBody>
-          <a:bodyPr wrap="square" lIns="0" tIns="0" rIns="0" bIns="0" rtlCol="0" anchor="ctr"/>
-          <a:lstStyle/>
-          <a:p>
-            <a:pPr algn="ctr" indent="0" marL="0">
-              <a:buNone/>
-            </a:pPr>
-            <a:r>
-              <a:rPr lang="en-US" sz="800" dirty="0">
-                <a:solidFill>
-                  <a:srgbClr val="2E3440"/>
-                </a:solidFill>
-                <a:latin typeface="Roboto" pitchFamily="34" charset="0"/>
-                <a:ea typeface="Roboto" pitchFamily="34" charset="-122"/>
-                <a:cs typeface="Roboto" pitchFamily="34" charset="-120"/>
-              </a:rPr>
-              <a:t>–</a:t>
-            </a:r>
-            <a:endParaRPr lang="en-US" sz="800" dirty="0"/>
-          </a:p>
-        </p:txBody>
-      </p:sp>
-      <p:sp>
-        <p:nvSpPr>
-          <p:cNvPr id="123" name="Text 115"/>
-          <p:cNvSpPr/>
-          <p:nvPr/>
-        </p:nvSpPr>
-        <p:spPr>
-          <a:xfrm>
-            <a:off x="4989217" y="4881880"/>
-            <a:ext cx="1272078" cy="196596"/>
-          </a:xfrm>
-          <a:prstGeom prst="rect">
-            <a:avLst/>
-          </a:prstGeom>
-          <a:noFill/>
-          <a:ln/>
-        </p:spPr>
-        <p:txBody>
-          <a:bodyPr wrap="square" lIns="0" tIns="0" rIns="0" bIns="0" rtlCol="0" anchor="ctr"/>
-          <a:lstStyle/>
-          <a:p>
-            <a:pPr algn="ctr" indent="0" marL="0">
-              <a:buNone/>
-            </a:pPr>
-            <a:r>
-              <a:rPr lang="en-US" sz="800" dirty="0">
-                <a:solidFill>
-                  <a:srgbClr val="2E3440"/>
-                </a:solidFill>
-                <a:latin typeface="Roboto" pitchFamily="34" charset="0"/>
-                <a:ea typeface="Roboto" pitchFamily="34" charset="-122"/>
-                <a:cs typeface="Roboto" pitchFamily="34" charset="-120"/>
-              </a:rPr>
-              <a:t>–</a:t>
-            </a:r>
-            <a:endParaRPr lang="en-US" sz="800" dirty="0"/>
-          </a:p>
-        </p:txBody>
-      </p:sp>
-      <p:sp>
-        <p:nvSpPr>
           <p:cNvPr id="124" name="Text 116"/>
           <p:cNvSpPr/>
           <p:nvPr/>
         </p:nvSpPr>
         <p:spPr>
           <a:xfrm>
-            <a:off x="6316159" y="4881880"/>
-            <a:ext cx="940342" cy="196596"/>
+            <a:off x="6382506" y="4881880"/>
+            <a:ext cx="873995" cy="196596"/>
           </a:xfrm>
           <a:prstGeom prst="rect">
             <a:avLst/>
@@ -6227,7 +6491,7 @@
         <p:spPr>
           <a:xfrm>
             <a:off x="676656" y="5078476"/>
-            <a:ext cx="542260" cy="196596"/>
+            <a:ext cx="674954" cy="196596"/>
           </a:xfrm>
           <a:prstGeom prst="rect">
             <a:avLst/>
@@ -6265,7 +6529,85 @@
         </p:nvSpPr>
         <p:spPr>
           <a:xfrm>
-            <a:off x="1273780" y="5078476"/>
+            <a:off x="1406474" y="5078476"/>
+            <a:ext cx="741301" cy="196596"/>
+          </a:xfrm>
+          <a:prstGeom prst="rect">
+            <a:avLst/>
+          </a:prstGeom>
+          <a:noFill/>
+          <a:ln/>
+        </p:spPr>
+        <p:txBody>
+          <a:bodyPr wrap="square" lIns="0" tIns="0" rIns="0" bIns="0" rtlCol="0" anchor="ctr"/>
+          <a:lstStyle/>
+          <a:p>
+            <a:pPr algn="ctr" indent="0" marL="0">
+              <a:buNone/>
+            </a:pPr>
+            <a:r>
+              <a:rPr lang="en-US" sz="800" dirty="0">
+                <a:solidFill>
+                  <a:srgbClr val="2E3440"/>
+                </a:solidFill>
+                <a:latin typeface="Roboto" pitchFamily="34" charset="0"/>
+                <a:ea typeface="Roboto" pitchFamily="34" charset="-122"/>
+                <a:cs typeface="Roboto" pitchFamily="34" charset="-120"/>
+              </a:rPr>
+              <a:t>0</a:t>
+            </a:r>
+            <a:endParaRPr lang="en-US" sz="800" dirty="0"/>
+          </a:p>
+        </p:txBody>
+      </p:sp>
+      <p:sp>
+        <p:nvSpPr>
+          <p:cNvPr id="128" name="Text 120"/>
+          <p:cNvSpPr/>
+          <p:nvPr/>
+        </p:nvSpPr>
+        <p:spPr>
+          <a:xfrm>
+            <a:off x="2202639" y="5078476"/>
+            <a:ext cx="940342" cy="196596"/>
+          </a:xfrm>
+          <a:prstGeom prst="rect">
+            <a:avLst/>
+          </a:prstGeom>
+          <a:noFill/>
+          <a:ln/>
+        </p:spPr>
+        <p:txBody>
+          <a:bodyPr wrap="square" lIns="0" tIns="0" rIns="0" bIns="0" rtlCol="0" anchor="ctr"/>
+          <a:lstStyle/>
+          <a:p>
+            <a:pPr algn="ctr" indent="0" marL="0">
+              <a:buNone/>
+            </a:pPr>
+            <a:r>
+              <a:rPr lang="en-US" sz="800" dirty="0">
+                <a:solidFill>
+                  <a:srgbClr val="2E3440"/>
+                </a:solidFill>
+                <a:latin typeface="Roboto" pitchFamily="34" charset="0"/>
+                <a:ea typeface="Roboto" pitchFamily="34" charset="-122"/>
+                <a:cs typeface="Roboto" pitchFamily="34" charset="-120"/>
+              </a:rPr>
+              <a:t>9 (14,4+0)</a:t>
+            </a:r>
+            <a:endParaRPr lang="en-US" sz="800" dirty="0"/>
+          </a:p>
+        </p:txBody>
+      </p:sp>
+      <p:sp>
+        <p:nvSpPr>
+          <p:cNvPr id="129" name="Text 121"/>
+          <p:cNvSpPr/>
+          <p:nvPr/>
+        </p:nvSpPr>
+        <p:spPr>
+          <a:xfrm>
+            <a:off x="3197846" y="5078476"/>
             <a:ext cx="807648" cy="196596"/>
           </a:xfrm>
           <a:prstGeom prst="rect">
@@ -6298,13 +6640,13 @@
       </p:sp>
       <p:sp>
         <p:nvSpPr>
-          <p:cNvPr id="128" name="Text 120"/>
-          <p:cNvSpPr/>
-          <p:nvPr/>
-        </p:nvSpPr>
-        <p:spPr>
-          <a:xfrm>
-            <a:off x="2136292" y="5078476"/>
+          <p:cNvPr id="130" name="Text 122"/>
+          <p:cNvSpPr/>
+          <p:nvPr/>
+        </p:nvSpPr>
+        <p:spPr>
+          <a:xfrm>
+            <a:off x="4060358" y="5078476"/>
             <a:ext cx="940342" cy="196596"/>
           </a:xfrm>
           <a:prstGeom prst="rect">
@@ -6329,22 +6671,22 @@
                 <a:ea typeface="Roboto" pitchFamily="34" charset="-122"/>
                 <a:cs typeface="Roboto" pitchFamily="34" charset="-120"/>
               </a:rPr>
-              <a:t>9 (14,4+0)</a:t>
-            </a:r>
-            <a:endParaRPr lang="en-US" sz="800" dirty="0"/>
-          </a:p>
-        </p:txBody>
-      </p:sp>
-      <p:sp>
-        <p:nvSpPr>
-          <p:cNvPr id="129" name="Text 121"/>
-          <p:cNvSpPr/>
-          <p:nvPr/>
-        </p:nvSpPr>
-        <p:spPr>
-          <a:xfrm>
-            <a:off x="3131498" y="5078476"/>
-            <a:ext cx="807648" cy="196596"/>
+              <a:t>5 (8,4+0)</a:t>
+            </a:r>
+            <a:endParaRPr lang="en-US" sz="800" dirty="0"/>
+          </a:p>
+        </p:txBody>
+      </p:sp>
+      <p:sp>
+        <p:nvSpPr>
+          <p:cNvPr id="131" name="Text 123"/>
+          <p:cNvSpPr/>
+          <p:nvPr/>
+        </p:nvSpPr>
+        <p:spPr>
+          <a:xfrm>
+            <a:off x="5055564" y="5078476"/>
+            <a:ext cx="1272078" cy="196596"/>
           </a:xfrm>
           <a:prstGeom prst="rect">
             <a:avLst/>
@@ -6368,84 +6710,6 @@
                 <a:ea typeface="Roboto" pitchFamily="34" charset="-122"/>
                 <a:cs typeface="Roboto" pitchFamily="34" charset="-120"/>
               </a:rPr>
-              <a:t>0</a:t>
-            </a:r>
-            <a:endParaRPr lang="en-US" sz="800" dirty="0"/>
-          </a:p>
-        </p:txBody>
-      </p:sp>
-      <p:sp>
-        <p:nvSpPr>
-          <p:cNvPr id="130" name="Text 122"/>
-          <p:cNvSpPr/>
-          <p:nvPr/>
-        </p:nvSpPr>
-        <p:spPr>
-          <a:xfrm>
-            <a:off x="3994011" y="5078476"/>
-            <a:ext cx="940342" cy="196596"/>
-          </a:xfrm>
-          <a:prstGeom prst="rect">
-            <a:avLst/>
-          </a:prstGeom>
-          <a:noFill/>
-          <a:ln/>
-        </p:spPr>
-        <p:txBody>
-          <a:bodyPr wrap="square" lIns="0" tIns="0" rIns="0" bIns="0" rtlCol="0" anchor="ctr"/>
-          <a:lstStyle/>
-          <a:p>
-            <a:pPr algn="ctr" indent="0" marL="0">
-              <a:buNone/>
-            </a:pPr>
-            <a:r>
-              <a:rPr lang="en-US" sz="800" dirty="0">
-                <a:solidFill>
-                  <a:srgbClr val="2E3440"/>
-                </a:solidFill>
-                <a:latin typeface="Roboto" pitchFamily="34" charset="0"/>
-                <a:ea typeface="Roboto" pitchFamily="34" charset="-122"/>
-                <a:cs typeface="Roboto" pitchFamily="34" charset="-120"/>
-              </a:rPr>
-              <a:t>5 (8,4+0)</a:t>
-            </a:r>
-            <a:endParaRPr lang="en-US" sz="800" dirty="0"/>
-          </a:p>
-        </p:txBody>
-      </p:sp>
-      <p:sp>
-        <p:nvSpPr>
-          <p:cNvPr id="131" name="Text 123"/>
-          <p:cNvSpPr/>
-          <p:nvPr/>
-        </p:nvSpPr>
-        <p:spPr>
-          <a:xfrm>
-            <a:off x="4989217" y="5078476"/>
-            <a:ext cx="1272078" cy="196596"/>
-          </a:xfrm>
-          <a:prstGeom prst="rect">
-            <a:avLst/>
-          </a:prstGeom>
-          <a:noFill/>
-          <a:ln/>
-        </p:spPr>
-        <p:txBody>
-          <a:bodyPr wrap="square" lIns="0" tIns="0" rIns="0" bIns="0" rtlCol="0" anchor="ctr"/>
-          <a:lstStyle/>
-          <a:p>
-            <a:pPr algn="ctr" indent="0" marL="0">
-              <a:buNone/>
-            </a:pPr>
-            <a:r>
-              <a:rPr lang="en-US" sz="800" dirty="0">
-                <a:solidFill>
-                  <a:srgbClr val="2E3440"/>
-                </a:solidFill>
-                <a:latin typeface="Roboto" pitchFamily="34" charset="0"/>
-                <a:ea typeface="Roboto" pitchFamily="34" charset="-122"/>
-                <a:cs typeface="Roboto" pitchFamily="34" charset="-120"/>
-              </a:rPr>
               <a:t>Jatim 1 (1,0+0)</a:t>
             </a:r>
             <a:endParaRPr lang="en-US" sz="800" dirty="0"/>
@@ -6460,8 +6724,8 @@
         </p:nvSpPr>
         <p:spPr>
           <a:xfrm>
-            <a:off x="6316159" y="5078476"/>
-            <a:ext cx="940342" cy="196596"/>
+            <a:off x="6382506" y="5078476"/>
+            <a:ext cx="873995" cy="196596"/>
           </a:xfrm>
           <a:prstGeom prst="rect">
             <a:avLst/>
@@ -6523,7 +6787,7 @@
         <p:spPr>
           <a:xfrm>
             <a:off x="676656" y="5275072"/>
-            <a:ext cx="542260" cy="196596"/>
+            <a:ext cx="674954" cy="196596"/>
           </a:xfrm>
           <a:prstGeom prst="rect">
             <a:avLst/>
@@ -6561,7 +6825,85 @@
         </p:nvSpPr>
         <p:spPr>
           <a:xfrm>
-            <a:off x="1273780" y="5275072"/>
+            <a:off x="1406474" y="5275072"/>
+            <a:ext cx="741301" cy="196596"/>
+          </a:xfrm>
+          <a:prstGeom prst="rect">
+            <a:avLst/>
+          </a:prstGeom>
+          <a:noFill/>
+          <a:ln/>
+        </p:spPr>
+        <p:txBody>
+          <a:bodyPr wrap="square" lIns="0" tIns="0" rIns="0" bIns="0" rtlCol="0" anchor="ctr"/>
+          <a:lstStyle/>
+          <a:p>
+            <a:pPr algn="ctr" indent="0" marL="0">
+              <a:buNone/>
+            </a:pPr>
+            <a:r>
+              <a:rPr lang="en-US" sz="800" dirty="0">
+                <a:solidFill>
+                  <a:srgbClr val="2E3440"/>
+                </a:solidFill>
+                <a:latin typeface="Roboto" pitchFamily="34" charset="0"/>
+                <a:ea typeface="Roboto" pitchFamily="34" charset="-122"/>
+                <a:cs typeface="Roboto" pitchFamily="34" charset="-120"/>
+              </a:rPr>
+              <a:t>0</a:t>
+            </a:r>
+            <a:endParaRPr lang="en-US" sz="800" dirty="0"/>
+          </a:p>
+        </p:txBody>
+      </p:sp>
+      <p:sp>
+        <p:nvSpPr>
+          <p:cNvPr id="136" name="Text 128"/>
+          <p:cNvSpPr/>
+          <p:nvPr/>
+        </p:nvSpPr>
+        <p:spPr>
+          <a:xfrm>
+            <a:off x="2202639" y="5275072"/>
+            <a:ext cx="940342" cy="196596"/>
+          </a:xfrm>
+          <a:prstGeom prst="rect">
+            <a:avLst/>
+          </a:prstGeom>
+          <a:noFill/>
+          <a:ln/>
+        </p:spPr>
+        <p:txBody>
+          <a:bodyPr wrap="square" lIns="0" tIns="0" rIns="0" bIns="0" rtlCol="0" anchor="ctr"/>
+          <a:lstStyle/>
+          <a:p>
+            <a:pPr algn="ctr" indent="0" marL="0">
+              <a:buNone/>
+            </a:pPr>
+            <a:r>
+              <a:rPr lang="en-US" sz="800" dirty="0">
+                <a:solidFill>
+                  <a:srgbClr val="2E3440"/>
+                </a:solidFill>
+                <a:latin typeface="Roboto" pitchFamily="34" charset="0"/>
+                <a:ea typeface="Roboto" pitchFamily="34" charset="-122"/>
+                <a:cs typeface="Roboto" pitchFamily="34" charset="-120"/>
+              </a:rPr>
+              <a:t>6 (10,2+0)</a:t>
+            </a:r>
+            <a:endParaRPr lang="en-US" sz="800" dirty="0"/>
+          </a:p>
+        </p:txBody>
+      </p:sp>
+      <p:sp>
+        <p:nvSpPr>
+          <p:cNvPr id="137" name="Text 129"/>
+          <p:cNvSpPr/>
+          <p:nvPr/>
+        </p:nvSpPr>
+        <p:spPr>
+          <a:xfrm>
+            <a:off x="3197846" y="5275072"/>
             <a:ext cx="807648" cy="196596"/>
           </a:xfrm>
           <a:prstGeom prst="rect">
@@ -6586,21 +6928,21 @@
                 <a:ea typeface="Roboto" pitchFamily="34" charset="-122"/>
                 <a:cs typeface="Roboto" pitchFamily="34" charset="-120"/>
               </a:rPr>
-              <a:t>0</a:t>
-            </a:r>
-            <a:endParaRPr lang="en-US" sz="800" dirty="0"/>
-          </a:p>
-        </p:txBody>
-      </p:sp>
-      <p:sp>
-        <p:nvSpPr>
-          <p:cNvPr id="136" name="Text 128"/>
-          <p:cNvSpPr/>
-          <p:nvPr/>
-        </p:nvSpPr>
-        <p:spPr>
-          <a:xfrm>
-            <a:off x="2136292" y="5275072"/>
+              <a:t>4 (1,0+2,1)</a:t>
+            </a:r>
+            <a:endParaRPr lang="en-US" sz="800" dirty="0"/>
+          </a:p>
+        </p:txBody>
+      </p:sp>
+      <p:sp>
+        <p:nvSpPr>
+          <p:cNvPr id="138" name="Text 130"/>
+          <p:cNvSpPr/>
+          <p:nvPr/>
+        </p:nvSpPr>
+        <p:spPr>
+          <a:xfrm>
+            <a:off x="4060358" y="5275072"/>
             <a:ext cx="940342" cy="196596"/>
           </a:xfrm>
           <a:prstGeom prst="rect">
@@ -6625,22 +6967,22 @@
                 <a:ea typeface="Roboto" pitchFamily="34" charset="-122"/>
                 <a:cs typeface="Roboto" pitchFamily="34" charset="-120"/>
               </a:rPr>
-              <a:t>6 (10,2+0)</a:t>
-            </a:r>
-            <a:endParaRPr lang="en-US" sz="800" dirty="0"/>
-          </a:p>
-        </p:txBody>
-      </p:sp>
-      <p:sp>
-        <p:nvSpPr>
-          <p:cNvPr id="137" name="Text 129"/>
-          <p:cNvSpPr/>
-          <p:nvPr/>
-        </p:nvSpPr>
-        <p:spPr>
-          <a:xfrm>
-            <a:off x="3131498" y="5275072"/>
-            <a:ext cx="807648" cy="196596"/>
+              <a:t>7 (8,2+1,7)</a:t>
+            </a:r>
+            <a:endParaRPr lang="en-US" sz="800" dirty="0"/>
+          </a:p>
+        </p:txBody>
+      </p:sp>
+      <p:sp>
+        <p:nvSpPr>
+          <p:cNvPr id="139" name="Text 131"/>
+          <p:cNvSpPr/>
+          <p:nvPr/>
+        </p:nvSpPr>
+        <p:spPr>
+          <a:xfrm>
+            <a:off x="5055564" y="5275072"/>
+            <a:ext cx="1272078" cy="196596"/>
           </a:xfrm>
           <a:prstGeom prst="rect">
             <a:avLst/>
@@ -6664,84 +7006,6 @@
                 <a:ea typeface="Roboto" pitchFamily="34" charset="-122"/>
                 <a:cs typeface="Roboto" pitchFamily="34" charset="-120"/>
               </a:rPr>
-              <a:t>4 (1,0+2,1)</a:t>
-            </a:r>
-            <a:endParaRPr lang="en-US" sz="800" dirty="0"/>
-          </a:p>
-        </p:txBody>
-      </p:sp>
-      <p:sp>
-        <p:nvSpPr>
-          <p:cNvPr id="138" name="Text 130"/>
-          <p:cNvSpPr/>
-          <p:nvPr/>
-        </p:nvSpPr>
-        <p:spPr>
-          <a:xfrm>
-            <a:off x="3994011" y="5275072"/>
-            <a:ext cx="940342" cy="196596"/>
-          </a:xfrm>
-          <a:prstGeom prst="rect">
-            <a:avLst/>
-          </a:prstGeom>
-          <a:noFill/>
-          <a:ln/>
-        </p:spPr>
-        <p:txBody>
-          <a:bodyPr wrap="square" lIns="0" tIns="0" rIns="0" bIns="0" rtlCol="0" anchor="ctr"/>
-          <a:lstStyle/>
-          <a:p>
-            <a:pPr algn="ctr" indent="0" marL="0">
-              <a:buNone/>
-            </a:pPr>
-            <a:r>
-              <a:rPr lang="en-US" sz="800" dirty="0">
-                <a:solidFill>
-                  <a:srgbClr val="2E3440"/>
-                </a:solidFill>
-                <a:latin typeface="Roboto" pitchFamily="34" charset="0"/>
-                <a:ea typeface="Roboto" pitchFamily="34" charset="-122"/>
-                <a:cs typeface="Roboto" pitchFamily="34" charset="-120"/>
-              </a:rPr>
-              <a:t>7 (8,2+1,7)</a:t>
-            </a:r>
-            <a:endParaRPr lang="en-US" sz="800" dirty="0"/>
-          </a:p>
-        </p:txBody>
-      </p:sp>
-      <p:sp>
-        <p:nvSpPr>
-          <p:cNvPr id="139" name="Text 131"/>
-          <p:cNvSpPr/>
-          <p:nvPr/>
-        </p:nvSpPr>
-        <p:spPr>
-          <a:xfrm>
-            <a:off x="4989217" y="5275072"/>
-            <a:ext cx="1272078" cy="196596"/>
-          </a:xfrm>
-          <a:prstGeom prst="rect">
-            <a:avLst/>
-          </a:prstGeom>
-          <a:noFill/>
-          <a:ln/>
-        </p:spPr>
-        <p:txBody>
-          <a:bodyPr wrap="square" lIns="0" tIns="0" rIns="0" bIns="0" rtlCol="0" anchor="ctr"/>
-          <a:lstStyle/>
-          <a:p>
-            <a:pPr algn="ctr" indent="0" marL="0">
-              <a:buNone/>
-            </a:pPr>
-            <a:r>
-              <a:rPr lang="en-US" sz="800" dirty="0">
-                <a:solidFill>
-                  <a:srgbClr val="2E3440"/>
-                </a:solidFill>
-                <a:latin typeface="Roboto" pitchFamily="34" charset="0"/>
-                <a:ea typeface="Roboto" pitchFamily="34" charset="-122"/>
-                <a:cs typeface="Roboto" pitchFamily="34" charset="-120"/>
-              </a:rPr>
               <a:t>Papua Selatan 2 (2,0+0)</a:t>
             </a:r>
             <a:endParaRPr lang="en-US" sz="800" dirty="0"/>
@@ -6756,8 +7020,8 @@
         </p:nvSpPr>
         <p:spPr>
           <a:xfrm>
-            <a:off x="6316159" y="5275072"/>
-            <a:ext cx="940342" cy="196596"/>
+            <a:off x="6382506" y="5275072"/>
+            <a:ext cx="873995" cy="196596"/>
           </a:xfrm>
           <a:prstGeom prst="rect">
             <a:avLst/>
@@ -6841,7 +7105,7 @@
         <p:spPr>
           <a:xfrm>
             <a:off x="676656" y="5471668"/>
-            <a:ext cx="542260" cy="196596"/>
+            <a:ext cx="674954" cy="196596"/>
           </a:xfrm>
           <a:prstGeom prst="rect">
             <a:avLst/>
@@ -6879,7 +7143,85 @@
         </p:nvSpPr>
         <p:spPr>
           <a:xfrm>
-            <a:off x="1273780" y="5471668"/>
+            <a:off x="1406474" y="5471668"/>
+            <a:ext cx="741301" cy="196596"/>
+          </a:xfrm>
+          <a:prstGeom prst="rect">
+            <a:avLst/>
+          </a:prstGeom>
+          <a:noFill/>
+          <a:ln/>
+        </p:spPr>
+        <p:txBody>
+          <a:bodyPr wrap="square" lIns="0" tIns="0" rIns="0" bIns="0" rtlCol="0" anchor="ctr"/>
+          <a:lstStyle/>
+          <a:p>
+            <a:pPr algn="ctr" indent="0" marL="0">
+              <a:buNone/>
+            </a:pPr>
+            <a:r>
+              <a:rPr lang="en-US" sz="800" b="1" dirty="0">
+                <a:solidFill>
+                  <a:srgbClr val="FFFFFF"/>
+                </a:solidFill>
+                <a:latin typeface="Roboto" pitchFamily="34" charset="0"/>
+                <a:ea typeface="Roboto" pitchFamily="34" charset="-122"/>
+                <a:cs typeface="Roboto" pitchFamily="34" charset="-120"/>
+              </a:rPr>
+              <a:t>10 (9,4+0)</a:t>
+            </a:r>
+            <a:endParaRPr lang="en-US" sz="800" dirty="0"/>
+          </a:p>
+        </p:txBody>
+      </p:sp>
+      <p:sp>
+        <p:nvSpPr>
+          <p:cNvPr id="145" name="Text 137"/>
+          <p:cNvSpPr/>
+          <p:nvPr/>
+        </p:nvSpPr>
+        <p:spPr>
+          <a:xfrm>
+            <a:off x="2202639" y="5471668"/>
+            <a:ext cx="940342" cy="196596"/>
+          </a:xfrm>
+          <a:prstGeom prst="rect">
+            <a:avLst/>
+          </a:prstGeom>
+          <a:noFill/>
+          <a:ln/>
+        </p:spPr>
+        <p:txBody>
+          <a:bodyPr wrap="square" lIns="0" tIns="0" rIns="0" bIns="0" rtlCol="0" anchor="ctr"/>
+          <a:lstStyle/>
+          <a:p>
+            <a:pPr algn="ctr" indent="0" marL="0">
+              <a:buNone/>
+            </a:pPr>
+            <a:r>
+              <a:rPr lang="en-US" sz="800" b="1" dirty="0">
+                <a:solidFill>
+                  <a:srgbClr val="FFFFFF"/>
+                </a:solidFill>
+                <a:latin typeface="Roboto" pitchFamily="34" charset="0"/>
+                <a:ea typeface="Roboto" pitchFamily="34" charset="-122"/>
+                <a:cs typeface="Roboto" pitchFamily="34" charset="-120"/>
+              </a:rPr>
+              <a:t>66 (47,0+23,8)</a:t>
+            </a:r>
+            <a:endParaRPr lang="en-US" sz="800" dirty="0"/>
+          </a:p>
+        </p:txBody>
+      </p:sp>
+      <p:sp>
+        <p:nvSpPr>
+          <p:cNvPr id="146" name="Text 138"/>
+          <p:cNvSpPr/>
+          <p:nvPr/>
+        </p:nvSpPr>
+        <p:spPr>
+          <a:xfrm>
+            <a:off x="3197846" y="5471668"/>
             <a:ext cx="807648" cy="196596"/>
           </a:xfrm>
           <a:prstGeom prst="rect">
@@ -6904,21 +7246,21 @@
                 <a:ea typeface="Roboto" pitchFamily="34" charset="-122"/>
                 <a:cs typeface="Roboto" pitchFamily="34" charset="-120"/>
               </a:rPr>
-              <a:t>10 (9,4+0)</a:t>
-            </a:r>
-            <a:endParaRPr lang="en-US" sz="800" dirty="0"/>
-          </a:p>
-        </p:txBody>
-      </p:sp>
-      <p:sp>
-        <p:nvSpPr>
-          <p:cNvPr id="145" name="Text 137"/>
-          <p:cNvSpPr/>
-          <p:nvPr/>
-        </p:nvSpPr>
-        <p:spPr>
-          <a:xfrm>
-            <a:off x="2136292" y="5471668"/>
+              <a:t>13 (10,0+2,1)</a:t>
+            </a:r>
+            <a:endParaRPr lang="en-US" sz="800" dirty="0"/>
+          </a:p>
+        </p:txBody>
+      </p:sp>
+      <p:sp>
+        <p:nvSpPr>
+          <p:cNvPr id="147" name="Text 139"/>
+          <p:cNvSpPr/>
+          <p:nvPr/>
+        </p:nvSpPr>
+        <p:spPr>
+          <a:xfrm>
+            <a:off x="4060358" y="5471668"/>
             <a:ext cx="940342" cy="196596"/>
           </a:xfrm>
           <a:prstGeom prst="rect">
@@ -6943,22 +7285,22 @@
                 <a:ea typeface="Roboto" pitchFamily="34" charset="-122"/>
                 <a:cs typeface="Roboto" pitchFamily="34" charset="-120"/>
               </a:rPr>
-              <a:t>66 (47,0+23,8)</a:t>
-            </a:r>
-            <a:endParaRPr lang="en-US" sz="800" dirty="0"/>
-          </a:p>
-        </p:txBody>
-      </p:sp>
-      <p:sp>
-        <p:nvSpPr>
-          <p:cNvPr id="146" name="Text 138"/>
-          <p:cNvSpPr/>
-          <p:nvPr/>
-        </p:nvSpPr>
-        <p:spPr>
-          <a:xfrm>
-            <a:off x="3131498" y="5471668"/>
-            <a:ext cx="807648" cy="196596"/>
+              <a:t>55 (32,6+27,7)</a:t>
+            </a:r>
+            <a:endParaRPr lang="en-US" sz="800" dirty="0"/>
+          </a:p>
+        </p:txBody>
+      </p:sp>
+      <p:sp>
+        <p:nvSpPr>
+          <p:cNvPr id="148" name="Text 140"/>
+          <p:cNvSpPr/>
+          <p:nvPr/>
+        </p:nvSpPr>
+        <p:spPr>
+          <a:xfrm>
+            <a:off x="5055564" y="5471668"/>
+            <a:ext cx="1272078" cy="196596"/>
           </a:xfrm>
           <a:prstGeom prst="rect">
             <a:avLst/>
@@ -6982,22 +7324,22 @@
                 <a:ea typeface="Roboto" pitchFamily="34" charset="-122"/>
                 <a:cs typeface="Roboto" pitchFamily="34" charset="-120"/>
               </a:rPr>
-              <a:t>13 (10,0+2,1)</a:t>
-            </a:r>
-            <a:endParaRPr lang="en-US" sz="800" dirty="0"/>
-          </a:p>
-        </p:txBody>
-      </p:sp>
-      <p:sp>
-        <p:nvSpPr>
-          <p:cNvPr id="147" name="Text 139"/>
-          <p:cNvSpPr/>
-          <p:nvPr/>
-        </p:nvSpPr>
-        <p:spPr>
-          <a:xfrm>
-            <a:off x="3994011" y="5471668"/>
-            <a:ext cx="940342" cy="196596"/>
+              <a:t>4 (7,0+0)</a:t>
+            </a:r>
+            <a:endParaRPr lang="en-US" sz="800" dirty="0"/>
+          </a:p>
+        </p:txBody>
+      </p:sp>
+      <p:sp>
+        <p:nvSpPr>
+          <p:cNvPr id="149" name="Text 141"/>
+          <p:cNvSpPr/>
+          <p:nvPr/>
+        </p:nvSpPr>
+        <p:spPr>
+          <a:xfrm>
+            <a:off x="6382506" y="5471668"/>
+            <a:ext cx="873995" cy="196596"/>
           </a:xfrm>
           <a:prstGeom prst="rect">
             <a:avLst/>
@@ -7021,85 +7363,7 @@
                 <a:ea typeface="Roboto" pitchFamily="34" charset="-122"/>
                 <a:cs typeface="Roboto" pitchFamily="34" charset="-120"/>
               </a:rPr>
-              <a:t>55 (32,6+27,7)</a:t>
-            </a:r>
-            <a:endParaRPr lang="en-US" sz="800" dirty="0"/>
-          </a:p>
-        </p:txBody>
-      </p:sp>
-      <p:sp>
-        <p:nvSpPr>
-          <p:cNvPr id="148" name="Text 140"/>
-          <p:cNvSpPr/>
-          <p:nvPr/>
-        </p:nvSpPr>
-        <p:spPr>
-          <a:xfrm>
-            <a:off x="4989217" y="5471668"/>
-            <a:ext cx="1272078" cy="196596"/>
-          </a:xfrm>
-          <a:prstGeom prst="rect">
-            <a:avLst/>
-          </a:prstGeom>
-          <a:noFill/>
-          <a:ln/>
-        </p:spPr>
-        <p:txBody>
-          <a:bodyPr wrap="square" lIns="0" tIns="0" rIns="0" bIns="0" rtlCol="0" anchor="ctr"/>
-          <a:lstStyle/>
-          <a:p>
-            <a:pPr algn="ctr" indent="0" marL="0">
-              <a:buNone/>
-            </a:pPr>
-            <a:r>
-              <a:rPr lang="en-US" sz="800" b="1" dirty="0">
-                <a:solidFill>
-                  <a:srgbClr val="FFFFFF"/>
-                </a:solidFill>
-                <a:latin typeface="Roboto" pitchFamily="34" charset="0"/>
-                <a:ea typeface="Roboto" pitchFamily="34" charset="-122"/>
-                <a:cs typeface="Roboto" pitchFamily="34" charset="-120"/>
-              </a:rPr>
-              <a:t>4 (3,0+0)</a:t>
-            </a:r>
-            <a:endParaRPr lang="en-US" sz="800" dirty="0"/>
-          </a:p>
-        </p:txBody>
-      </p:sp>
-      <p:sp>
-        <p:nvSpPr>
-          <p:cNvPr id="149" name="Text 141"/>
-          <p:cNvSpPr/>
-          <p:nvPr/>
-        </p:nvSpPr>
-        <p:spPr>
-          <a:xfrm>
-            <a:off x="6316159" y="5471668"/>
-            <a:ext cx="940342" cy="196596"/>
-          </a:xfrm>
-          <a:prstGeom prst="rect">
-            <a:avLst/>
-          </a:prstGeom>
-          <a:noFill/>
-          <a:ln/>
-        </p:spPr>
-        <p:txBody>
-          <a:bodyPr wrap="square" lIns="0" tIns="0" rIns="0" bIns="0" rtlCol="0" anchor="ctr"/>
-          <a:lstStyle/>
-          <a:p>
-            <a:pPr algn="ctr" indent="0" marL="0">
-              <a:buNone/>
-            </a:pPr>
-            <a:r>
-              <a:rPr lang="en-US" sz="800" b="1" dirty="0">
-                <a:solidFill>
-                  <a:srgbClr val="FFFFFF"/>
-                </a:solidFill>
-                <a:latin typeface="Roboto" pitchFamily="34" charset="0"/>
-                <a:ea typeface="Roboto" pitchFamily="34" charset="-122"/>
-                <a:cs typeface="Roboto" pitchFamily="34" charset="-120"/>
-              </a:rPr>
-              <a:t>148 (102,0+53,6)</a:t>
+              <a:t>148 (106,0+53,6)</a:t>
             </a:r>
             <a:endParaRPr lang="en-US" sz="800" dirty="0"/>
           </a:p>
@@ -7108,6 +7372,29 @@
       <p:sp>
         <p:nvSpPr>
           <p:cNvPr id="150" name="Shape 142"/>
+          <p:cNvSpPr/>
+          <p:nvPr/>
+        </p:nvSpPr>
+        <p:spPr>
+          <a:xfrm>
+            <a:off x="676656" y="5668264"/>
+            <a:ext cx="6634709" cy="0"/>
+          </a:xfrm>
+          <a:prstGeom prst="line">
+            <a:avLst/>
+          </a:prstGeom>
+          <a:noFill/>
+          <a:ln w="9525">
+            <a:solidFill>
+              <a:srgbClr val="1A1A1A"/>
+            </a:solidFill>
+            <a:prstDash val="solid"/>
+          </a:ln>
+        </p:spPr>
+      </p:sp>
+      <p:sp>
+        <p:nvSpPr>
+          <p:cNvPr id="151" name="Shape 143"/>
           <p:cNvSpPr/>
           <p:nvPr/>
         </p:nvSpPr>
@@ -7134,7 +7421,7 @@
       </p:sp>
       <p:sp>
         <p:nvSpPr>
-          <p:cNvPr id="151" name="Shape 143"/>
+          <p:cNvPr id="152" name="Shape 144"/>
           <p:cNvSpPr/>
           <p:nvPr/>
         </p:nvSpPr>
@@ -7156,7 +7443,7 @@
       </p:sp>
       <p:sp>
         <p:nvSpPr>
-          <p:cNvPr id="152" name="Shape 144"/>
+          <p:cNvPr id="153" name="Shape 145"/>
           <p:cNvSpPr/>
           <p:nvPr/>
         </p:nvSpPr>
@@ -7176,7 +7463,7 @@
       </p:sp>
       <p:sp>
         <p:nvSpPr>
-          <p:cNvPr id="153" name="Shape 145"/>
+          <p:cNvPr id="154" name="Shape 146"/>
           <p:cNvSpPr/>
           <p:nvPr/>
         </p:nvSpPr>
@@ -7196,7 +7483,7 @@
       </p:sp>
       <p:pic>
         <p:nvPicPr>
-          <p:cNvPr id="154" name="Image 6" descr="/Users/priyankaalfatehan28/.claude/skills/ppt-konsultan/mesin/cache-ikon/map-pin-regular-FFFFFF.png">    </p:cNvPr>
+          <p:cNvPr id="155" name="Image 6" descr="/Users/priyankaalfatehan28/.claude/skills/ppt-konsultan/mesin/cache-ikon/map-pin-regular-FFFFFF.png">    </p:cNvPr>
           <p:cNvPicPr>
             <a:picLocks noChangeAspect="1"/>
           </p:cNvPicPr>
@@ -7220,7 +7507,7 @@
       </p:pic>
       <p:sp>
         <p:nvSpPr>
-          <p:cNvPr id="155" name="Text 146"/>
+          <p:cNvPr id="156" name="Text 147"/>
           <p:cNvSpPr/>
           <p:nvPr/>
         </p:nvSpPr>
@@ -7259,7 +7546,7 @@
       </p:sp>
       <p:sp>
         <p:nvSpPr>
-          <p:cNvPr id="156" name="Text 147"/>
+          <p:cNvPr id="157" name="Text 148"/>
           <p:cNvSpPr/>
           <p:nvPr/>
         </p:nvSpPr>
@@ -7282,9 +7569,9 @@
               <a:buNone/>
             </a:pPr>
             <a:r>
-              <a:rPr lang="en-US" sz="800" b="1" spc="150" kern="0" dirty="0">
-                <a:solidFill>
-                  <a:srgbClr val="6B7280"/>
+              <a:rPr lang="en-US" sz="800" b="1" dirty="0">
+                <a:solidFill>
+                  <a:srgbClr val="1A1A1A"/>
                 </a:solidFill>
                 <a:latin typeface="Roboto" pitchFamily="34" charset="0"/>
                 <a:ea typeface="Roboto" pitchFamily="34" charset="-122"/>
@@ -7298,7 +7585,7 @@
       </p:sp>
       <p:sp>
         <p:nvSpPr>
-          <p:cNvPr id="157" name="Text 148"/>
+          <p:cNvPr id="158" name="Text 149"/>
           <p:cNvSpPr/>
           <p:nvPr/>
         </p:nvSpPr>
@@ -7321,9 +7608,9 @@
               <a:buNone/>
             </a:pPr>
             <a:r>
-              <a:rPr lang="en-US" sz="800" b="1" spc="150" kern="0" dirty="0">
-                <a:solidFill>
-                  <a:srgbClr val="6B7280"/>
+              <a:rPr lang="en-US" sz="800" b="1" dirty="0">
+                <a:solidFill>
+                  <a:srgbClr val="1A1A1A"/>
                 </a:solidFill>
                 <a:latin typeface="Roboto" pitchFamily="34" charset="0"/>
                 <a:ea typeface="Roboto" pitchFamily="34" charset="-122"/>
@@ -7337,7 +7624,7 @@
       </p:sp>
       <p:sp>
         <p:nvSpPr>
-          <p:cNvPr id="158" name="Text 149"/>
+          <p:cNvPr id="159" name="Text 150"/>
           <p:cNvSpPr/>
           <p:nvPr/>
         </p:nvSpPr>
@@ -7360,9 +7647,9 @@
               <a:buNone/>
             </a:pPr>
             <a:r>
-              <a:rPr lang="en-US" sz="800" b="1" spc="150" kern="0" dirty="0">
-                <a:solidFill>
-                  <a:srgbClr val="6B7280"/>
+              <a:rPr lang="en-US" sz="800" b="1" dirty="0">
+                <a:solidFill>
+                  <a:srgbClr val="1A1A1A"/>
                 </a:solidFill>
                 <a:latin typeface="Roboto" pitchFamily="34" charset="0"/>
                 <a:ea typeface="Roboto" pitchFamily="34" charset="-122"/>
@@ -7376,7 +7663,7 @@
       </p:sp>
       <p:sp>
         <p:nvSpPr>
-          <p:cNvPr id="159" name="Text 150"/>
+          <p:cNvPr id="160" name="Text 151"/>
           <p:cNvSpPr/>
           <p:nvPr/>
         </p:nvSpPr>
@@ -7399,9 +7686,9 @@
               <a:buNone/>
             </a:pPr>
             <a:r>
-              <a:rPr lang="en-US" sz="800" b="1" spc="150" kern="0" dirty="0">
-                <a:solidFill>
-                  <a:srgbClr val="6B7280"/>
+              <a:rPr lang="en-US" sz="800" b="1" dirty="0">
+                <a:solidFill>
+                  <a:srgbClr val="1A1A1A"/>
                 </a:solidFill>
                 <a:latin typeface="Roboto" pitchFamily="34" charset="0"/>
                 <a:ea typeface="Roboto" pitchFamily="34" charset="-122"/>
@@ -7415,7 +7702,7 @@
       </p:sp>
       <p:sp>
         <p:nvSpPr>
-          <p:cNvPr id="160" name="Shape 151"/>
+          <p:cNvPr id="161" name="Shape 152"/>
           <p:cNvSpPr/>
           <p:nvPr/>
         </p:nvSpPr>
@@ -7438,7 +7725,7 @@
       </p:sp>
       <p:sp>
         <p:nvSpPr>
-          <p:cNvPr id="161" name="Text 152"/>
+          <p:cNvPr id="162" name="Text 153"/>
           <p:cNvSpPr/>
           <p:nvPr/>
         </p:nvSpPr>
@@ -7477,7 +7764,7 @@
       </p:sp>
       <p:sp>
         <p:nvSpPr>
-          <p:cNvPr id="162" name="Text 153"/>
+          <p:cNvPr id="163" name="Text 154"/>
           <p:cNvSpPr/>
           <p:nvPr/>
         </p:nvSpPr>
@@ -7516,7 +7803,7 @@
       </p:sp>
       <p:sp>
         <p:nvSpPr>
-          <p:cNvPr id="163" name="Text 154"/>
+          <p:cNvPr id="164" name="Text 155"/>
           <p:cNvSpPr/>
           <p:nvPr/>
         </p:nvSpPr>
@@ -7555,7 +7842,7 @@
       </p:sp>
       <p:sp>
         <p:nvSpPr>
-          <p:cNvPr id="164" name="Text 155"/>
+          <p:cNvPr id="165" name="Text 156"/>
           <p:cNvSpPr/>
           <p:nvPr/>
         </p:nvSpPr>
@@ -7594,7 +7881,7 @@
       </p:sp>
       <p:sp>
         <p:nvSpPr>
-          <p:cNvPr id="165" name="Shape 156"/>
+          <p:cNvPr id="166" name="Shape 157"/>
           <p:cNvSpPr/>
           <p:nvPr/>
         </p:nvSpPr>
@@ -7617,7 +7904,7 @@
       </p:sp>
       <p:sp>
         <p:nvSpPr>
-          <p:cNvPr id="166" name="Text 157"/>
+          <p:cNvPr id="167" name="Text 158"/>
           <p:cNvSpPr/>
           <p:nvPr/>
         </p:nvSpPr>
@@ -7656,7 +7943,7 @@
       </p:sp>
       <p:sp>
         <p:nvSpPr>
-          <p:cNvPr id="167" name="Text 158"/>
+          <p:cNvPr id="168" name="Text 159"/>
           <p:cNvSpPr/>
           <p:nvPr/>
         </p:nvSpPr>
@@ -7695,7 +7982,7 @@
       </p:sp>
       <p:sp>
         <p:nvSpPr>
-          <p:cNvPr id="168" name="Text 159"/>
+          <p:cNvPr id="169" name="Text 160"/>
           <p:cNvSpPr/>
           <p:nvPr/>
         </p:nvSpPr>
@@ -7734,7 +8021,7 @@
       </p:sp>
       <p:sp>
         <p:nvSpPr>
-          <p:cNvPr id="169" name="Text 160"/>
+          <p:cNvPr id="170" name="Text 161"/>
           <p:cNvSpPr/>
           <p:nvPr/>
         </p:nvSpPr>
@@ -7773,7 +8060,7 @@
       </p:sp>
       <p:sp>
         <p:nvSpPr>
-          <p:cNvPr id="170" name="Shape 161"/>
+          <p:cNvPr id="171" name="Shape 162"/>
           <p:cNvSpPr/>
           <p:nvPr/>
         </p:nvSpPr>
@@ -7796,7 +8083,7 @@
       </p:sp>
       <p:sp>
         <p:nvSpPr>
-          <p:cNvPr id="171" name="Text 162"/>
+          <p:cNvPr id="172" name="Text 163"/>
           <p:cNvSpPr/>
           <p:nvPr/>
         </p:nvSpPr>
@@ -7835,7 +8122,7 @@
       </p:sp>
       <p:sp>
         <p:nvSpPr>
-          <p:cNvPr id="172" name="Text 163"/>
+          <p:cNvPr id="173" name="Text 164"/>
           <p:cNvSpPr/>
           <p:nvPr/>
         </p:nvSpPr>
@@ -7874,7 +8161,7 @@
       </p:sp>
       <p:sp>
         <p:nvSpPr>
-          <p:cNvPr id="173" name="Text 164"/>
+          <p:cNvPr id="174" name="Text 165"/>
           <p:cNvSpPr/>
           <p:nvPr/>
         </p:nvSpPr>
@@ -7913,7 +8200,7 @@
       </p:sp>
       <p:sp>
         <p:nvSpPr>
-          <p:cNvPr id="174" name="Text 165"/>
+          <p:cNvPr id="175" name="Text 166"/>
           <p:cNvSpPr/>
           <p:nvPr/>
         </p:nvSpPr>
@@ -7952,7 +8239,7 @@
       </p:sp>
       <p:sp>
         <p:nvSpPr>
-          <p:cNvPr id="175" name="Shape 166"/>
+          <p:cNvPr id="176" name="Shape 167"/>
           <p:cNvSpPr/>
           <p:nvPr/>
         </p:nvSpPr>
@@ -7975,7 +8262,7 @@
       </p:sp>
       <p:sp>
         <p:nvSpPr>
-          <p:cNvPr id="176" name="Text 167"/>
+          <p:cNvPr id="177" name="Text 168"/>
           <p:cNvSpPr/>
           <p:nvPr/>
         </p:nvSpPr>
@@ -8014,7 +8301,7 @@
       </p:sp>
       <p:sp>
         <p:nvSpPr>
-          <p:cNvPr id="177" name="Text 168"/>
+          <p:cNvPr id="178" name="Text 169"/>
           <p:cNvSpPr/>
           <p:nvPr/>
         </p:nvSpPr>
@@ -8053,7 +8340,7 @@
       </p:sp>
       <p:sp>
         <p:nvSpPr>
-          <p:cNvPr id="178" name="Text 169"/>
+          <p:cNvPr id="179" name="Text 170"/>
           <p:cNvSpPr/>
           <p:nvPr/>
         </p:nvSpPr>
@@ -8092,7 +8379,7 @@
       </p:sp>
       <p:sp>
         <p:nvSpPr>
-          <p:cNvPr id="179" name="Text 170"/>
+          <p:cNvPr id="180" name="Text 171"/>
           <p:cNvSpPr/>
           <p:nvPr/>
         </p:nvSpPr>
@@ -8131,7 +8418,7 @@
       </p:sp>
       <p:sp>
         <p:nvSpPr>
-          <p:cNvPr id="180" name="Shape 171"/>
+          <p:cNvPr id="181" name="Shape 172"/>
           <p:cNvSpPr/>
           <p:nvPr/>
         </p:nvSpPr>
@@ -8154,7 +8441,7 @@
       </p:sp>
       <p:sp>
         <p:nvSpPr>
-          <p:cNvPr id="181" name="Text 172"/>
+          <p:cNvPr id="182" name="Text 173"/>
           <p:cNvSpPr/>
           <p:nvPr/>
         </p:nvSpPr>
@@ -8193,7 +8480,7 @@
       </p:sp>
       <p:sp>
         <p:nvSpPr>
-          <p:cNvPr id="182" name="Text 173"/>
+          <p:cNvPr id="183" name="Text 174"/>
           <p:cNvSpPr/>
           <p:nvPr/>
         </p:nvSpPr>
@@ -8232,7 +8519,7 @@
       </p:sp>
       <p:sp>
         <p:nvSpPr>
-          <p:cNvPr id="183" name="Text 174"/>
+          <p:cNvPr id="184" name="Text 175"/>
           <p:cNvSpPr/>
           <p:nvPr/>
         </p:nvSpPr>
@@ -8263,15 +8550,15 @@
                 <a:ea typeface="Roboto" pitchFamily="34" charset="-122"/>
                 <a:cs typeface="Roboto" pitchFamily="34" charset="-120"/>
               </a:rPr>
-              <a:t>3,0</a:t>
-            </a:r>
-            <a:endParaRPr lang="en-US" sz="800" dirty="0"/>
-          </a:p>
-        </p:txBody>
-      </p:sp>
-      <p:sp>
-        <p:nvSpPr>
-          <p:cNvPr id="184" name="Text 175"/>
+              <a:t>7,0</a:t>
+            </a:r>
+            <a:endParaRPr lang="en-US" sz="800" dirty="0"/>
+          </a:p>
+        </p:txBody>
+      </p:sp>
+      <p:sp>
+        <p:nvSpPr>
+          <p:cNvPr id="185" name="Text 176"/>
           <p:cNvSpPr/>
           <p:nvPr/>
         </p:nvSpPr>
@@ -8310,14 +8597,37 @@
       </p:sp>
       <p:sp>
         <p:nvSpPr>
-          <p:cNvPr id="185" name="Text 176"/>
+          <p:cNvPr id="186" name="Shape 177"/>
+          <p:cNvSpPr/>
+          <p:nvPr/>
+        </p:nvSpPr>
+        <p:spPr>
+          <a:xfrm>
+            <a:off x="7704557" y="4095496"/>
+            <a:ext cx="3807739" cy="0"/>
+          </a:xfrm>
+          <a:prstGeom prst="line">
+            <a:avLst/>
+          </a:prstGeom>
+          <a:noFill/>
+          <a:ln w="9525">
+            <a:solidFill>
+              <a:srgbClr val="1A1A1A"/>
+            </a:solidFill>
+            <a:prstDash val="solid"/>
+          </a:ln>
+        </p:spPr>
+      </p:sp>
+      <p:sp>
+        <p:nvSpPr>
+          <p:cNvPr id="187" name="Text 178"/>
           <p:cNvSpPr/>
           <p:nvPr/>
         </p:nvSpPr>
         <p:spPr>
           <a:xfrm>
             <a:off x="7704557" y="4269232"/>
-            <a:ext cx="3807739" cy="1577340"/>
+            <a:ext cx="3807739" cy="1691640"/>
           </a:xfrm>
           <a:prstGeom prst="rect">
             <a:avLst/>
@@ -8353,7 +8663,7 @@
                 <a:ea typeface="Roboto" pitchFamily="34" charset="-122"/>
                 <a:cs typeface="Roboto" pitchFamily="34" charset="-120"/>
               </a:rPr>
-              <a:t> dry ice di Palangka Raya; NaCl di Katingan, Pulang Pisau, Palangka Raya, Kotawaringin Timur, Kotawaringin Barat, Kapuas, Barito Selatan, Seruyan.</a:t>
+              <a:t> dry ice di Palangka Raya; NaCl di Katingan, Pulang Pisau, Palangka Raya, Kotawaringin Timur dan Barat, Kapuas.</a:t>
             </a:r>
             <a:endParaRPr lang="en-US" sz="800" dirty="0"/>
           </a:p>
@@ -8385,7 +8695,7 @@
                 <a:ea typeface="Roboto" pitchFamily="34" charset="-122"/>
                 <a:cs typeface="Roboto" pitchFamily="34" charset="-120"/>
               </a:rPr>
-              <a:t> dry ice di Palembang dan sekitarnya; NaCl di OKI, Banyuasin, Ogan Ilir, Musi Banyuasin.</a:t>
+              <a:t> dry ice di Palembang dan sekitarnya; NaCl di OKI, Banyuasin, Ogan Ilir.</a:t>
             </a:r>
             <a:endParaRPr lang="en-US" sz="800" dirty="0"/>
           </a:p>
@@ -8417,7 +8727,7 @@
                 <a:ea typeface="Roboto" pitchFamily="34" charset="-122"/>
                 <a:cs typeface="Roboto" pitchFamily="34" charset="-120"/>
               </a:rPr>
-              <a:t> dry ice di Banjarbaru dan Banjarmasin (27 Okt); NaCl di Kotabaru, Barito Kuala, Banjar, Tanah Bumbu.</a:t>
+              <a:t> dry ice di Banjarbaru dan Banjarmasin (27 Okt); NaCl di Kotabaru, Barito Kuala, Banjar.</a:t>
             </a:r>
             <a:endParaRPr lang="en-US" sz="800" dirty="0"/>
           </a:p>
@@ -8471,7 +8781,7 @@
                 <a:ea typeface="Roboto" pitchFamily="34" charset="-122"/>
                 <a:cs typeface="Roboto" pitchFamily="34" charset="-120"/>
               </a:rPr>
-              <a:t> Jatim (Malang, Pasuruan, Jember) dan Papua Selatan (Merauke, Mappi).</a:t>
+              <a:t> Jatim (Malang, Pasuruan, Jember), Papua Selatan (Merauke, Mappi), Lampung (22 Okt 1 sortie; 23 dan 24 Okt NaCl 2,0 ton per hari, sortie tidak tertulis).</a:t>
             </a:r>
             <a:endParaRPr lang="en-US" sz="800" dirty="0"/>
           </a:p>
@@ -8503,7 +8813,7 @@
                 <a:ea typeface="Roboto" pitchFamily="34" charset="-122"/>
                 <a:cs typeface="Roboto" pitchFamily="34" charset="-120"/>
               </a:rPr>
-              <a:t> Jatim 24–25 Okt 2 sortie 2,0 ton; Jabar PK-ALA 1 sortie 1,0 ton (tanpa tanggal); Kaltim 30 sortie 28,8 ton (rekap posko, tanpa periode).</a:t>
+              <a:t> Jatim 24–25 Okt 2 sortie 2,0 ton; Jabar PK-ALA 1 sortie 1,0 ton (tanpa tanggal); Jabar (Kertajati) mulai 24 Okt tanpa rincian sortie dan bahan; Kaltim 30 sortie 28,8 ton (rekap posko, tanpa periode).</a:t>
             </a:r>
             <a:endParaRPr lang="en-US" sz="800" dirty="0"/>
           </a:p>
@@ -8764,8 +9074,8 @@
         </p:nvSpPr>
         <p:spPr>
           <a:xfrm>
-            <a:off x="548640" y="6181344"/>
-            <a:ext cx="36576" cy="164592"/>
+            <a:off x="548640" y="6199632"/>
+            <a:ext cx="45720" cy="219456"/>
           </a:xfrm>
           <a:prstGeom prst="rect">
             <a:avLst/>
@@ -8801,17 +9111,28 @@
               <a:buNone/>
             </a:pPr>
             <a:r>
-              <a:rPr lang="en-US" sz="800" dirty="0">
-                <a:solidFill>
-                  <a:srgbClr val="6B7280"/>
-                </a:solidFill>
-                <a:latin typeface="Roboto" pitchFamily="34" charset="0"/>
-                <a:ea typeface="Roboto" pitchFamily="34" charset="-122"/>
-                <a:cs typeface="Roboto" pitchFamily="34" charset="-120"/>
-              </a:rPr>
-              <a:t>Sumber: Laporan Penanganan Karhutla BNPB 17–27 Okt 2026; Resume Posko Terpadu OMC 27 Okt 2026; BPBD Jatim; radar BMKG. Hujan di wilayah sasaran pada hari yang sama menurut laporan harian dan radar</a:t>
-            </a:r>
-            <a:endParaRPr lang="en-US" sz="800" dirty="0"/>
+              <a:rPr lang="en-US" sz="900" b="1" dirty="0">
+                <a:solidFill>
+                  <a:srgbClr val="1A1A1A"/>
+                </a:solidFill>
+                <a:latin typeface="Roboto" pitchFamily="34" charset="0"/>
+                <a:ea typeface="Roboto" pitchFamily="34" charset="-122"/>
+                <a:cs typeface="Roboto" pitchFamily="34" charset="-120"/>
+              </a:rPr>
+              <a:t>Sumber: </a:t>
+            </a:r>
+            <a:r>
+              <a:rPr lang="en-US" sz="900" i="1" dirty="0">
+                <a:solidFill>
+                  <a:srgbClr val="1A1A1A"/>
+                </a:solidFill>
+                <a:latin typeface="Roboto" pitchFamily="34" charset="0"/>
+                <a:ea typeface="Roboto" pitchFamily="34" charset="-122"/>
+                <a:cs typeface="Roboto" pitchFamily="34" charset="-120"/>
+              </a:rPr>
+              <a:t>Laporan Penanganan Karhutla BNPB 17–27 Okt 2026; Resume Posko Terpadu OMC 27 Okt 2026; BPBD Jatim; radar BMKG</a:t>
+            </a:r>
+            <a:endParaRPr lang="en-US" sz="900" dirty="0"/>
           </a:p>
         </p:txBody>
       </p:sp>
@@ -9465,9 +9786,9 @@
               <a:buNone/>
             </a:pPr>
             <a:r>
-              <a:rPr lang="en-US" sz="800" b="1" spc="150" kern="0" dirty="0">
-                <a:solidFill>
-                  <a:srgbClr val="6B7280"/>
+              <a:rPr lang="en-US" sz="800" b="1" dirty="0">
+                <a:solidFill>
+                  <a:srgbClr val="1A1A1A"/>
                 </a:solidFill>
                 <a:latin typeface="Roboto" pitchFamily="34" charset="0"/>
                 <a:ea typeface="Roboto" pitchFamily="34" charset="-122"/>
@@ -9504,9 +9825,9 @@
               <a:buNone/>
             </a:pPr>
             <a:r>
-              <a:rPr lang="en-US" sz="800" b="1" spc="150" kern="0" dirty="0">
-                <a:solidFill>
-                  <a:srgbClr val="6B7280"/>
+              <a:rPr lang="en-US" sz="800" b="1" dirty="0">
+                <a:solidFill>
+                  <a:srgbClr val="1A1A1A"/>
                 </a:solidFill>
                 <a:latin typeface="Roboto" pitchFamily="34" charset="0"/>
                 <a:ea typeface="Roboto" pitchFamily="34" charset="-122"/>
@@ -9543,9 +9864,9 @@
               <a:buNone/>
             </a:pPr>
             <a:r>
-              <a:rPr lang="en-US" sz="800" b="1" spc="150" kern="0" dirty="0">
-                <a:solidFill>
-                  <a:srgbClr val="6B7280"/>
+              <a:rPr lang="en-US" sz="800" b="1" dirty="0">
+                <a:solidFill>
+                  <a:srgbClr val="1A1A1A"/>
                 </a:solidFill>
                 <a:latin typeface="Roboto" pitchFamily="34" charset="0"/>
                 <a:ea typeface="Roboto" pitchFamily="34" charset="-122"/>
@@ -9582,9 +9903,9 @@
               <a:buNone/>
             </a:pPr>
             <a:r>
-              <a:rPr lang="en-US" sz="800" b="1" spc="150" kern="0" dirty="0">
-                <a:solidFill>
-                  <a:srgbClr val="6B7280"/>
+              <a:rPr lang="en-US" sz="800" b="1" dirty="0">
+                <a:solidFill>
+                  <a:srgbClr val="1A1A1A"/>
                 </a:solidFill>
                 <a:latin typeface="Roboto" pitchFamily="34" charset="0"/>
                 <a:ea typeface="Roboto" pitchFamily="34" charset="-122"/>
@@ -10494,6 +10815,29 @@
       <p:sp>
         <p:nvSpPr>
           <p:cNvPr id="59" name="Shape 53"/>
+          <p:cNvSpPr/>
+          <p:nvPr/>
+        </p:nvSpPr>
+        <p:spPr>
+          <a:xfrm>
+            <a:off x="676656" y="4892040"/>
+            <a:ext cx="6921062" cy="0"/>
+          </a:xfrm>
+          <a:prstGeom prst="line">
+            <a:avLst/>
+          </a:prstGeom>
+          <a:noFill/>
+          <a:ln w="9525">
+            <a:solidFill>
+              <a:srgbClr val="1A1A1A"/>
+            </a:solidFill>
+            <a:prstDash val="solid"/>
+          </a:ln>
+        </p:spPr>
+      </p:sp>
+      <p:sp>
+        <p:nvSpPr>
+          <p:cNvPr id="60" name="Shape 54"/>
           <p:cNvSpPr/>
           <p:nvPr/>
         </p:nvSpPr>
@@ -10520,7 +10864,7 @@
       </p:sp>
       <p:sp>
         <p:nvSpPr>
-          <p:cNvPr id="60" name="Shape 54"/>
+          <p:cNvPr id="61" name="Shape 55"/>
           <p:cNvSpPr/>
           <p:nvPr/>
         </p:nvSpPr>
@@ -10542,7 +10886,7 @@
       </p:sp>
       <p:sp>
         <p:nvSpPr>
-          <p:cNvPr id="61" name="Shape 55"/>
+          <p:cNvPr id="62" name="Shape 56"/>
           <p:cNvSpPr/>
           <p:nvPr/>
         </p:nvSpPr>
@@ -10562,7 +10906,7 @@
       </p:sp>
       <p:sp>
         <p:nvSpPr>
-          <p:cNvPr id="62" name="Shape 56"/>
+          <p:cNvPr id="63" name="Shape 57"/>
           <p:cNvSpPr/>
           <p:nvPr/>
         </p:nvSpPr>
@@ -10582,7 +10926,7 @@
       </p:sp>
       <p:pic>
         <p:nvPicPr>
-          <p:cNvPr id="63" name="Image 4" descr="/Users/priyankaalfatehan28/.claude/skills/ppt-konsultan/mesin/cache-ikon/warning-regular-FFFFFF.png">    </p:cNvPr>
+          <p:cNvPr id="64" name="Image 4" descr="/Users/priyankaalfatehan28/.claude/skills/ppt-konsultan/mesin/cache-ikon/warning-regular-FFFFFF.png">    </p:cNvPr>
           <p:cNvPicPr>
             <a:picLocks noChangeAspect="1"/>
           </p:cNvPicPr>
@@ -10606,7 +10950,7 @@
       </p:pic>
       <p:sp>
         <p:nvSpPr>
-          <p:cNvPr id="64" name="Text 57"/>
+          <p:cNvPr id="65" name="Text 58"/>
           <p:cNvSpPr/>
           <p:nvPr/>
         </p:nvSpPr>
@@ -10637,7 +10981,7 @@
                 <a:ea typeface="Roboto" pitchFamily="34" charset="-122"/>
                 <a:cs typeface="Roboto" pitchFamily="34" charset="-120"/>
               </a:rPr>
-              <a:t>Catatan jujur tentang pembacaan hujan</a:t>
+              <a:t>Cara membaca angka hujan ini</a:t>
             </a:r>
             <a:endParaRPr lang="en-US" sz="1000" dirty="0"/>
           </a:p>
@@ -10645,7 +10989,7 @@
       </p:sp>
       <p:sp>
         <p:nvSpPr>
-          <p:cNvPr id="65" name="Text 58"/>
+          <p:cNvPr id="66" name="Text 59"/>
           <p:cNvSpPr/>
           <p:nvPr/>
         </p:nvSpPr>
@@ -10684,7 +11028,7 @@
       </p:sp>
       <p:sp>
         <p:nvSpPr>
-          <p:cNvPr id="66" name="Text 59"/>
+          <p:cNvPr id="67" name="Text 60"/>
           <p:cNvSpPr/>
           <p:nvPr/>
         </p:nvSpPr>
@@ -10715,15 +11059,15 @@
                 <a:ea typeface="Roboto" pitchFamily="34" charset="-122"/>
                 <a:cs typeface="Roboto" pitchFamily="34" charset="-120"/>
               </a:rPr>
-              <a:t>hari operasi Kalbar dengan hujan di Ketapang</a:t>
-            </a:r>
-            <a:endParaRPr lang="en-US" sz="800" dirty="0"/>
-          </a:p>
-        </p:txBody>
-      </p:sp>
-      <p:sp>
-        <p:nvSpPr>
-          <p:cNvPr id="67" name="Shape 60"/>
+              <a:t>hari OMC di Kalbar, Ketapang selalu dilaporkan hujan</a:t>
+            </a:r>
+            <a:endParaRPr lang="en-US" sz="800" dirty="0"/>
+          </a:p>
+        </p:txBody>
+      </p:sp>
+      <p:sp>
+        <p:nvSpPr>
+          <p:cNvPr id="68" name="Shape 61"/>
           <p:cNvSpPr/>
           <p:nvPr/>
         </p:nvSpPr>
@@ -10746,7 +11090,7 @@
       </p:sp>
       <p:sp>
         <p:nvSpPr>
-          <p:cNvPr id="68" name="Text 61"/>
+          <p:cNvPr id="69" name="Text 62"/>
           <p:cNvSpPr/>
           <p:nvPr/>
         </p:nvSpPr>
@@ -10785,7 +11129,7 @@
       </p:sp>
       <p:sp>
         <p:nvSpPr>
-          <p:cNvPr id="69" name="Text 62"/>
+          <p:cNvPr id="70" name="Text 63"/>
           <p:cNvSpPr/>
           <p:nvPr/>
         </p:nvSpPr>
@@ -10816,15 +11160,15 @@
                 <a:ea typeface="Roboto" pitchFamily="34" charset="-122"/>
                 <a:cs typeface="Roboto" pitchFamily="34" charset="-120"/>
               </a:rPr>
-              <a:t>hari operasi Kalteng dengan hujan di Kotawaringin Barat</a:t>
-            </a:r>
-            <a:endParaRPr lang="en-US" sz="800" dirty="0"/>
-          </a:p>
-        </p:txBody>
-      </p:sp>
-      <p:sp>
-        <p:nvSpPr>
-          <p:cNvPr id="70" name="Shape 63"/>
+              <a:t>hari OMC di Kalteng, Kotawaringin Barat dilaporkan hujan</a:t>
+            </a:r>
+            <a:endParaRPr lang="en-US" sz="800" dirty="0"/>
+          </a:p>
+        </p:txBody>
+      </p:sp>
+      <p:sp>
+        <p:nvSpPr>
+          <p:cNvPr id="71" name="Shape 64"/>
           <p:cNvSpPr/>
           <p:nvPr/>
         </p:nvSpPr>
@@ -10847,7 +11191,7 @@
       </p:sp>
       <p:sp>
         <p:nvSpPr>
-          <p:cNvPr id="71" name="Text 64"/>
+          <p:cNvPr id="72" name="Text 65"/>
           <p:cNvSpPr/>
           <p:nvPr/>
         </p:nvSpPr>
@@ -10878,7 +11222,7 @@
                 <a:ea typeface="Roboto" pitchFamily="34" charset="-122"/>
                 <a:cs typeface="Roboto" pitchFamily="34" charset="-120"/>
               </a:rPr>
-              <a:t>6 dari 11</a:t>
+              <a:t>6 hari</a:t>
             </a:r>
             <a:endParaRPr lang="en-US" sz="1400" dirty="0"/>
           </a:p>
@@ -10886,7 +11230,7 @@
       </p:sp>
       <p:sp>
         <p:nvSpPr>
-          <p:cNvPr id="72" name="Text 65"/>
+          <p:cNvPr id="73" name="Text 66"/>
           <p:cNvSpPr/>
           <p:nvPr/>
         </p:nvSpPr>
@@ -10917,15 +11261,15 @@
                 <a:ea typeface="Roboto" pitchFamily="34" charset="-122"/>
                 <a:cs typeface="Roboto" pitchFamily="34" charset="-120"/>
               </a:rPr>
-              <a:t>hari operasi Sumsel (16–21 Okt) hanya hujan sangat ringan atau tanpa laporan hujan</a:t>
-            </a:r>
-            <a:endParaRPr lang="en-US" sz="800" dirty="0"/>
-          </a:p>
-        </p:txBody>
-      </p:sp>
-      <p:sp>
-        <p:nvSpPr>
-          <p:cNvPr id="73" name="Text 66"/>
+              <a:t>OMC pertama di Sumsel (16 sampai 21 Okt) nyaris tanpa hujan</a:t>
+            </a:r>
+            <a:endParaRPr lang="en-US" sz="800" dirty="0"/>
+          </a:p>
+        </p:txBody>
+      </p:sp>
+      <p:sp>
+        <p:nvSpPr>
+          <p:cNvPr id="74" name="Text 67"/>
           <p:cNvSpPr/>
           <p:nvPr/>
         </p:nvSpPr>
@@ -10968,7 +11312,7 @@
                 <a:ea typeface="Roboto" pitchFamily="34" charset="-122"/>
                 <a:cs typeface="Roboto" pitchFamily="34" charset="-120"/>
               </a:rPr>
-              <a:t> Kalbar 22 Okt (tanpa sortie) dan 26 Okt (tanpa OMC sejak pesawat pindah), serta Jambi 26 Okt (ringan sampai sedang di Tanjung Jabung Timur).</a:t>
+              <a:t> Kalbar 22 dan 26 Okt (tidak ada penyemaian) dan Jambi 26 Okt tetap hujan.</a:t>
             </a:r>
             <a:endParaRPr lang="en-US" sz="800" dirty="0"/>
           </a:p>
@@ -10989,7 +11333,7 @@
                 <a:ea typeface="Roboto" pitchFamily="34" charset="-122"/>
                 <a:cs typeface="Roboto" pitchFamily="34" charset="-120"/>
               </a:rPr>
-              <a:t>Lokasi sama belum berarti sebab.</a:t>
+              <a:t>Hujan di lokasi sasaran belum tentu karena OMC.</a:t>
             </a:r>
             <a:r>
               <a:rPr lang="en-US" sz="800" dirty="0">
@@ -11000,7 +11344,7 @@
                 <a:ea typeface="Roboto" pitchFamily="34" charset="-122"/>
                 <a:cs typeface="Roboto" pitchFamily="34" charset="-120"/>
               </a:rPr>
-              <a:t> Kesesuaian lokasi atau waktu dengan sasaran belum membuktikan sebab-akibat.</a:t>
+              <a:t> Oktober adalah awal musim hujan, jadi hujan bisa turun dengan atau tanpa penyemaian.</a:t>
             </a:r>
             <a:endParaRPr lang="en-US" sz="800" dirty="0"/>
           </a:p>
@@ -11021,7 +11365,7 @@
                 <a:ea typeface="Roboto" pitchFamily="34" charset="-122"/>
                 <a:cs typeface="Roboto" pitchFamily="34" charset="-120"/>
               </a:rPr>
-              <a:t>Evaluasi terukur belum bisa.</a:t>
+              <a:t>Persentase hasil OMC belum bisa dihitung.</a:t>
             </a:r>
             <a:r>
               <a:rPr lang="en-US" sz="800" dirty="0">
@@ -11032,7 +11376,7 @@
                 <a:ea typeface="Roboto" pitchFamily="34" charset="-122"/>
                 <a:cs typeface="Roboto" pitchFamily="34" charset="-120"/>
               </a:rPr>
-              <a:t> Pembanding dengan wilayah kontrol (difference-in-differences) membutuhkan jam sortie, yang jarang tercatat.</a:t>
+              <a:t> Caranya membandingkan wilayah yang disemai dengan yang tidak, pada jam yang sama; jam terbang tiap sortie jarang dicatat.</a:t>
             </a:r>
             <a:endParaRPr lang="en-US" sz="800" dirty="0"/>
           </a:p>
@@ -11053,7 +11397,7 @@
                 <a:ea typeface="Roboto" pitchFamily="34" charset="-122"/>
                 <a:cs typeface="Roboto" pitchFamily="34" charset="-120"/>
               </a:rPr>
-              <a:t>Arsip PM2,5 BMKG terhenti 23 Okt</a:t>
+              <a:t>Efek ke asap belum bisa dihitung.</a:t>
             </a:r>
             <a:r>
               <a:rPr lang="en-US" sz="800" dirty="0">
@@ -11064,7 +11408,7 @@
                 <a:ea typeface="Roboto" pitchFamily="34" charset="-122"/>
                 <a:cs typeface="Roboto" pitchFamily="34" charset="-120"/>
               </a:rPr>
-              <a:t>, sehingga 27 Okt tidak punya pembanding sebelum dan sesudah sortie.</a:t>
+              <a:t> Data PM2,5 BMKG di sistem terhenti sejak 23 Okt.</a:t>
             </a:r>
             <a:endParaRPr lang="en-US" sz="800" dirty="0"/>
           </a:p>
@@ -11085,7 +11429,7 @@
                 <a:ea typeface="Roboto" pitchFamily="34" charset="-122"/>
                 <a:cs typeface="Roboto" pitchFamily="34" charset="-120"/>
               </a:rPr>
-              <a:t>Sumber hujan adalah radar dan laporan harian</a:t>
+              <a:t>Sumber hujan masih laporan harian dan radar</a:t>
             </a:r>
             <a:r>
               <a:rPr lang="en-US" sz="800" dirty="0">
@@ -11096,7 +11440,7 @@
                 <a:ea typeface="Roboto" pitchFamily="34" charset="-122"/>
                 <a:cs typeface="Roboto" pitchFamily="34" charset="-120"/>
               </a:rPr>
-              <a:t>; tidak ada alat ukur di titik sasaran, dan intensitas mengikuti sumber.</a:t>
+              <a:t>, belum dicek dengan alat ukur hujan; pengecekan dengan data satelit sedang berjalan.</a:t>
             </a:r>
             <a:endParaRPr lang="en-US" sz="800" dirty="0"/>
           </a:p>
@@ -11210,7 +11554,7 @@
                 <a:ea typeface="Roboto" pitchFamily="34" charset="-122"/>
                 <a:cs typeface="Roboto" pitchFamily="34" charset="-120"/>
               </a:rPr>
-              <a:t>Bukti dunia: penyemaian higroskopis paling banyak menambah sekitar </a:t>
+              <a:t>Bukti dunia: penyemaian garam paling banyak menambah sekitar </a:t>
             </a:r>
             <a:r>
               <a:rPr lang="en-US" sz="2200" b="1" dirty="0">
@@ -11357,8 +11701,8 @@
         </p:nvSpPr>
         <p:spPr>
           <a:xfrm>
-            <a:off x="548640" y="6181344"/>
-            <a:ext cx="36576" cy="164592"/>
+            <a:off x="548640" y="6199632"/>
+            <a:ext cx="45720" cy="219456"/>
           </a:xfrm>
           <a:prstGeom prst="rect">
             <a:avLst/>
@@ -11394,17 +11738,28 @@
               <a:buNone/>
             </a:pPr>
             <a:r>
-              <a:rPr lang="en-US" sz="800" dirty="0">
-                <a:solidFill>
-                  <a:srgbClr val="6B7280"/>
-                </a:solidFill>
-                <a:latin typeface="Roboto" pitchFamily="34" charset="0"/>
-                <a:ea typeface="Roboto" pitchFamily="34" charset="-122"/>
-                <a:cs typeface="Roboto" pitchFamily="34" charset="-120"/>
-              </a:rPr>
-              <a:t>Sumber: WMO 2025; IITM 2023 (CAIPEEX-IV); Israel-4; Silverman 2003; BRIN 19 Okt 2026; BMKG Jul 2025; BNPB 21 Okt 2026. Angka CAIPEEX-IV dari siaran IITM; kebutuhan sampel adalah perkiraan kasar hitungan sendiri</a:t>
-            </a:r>
-            <a:endParaRPr lang="en-US" sz="800" dirty="0"/>
+              <a:rPr lang="en-US" sz="900" b="1" dirty="0">
+                <a:solidFill>
+                  <a:srgbClr val="1A1A1A"/>
+                </a:solidFill>
+                <a:latin typeface="Roboto" pitchFamily="34" charset="0"/>
+                <a:ea typeface="Roboto" pitchFamily="34" charset="-122"/>
+                <a:cs typeface="Roboto" pitchFamily="34" charset="-120"/>
+              </a:rPr>
+              <a:t>Sumber: </a:t>
+            </a:r>
+            <a:r>
+              <a:rPr lang="en-US" sz="900" i="1" dirty="0">
+                <a:solidFill>
+                  <a:srgbClr val="1A1A1A"/>
+                </a:solidFill>
+                <a:latin typeface="Roboto" pitchFamily="34" charset="0"/>
+                <a:ea typeface="Roboto" pitchFamily="34" charset="-122"/>
+                <a:cs typeface="Roboto" pitchFamily="34" charset="-120"/>
+              </a:rPr>
+              <a:t>WMO 2025; IITM 2023 (CAIPEEX-IV); Israel-4; Silverman 2003; BRIN 19 Okt 2026; BMKG Jul 2025; BNPB 21 Okt 2026</a:t>
+            </a:r>
+            <a:endParaRPr lang="en-US" sz="900" dirty="0"/>
           </a:p>
         </p:txBody>
       </p:sp>
@@ -11417,11 +11772,11 @@
         <p:spPr>
           <a:xfrm>
             <a:off x="548640" y="1280160"/>
-            <a:ext cx="3852756" cy="4809744"/>
+            <a:ext cx="3949192" cy="4809744"/>
           </a:xfrm>
           <a:prstGeom prst="roundRect">
             <a:avLst>
-              <a:gd name="adj" fmla="val 1424"/>
+              <a:gd name="adj" fmla="val 1389"/>
             </a:avLst>
           </a:prstGeom>
           <a:solidFill>
@@ -11444,7 +11799,7 @@
         <p:spPr>
           <a:xfrm>
             <a:off x="548640" y="1280160"/>
-            <a:ext cx="3852756" cy="457200"/>
+            <a:ext cx="3949192" cy="457200"/>
           </a:xfrm>
           <a:prstGeom prst="roundRect">
             <a:avLst>
@@ -11466,7 +11821,7 @@
         <p:spPr>
           <a:xfrm>
             <a:off x="548640" y="1508760"/>
-            <a:ext cx="3852756" cy="228600"/>
+            <a:ext cx="3949192" cy="228600"/>
           </a:xfrm>
           <a:prstGeom prst="rect">
             <a:avLst/>
@@ -11530,7 +11885,7 @@
         <p:spPr>
           <a:xfrm>
             <a:off x="1060704" y="1280160"/>
-            <a:ext cx="3203532" cy="457200"/>
+            <a:ext cx="3299968" cy="457200"/>
           </a:xfrm>
           <a:prstGeom prst="rect">
             <a:avLst/>
@@ -11554,7 +11909,7 @@
                 <a:ea typeface="Roboto" pitchFamily="34" charset="-122"/>
                 <a:cs typeface="Roboto" pitchFamily="34" charset="-120"/>
               </a:rPr>
-              <a:t>Bukti studi penyemaian awan</a:t>
+              <a:t>Seberapa besar efek penyemaian</a:t>
             </a:r>
             <a:endParaRPr lang="en-US" sz="1000" dirty="0"/>
           </a:p>
@@ -11569,23 +11924,78 @@
         <p:spPr>
           <a:xfrm>
             <a:off x="676656" y="1828800"/>
-            <a:ext cx="808350" cy="182880"/>
-          </a:xfrm>
-          <a:prstGeom prst="rect">
-            <a:avLst/>
-          </a:prstGeom>
-          <a:noFill/>
-          <a:ln/>
-        </p:spPr>
-        <p:txBody>
-          <a:bodyPr wrap="square" lIns="0" tIns="0" rIns="0" bIns="0" rtlCol="0" anchor="ctr"/>
-          <a:lstStyle/>
-          <a:p>
-            <a:pPr algn="ctr" indent="0" marL="0">
-              <a:buNone/>
-            </a:pPr>
-            <a:r>
-              <a:rPr lang="en-US" sz="800" b="1" spc="150" kern="0" dirty="0">
+            <a:ext cx="2954528" cy="292608"/>
+          </a:xfrm>
+          <a:prstGeom prst="rect">
+            <a:avLst/>
+          </a:prstGeom>
+          <a:noFill/>
+          <a:ln/>
+        </p:spPr>
+        <p:txBody>
+          <a:bodyPr wrap="square" lIns="0" tIns="0" rIns="0" bIns="0" rtlCol="0" anchor="ctr"/>
+          <a:lstStyle/>
+          <a:p>
+            <a:pPr indent="0" marL="0">
+              <a:buNone/>
+            </a:pPr>
+            <a:r>
+              <a:rPr lang="en-US" sz="1200" b="1" dirty="0">
+                <a:solidFill>
+                  <a:srgbClr val="1A1A1A"/>
+                </a:solidFill>
+                <a:latin typeface="Roboto" pitchFamily="34" charset="0"/>
+                <a:ea typeface="Roboto" pitchFamily="34" charset="-122"/>
+                <a:cs typeface="Roboto" pitchFamily="34" charset="-120"/>
+              </a:rPr>
+              <a:t>Tambahan hujan dari uji acak (%)</a:t>
+            </a:r>
+            <a:endParaRPr lang="en-US" sz="1200" dirty="0"/>
+          </a:p>
+        </p:txBody>
+      </p:sp>
+      <p:graphicFrame>
+        <p:nvGraphicFramePr>
+          <p:cNvPr id="15" name="Chart 0" descr=""/>
+          <p:cNvGraphicFramePr/>
+          <p:nvPr/>
+        </p:nvGraphicFramePr>
+        <p:xfrm>
+          <a:off x="676656" y="2157984"/>
+          <a:ext cx="3693160" cy="1499616"/>
+        </p:xfrm>
+        <a:graphic xmlns:a="http://schemas.openxmlformats.org/drawingml/2006/main">
+          <a:graphicData uri="http://schemas.openxmlformats.org/drawingml/2006/chart">
+            <c:chart xmlns:c="http://schemas.openxmlformats.org/drawingml/2006/chart" r:id="rId2"/>
+          </a:graphicData>
+        </a:graphic>
+      </p:graphicFrame>
+      <p:sp>
+        <p:nvSpPr>
+          <p:cNvPr id="16" name="Text 12"/>
+          <p:cNvSpPr/>
+          <p:nvPr/>
+        </p:nvSpPr>
+        <p:spPr>
+          <a:xfrm>
+            <a:off x="3778910" y="1847088"/>
+            <a:ext cx="590906" cy="274320"/>
+          </a:xfrm>
+          <a:prstGeom prst="rect">
+            <a:avLst/>
+          </a:prstGeom>
+          <a:noFill/>
+          <a:ln/>
+        </p:spPr>
+        <p:txBody>
+          <a:bodyPr wrap="square" lIns="0" tIns="0" rIns="0" bIns="0" rtlCol="0" anchor="b"/>
+          <a:lstStyle/>
+          <a:p>
+            <a:pPr algn="r" indent="0" marL="0">
+              <a:buNone/>
+            </a:pPr>
+            <a:r>
+              <a:rPr lang="en-US" sz="1000" b="1" dirty="0">
                 <a:solidFill>
                   <a:srgbClr val="6B7280"/>
                 </a:solidFill>
@@ -11593,139 +12003,117 @@
                 <a:ea typeface="Roboto" pitchFamily="34" charset="-122"/>
                 <a:cs typeface="Roboto" pitchFamily="34" charset="-120"/>
               </a:rPr>
-              <a:t>STUDI</a:t>
-            </a:r>
-            <a:endParaRPr lang="en-US" sz="800" dirty="0"/>
-          </a:p>
-        </p:txBody>
-      </p:sp>
-      <p:sp>
-        <p:nvSpPr>
-          <p:cNvPr id="15" name="Text 12"/>
-          <p:cNvSpPr/>
-          <p:nvPr/>
-        </p:nvSpPr>
-        <p:spPr>
-          <a:xfrm>
-            <a:off x="1539870" y="1828800"/>
-            <a:ext cx="1239956" cy="182880"/>
-          </a:xfrm>
-          <a:prstGeom prst="rect">
-            <a:avLst/>
-          </a:prstGeom>
-          <a:noFill/>
-          <a:ln/>
-        </p:spPr>
-        <p:txBody>
-          <a:bodyPr wrap="square" lIns="0" tIns="0" rIns="0" bIns="0" rtlCol="0" anchor="ctr"/>
-          <a:lstStyle/>
-          <a:p>
-            <a:pPr algn="ctr" indent="0" marL="0">
-              <a:buNone/>
-            </a:pPr>
-            <a:r>
-              <a:rPr lang="en-US" sz="800" b="1" spc="150" kern="0" dirty="0">
-                <a:solidFill>
-                  <a:srgbClr val="6B7280"/>
-                </a:solidFill>
-                <a:latin typeface="Roboto" pitchFamily="34" charset="0"/>
-                <a:ea typeface="Roboto" pitchFamily="34" charset="-122"/>
-                <a:cs typeface="Roboto" pitchFamily="34" charset="-120"/>
-              </a:rPr>
-              <a:t>HASIL</a:t>
-            </a:r>
-            <a:endParaRPr lang="en-US" sz="800" dirty="0"/>
-          </a:p>
-        </p:txBody>
-      </p:sp>
-      <p:sp>
-        <p:nvSpPr>
-          <p:cNvPr id="16" name="Text 13"/>
-          <p:cNvSpPr/>
-          <p:nvPr/>
-        </p:nvSpPr>
-        <p:spPr>
-          <a:xfrm>
-            <a:off x="2834690" y="1828800"/>
-            <a:ext cx="1383825" cy="182880"/>
-          </a:xfrm>
-          <a:prstGeom prst="rect">
-            <a:avLst/>
-          </a:prstGeom>
-          <a:noFill/>
-          <a:ln/>
-        </p:spPr>
-        <p:txBody>
-          <a:bodyPr wrap="square" lIns="0" tIns="0" rIns="0" bIns="0" rtlCol="0" anchor="ctr"/>
-          <a:lstStyle/>
-          <a:p>
-            <a:pPr algn="ctr" indent="0" marL="0">
-              <a:buNone/>
-            </a:pPr>
-            <a:r>
-              <a:rPr lang="en-US" sz="800" b="1" spc="150" kern="0" dirty="0">
-                <a:solidFill>
-                  <a:srgbClr val="6B7280"/>
-                </a:solidFill>
-                <a:latin typeface="Roboto" pitchFamily="34" charset="0"/>
-                <a:ea typeface="Roboto" pitchFamily="34" charset="-122"/>
-                <a:cs typeface="Roboto" pitchFamily="34" charset="-120"/>
-              </a:rPr>
-              <a:t>CATATAN</a:t>
-            </a:r>
-            <a:endParaRPr lang="en-US" sz="800" dirty="0"/>
-          </a:p>
-        </p:txBody>
-      </p:sp>
-      <p:sp>
-        <p:nvSpPr>
-          <p:cNvPr id="17" name="Shape 14"/>
-          <p:cNvSpPr/>
-          <p:nvPr/>
-        </p:nvSpPr>
-        <p:spPr>
-          <a:xfrm>
-            <a:off x="676656" y="2057400"/>
-            <a:ext cx="3596724" cy="0"/>
-          </a:xfrm>
-          <a:prstGeom prst="line">
-            <a:avLst/>
-          </a:prstGeom>
-          <a:noFill/>
-          <a:ln w="9525">
-            <a:solidFill>
-              <a:srgbClr val="1A1A1A"/>
-            </a:solidFill>
-            <a:prstDash val="solid"/>
-          </a:ln>
-        </p:spPr>
-      </p:sp>
-      <p:sp>
-        <p:nvSpPr>
-          <p:cNvPr id="18" name="Text 15"/>
-          <p:cNvSpPr/>
-          <p:nvPr/>
-        </p:nvSpPr>
-        <p:spPr>
-          <a:xfrm>
-            <a:off x="676656" y="2057400"/>
-            <a:ext cx="808350" cy="731520"/>
-          </a:xfrm>
-          <a:prstGeom prst="rect">
-            <a:avLst/>
-          </a:prstGeom>
-          <a:noFill/>
-          <a:ln/>
-        </p:spPr>
-        <p:txBody>
-          <a:bodyPr wrap="square" lIns="0" tIns="0" rIns="0" bIns="0" rtlCol="0" anchor="ctr"/>
-          <a:lstStyle/>
-          <a:p>
-            <a:pPr algn="l" indent="0" marL="0">
-              <a:buNone/>
-            </a:pPr>
-            <a:r>
-              <a:rPr lang="en-US" sz="800" b="1" dirty="0">
+              <a:t>Rentang</a:t>
+            </a:r>
+            <a:endParaRPr lang="en-US" sz="1000" dirty="0"/>
+          </a:p>
+        </p:txBody>
+      </p:sp>
+      <p:sp>
+        <p:nvSpPr>
+          <p:cNvPr id="17" name="Shape 13"/>
+          <p:cNvSpPr/>
+          <p:nvPr/>
+        </p:nvSpPr>
+        <p:spPr>
+          <a:xfrm>
+            <a:off x="3778910" y="2295949"/>
+            <a:ext cx="590906" cy="503871"/>
+          </a:xfrm>
+          <a:prstGeom prst="rect">
+            <a:avLst/>
+          </a:prstGeom>
+          <a:solidFill>
+            <a:srgbClr val="E6EEF7"/>
+          </a:solidFill>
+          <a:ln/>
+        </p:spPr>
+      </p:sp>
+      <p:sp>
+        <p:nvSpPr>
+          <p:cNvPr id="18" name="Text 14"/>
+          <p:cNvSpPr/>
+          <p:nvPr/>
+        </p:nvSpPr>
+        <p:spPr>
+          <a:xfrm>
+            <a:off x="3778910" y="2295949"/>
+            <a:ext cx="499466" cy="503871"/>
+          </a:xfrm>
+          <a:prstGeom prst="rect">
+            <a:avLst/>
+          </a:prstGeom>
+          <a:noFill/>
+          <a:ln/>
+        </p:spPr>
+        <p:txBody>
+          <a:bodyPr wrap="square" lIns="0" tIns="0" rIns="0" bIns="0" rtlCol="0" anchor="ctr"/>
+          <a:lstStyle/>
+          <a:p>
+            <a:pPr algn="r" indent="0" marL="0">
+              <a:buNone/>
+            </a:pPr>
+            <a:r>
+              <a:rPr lang="en-US" sz="1000" b="1" dirty="0">
+                <a:solidFill>
+                  <a:srgbClr val="051C2C"/>
+                </a:solidFill>
+                <a:latin typeface="Roboto" pitchFamily="34" charset="0"/>
+                <a:ea typeface="Roboto" pitchFamily="34" charset="-122"/>
+                <a:cs typeface="Roboto" pitchFamily="34" charset="-120"/>
+              </a:rPr>
+              <a:t>±2,6</a:t>
+            </a:r>
+            <a:endParaRPr lang="en-US" sz="1000" dirty="0"/>
+          </a:p>
+        </p:txBody>
+      </p:sp>
+      <p:sp>
+        <p:nvSpPr>
+          <p:cNvPr id="19" name="Shape 15"/>
+          <p:cNvSpPr/>
+          <p:nvPr/>
+        </p:nvSpPr>
+        <p:spPr>
+          <a:xfrm>
+            <a:off x="3778910" y="3015764"/>
+            <a:ext cx="590906" cy="503871"/>
+          </a:xfrm>
+          <a:prstGeom prst="rect">
+            <a:avLst/>
+          </a:prstGeom>
+          <a:solidFill>
+            <a:srgbClr val="F2F2F2"/>
+          </a:solidFill>
+          <a:ln/>
+        </p:spPr>
+      </p:sp>
+      <p:sp>
+        <p:nvSpPr>
+          <p:cNvPr id="20" name="Text 16"/>
+          <p:cNvSpPr/>
+          <p:nvPr/>
+        </p:nvSpPr>
+        <p:spPr>
+          <a:xfrm>
+            <a:off x="3778910" y="3015764"/>
+            <a:ext cx="499466" cy="503871"/>
+          </a:xfrm>
+          <a:prstGeom prst="rect">
+            <a:avLst/>
+          </a:prstGeom>
+          <a:noFill/>
+          <a:ln/>
+        </p:spPr>
+        <p:txBody>
+          <a:bodyPr wrap="square" lIns="0" tIns="0" rIns="0" bIns="0" rtlCol="0" anchor="ctr"/>
+          <a:lstStyle/>
+          <a:p>
+            <a:pPr algn="r" indent="0" marL="0">
+              <a:buNone/>
+            </a:pPr>
+            <a:r>
+              <a:rPr lang="en-US" sz="1000" dirty="0">
                 <a:solidFill>
                   <a:srgbClr val="1A1A1A"/>
                 </a:solidFill>
@@ -11733,664 +12121,374 @@
                 <a:ea typeface="Roboto" pitchFamily="34" charset="-122"/>
                 <a:cs typeface="Roboto" pitchFamily="34" charset="-120"/>
               </a:rPr>
-              <a:t>WMO 2025</a:t>
-            </a:r>
-            <a:endParaRPr lang="en-US" sz="800" dirty="0"/>
-          </a:p>
-        </p:txBody>
-      </p:sp>
-      <p:sp>
-        <p:nvSpPr>
-          <p:cNvPr id="19" name="Text 16"/>
-          <p:cNvSpPr/>
-          <p:nvPr/>
-        </p:nvSpPr>
-        <p:spPr>
-          <a:xfrm>
-            <a:off x="1539870" y="2057400"/>
-            <a:ext cx="1239956" cy="731520"/>
-          </a:xfrm>
-          <a:prstGeom prst="rect">
-            <a:avLst/>
-          </a:prstGeom>
-          <a:noFill/>
-          <a:ln/>
-        </p:spPr>
-        <p:txBody>
-          <a:bodyPr wrap="square" lIns="0" tIns="0" rIns="0" bIns="0" rtlCol="0" anchor="ctr"/>
-          <a:lstStyle/>
-          <a:p>
-            <a:pPr algn="l" indent="0" marL="0">
-              <a:buNone/>
-            </a:pPr>
-            <a:r>
-              <a:rPr lang="en-US" sz="800" dirty="0">
-                <a:solidFill>
-                  <a:srgbClr val="2E3440"/>
-                </a:solidFill>
-                <a:latin typeface="Roboto" pitchFamily="34" charset="0"/>
-                <a:ea typeface="Roboto" pitchFamily="34" charset="-122"/>
-                <a:cs typeface="Roboto" pitchFamily="34" charset="-120"/>
-              </a:rPr>
-              <a:t>Tanpa angka persen; bukti sebab-akibat kuat hanya untuk glasiogenik awan orografik musim dingin</a:t>
-            </a:r>
-            <a:endParaRPr lang="en-US" sz="800" dirty="0"/>
-          </a:p>
-        </p:txBody>
-      </p:sp>
-      <p:sp>
-        <p:nvSpPr>
-          <p:cNvPr id="20" name="Text 17"/>
-          <p:cNvSpPr/>
-          <p:nvPr/>
-        </p:nvSpPr>
-        <p:spPr>
-          <a:xfrm>
-            <a:off x="2834690" y="2057400"/>
-            <a:ext cx="1383825" cy="731520"/>
-          </a:xfrm>
-          <a:prstGeom prst="rect">
-            <a:avLst/>
-          </a:prstGeom>
-          <a:noFill/>
-          <a:ln/>
-        </p:spPr>
-        <p:txBody>
-          <a:bodyPr wrap="square" lIns="0" tIns="0" rIns="0" bIns="0" rtlCol="0" anchor="ctr"/>
-          <a:lstStyle/>
-          <a:p>
-            <a:pPr algn="l" indent="0" marL="0">
-              <a:buNone/>
-            </a:pPr>
-            <a:r>
-              <a:rPr lang="en-US" sz="800" dirty="0">
-                <a:solidFill>
-                  <a:srgbClr val="2E3440"/>
-                </a:solidFill>
-                <a:latin typeface="Roboto" pitchFamily="34" charset="0"/>
-                <a:ea typeface="Roboto" pitchFamily="34" charset="-122"/>
-                <a:cs typeface="Roboto" pitchFamily="34" charset="-120"/>
-              </a:rPr>
-              <a:t>Awan konvektif bersinyal lemah; hasil satu uji tidak langsung berlaku di tempat lain.</a:t>
-            </a:r>
-            <a:endParaRPr lang="en-US" sz="800" dirty="0"/>
-          </a:p>
-        </p:txBody>
-      </p:sp>
-      <p:sp>
-        <p:nvSpPr>
-          <p:cNvPr id="21" name="Shape 18"/>
-          <p:cNvSpPr/>
-          <p:nvPr/>
-        </p:nvSpPr>
-        <p:spPr>
-          <a:xfrm>
-            <a:off x="676656" y="2788920"/>
-            <a:ext cx="3596724" cy="0"/>
-          </a:xfrm>
-          <a:prstGeom prst="line">
-            <a:avLst/>
-          </a:prstGeom>
-          <a:noFill/>
-          <a:ln w="6350">
-            <a:solidFill>
-              <a:srgbClr val="E3E6EA"/>
-            </a:solidFill>
-            <a:prstDash val="solid"/>
-          </a:ln>
-        </p:spPr>
-      </p:sp>
-      <p:sp>
-        <p:nvSpPr>
-          <p:cNvPr id="22" name="Text 19"/>
-          <p:cNvSpPr/>
-          <p:nvPr/>
-        </p:nvSpPr>
-        <p:spPr>
-          <a:xfrm>
-            <a:off x="676656" y="2788920"/>
-            <a:ext cx="808350" cy="731520"/>
-          </a:xfrm>
-          <a:prstGeom prst="rect">
-            <a:avLst/>
-          </a:prstGeom>
-          <a:noFill/>
-          <a:ln/>
-        </p:spPr>
-        <p:txBody>
-          <a:bodyPr wrap="square" lIns="0" tIns="0" rIns="0" bIns="0" rtlCol="0" anchor="ctr"/>
-          <a:lstStyle/>
-          <a:p>
-            <a:pPr algn="l" indent="0" marL="0">
-              <a:buNone/>
-            </a:pPr>
-            <a:r>
-              <a:rPr lang="en-US" sz="800" b="1" dirty="0">
-                <a:solidFill>
-                  <a:srgbClr val="1A1A1A"/>
-                </a:solidFill>
-                <a:latin typeface="Roboto" pitchFamily="34" charset="0"/>
-                <a:ea typeface="Roboto" pitchFamily="34" charset="-122"/>
-                <a:cs typeface="Roboto" pitchFamily="34" charset="-120"/>
-              </a:rPr>
-              <a:t>CAIPEEX-IV India 2023</a:t>
-            </a:r>
-            <a:endParaRPr lang="en-US" sz="800" dirty="0"/>
-          </a:p>
-        </p:txBody>
-      </p:sp>
-      <p:sp>
-        <p:nvSpPr>
-          <p:cNvPr id="23" name="Text 20"/>
-          <p:cNvSpPr/>
-          <p:nvPr/>
-        </p:nvSpPr>
-        <p:spPr>
-          <a:xfrm>
-            <a:off x="1539870" y="2788920"/>
-            <a:ext cx="1239956" cy="731520"/>
-          </a:xfrm>
-          <a:prstGeom prst="rect">
-            <a:avLst/>
-          </a:prstGeom>
-          <a:noFill/>
-          <a:ln/>
-        </p:spPr>
-        <p:txBody>
-          <a:bodyPr wrap="square" lIns="0" tIns="0" rIns="0" bIns="0" rtlCol="0" anchor="ctr"/>
-          <a:lstStyle/>
-          <a:p>
-            <a:pPr algn="l" indent="0" marL="0">
-              <a:buNone/>
-            </a:pPr>
-            <a:r>
-              <a:rPr lang="en-US" sz="800" dirty="0">
-                <a:solidFill>
-                  <a:srgbClr val="2E3440"/>
-                </a:solidFill>
-                <a:latin typeface="Roboto" pitchFamily="34" charset="0"/>
-                <a:ea typeface="Roboto" pitchFamily="34" charset="-122"/>
-                <a:cs typeface="Roboto" pitchFamily="34" charset="-120"/>
-              </a:rPr>
-              <a:t>+18 ±2,6% hujan rata-rata di area 100 km2 hilir</a:t>
-            </a:r>
-            <a:endParaRPr lang="en-US" sz="800" dirty="0"/>
-          </a:p>
-        </p:txBody>
-      </p:sp>
-      <p:sp>
-        <p:nvSpPr>
-          <p:cNvPr id="24" name="Text 21"/>
-          <p:cNvSpPr/>
-          <p:nvPr/>
-        </p:nvSpPr>
-        <p:spPr>
-          <a:xfrm>
-            <a:off x="2834690" y="2788920"/>
-            <a:ext cx="1383825" cy="731520"/>
-          </a:xfrm>
-          <a:prstGeom prst="rect">
-            <a:avLst/>
-          </a:prstGeom>
-          <a:noFill/>
-          <a:ln/>
-        </p:spPr>
-        <p:txBody>
-          <a:bodyPr wrap="square" lIns="0" tIns="0" rIns="0" bIns="0" rtlCol="0" anchor="ctr"/>
-          <a:lstStyle/>
-          <a:p>
-            <a:pPr algn="l" indent="0" marL="0">
-              <a:buNone/>
-            </a:pPr>
-            <a:r>
-              <a:rPr lang="en-US" sz="800" dirty="0">
-                <a:solidFill>
-                  <a:srgbClr val="2E3440"/>
-                </a:solidFill>
-                <a:latin typeface="Roboto" pitchFamily="34" charset="0"/>
-                <a:ea typeface="Roboto" pitchFamily="34" charset="-122"/>
-                <a:cs typeface="Roboto" pitchFamily="34" charset="-120"/>
-              </a:rPr>
-              <a:t>Higroskopis, acak, 150 semai dan 122 tanpa semai; satu lokasi di bayangan hujan Ghats Barat.</a:t>
-            </a:r>
-            <a:endParaRPr lang="en-US" sz="800" dirty="0"/>
-          </a:p>
-        </p:txBody>
-      </p:sp>
-      <p:sp>
-        <p:nvSpPr>
-          <p:cNvPr id="25" name="Shape 22"/>
-          <p:cNvSpPr/>
-          <p:nvPr/>
-        </p:nvSpPr>
-        <p:spPr>
-          <a:xfrm>
-            <a:off x="676656" y="3520440"/>
-            <a:ext cx="3596724" cy="0"/>
-          </a:xfrm>
-          <a:prstGeom prst="line">
-            <a:avLst/>
-          </a:prstGeom>
-          <a:noFill/>
-          <a:ln w="6350">
-            <a:solidFill>
-              <a:srgbClr val="E3E6EA"/>
-            </a:solidFill>
-            <a:prstDash val="solid"/>
-          </a:ln>
-        </p:spPr>
-      </p:sp>
-      <p:sp>
-        <p:nvSpPr>
-          <p:cNvPr id="26" name="Text 23"/>
-          <p:cNvSpPr/>
-          <p:nvPr/>
-        </p:nvSpPr>
-        <p:spPr>
-          <a:xfrm>
-            <a:off x="676656" y="3520440"/>
-            <a:ext cx="808350" cy="731520"/>
-          </a:xfrm>
-          <a:prstGeom prst="rect">
-            <a:avLst/>
-          </a:prstGeom>
-          <a:noFill/>
-          <a:ln/>
-        </p:spPr>
-        <p:txBody>
-          <a:bodyPr wrap="square" lIns="0" tIns="0" rIns="0" bIns="0" rtlCol="0" anchor="ctr"/>
-          <a:lstStyle/>
-          <a:p>
-            <a:pPr algn="l" indent="0" marL="0">
-              <a:buNone/>
-            </a:pPr>
-            <a:r>
-              <a:rPr lang="en-US" sz="800" b="1" dirty="0">
-                <a:solidFill>
-                  <a:srgbClr val="1A1A1A"/>
-                </a:solidFill>
-                <a:latin typeface="Roboto" pitchFamily="34" charset="0"/>
-                <a:ea typeface="Roboto" pitchFamily="34" charset="-122"/>
-                <a:cs typeface="Roboto" pitchFamily="34" charset="-120"/>
-              </a:rPr>
-              <a:t>Israel-4 2013 sampai 2020</a:t>
-            </a:r>
-            <a:endParaRPr lang="en-US" sz="800" dirty="0"/>
-          </a:p>
-        </p:txBody>
-      </p:sp>
-      <p:sp>
-        <p:nvSpPr>
-          <p:cNvPr id="27" name="Text 24"/>
-          <p:cNvSpPr/>
-          <p:nvPr/>
-        </p:nvSpPr>
-        <p:spPr>
-          <a:xfrm>
-            <a:off x="1539870" y="3520440"/>
-            <a:ext cx="1239956" cy="731520"/>
-          </a:xfrm>
-          <a:prstGeom prst="rect">
-            <a:avLst/>
-          </a:prstGeom>
-          <a:noFill/>
-          <a:ln/>
-        </p:spPr>
-        <p:txBody>
-          <a:bodyPr wrap="square" lIns="0" tIns="0" rIns="0" bIns="0" rtlCol="0" anchor="ctr"/>
-          <a:lstStyle/>
-          <a:p>
-            <a:pPr algn="l" indent="0" marL="0">
-              <a:buNone/>
-            </a:pPr>
-            <a:r>
-              <a:rPr lang="en-US" sz="800" dirty="0">
-                <a:solidFill>
-                  <a:srgbClr val="2E3440"/>
-                </a:solidFill>
-                <a:latin typeface="Roboto" pitchFamily="34" charset="0"/>
-                <a:ea typeface="Roboto" pitchFamily="34" charset="-122"/>
-                <a:cs typeface="Roboto" pitchFamily="34" charset="-120"/>
-              </a:rPr>
-              <a:t>+1,8%, p = 0,4, selang 95% -11% sampai 16%</a:t>
-            </a:r>
-            <a:endParaRPr lang="en-US" sz="800" dirty="0"/>
-          </a:p>
-        </p:txBody>
-      </p:sp>
-      <p:sp>
-        <p:nvSpPr>
-          <p:cNvPr id="28" name="Text 25"/>
-          <p:cNvSpPr/>
-          <p:nvPr/>
-        </p:nvSpPr>
-        <p:spPr>
-          <a:xfrm>
-            <a:off x="2834690" y="3520440"/>
-            <a:ext cx="1383825" cy="731520"/>
-          </a:xfrm>
-          <a:prstGeom prst="rect">
-            <a:avLst/>
-          </a:prstGeom>
-          <a:noFill/>
-          <a:ln/>
-        </p:spPr>
-        <p:txBody>
-          <a:bodyPr wrap="square" lIns="0" tIns="0" rIns="0" bIns="0" rtlCol="0" anchor="ctr"/>
-          <a:lstStyle/>
-          <a:p>
-            <a:pPr algn="l" indent="0" marL="0">
-              <a:buNone/>
-            </a:pPr>
-            <a:r>
-              <a:rPr lang="en-US" sz="800" dirty="0">
-                <a:solidFill>
-                  <a:srgbClr val="2E3440"/>
-                </a:solidFill>
-                <a:latin typeface="Roboto" pitchFamily="34" charset="0"/>
-                <a:ea typeface="Roboto" pitchFamily="34" charset="-122"/>
-                <a:cs typeface="Roboto" pitchFamily="34" charset="-120"/>
-              </a:rPr>
-              <a:t>Uji acak dengan AgI; efek tidak terdeteksi.</a:t>
-            </a:r>
-            <a:endParaRPr lang="en-US" sz="800" dirty="0"/>
-          </a:p>
-        </p:txBody>
-      </p:sp>
-      <p:sp>
-        <p:nvSpPr>
-          <p:cNvPr id="29" name="Shape 26"/>
-          <p:cNvSpPr/>
-          <p:nvPr/>
-        </p:nvSpPr>
-        <p:spPr>
-          <a:xfrm>
-            <a:off x="676656" y="4251960"/>
-            <a:ext cx="3596724" cy="0"/>
-          </a:xfrm>
-          <a:prstGeom prst="line">
-            <a:avLst/>
-          </a:prstGeom>
-          <a:noFill/>
-          <a:ln w="6350">
-            <a:solidFill>
-              <a:srgbClr val="E3E6EA"/>
-            </a:solidFill>
-            <a:prstDash val="solid"/>
-          </a:ln>
-        </p:spPr>
-      </p:sp>
-      <p:sp>
-        <p:nvSpPr>
-          <p:cNvPr id="30" name="Text 27"/>
-          <p:cNvSpPr/>
-          <p:nvPr/>
-        </p:nvSpPr>
-        <p:spPr>
-          <a:xfrm>
-            <a:off x="676656" y="4251960"/>
-            <a:ext cx="808350" cy="731520"/>
-          </a:xfrm>
-          <a:prstGeom prst="rect">
-            <a:avLst/>
-          </a:prstGeom>
-          <a:noFill/>
-          <a:ln/>
-        </p:spPr>
-        <p:txBody>
-          <a:bodyPr wrap="square" lIns="0" tIns="0" rIns="0" bIns="0" rtlCol="0" anchor="ctr"/>
-          <a:lstStyle/>
-          <a:p>
-            <a:pPr algn="l" indent="0" marL="0">
-              <a:buNone/>
-            </a:pPr>
-            <a:r>
-              <a:rPr lang="en-US" sz="800" b="1" dirty="0">
-                <a:solidFill>
-                  <a:srgbClr val="1A1A1A"/>
-                </a:solidFill>
-                <a:latin typeface="Roboto" pitchFamily="34" charset="0"/>
-                <a:ea typeface="Roboto" pitchFamily="34" charset="-122"/>
-                <a:cs typeface="Roboto" pitchFamily="34" charset="-120"/>
-              </a:rPr>
-              <a:t>Silverman 2003</a:t>
-            </a:r>
-            <a:endParaRPr lang="en-US" sz="800" dirty="0"/>
-          </a:p>
-        </p:txBody>
-      </p:sp>
-      <p:sp>
-        <p:nvSpPr>
-          <p:cNvPr id="31" name="Text 28"/>
-          <p:cNvSpPr/>
-          <p:nvPr/>
-        </p:nvSpPr>
-        <p:spPr>
-          <a:xfrm>
-            <a:off x="1539870" y="4251960"/>
-            <a:ext cx="1239956" cy="731520"/>
-          </a:xfrm>
-          <a:prstGeom prst="rect">
-            <a:avLst/>
-          </a:prstGeom>
-          <a:noFill/>
-          <a:ln/>
-        </p:spPr>
-        <p:txBody>
-          <a:bodyPr wrap="square" lIns="0" tIns="0" rIns="0" bIns="0" rtlCol="0" anchor="ctr"/>
-          <a:lstStyle/>
-          <a:p>
-            <a:pPr algn="l" indent="0" marL="0">
-              <a:buNone/>
-            </a:pPr>
-            <a:r>
-              <a:rPr lang="en-US" sz="800" dirty="0">
-                <a:solidFill>
-                  <a:srgbClr val="2E3440"/>
-                </a:solidFill>
-                <a:latin typeface="Roboto" pitchFamily="34" charset="0"/>
-                <a:ea typeface="Roboto" pitchFamily="34" charset="-122"/>
-                <a:cs typeface="Roboto" pitchFamily="34" charset="-120"/>
-              </a:rPr>
-              <a:t>Empat uji higroskopis acak belum terbukti</a:t>
-            </a:r>
-            <a:endParaRPr lang="en-US" sz="800" dirty="0"/>
-          </a:p>
-        </p:txBody>
-      </p:sp>
-      <p:sp>
-        <p:nvSpPr>
-          <p:cNvPr id="32" name="Text 29"/>
-          <p:cNvSpPr/>
-          <p:nvPr/>
-        </p:nvSpPr>
-        <p:spPr>
-          <a:xfrm>
-            <a:off x="2834690" y="4251960"/>
-            <a:ext cx="1383825" cy="731520"/>
-          </a:xfrm>
-          <a:prstGeom prst="rect">
-            <a:avLst/>
-          </a:prstGeom>
-          <a:noFill/>
-          <a:ln/>
-        </p:spPr>
-        <p:txBody>
-          <a:bodyPr wrap="square" lIns="0" tIns="0" rIns="0" bIns="0" rtlCol="0" anchor="ctr"/>
-          <a:lstStyle/>
-          <a:p>
-            <a:pPr algn="l" indent="0" marL="0">
-              <a:buNone/>
-            </a:pPr>
-            <a:r>
-              <a:rPr lang="en-US" sz="800" dirty="0">
-                <a:solidFill>
-                  <a:srgbClr val="2E3440"/>
-                </a:solidFill>
-                <a:latin typeface="Roboto" pitchFamily="34" charset="0"/>
-                <a:ea typeface="Roboto" pitchFamily="34" charset="-122"/>
-                <a:cs typeface="Roboto" pitchFamily="34" charset="-120"/>
-              </a:rPr>
-              <a:t>Belum memberi bukti statistik maupun fisik.</a:t>
-            </a:r>
-            <a:endParaRPr lang="en-US" sz="800" dirty="0"/>
-          </a:p>
-        </p:txBody>
-      </p:sp>
-      <p:sp>
-        <p:nvSpPr>
-          <p:cNvPr id="33" name="Shape 30"/>
-          <p:cNvSpPr/>
-          <p:nvPr/>
-        </p:nvSpPr>
-        <p:spPr>
-          <a:xfrm>
-            <a:off x="676656" y="4983480"/>
-            <a:ext cx="3596724" cy="0"/>
-          </a:xfrm>
-          <a:prstGeom prst="line">
-            <a:avLst/>
-          </a:prstGeom>
-          <a:noFill/>
-          <a:ln w="6350">
-            <a:solidFill>
-              <a:srgbClr val="E3E6EA"/>
-            </a:solidFill>
-            <a:prstDash val="solid"/>
-          </a:ln>
-        </p:spPr>
-      </p:sp>
-      <p:sp>
-        <p:nvSpPr>
-          <p:cNvPr id="34" name="Text 31"/>
-          <p:cNvSpPr/>
-          <p:nvPr/>
-        </p:nvSpPr>
-        <p:spPr>
-          <a:xfrm>
-            <a:off x="676656" y="4983480"/>
-            <a:ext cx="808350" cy="731520"/>
-          </a:xfrm>
-          <a:prstGeom prst="rect">
-            <a:avLst/>
-          </a:prstGeom>
-          <a:noFill/>
-          <a:ln/>
-        </p:spPr>
-        <p:txBody>
-          <a:bodyPr wrap="square" lIns="0" tIns="0" rIns="0" bIns="0" rtlCol="0" anchor="ctr"/>
-          <a:lstStyle/>
-          <a:p>
-            <a:pPr algn="l" indent="0" marL="0">
-              <a:buNone/>
-            </a:pPr>
-            <a:r>
-              <a:rPr lang="en-US" sz="800" b="1" dirty="0">
-                <a:solidFill>
-                  <a:srgbClr val="1A1A1A"/>
-                </a:solidFill>
-                <a:latin typeface="Roboto" pitchFamily="34" charset="0"/>
-                <a:ea typeface="Roboto" pitchFamily="34" charset="-122"/>
-                <a:cs typeface="Roboto" pitchFamily="34" charset="-120"/>
-              </a:rPr>
-              <a:t>Dry ice untuk asap</a:t>
-            </a:r>
-            <a:endParaRPr lang="en-US" sz="800" dirty="0"/>
-          </a:p>
-        </p:txBody>
-      </p:sp>
-      <p:sp>
-        <p:nvSpPr>
-          <p:cNvPr id="35" name="Text 32"/>
-          <p:cNvSpPr/>
-          <p:nvPr/>
-        </p:nvSpPr>
-        <p:spPr>
-          <a:xfrm>
-            <a:off x="1539870" y="4983480"/>
-            <a:ext cx="1239956" cy="731520"/>
-          </a:xfrm>
-          <a:prstGeom prst="rect">
-            <a:avLst/>
-          </a:prstGeom>
-          <a:noFill/>
-          <a:ln/>
-        </p:spPr>
-        <p:txBody>
-          <a:bodyPr wrap="square" lIns="0" tIns="0" rIns="0" bIns="0" rtlCol="0" anchor="ctr"/>
-          <a:lstStyle/>
-          <a:p>
-            <a:pPr algn="l" indent="0" marL="0">
-              <a:buNone/>
-            </a:pPr>
-            <a:r>
-              <a:rPr lang="en-US" sz="800" dirty="0">
-                <a:solidFill>
-                  <a:srgbClr val="2E3440"/>
-                </a:solidFill>
-                <a:latin typeface="Roboto" pitchFamily="34" charset="0"/>
-                <a:ea typeface="Roboto" pitchFamily="34" charset="-122"/>
-                <a:cs typeface="Roboto" pitchFamily="34" charset="-120"/>
-              </a:rPr>
-              <a:t>Tidak ada bukti; terbukti hanya untuk kabut super-dingin</a:t>
-            </a:r>
-            <a:endParaRPr lang="en-US" sz="800" dirty="0"/>
-          </a:p>
-        </p:txBody>
-      </p:sp>
-      <p:sp>
-        <p:nvSpPr>
-          <p:cNvPr id="36" name="Text 33"/>
-          <p:cNvSpPr/>
-          <p:nvPr/>
-        </p:nvSpPr>
-        <p:spPr>
-          <a:xfrm>
-            <a:off x="2834690" y="4983480"/>
-            <a:ext cx="1383825" cy="731520"/>
-          </a:xfrm>
-          <a:prstGeom prst="rect">
-            <a:avLst/>
-          </a:prstGeom>
-          <a:noFill/>
-          <a:ln/>
-        </p:spPr>
-        <p:txBody>
-          <a:bodyPr wrap="square" lIns="0" tIns="0" rIns="0" bIns="0" rtlCol="0" anchor="ctr"/>
-          <a:lstStyle/>
-          <a:p>
-            <a:pPr algn="l" indent="0" marL="0">
-              <a:buNone/>
-            </a:pPr>
-            <a:r>
-              <a:rPr lang="en-US" sz="800" dirty="0">
-                <a:solidFill>
-                  <a:srgbClr val="2E3440"/>
-                </a:solidFill>
-                <a:latin typeface="Roboto" pitchFamily="34" charset="0"/>
-                <a:ea typeface="Roboto" pitchFamily="34" charset="-122"/>
-                <a:cs typeface="Roboto" pitchFamily="34" charset="-120"/>
-              </a:rPr>
-              <a:t>BRIN 19 Okt 2026 menyebut pembongkaran inversi masih hipotesis ilmiah.</a:t>
-            </a:r>
-            <a:endParaRPr lang="en-US" sz="800" dirty="0"/>
-          </a:p>
-        </p:txBody>
-      </p:sp>
-      <p:sp>
-        <p:nvSpPr>
-          <p:cNvPr id="37" name="Shape 34"/>
-          <p:cNvSpPr/>
-          <p:nvPr/>
-        </p:nvSpPr>
-        <p:spPr>
-          <a:xfrm>
-            <a:off x="4538556" y="1280160"/>
-            <a:ext cx="3408207" cy="4809744"/>
+              <a:t>-11 s.d. +16</a:t>
+            </a:r>
+            <a:endParaRPr lang="en-US" sz="1000" dirty="0"/>
+          </a:p>
+        </p:txBody>
+      </p:sp>
+      <p:sp>
+        <p:nvSpPr>
+          <p:cNvPr id="21" name="Shape 17"/>
+          <p:cNvSpPr/>
+          <p:nvPr/>
+        </p:nvSpPr>
+        <p:spPr>
+          <a:xfrm>
+            <a:off x="676656" y="3822192"/>
+            <a:ext cx="3693160" cy="566928"/>
           </a:xfrm>
           <a:prstGeom prst="roundRect">
             <a:avLst>
-              <a:gd name="adj" fmla="val 1610"/>
+              <a:gd name="adj" fmla="val 9677"/>
+            </a:avLst>
+          </a:prstGeom>
+          <a:solidFill>
+            <a:srgbClr val="F3F5F8"/>
+          </a:solidFill>
+          <a:ln/>
+        </p:spPr>
+      </p:sp>
+      <p:sp>
+        <p:nvSpPr>
+          <p:cNvPr id="22" name="Shape 18"/>
+          <p:cNvSpPr/>
+          <p:nvPr/>
+        </p:nvSpPr>
+        <p:spPr>
+          <a:xfrm>
+            <a:off x="786384" y="3950208"/>
+            <a:ext cx="310896" cy="310896"/>
+          </a:xfrm>
+          <a:prstGeom prst="ellipse">
+            <a:avLst/>
+          </a:prstGeom>
+          <a:solidFill>
+            <a:srgbClr val="051C2C"/>
+          </a:solidFill>
+          <a:ln/>
+        </p:spPr>
+      </p:sp>
+      <p:pic>
+        <p:nvPicPr>
+          <p:cNvPr id="23" name="Image 1" descr="/Users/priyankaalfatehan28/.claude/skills/ppt-konsultan/mesin/cache-ikon/snowflake-regular-FFFFFF.png">    </p:cNvPr>
+          <p:cNvPicPr>
+            <a:picLocks noChangeAspect="1"/>
+          </p:cNvPicPr>
+          <p:nvPr/>
+        </p:nvPicPr>
+        <p:blipFill>
+          <a:blip r:embed="rId3"/>
+          <a:stretch>
+            <a:fillRect/>
+          </a:stretch>
+        </p:blipFill>
+        <p:spPr>
+          <a:xfrm>
+            <a:off x="859536" y="4023360"/>
+            <a:ext cx="164592" cy="164592"/>
+          </a:xfrm>
+          <a:prstGeom prst="rect">
+            <a:avLst/>
+          </a:prstGeom>
+        </p:spPr>
+      </p:pic>
+      <p:sp>
+        <p:nvSpPr>
+          <p:cNvPr id="24" name="Text 19"/>
+          <p:cNvSpPr/>
+          <p:nvPr/>
+        </p:nvSpPr>
+        <p:spPr>
+          <a:xfrm>
+            <a:off x="1188720" y="3822192"/>
+            <a:ext cx="3053080" cy="566928"/>
+          </a:xfrm>
+          <a:prstGeom prst="rect">
+            <a:avLst/>
+          </a:prstGeom>
+          <a:noFill/>
+          <a:ln/>
+        </p:spPr>
+        <p:txBody>
+          <a:bodyPr wrap="square" lIns="0" tIns="0" rIns="0" bIns="0" rtlCol="0" anchor="ctr"/>
+          <a:lstStyle/>
+          <a:p>
+            <a:pPr indent="0" marL="0">
+              <a:buNone/>
+            </a:pPr>
+            <a:r>
+              <a:rPr lang="en-US" sz="900" b="1" dirty="0">
+                <a:solidFill>
+                  <a:srgbClr val="1A1A1A"/>
+                </a:solidFill>
+                <a:latin typeface="Roboto" pitchFamily="34" charset="0"/>
+                <a:ea typeface="Roboto" pitchFamily="34" charset="-122"/>
+                <a:cs typeface="Roboto" pitchFamily="34" charset="-120"/>
+              </a:rPr>
+              <a:t>WMO 2025:</a:t>
+            </a:r>
+            <a:r>
+              <a:rPr lang="en-US" sz="900" dirty="0">
+                <a:solidFill>
+                  <a:srgbClr val="1A1A1A"/>
+                </a:solidFill>
+                <a:latin typeface="Roboto" pitchFamily="34" charset="0"/>
+                <a:ea typeface="Roboto" pitchFamily="34" charset="-122"/>
+                <a:cs typeface="Roboto" pitchFamily="34" charset="-120"/>
+              </a:rPr>
+              <a:t> bukti kuat hanya untuk awan dingin di pegunungan</a:t>
+            </a:r>
+            <a:endParaRPr lang="en-US" sz="900" dirty="0"/>
+          </a:p>
+        </p:txBody>
+      </p:sp>
+      <p:sp>
+        <p:nvSpPr>
+          <p:cNvPr id="25" name="Shape 20"/>
+          <p:cNvSpPr/>
+          <p:nvPr/>
+        </p:nvSpPr>
+        <p:spPr>
+          <a:xfrm>
+            <a:off x="676656" y="4462272"/>
+            <a:ext cx="3693160" cy="566928"/>
+          </a:xfrm>
+          <a:prstGeom prst="roundRect">
+            <a:avLst>
+              <a:gd name="adj" fmla="val 9677"/>
+            </a:avLst>
+          </a:prstGeom>
+          <a:solidFill>
+            <a:srgbClr val="F3F5F8"/>
+          </a:solidFill>
+          <a:ln/>
+        </p:spPr>
+      </p:sp>
+      <p:sp>
+        <p:nvSpPr>
+          <p:cNvPr id="26" name="Shape 21"/>
+          <p:cNvSpPr/>
+          <p:nvPr/>
+        </p:nvSpPr>
+        <p:spPr>
+          <a:xfrm>
+            <a:off x="786384" y="4590288"/>
+            <a:ext cx="310896" cy="310896"/>
+          </a:xfrm>
+          <a:prstGeom prst="ellipse">
+            <a:avLst/>
+          </a:prstGeom>
+          <a:solidFill>
+            <a:srgbClr val="051C2C"/>
+          </a:solidFill>
+          <a:ln/>
+        </p:spPr>
+      </p:sp>
+      <p:pic>
+        <p:nvPicPr>
+          <p:cNvPr id="27" name="Image 2" descr="/Users/priyankaalfatehan28/.claude/skills/ppt-konsultan/mesin/cache-ikon/flask-regular-FFFFFF.png">    </p:cNvPr>
+          <p:cNvPicPr>
+            <a:picLocks noChangeAspect="1"/>
+          </p:cNvPicPr>
+          <p:nvPr/>
+        </p:nvPicPr>
+        <p:blipFill>
+          <a:blip r:embed="rId4"/>
+          <a:stretch>
+            <a:fillRect/>
+          </a:stretch>
+        </p:blipFill>
+        <p:spPr>
+          <a:xfrm>
+            <a:off x="859536" y="4663440"/>
+            <a:ext cx="164592" cy="164592"/>
+          </a:xfrm>
+          <a:prstGeom prst="rect">
+            <a:avLst/>
+          </a:prstGeom>
+        </p:spPr>
+      </p:pic>
+      <p:sp>
+        <p:nvSpPr>
+          <p:cNvPr id="28" name="Text 22"/>
+          <p:cNvSpPr/>
+          <p:nvPr/>
+        </p:nvSpPr>
+        <p:spPr>
+          <a:xfrm>
+            <a:off x="1188720" y="4462272"/>
+            <a:ext cx="3053080" cy="566928"/>
+          </a:xfrm>
+          <a:prstGeom prst="rect">
+            <a:avLst/>
+          </a:prstGeom>
+          <a:noFill/>
+          <a:ln/>
+        </p:spPr>
+        <p:txBody>
+          <a:bodyPr wrap="square" lIns="0" tIns="0" rIns="0" bIns="0" rtlCol="0" anchor="ctr"/>
+          <a:lstStyle/>
+          <a:p>
+            <a:pPr indent="0" marL="0">
+              <a:buNone/>
+            </a:pPr>
+            <a:r>
+              <a:rPr lang="en-US" sz="900" b="1" dirty="0">
+                <a:solidFill>
+                  <a:srgbClr val="1A1A1A"/>
+                </a:solidFill>
+                <a:latin typeface="Roboto" pitchFamily="34" charset="0"/>
+                <a:ea typeface="Roboto" pitchFamily="34" charset="-122"/>
+                <a:cs typeface="Roboto" pitchFamily="34" charset="-120"/>
+              </a:rPr>
+              <a:t>4 uji penyemaian garam (Silverman 2003):</a:t>
+            </a:r>
+            <a:r>
+              <a:rPr lang="en-US" sz="900" dirty="0">
+                <a:solidFill>
+                  <a:srgbClr val="1A1A1A"/>
+                </a:solidFill>
+                <a:latin typeface="Roboto" pitchFamily="34" charset="0"/>
+                <a:ea typeface="Roboto" pitchFamily="34" charset="-122"/>
+                <a:cs typeface="Roboto" pitchFamily="34" charset="-120"/>
+              </a:rPr>
+              <a:t> belum terbukti</a:t>
+            </a:r>
+            <a:endParaRPr lang="en-US" sz="900" dirty="0"/>
+          </a:p>
+        </p:txBody>
+      </p:sp>
+      <p:sp>
+        <p:nvSpPr>
+          <p:cNvPr id="29" name="Shape 23"/>
+          <p:cNvSpPr/>
+          <p:nvPr/>
+        </p:nvSpPr>
+        <p:spPr>
+          <a:xfrm>
+            <a:off x="676656" y="5102352"/>
+            <a:ext cx="3693160" cy="566928"/>
+          </a:xfrm>
+          <a:prstGeom prst="roundRect">
+            <a:avLst>
+              <a:gd name="adj" fmla="val 9677"/>
+            </a:avLst>
+          </a:prstGeom>
+          <a:solidFill>
+            <a:srgbClr val="F3F5F8"/>
+          </a:solidFill>
+          <a:ln/>
+        </p:spPr>
+      </p:sp>
+      <p:sp>
+        <p:nvSpPr>
+          <p:cNvPr id="30" name="Shape 24"/>
+          <p:cNvSpPr/>
+          <p:nvPr/>
+        </p:nvSpPr>
+        <p:spPr>
+          <a:xfrm>
+            <a:off x="786384" y="5230368"/>
+            <a:ext cx="310896" cy="310896"/>
+          </a:xfrm>
+          <a:prstGeom prst="ellipse">
+            <a:avLst/>
+          </a:prstGeom>
+          <a:solidFill>
+            <a:srgbClr val="051C2C"/>
+          </a:solidFill>
+          <a:ln/>
+        </p:spPr>
+      </p:sp>
+      <p:pic>
+        <p:nvPicPr>
+          <p:cNvPr id="31" name="Image 3" descr="/Users/priyankaalfatehan28/.claude/skills/ppt-konsultan/mesin/cache-ikon/cloud-regular-FFFFFF.png">    </p:cNvPr>
+          <p:cNvPicPr>
+            <a:picLocks noChangeAspect="1"/>
+          </p:cNvPicPr>
+          <p:nvPr/>
+        </p:nvPicPr>
+        <p:blipFill>
+          <a:blip r:embed="rId5"/>
+          <a:stretch>
+            <a:fillRect/>
+          </a:stretch>
+        </p:blipFill>
+        <p:spPr>
+          <a:xfrm>
+            <a:off x="859536" y="5303520"/>
+            <a:ext cx="164592" cy="164592"/>
+          </a:xfrm>
+          <a:prstGeom prst="rect">
+            <a:avLst/>
+          </a:prstGeom>
+        </p:spPr>
+      </p:pic>
+      <p:sp>
+        <p:nvSpPr>
+          <p:cNvPr id="32" name="Text 25"/>
+          <p:cNvSpPr/>
+          <p:nvPr/>
+        </p:nvSpPr>
+        <p:spPr>
+          <a:xfrm>
+            <a:off x="1188720" y="5102352"/>
+            <a:ext cx="3053080" cy="566928"/>
+          </a:xfrm>
+          <a:prstGeom prst="rect">
+            <a:avLst/>
+          </a:prstGeom>
+          <a:noFill/>
+          <a:ln/>
+        </p:spPr>
+        <p:txBody>
+          <a:bodyPr wrap="square" lIns="0" tIns="0" rIns="0" bIns="0" rtlCol="0" anchor="ctr"/>
+          <a:lstStyle/>
+          <a:p>
+            <a:pPr indent="0" marL="0">
+              <a:buNone/>
+            </a:pPr>
+            <a:r>
+              <a:rPr lang="en-US" sz="900" b="1" dirty="0">
+                <a:solidFill>
+                  <a:srgbClr val="1A1A1A"/>
+                </a:solidFill>
+                <a:latin typeface="Roboto" pitchFamily="34" charset="0"/>
+                <a:ea typeface="Roboto" pitchFamily="34" charset="-122"/>
+                <a:cs typeface="Roboto" pitchFamily="34" charset="-120"/>
+              </a:rPr>
+              <a:t>Dry ice untuk asap:</a:t>
+            </a:r>
+            <a:r>
+              <a:rPr lang="en-US" sz="900" dirty="0">
+                <a:solidFill>
+                  <a:srgbClr val="1A1A1A"/>
+                </a:solidFill>
+                <a:latin typeface="Roboto" pitchFamily="34" charset="0"/>
+                <a:ea typeface="Roboto" pitchFamily="34" charset="-122"/>
+                <a:cs typeface="Roboto" pitchFamily="34" charset="-120"/>
+              </a:rPr>
+              <a:t> belum ada bukti (BRIN 19 Okt 2026)</a:t>
+            </a:r>
+            <a:endParaRPr lang="en-US" sz="900" dirty="0"/>
+          </a:p>
+        </p:txBody>
+      </p:sp>
+      <p:sp>
+        <p:nvSpPr>
+          <p:cNvPr id="33" name="Shape 26"/>
+          <p:cNvSpPr/>
+          <p:nvPr/>
+        </p:nvSpPr>
+        <p:spPr>
+          <a:xfrm>
+            <a:off x="4634992" y="1280160"/>
+            <a:ext cx="3434080" cy="4809744"/>
+          </a:xfrm>
+          <a:prstGeom prst="roundRect">
+            <a:avLst>
+              <a:gd name="adj" fmla="val 1598"/>
             </a:avLst>
           </a:prstGeom>
           <a:solidFill>
@@ -12406,14 +12504,14 @@
       </p:sp>
       <p:sp>
         <p:nvSpPr>
-          <p:cNvPr id="38" name="Shape 35"/>
-          <p:cNvSpPr/>
-          <p:nvPr/>
-        </p:nvSpPr>
-        <p:spPr>
-          <a:xfrm>
-            <a:off x="4538556" y="1280160"/>
-            <a:ext cx="3408207" cy="457200"/>
+          <p:cNvPr id="34" name="Shape 27"/>
+          <p:cNvSpPr/>
+          <p:nvPr/>
+        </p:nvSpPr>
+        <p:spPr>
+          <a:xfrm>
+            <a:off x="4634992" y="1280160"/>
+            <a:ext cx="3434080" cy="457200"/>
           </a:xfrm>
           <a:prstGeom prst="roundRect">
             <a:avLst>
@@ -12428,14 +12526,14 @@
       </p:sp>
       <p:sp>
         <p:nvSpPr>
-          <p:cNvPr id="39" name="Shape 36"/>
-          <p:cNvSpPr/>
-          <p:nvPr/>
-        </p:nvSpPr>
-        <p:spPr>
-          <a:xfrm>
-            <a:off x="4538556" y="1508760"/>
-            <a:ext cx="3408207" cy="228600"/>
+          <p:cNvPr id="35" name="Shape 28"/>
+          <p:cNvSpPr/>
+          <p:nvPr/>
+        </p:nvSpPr>
+        <p:spPr>
+          <a:xfrm>
+            <a:off x="4634992" y="1508760"/>
+            <a:ext cx="3434080" cy="228600"/>
           </a:xfrm>
           <a:prstGeom prst="rect">
             <a:avLst/>
@@ -12448,13 +12546,13 @@
       </p:sp>
       <p:sp>
         <p:nvSpPr>
-          <p:cNvPr id="40" name="Shape 37"/>
-          <p:cNvSpPr/>
-          <p:nvPr/>
-        </p:nvSpPr>
-        <p:spPr>
-          <a:xfrm>
-            <a:off x="4666572" y="1362456"/>
+          <p:cNvPr id="36" name="Shape 29"/>
+          <p:cNvSpPr/>
+          <p:nvPr/>
+        </p:nvSpPr>
+        <p:spPr>
+          <a:xfrm>
+            <a:off x="4763008" y="1362456"/>
             <a:ext cx="292608" cy="292608"/>
           </a:xfrm>
           <a:prstGeom prst="ellipse">
@@ -12468,21 +12566,21 @@
       </p:sp>
       <p:pic>
         <p:nvPicPr>
-          <p:cNvPr id="41" name="Image 1" descr="/Users/priyankaalfatehan28/.claude/skills/ppt-konsultan/mesin/cache-ikon/scales-regular-FFFFFF.png">    </p:cNvPr>
+          <p:cNvPr id="37" name="Image 4" descr="/Users/priyankaalfatehan28/.claude/skills/ppt-konsultan/mesin/cache-ikon/scales-regular-FFFFFF.png">    </p:cNvPr>
           <p:cNvPicPr>
             <a:picLocks noChangeAspect="1"/>
           </p:cNvPicPr>
           <p:nvPr/>
         </p:nvPicPr>
         <p:blipFill>
-          <a:blip r:embed="rId2"/>
+          <a:blip r:embed="rId6"/>
           <a:stretch>
             <a:fillRect/>
           </a:stretch>
         </p:blipFill>
         <p:spPr>
           <a:xfrm>
-            <a:off x="4730580" y="1426464"/>
+            <a:off x="4827016" y="1426464"/>
             <a:ext cx="164592" cy="164592"/>
           </a:xfrm>
           <a:prstGeom prst="rect">
@@ -12492,14 +12590,14 @@
       </p:pic>
       <p:sp>
         <p:nvSpPr>
-          <p:cNvPr id="42" name="Text 38"/>
-          <p:cNvSpPr/>
-          <p:nvPr/>
-        </p:nvSpPr>
-        <p:spPr>
-          <a:xfrm>
-            <a:off x="5050620" y="1280160"/>
-            <a:ext cx="2758983" cy="457200"/>
+          <p:cNvPr id="38" name="Text 30"/>
+          <p:cNvSpPr/>
+          <p:nvPr/>
+        </p:nvSpPr>
+        <p:spPr>
+          <a:xfrm>
+            <a:off x="5147056" y="1280160"/>
+            <a:ext cx="2784856" cy="457200"/>
           </a:xfrm>
           <a:prstGeom prst="rect">
             <a:avLst/>
@@ -12523,7 +12621,7 @@
                 <a:ea typeface="Roboto" pitchFamily="34" charset="-122"/>
                 <a:cs typeface="Roboto" pitchFamily="34" charset="-120"/>
               </a:rPr>
-              <a:t>Klaim keberhasilan dan buktinya</a:t>
+              <a:t>Klaim keberhasilan di Indonesia</a:t>
             </a:r>
             <a:endParaRPr lang="en-US" sz="1000" dirty="0"/>
           </a:p>
@@ -12531,139 +12629,26 @@
       </p:sp>
       <p:sp>
         <p:nvSpPr>
-          <p:cNvPr id="43" name="Text 39"/>
-          <p:cNvSpPr/>
-          <p:nvPr/>
-        </p:nvSpPr>
-        <p:spPr>
-          <a:xfrm>
-            <a:off x="4666572" y="1828800"/>
-            <a:ext cx="1269049" cy="182880"/>
-          </a:xfrm>
-          <a:prstGeom prst="rect">
-            <a:avLst/>
-          </a:prstGeom>
-          <a:noFill/>
-          <a:ln/>
-        </p:spPr>
-        <p:txBody>
-          <a:bodyPr wrap="square" lIns="0" tIns="0" rIns="0" bIns="0" rtlCol="0" anchor="ctr"/>
-          <a:lstStyle/>
-          <a:p>
-            <a:pPr algn="ctr" indent="0" marL="0">
-              <a:buNone/>
-            </a:pPr>
-            <a:r>
-              <a:rPr lang="en-US" sz="800" b="1" spc="150" kern="0" dirty="0">
-                <a:solidFill>
-                  <a:srgbClr val="6B7280"/>
-                </a:solidFill>
-                <a:latin typeface="Roboto" pitchFamily="34" charset="0"/>
-                <a:ea typeface="Roboto" pitchFamily="34" charset="-122"/>
-                <a:cs typeface="Roboto" pitchFamily="34" charset="-120"/>
-              </a:rPr>
-              <a:t>KLAIM</a:t>
-            </a:r>
-            <a:endParaRPr lang="en-US" sz="800" dirty="0"/>
-          </a:p>
-        </p:txBody>
-      </p:sp>
-      <p:sp>
-        <p:nvSpPr>
-          <p:cNvPr id="44" name="Text 40"/>
-          <p:cNvSpPr/>
-          <p:nvPr/>
-        </p:nvSpPr>
-        <p:spPr>
-          <a:xfrm>
-            <a:off x="5990485" y="1828800"/>
-            <a:ext cx="953832" cy="182880"/>
-          </a:xfrm>
-          <a:prstGeom prst="rect">
-            <a:avLst/>
-          </a:prstGeom>
-          <a:noFill/>
-          <a:ln/>
-        </p:spPr>
-        <p:txBody>
-          <a:bodyPr wrap="square" lIns="0" tIns="0" rIns="0" bIns="0" rtlCol="0" anchor="ctr"/>
-          <a:lstStyle/>
-          <a:p>
-            <a:pPr algn="ctr" indent="0" marL="0">
-              <a:buNone/>
-            </a:pPr>
-            <a:r>
-              <a:rPr lang="en-US" sz="800" b="1" spc="150" kern="0" dirty="0">
-                <a:solidFill>
-                  <a:srgbClr val="6B7280"/>
-                </a:solidFill>
-                <a:latin typeface="Roboto" pitchFamily="34" charset="0"/>
-                <a:ea typeface="Roboto" pitchFamily="34" charset="-122"/>
-                <a:cs typeface="Roboto" pitchFamily="34" charset="-120"/>
-              </a:rPr>
-              <a:t>CARA HITUNG</a:t>
-            </a:r>
-            <a:endParaRPr lang="en-US" sz="800" dirty="0"/>
-          </a:p>
-        </p:txBody>
-      </p:sp>
-      <p:sp>
-        <p:nvSpPr>
-          <p:cNvPr id="45" name="Text 41"/>
-          <p:cNvSpPr/>
-          <p:nvPr/>
-        </p:nvSpPr>
-        <p:spPr>
-          <a:xfrm>
-            <a:off x="6999181" y="1828800"/>
-            <a:ext cx="764701" cy="182880"/>
-          </a:xfrm>
-          <a:prstGeom prst="rect">
-            <a:avLst/>
-          </a:prstGeom>
-          <a:noFill/>
-          <a:ln/>
-        </p:spPr>
-        <p:txBody>
-          <a:bodyPr wrap="square" lIns="0" tIns="0" rIns="0" bIns="0" rtlCol="0" anchor="ctr"/>
-          <a:lstStyle/>
-          <a:p>
-            <a:pPr algn="ctr" indent="0" marL="0">
-              <a:buNone/>
-            </a:pPr>
-            <a:r>
-              <a:rPr lang="en-US" sz="800" b="1" spc="150" kern="0" dirty="0">
-                <a:solidFill>
-                  <a:srgbClr val="6B7280"/>
-                </a:solidFill>
-                <a:latin typeface="Roboto" pitchFamily="34" charset="0"/>
-                <a:ea typeface="Roboto" pitchFamily="34" charset="-122"/>
-                <a:cs typeface="Roboto" pitchFamily="34" charset="-120"/>
-              </a:rPr>
-              <a:t>STATUS</a:t>
-            </a:r>
-            <a:endParaRPr lang="en-US" sz="800" dirty="0"/>
-          </a:p>
-        </p:txBody>
-      </p:sp>
-      <p:sp>
-        <p:nvSpPr>
-          <p:cNvPr id="46" name="Shape 42"/>
-          <p:cNvSpPr/>
-          <p:nvPr/>
-        </p:nvSpPr>
-        <p:spPr>
-          <a:xfrm>
-            <a:off x="4666572" y="2057400"/>
-            <a:ext cx="3152175" cy="0"/>
-          </a:xfrm>
-          <a:prstGeom prst="line">
-            <a:avLst/>
-          </a:prstGeom>
-          <a:noFill/>
+          <p:cNvPr id="39" name="Shape 31"/>
+          <p:cNvSpPr/>
+          <p:nvPr/>
+        </p:nvSpPr>
+        <p:spPr>
+          <a:xfrm>
+            <a:off x="4763008" y="1856232"/>
+            <a:ext cx="3178048" cy="1225296"/>
+          </a:xfrm>
+          <a:prstGeom prst="roundRect">
+            <a:avLst>
+              <a:gd name="adj" fmla="val 4478"/>
+            </a:avLst>
+          </a:prstGeom>
+          <a:solidFill>
+            <a:srgbClr val="FFFFFF"/>
+          </a:solidFill>
           <a:ln w="9525">
             <a:solidFill>
-              <a:srgbClr val="1A1A1A"/>
+              <a:srgbClr val="BFC5CC"/>
             </a:solidFill>
             <a:prstDash val="solid"/>
           </a:ln>
@@ -12671,67 +12656,122 @@
       </p:sp>
       <p:sp>
         <p:nvSpPr>
-          <p:cNvPr id="47" name="Text 43"/>
-          <p:cNvSpPr/>
-          <p:nvPr/>
-        </p:nvSpPr>
-        <p:spPr>
-          <a:xfrm>
-            <a:off x="4666572" y="2057400"/>
-            <a:ext cx="1269049" cy="731520"/>
-          </a:xfrm>
-          <a:prstGeom prst="rect">
-            <a:avLst/>
-          </a:prstGeom>
-          <a:noFill/>
-          <a:ln/>
-        </p:spPr>
-        <p:txBody>
-          <a:bodyPr wrap="square" lIns="0" tIns="0" rIns="0" bIns="0" rtlCol="0" anchor="ctr"/>
-          <a:lstStyle/>
-          <a:p>
-            <a:pPr algn="l" indent="0" marL="0">
+          <p:cNvPr id="40" name="Shape 32"/>
+          <p:cNvSpPr/>
+          <p:nvPr/>
+        </p:nvSpPr>
+        <p:spPr>
+          <a:xfrm>
+            <a:off x="4891024" y="1984248"/>
+            <a:ext cx="329184" cy="329184"/>
+          </a:xfrm>
+          <a:prstGeom prst="ellipse">
+            <a:avLst/>
+          </a:prstGeom>
+          <a:solidFill>
+            <a:srgbClr val="E6EAF0"/>
+          </a:solidFill>
+          <a:ln/>
+        </p:spPr>
+      </p:sp>
+      <p:pic>
+        <p:nvPicPr>
+          <p:cNvPr id="41" name="Image 5" descr="/Users/priyankaalfatehan28/.claude/skills/ppt-konsultan/mesin/cache-ikon/megaphone-regular-051C2C.png">    </p:cNvPr>
+          <p:cNvPicPr>
+            <a:picLocks noChangeAspect="1"/>
+          </p:cNvPicPr>
+          <p:nvPr/>
+        </p:nvPicPr>
+        <p:blipFill>
+          <a:blip r:embed="rId7"/>
+          <a:stretch>
+            <a:fillRect/>
+          </a:stretch>
+        </p:blipFill>
+        <p:spPr>
+          <a:xfrm>
+            <a:off x="4973320" y="2066544"/>
+            <a:ext cx="164592" cy="164592"/>
+          </a:xfrm>
+          <a:prstGeom prst="rect">
+            <a:avLst/>
+          </a:prstGeom>
+        </p:spPr>
+      </p:pic>
+      <p:sp>
+        <p:nvSpPr>
+          <p:cNvPr id="42" name="Text 33"/>
+          <p:cNvSpPr/>
+          <p:nvPr/>
+        </p:nvSpPr>
+        <p:spPr>
+          <a:xfrm>
+            <a:off x="5329936" y="1920240"/>
+            <a:ext cx="2483104" cy="457200"/>
+          </a:xfrm>
+          <a:prstGeom prst="rect">
+            <a:avLst/>
+          </a:prstGeom>
+          <a:noFill/>
+          <a:ln/>
+        </p:spPr>
+        <p:txBody>
+          <a:bodyPr wrap="square" lIns="0" tIns="0" rIns="0" bIns="0" rtlCol="0" anchor="t"/>
+          <a:lstStyle/>
+          <a:p>
+            <a:pPr indent="0" marL="0">
+              <a:buNone/>
+            </a:pPr>
+            <a:r>
+              <a:rPr lang="en-US" sz="1000" b="1" dirty="0">
+                <a:solidFill>
+                  <a:srgbClr val="1A1A1A"/>
+                </a:solidFill>
+                <a:latin typeface="Roboto" pitchFamily="34" charset="0"/>
+                <a:ea typeface="Roboto" pitchFamily="34" charset="-122"/>
+                <a:cs typeface="Roboto" pitchFamily="34" charset="-120"/>
+              </a:rPr>
+              <a:t>BMKG Jul 2025: penyemaian berhasil 85 sampai 100%</a:t>
+            </a:r>
+            <a:endParaRPr lang="en-US" sz="1000" dirty="0"/>
+          </a:p>
+        </p:txBody>
+      </p:sp>
+      <p:sp>
+        <p:nvSpPr>
+          <p:cNvPr id="43" name="Text 34"/>
+          <p:cNvSpPr/>
+          <p:nvPr/>
+        </p:nvSpPr>
+        <p:spPr>
+          <a:xfrm>
+            <a:off x="4891024" y="2432304"/>
+            <a:ext cx="2922016" cy="274320"/>
+          </a:xfrm>
+          <a:prstGeom prst="rect">
+            <a:avLst/>
+          </a:prstGeom>
+          <a:noFill/>
+          <a:ln/>
+        </p:spPr>
+        <p:txBody>
+          <a:bodyPr wrap="square" lIns="0" tIns="0" rIns="0" bIns="0" rtlCol="0" anchor="t"/>
+          <a:lstStyle/>
+          <a:p>
+            <a:pPr indent="0" marL="0">
               <a:buNone/>
             </a:pPr>
             <a:r>
               <a:rPr lang="en-US" sz="800" b="1" dirty="0">
                 <a:solidFill>
-                  <a:srgbClr val="1A1A1A"/>
-                </a:solidFill>
-                <a:latin typeface="Roboto" pitchFamily="34" charset="0"/>
-                <a:ea typeface="Roboto" pitchFamily="34" charset="-122"/>
-                <a:cs typeface="Roboto" pitchFamily="34" charset="-120"/>
-              </a:rPr>
-              <a:t>BMKG Jul 2025: keberhasilan penyemaian 85 sampai 100%</a:t>
-            </a:r>
-            <a:endParaRPr lang="en-US" sz="800" dirty="0"/>
-          </a:p>
-        </p:txBody>
-      </p:sp>
-      <p:sp>
-        <p:nvSpPr>
-          <p:cNvPr id="48" name="Text 44"/>
-          <p:cNvSpPr/>
-          <p:nvPr/>
-        </p:nvSpPr>
-        <p:spPr>
-          <a:xfrm>
-            <a:off x="5990485" y="2057400"/>
-            <a:ext cx="953832" cy="731520"/>
-          </a:xfrm>
-          <a:prstGeom prst="rect">
-            <a:avLst/>
-          </a:prstGeom>
-          <a:noFill/>
-          <a:ln/>
-        </p:spPr>
-        <p:txBody>
-          <a:bodyPr wrap="square" lIns="0" tIns="0" rIns="0" bIns="0" rtlCol="0" anchor="ctr"/>
-          <a:lstStyle/>
-          <a:p>
-            <a:pPr algn="l" indent="0" marL="0">
-              <a:buNone/>
-            </a:pPr>
+                  <a:srgbClr val="2E3440"/>
+                </a:solidFill>
+                <a:latin typeface="Roboto" pitchFamily="34" charset="0"/>
+                <a:ea typeface="Roboto" pitchFamily="34" charset="-122"/>
+                <a:cs typeface="Roboto" pitchFamily="34" charset="-120"/>
+              </a:rPr>
+              <a:t>Dihitung dari: </a:t>
+            </a:r>
             <a:r>
               <a:rPr lang="en-US" sz="800" dirty="0">
                 <a:solidFill>
@@ -12741,69 +12781,119 @@
                 <a:ea typeface="Roboto" pitchFamily="34" charset="-122"/>
                 <a:cs typeface="Roboto" pitchFamily="34" charset="-120"/>
               </a:rPr>
-              <a:t>Keberhasilan tidak didefinisikan</a:t>
-            </a:r>
-            <a:endParaRPr lang="en-US" sz="800" dirty="0"/>
-          </a:p>
-        </p:txBody>
-      </p:sp>
-      <p:sp>
-        <p:nvSpPr>
-          <p:cNvPr id="49" name="Text 45"/>
-          <p:cNvSpPr/>
-          <p:nvPr/>
-        </p:nvSpPr>
-        <p:spPr>
-          <a:xfrm>
-            <a:off x="6999181" y="2057400"/>
-            <a:ext cx="764701" cy="731520"/>
-          </a:xfrm>
-          <a:prstGeom prst="rect">
-            <a:avLst/>
-          </a:prstGeom>
-          <a:noFill/>
-          <a:ln/>
-        </p:spPr>
-        <p:txBody>
-          <a:bodyPr wrap="square" lIns="0" tIns="0" rIns="0" bIns="0" rtlCol="0" anchor="ctr"/>
-          <a:lstStyle/>
-          <a:p>
-            <a:pPr algn="l" indent="0" marL="0">
-              <a:buNone/>
-            </a:pPr>
-            <a:r>
-              <a:rPr lang="en-US" sz="800" dirty="0">
-                <a:solidFill>
-                  <a:srgbClr val="2E3440"/>
-                </a:solidFill>
-                <a:latin typeface="Roboto" pitchFamily="34" charset="0"/>
-                <a:ea typeface="Roboto" pitchFamily="34" charset="-122"/>
-                <a:cs typeface="Roboto" pitchFamily="34" charset="-120"/>
-              </a:rPr>
-              <a:t>Klaim, tidak dapat diverifikasi</a:t>
-            </a:r>
-            <a:endParaRPr lang="en-US" sz="800" dirty="0"/>
-          </a:p>
-        </p:txBody>
-      </p:sp>
-      <p:sp>
-        <p:nvSpPr>
-          <p:cNvPr id="50" name="Shape 46"/>
-          <p:cNvSpPr/>
-          <p:nvPr/>
-        </p:nvSpPr>
-        <p:spPr>
-          <a:xfrm>
-            <a:off x="4666572" y="2788920"/>
-            <a:ext cx="3152175" cy="0"/>
-          </a:xfrm>
-          <a:prstGeom prst="line">
-            <a:avLst/>
-          </a:prstGeom>
-          <a:noFill/>
-          <a:ln w="6350">
+              <a:t>keberhasilan tanpa definisi tertulis</a:t>
+            </a:r>
+            <a:endParaRPr lang="en-US" sz="800" dirty="0"/>
+          </a:p>
+        </p:txBody>
+      </p:sp>
+      <p:sp>
+        <p:nvSpPr>
+          <p:cNvPr id="44" name="Shape 35"/>
+          <p:cNvSpPr/>
+          <p:nvPr/>
+        </p:nvSpPr>
+        <p:spPr>
+          <a:xfrm>
+            <a:off x="4891024" y="2779776"/>
+            <a:ext cx="1199693" cy="201168"/>
+          </a:xfrm>
+          <a:prstGeom prst="roundRect">
+            <a:avLst>
+              <a:gd name="adj" fmla="val 50000"/>
+            </a:avLst>
+          </a:prstGeom>
+          <a:solidFill>
+            <a:srgbClr val="C05509"/>
+          </a:solidFill>
+          <a:ln/>
+        </p:spPr>
+      </p:sp>
+      <p:pic>
+        <p:nvPicPr>
+          <p:cNvPr id="45" name="Image 6" descr="/Users/priyankaalfatehan28/.claude/skills/ppt-konsultan/mesin/cache-ikon/warning-regular-FFFFFF.png">    </p:cNvPr>
+          <p:cNvPicPr>
+            <a:picLocks noChangeAspect="1"/>
+          </p:cNvPicPr>
+          <p:nvPr/>
+        </p:nvPicPr>
+        <p:blipFill>
+          <a:blip r:embed="rId8"/>
+          <a:stretch>
+            <a:fillRect/>
+          </a:stretch>
+        </p:blipFill>
+        <p:spPr>
+          <a:xfrm>
+            <a:off x="4964176" y="2815986"/>
+            <a:ext cx="128748" cy="128748"/>
+          </a:xfrm>
+          <a:prstGeom prst="rect">
+            <a:avLst/>
+          </a:prstGeom>
+        </p:spPr>
+      </p:pic>
+      <p:sp>
+        <p:nvSpPr>
+          <p:cNvPr id="46" name="Text 36"/>
+          <p:cNvSpPr/>
+          <p:nvPr/>
+        </p:nvSpPr>
+        <p:spPr>
+          <a:xfrm>
+            <a:off x="5128768" y="2779776"/>
+            <a:ext cx="907085" cy="201168"/>
+          </a:xfrm>
+          <a:prstGeom prst="rect">
+            <a:avLst/>
+          </a:prstGeom>
+          <a:noFill/>
+          <a:ln/>
+        </p:spPr>
+        <p:txBody>
+          <a:bodyPr wrap="square" lIns="0" tIns="0" rIns="0" bIns="0" rtlCol="0" anchor="ctr"/>
+          <a:lstStyle/>
+          <a:p>
+            <a:pPr algn="ctr" indent="0" marL="0">
+              <a:buNone/>
+            </a:pPr>
+            <a:r>
+              <a:rPr lang="en-US" sz="800" b="1" dirty="0">
+                <a:solidFill>
+                  <a:srgbClr val="FFFFFF"/>
+                </a:solidFill>
+                <a:latin typeface="Roboto" pitchFamily="34" charset="0"/>
+                <a:ea typeface="Roboto" pitchFamily="34" charset="-122"/>
+                <a:cs typeface="Roboto" pitchFamily="34" charset="-120"/>
+              </a:rPr>
+              <a:t>Tanpa pembanding</a:t>
+            </a:r>
+            <a:endParaRPr lang="en-US" sz="800" dirty="0"/>
+          </a:p>
+        </p:txBody>
+      </p:sp>
+      <p:sp>
+        <p:nvSpPr>
+          <p:cNvPr id="47" name="Shape 37"/>
+          <p:cNvSpPr/>
+          <p:nvPr/>
+        </p:nvSpPr>
+        <p:spPr>
+          <a:xfrm>
+            <a:off x="4763008" y="3136392"/>
+            <a:ext cx="3178048" cy="1225296"/>
+          </a:xfrm>
+          <a:prstGeom prst="roundRect">
+            <a:avLst>
+              <a:gd name="adj" fmla="val 4478"/>
+            </a:avLst>
+          </a:prstGeom>
+          <a:solidFill>
+            <a:srgbClr val="FFFFFF"/>
+          </a:solidFill>
+          <a:ln w="9525">
             <a:solidFill>
-              <a:srgbClr val="E3E6EA"/>
+              <a:srgbClr val="BFC5CC"/>
             </a:solidFill>
             <a:prstDash val="solid"/>
           </a:ln>
@@ -12811,67 +12901,122 @@
       </p:sp>
       <p:sp>
         <p:nvSpPr>
-          <p:cNvPr id="51" name="Text 47"/>
-          <p:cNvSpPr/>
-          <p:nvPr/>
-        </p:nvSpPr>
-        <p:spPr>
-          <a:xfrm>
-            <a:off x="4666572" y="2788920"/>
-            <a:ext cx="1269049" cy="731520"/>
-          </a:xfrm>
-          <a:prstGeom prst="rect">
-            <a:avLst/>
-          </a:prstGeom>
-          <a:noFill/>
-          <a:ln/>
-        </p:spPr>
-        <p:txBody>
-          <a:bodyPr wrap="square" lIns="0" tIns="0" rIns="0" bIns="0" rtlCol="0" anchor="ctr"/>
-          <a:lstStyle/>
-          <a:p>
-            <a:pPr algn="l" indent="0" marL="0">
+          <p:cNvPr id="48" name="Shape 38"/>
+          <p:cNvSpPr/>
+          <p:nvPr/>
+        </p:nvSpPr>
+        <p:spPr>
+          <a:xfrm>
+            <a:off x="4891024" y="3264408"/>
+            <a:ext cx="329184" cy="329184"/>
+          </a:xfrm>
+          <a:prstGeom prst="ellipse">
+            <a:avLst/>
+          </a:prstGeom>
+          <a:solidFill>
+            <a:srgbClr val="E6EAF0"/>
+          </a:solidFill>
+          <a:ln/>
+        </p:spPr>
+      </p:sp>
+      <p:pic>
+        <p:nvPicPr>
+          <p:cNvPr id="49" name="Image 7" descr="/Users/priyankaalfatehan28/.claude/skills/ppt-konsultan/mesin/cache-ikon/megaphone-regular-051C2C.png">    </p:cNvPr>
+          <p:cNvPicPr>
+            <a:picLocks noChangeAspect="1"/>
+          </p:cNvPicPr>
+          <p:nvPr/>
+        </p:nvPicPr>
+        <p:blipFill>
+          <a:blip r:embed="rId9"/>
+          <a:stretch>
+            <a:fillRect/>
+          </a:stretch>
+        </p:blipFill>
+        <p:spPr>
+          <a:xfrm>
+            <a:off x="4973320" y="3346704"/>
+            <a:ext cx="164592" cy="164592"/>
+          </a:xfrm>
+          <a:prstGeom prst="rect">
+            <a:avLst/>
+          </a:prstGeom>
+        </p:spPr>
+      </p:pic>
+      <p:sp>
+        <p:nvSpPr>
+          <p:cNvPr id="50" name="Text 39"/>
+          <p:cNvSpPr/>
+          <p:nvPr/>
+        </p:nvSpPr>
+        <p:spPr>
+          <a:xfrm>
+            <a:off x="5329936" y="3200400"/>
+            <a:ext cx="2483104" cy="457200"/>
+          </a:xfrm>
+          <a:prstGeom prst="rect">
+            <a:avLst/>
+          </a:prstGeom>
+          <a:noFill/>
+          <a:ln/>
+        </p:spPr>
+        <p:txBody>
+          <a:bodyPr wrap="square" lIns="0" tIns="0" rIns="0" bIns="0" rtlCol="0" anchor="t"/>
+          <a:lstStyle/>
+          <a:p>
+            <a:pPr indent="0" marL="0">
+              <a:buNone/>
+            </a:pPr>
+            <a:r>
+              <a:rPr lang="en-US" sz="1000" b="1" dirty="0">
+                <a:solidFill>
+                  <a:srgbClr val="1A1A1A"/>
+                </a:solidFill>
+                <a:latin typeface="Roboto" pitchFamily="34" charset="0"/>
+                <a:ea typeface="Roboto" pitchFamily="34" charset="-122"/>
+                <a:cs typeface="Roboto" pitchFamily="34" charset="-120"/>
+              </a:rPr>
+              <a:t>BMKG: karhutla turun rata-rata 23% (2016 sampai 2019)</a:t>
+            </a:r>
+            <a:endParaRPr lang="en-US" sz="1000" dirty="0"/>
+          </a:p>
+        </p:txBody>
+      </p:sp>
+      <p:sp>
+        <p:nvSpPr>
+          <p:cNvPr id="51" name="Text 40"/>
+          <p:cNvSpPr/>
+          <p:nvPr/>
+        </p:nvSpPr>
+        <p:spPr>
+          <a:xfrm>
+            <a:off x="4891024" y="3712464"/>
+            <a:ext cx="2922016" cy="274320"/>
+          </a:xfrm>
+          <a:prstGeom prst="rect">
+            <a:avLst/>
+          </a:prstGeom>
+          <a:noFill/>
+          <a:ln/>
+        </p:spPr>
+        <p:txBody>
+          <a:bodyPr wrap="square" lIns="0" tIns="0" rIns="0" bIns="0" rtlCol="0" anchor="t"/>
+          <a:lstStyle/>
+          <a:p>
+            <a:pPr indent="0" marL="0">
               <a:buNone/>
             </a:pPr>
             <a:r>
               <a:rPr lang="en-US" sz="800" b="1" dirty="0">
                 <a:solidFill>
-                  <a:srgbClr val="1A1A1A"/>
-                </a:solidFill>
-                <a:latin typeface="Roboto" pitchFamily="34" charset="0"/>
-                <a:ea typeface="Roboto" pitchFamily="34" charset="-122"/>
-                <a:cs typeface="Roboto" pitchFamily="34" charset="-120"/>
-              </a:rPr>
-              <a:t>BMKG: karhutla turun rata-rata 23% (2016 sampai 2019)</a:t>
-            </a:r>
-            <a:endParaRPr lang="en-US" sz="800" dirty="0"/>
-          </a:p>
-        </p:txBody>
-      </p:sp>
-      <p:sp>
-        <p:nvSpPr>
-          <p:cNvPr id="52" name="Text 48"/>
-          <p:cNvSpPr/>
-          <p:nvPr/>
-        </p:nvSpPr>
-        <p:spPr>
-          <a:xfrm>
-            <a:off x="5990485" y="2788920"/>
-            <a:ext cx="953832" cy="731520"/>
-          </a:xfrm>
-          <a:prstGeom prst="rect">
-            <a:avLst/>
-          </a:prstGeom>
-          <a:noFill/>
-          <a:ln/>
-        </p:spPr>
-        <p:txBody>
-          <a:bodyPr wrap="square" lIns="0" tIns="0" rIns="0" bIns="0" rtlCol="0" anchor="ctr"/>
-          <a:lstStyle/>
-          <a:p>
-            <a:pPr algn="l" indent="0" marL="0">
-              <a:buNone/>
-            </a:pPr>
+                  <a:srgbClr val="2E3440"/>
+                </a:solidFill>
+                <a:latin typeface="Roboto" pitchFamily="34" charset="0"/>
+                <a:ea typeface="Roboto" pitchFamily="34" charset="-122"/>
+                <a:cs typeface="Roboto" pitchFamily="34" charset="-120"/>
+              </a:rPr>
+              <a:t>Dihitung dari: </a:t>
+            </a:r>
             <a:r>
               <a:rPr lang="en-US" sz="800" dirty="0">
                 <a:solidFill>
@@ -12881,69 +13026,119 @@
                 <a:ea typeface="Roboto" pitchFamily="34" charset="-122"/>
                 <a:cs typeface="Roboto" pitchFamily="34" charset="-120"/>
               </a:rPr>
-              <a:t>Baseline, metrik, dan data tidak disebut</a:t>
-            </a:r>
-            <a:endParaRPr lang="en-US" sz="800" dirty="0"/>
-          </a:p>
-        </p:txBody>
-      </p:sp>
-      <p:sp>
-        <p:nvSpPr>
-          <p:cNvPr id="53" name="Text 49"/>
-          <p:cNvSpPr/>
-          <p:nvPr/>
-        </p:nvSpPr>
-        <p:spPr>
-          <a:xfrm>
-            <a:off x="6999181" y="2788920"/>
-            <a:ext cx="764701" cy="731520"/>
-          </a:xfrm>
-          <a:prstGeom prst="rect">
-            <a:avLst/>
-          </a:prstGeom>
-          <a:noFill/>
-          <a:ln/>
-        </p:spPr>
-        <p:txBody>
-          <a:bodyPr wrap="square" lIns="0" tIns="0" rIns="0" bIns="0" rtlCol="0" anchor="ctr"/>
-          <a:lstStyle/>
-          <a:p>
-            <a:pPr algn="l" indent="0" marL="0">
-              <a:buNone/>
-            </a:pPr>
-            <a:r>
-              <a:rPr lang="en-US" sz="800" dirty="0">
-                <a:solidFill>
-                  <a:srgbClr val="2E3440"/>
-                </a:solidFill>
-                <a:latin typeface="Roboto" pitchFamily="34" charset="0"/>
-                <a:ea typeface="Roboto" pitchFamily="34" charset="-122"/>
-                <a:cs typeface="Roboto" pitchFamily="34" charset="-120"/>
-              </a:rPr>
-              <a:t>Klaim, tidak dapat diverifikasi</a:t>
-            </a:r>
-            <a:endParaRPr lang="en-US" sz="800" dirty="0"/>
-          </a:p>
-        </p:txBody>
-      </p:sp>
-      <p:sp>
-        <p:nvSpPr>
-          <p:cNvPr id="54" name="Shape 50"/>
-          <p:cNvSpPr/>
-          <p:nvPr/>
-        </p:nvSpPr>
-        <p:spPr>
-          <a:xfrm>
-            <a:off x="4666572" y="3520440"/>
-            <a:ext cx="3152175" cy="0"/>
-          </a:xfrm>
-          <a:prstGeom prst="line">
-            <a:avLst/>
-          </a:prstGeom>
-          <a:noFill/>
-          <a:ln w="6350">
+              <a:t>pembanding awal tidak disebut</a:t>
+            </a:r>
+            <a:endParaRPr lang="en-US" sz="800" dirty="0"/>
+          </a:p>
+        </p:txBody>
+      </p:sp>
+      <p:sp>
+        <p:nvSpPr>
+          <p:cNvPr id="52" name="Shape 41"/>
+          <p:cNvSpPr/>
+          <p:nvPr/>
+        </p:nvSpPr>
+        <p:spPr>
+          <a:xfrm>
+            <a:off x="4891024" y="4059936"/>
+            <a:ext cx="1199693" cy="201168"/>
+          </a:xfrm>
+          <a:prstGeom prst="roundRect">
+            <a:avLst>
+              <a:gd name="adj" fmla="val 50000"/>
+            </a:avLst>
+          </a:prstGeom>
+          <a:solidFill>
+            <a:srgbClr val="C05509"/>
+          </a:solidFill>
+          <a:ln/>
+        </p:spPr>
+      </p:sp>
+      <p:pic>
+        <p:nvPicPr>
+          <p:cNvPr id="53" name="Image 8" descr="/Users/priyankaalfatehan28/.claude/skills/ppt-konsultan/mesin/cache-ikon/warning-regular-FFFFFF.png">    </p:cNvPr>
+          <p:cNvPicPr>
+            <a:picLocks noChangeAspect="1"/>
+          </p:cNvPicPr>
+          <p:nvPr/>
+        </p:nvPicPr>
+        <p:blipFill>
+          <a:blip r:embed="rId10"/>
+          <a:stretch>
+            <a:fillRect/>
+          </a:stretch>
+        </p:blipFill>
+        <p:spPr>
+          <a:xfrm>
+            <a:off x="4964176" y="4096146"/>
+            <a:ext cx="128748" cy="128748"/>
+          </a:xfrm>
+          <a:prstGeom prst="rect">
+            <a:avLst/>
+          </a:prstGeom>
+        </p:spPr>
+      </p:pic>
+      <p:sp>
+        <p:nvSpPr>
+          <p:cNvPr id="54" name="Text 42"/>
+          <p:cNvSpPr/>
+          <p:nvPr/>
+        </p:nvSpPr>
+        <p:spPr>
+          <a:xfrm>
+            <a:off x="5128768" y="4059936"/>
+            <a:ext cx="907085" cy="201168"/>
+          </a:xfrm>
+          <a:prstGeom prst="rect">
+            <a:avLst/>
+          </a:prstGeom>
+          <a:noFill/>
+          <a:ln/>
+        </p:spPr>
+        <p:txBody>
+          <a:bodyPr wrap="square" lIns="0" tIns="0" rIns="0" bIns="0" rtlCol="0" anchor="ctr"/>
+          <a:lstStyle/>
+          <a:p>
+            <a:pPr algn="ctr" indent="0" marL="0">
+              <a:buNone/>
+            </a:pPr>
+            <a:r>
+              <a:rPr lang="en-US" sz="800" b="1" dirty="0">
+                <a:solidFill>
+                  <a:srgbClr val="FFFFFF"/>
+                </a:solidFill>
+                <a:latin typeface="Roboto" pitchFamily="34" charset="0"/>
+                <a:ea typeface="Roboto" pitchFamily="34" charset="-122"/>
+                <a:cs typeface="Roboto" pitchFamily="34" charset="-120"/>
+              </a:rPr>
+              <a:t>Tanpa pembanding</a:t>
+            </a:r>
+            <a:endParaRPr lang="en-US" sz="800" dirty="0"/>
+          </a:p>
+        </p:txBody>
+      </p:sp>
+      <p:sp>
+        <p:nvSpPr>
+          <p:cNvPr id="55" name="Shape 43"/>
+          <p:cNvSpPr/>
+          <p:nvPr/>
+        </p:nvSpPr>
+        <p:spPr>
+          <a:xfrm>
+            <a:off x="4763008" y="4416552"/>
+            <a:ext cx="3178048" cy="1225296"/>
+          </a:xfrm>
+          <a:prstGeom prst="roundRect">
+            <a:avLst>
+              <a:gd name="adj" fmla="val 4478"/>
+            </a:avLst>
+          </a:prstGeom>
+          <a:solidFill>
+            <a:srgbClr val="FFFFFF"/>
+          </a:solidFill>
+          <a:ln w="9525">
             <a:solidFill>
-              <a:srgbClr val="E3E6EA"/>
+              <a:srgbClr val="BFC5CC"/>
             </a:solidFill>
             <a:prstDash val="solid"/>
           </a:ln>
@@ -12951,67 +13146,122 @@
       </p:sp>
       <p:sp>
         <p:nvSpPr>
-          <p:cNvPr id="55" name="Text 51"/>
-          <p:cNvSpPr/>
-          <p:nvPr/>
-        </p:nvSpPr>
-        <p:spPr>
-          <a:xfrm>
-            <a:off x="4666572" y="3520440"/>
-            <a:ext cx="1269049" cy="731520"/>
-          </a:xfrm>
-          <a:prstGeom prst="rect">
-            <a:avLst/>
-          </a:prstGeom>
-          <a:noFill/>
-          <a:ln/>
-        </p:spPr>
-        <p:txBody>
-          <a:bodyPr wrap="square" lIns="0" tIns="0" rIns="0" bIns="0" rtlCol="0" anchor="ctr"/>
-          <a:lstStyle/>
-          <a:p>
-            <a:pPr algn="l" indent="0" marL="0">
+          <p:cNvPr id="56" name="Shape 44"/>
+          <p:cNvSpPr/>
+          <p:nvPr/>
+        </p:nvSpPr>
+        <p:spPr>
+          <a:xfrm>
+            <a:off x="4891024" y="4544568"/>
+            <a:ext cx="329184" cy="329184"/>
+          </a:xfrm>
+          <a:prstGeom prst="ellipse">
+            <a:avLst/>
+          </a:prstGeom>
+          <a:solidFill>
+            <a:srgbClr val="E6EAF0"/>
+          </a:solidFill>
+          <a:ln/>
+        </p:spPr>
+      </p:sp>
+      <p:pic>
+        <p:nvPicPr>
+          <p:cNvPr id="57" name="Image 9" descr="/Users/priyankaalfatehan28/.claude/skills/ppt-konsultan/mesin/cache-ikon/megaphone-regular-051C2C.png">    </p:cNvPr>
+          <p:cNvPicPr>
+            <a:picLocks noChangeAspect="1"/>
+          </p:cNvPicPr>
+          <p:nvPr/>
+        </p:nvPicPr>
+        <p:blipFill>
+          <a:blip r:embed="rId11"/>
+          <a:stretch>
+            <a:fillRect/>
+          </a:stretch>
+        </p:blipFill>
+        <p:spPr>
+          <a:xfrm>
+            <a:off x="4973320" y="4626864"/>
+            <a:ext cx="164592" cy="164592"/>
+          </a:xfrm>
+          <a:prstGeom prst="rect">
+            <a:avLst/>
+          </a:prstGeom>
+        </p:spPr>
+      </p:pic>
+      <p:sp>
+        <p:nvSpPr>
+          <p:cNvPr id="58" name="Text 45"/>
+          <p:cNvSpPr/>
+          <p:nvPr/>
+        </p:nvSpPr>
+        <p:spPr>
+          <a:xfrm>
+            <a:off x="5329936" y="4480560"/>
+            <a:ext cx="2483104" cy="457200"/>
+          </a:xfrm>
+          <a:prstGeom prst="rect">
+            <a:avLst/>
+          </a:prstGeom>
+          <a:noFill/>
+          <a:ln/>
+        </p:spPr>
+        <p:txBody>
+          <a:bodyPr wrap="square" lIns="0" tIns="0" rIns="0" bIns="0" rtlCol="0" anchor="t"/>
+          <a:lstStyle/>
+          <a:p>
+            <a:pPr indent="0" marL="0">
+              <a:buNone/>
+            </a:pPr>
+            <a:r>
+              <a:rPr lang="en-US" sz="1000" b="1" dirty="0">
+                <a:solidFill>
+                  <a:srgbClr val="1A1A1A"/>
+                </a:solidFill>
+                <a:latin typeface="Roboto" pitchFamily="34" charset="0"/>
+                <a:ea typeface="Roboto" pitchFamily="34" charset="-122"/>
+                <a:cs typeface="Roboto" pitchFamily="34" charset="-120"/>
+              </a:rPr>
+              <a:t>BNPB 21 Okt 2026: hujan di 3 dari 4 provinsi sasaran</a:t>
+            </a:r>
+            <a:endParaRPr lang="en-US" sz="1000" dirty="0"/>
+          </a:p>
+        </p:txBody>
+      </p:sp>
+      <p:sp>
+        <p:nvSpPr>
+          <p:cNvPr id="59" name="Text 46"/>
+          <p:cNvSpPr/>
+          <p:nvPr/>
+        </p:nvSpPr>
+        <p:spPr>
+          <a:xfrm>
+            <a:off x="4891024" y="4992624"/>
+            <a:ext cx="2922016" cy="274320"/>
+          </a:xfrm>
+          <a:prstGeom prst="rect">
+            <a:avLst/>
+          </a:prstGeom>
+          <a:noFill/>
+          <a:ln/>
+        </p:spPr>
+        <p:txBody>
+          <a:bodyPr wrap="square" lIns="0" tIns="0" rIns="0" bIns="0" rtlCol="0" anchor="t"/>
+          <a:lstStyle/>
+          <a:p>
+            <a:pPr indent="0" marL="0">
               <a:buNone/>
             </a:pPr>
             <a:r>
               <a:rPr lang="en-US" sz="800" b="1" dirty="0">
                 <a:solidFill>
-                  <a:srgbClr val="1A1A1A"/>
-                </a:solidFill>
-                <a:latin typeface="Roboto" pitchFamily="34" charset="0"/>
-                <a:ea typeface="Roboto" pitchFamily="34" charset="-122"/>
-                <a:cs typeface="Roboto" pitchFamily="34" charset="-120"/>
-              </a:rPr>
-              <a:t>BNPB 21 Okt 2026: hujan di 3 dari 4 provinsi, jarak pandang 1.000 m ke 7.000 m</a:t>
-            </a:r>
-            <a:endParaRPr lang="en-US" sz="800" dirty="0"/>
-          </a:p>
-        </p:txBody>
-      </p:sp>
-      <p:sp>
-        <p:nvSpPr>
-          <p:cNvPr id="56" name="Text 52"/>
-          <p:cNvSpPr/>
-          <p:nvPr/>
-        </p:nvSpPr>
-        <p:spPr>
-          <a:xfrm>
-            <a:off x="5990485" y="3520440"/>
-            <a:ext cx="953832" cy="731520"/>
-          </a:xfrm>
-          <a:prstGeom prst="rect">
-            <a:avLst/>
-          </a:prstGeom>
-          <a:noFill/>
-          <a:ln/>
-        </p:spPr>
-        <p:txBody>
-          <a:bodyPr wrap="square" lIns="0" tIns="0" rIns="0" bIns="0" rtlCol="0" anchor="ctr"/>
-          <a:lstStyle/>
-          <a:p>
-            <a:pPr algn="l" indent="0" marL="0">
-              <a:buNone/>
-            </a:pPr>
+                  <a:srgbClr val="2E3440"/>
+                </a:solidFill>
+                <a:latin typeface="Roboto" pitchFamily="34" charset="0"/>
+                <a:ea typeface="Roboto" pitchFamily="34" charset="-122"/>
+                <a:cs typeface="Roboto" pitchFamily="34" charset="-120"/>
+              </a:rPr>
+              <a:t>Dihitung dari: </a:t>
+            </a:r>
             <a:r>
               <a:rPr lang="en-US" sz="800" dirty="0">
                 <a:solidFill>
@@ -13021,345 +13271,111 @@
                 <a:ea typeface="Roboto" pitchFamily="34" charset="-122"/>
                 <a:cs typeface="Roboto" pitchFamily="34" charset="-120"/>
               </a:rPr>
-              <a:t>Hitungan kabupaten, sortie, jarak pandang; tanpa kontrol</a:t>
-            </a:r>
-            <a:endParaRPr lang="en-US" sz="800" dirty="0"/>
-          </a:p>
-        </p:txBody>
-      </p:sp>
-      <p:sp>
-        <p:nvSpPr>
-          <p:cNvPr id="57" name="Text 53"/>
-          <p:cNvSpPr/>
-          <p:nvPr/>
-        </p:nvSpPr>
-        <p:spPr>
-          <a:xfrm>
-            <a:off x="6999181" y="3520440"/>
-            <a:ext cx="764701" cy="731520"/>
-          </a:xfrm>
-          <a:prstGeom prst="rect">
-            <a:avLst/>
-          </a:prstGeom>
-          <a:noFill/>
-          <a:ln/>
-        </p:spPr>
-        <p:txBody>
-          <a:bodyPr wrap="square" lIns="0" tIns="0" rIns="0" bIns="0" rtlCol="0" anchor="ctr"/>
-          <a:lstStyle/>
-          <a:p>
-            <a:pPr algn="l" indent="0" marL="0">
-              <a:buNone/>
-            </a:pPr>
-            <a:r>
-              <a:rPr lang="en-US" sz="800" dirty="0">
-                <a:solidFill>
-                  <a:srgbClr val="2E3440"/>
-                </a:solidFill>
-                <a:latin typeface="Roboto" pitchFamily="34" charset="0"/>
-                <a:ea typeface="Roboto" pitchFamily="34" charset="-122"/>
-                <a:cs typeface="Roboto" pitchFamily="34" charset="-120"/>
-              </a:rPr>
-              <a:t>Ukuran proses, efek tidak terukur</a:t>
-            </a:r>
-            <a:endParaRPr lang="en-US" sz="800" dirty="0"/>
-          </a:p>
-        </p:txBody>
-      </p:sp>
-      <p:sp>
-        <p:nvSpPr>
-          <p:cNvPr id="58" name="Shape 54"/>
-          <p:cNvSpPr/>
-          <p:nvPr/>
-        </p:nvSpPr>
-        <p:spPr>
-          <a:xfrm>
-            <a:off x="4666572" y="4251960"/>
-            <a:ext cx="3152175" cy="0"/>
-          </a:xfrm>
-          <a:prstGeom prst="line">
-            <a:avLst/>
-          </a:prstGeom>
-          <a:noFill/>
-          <a:ln w="6350">
-            <a:solidFill>
-              <a:srgbClr val="E3E6EA"/>
-            </a:solidFill>
-            <a:prstDash val="solid"/>
-          </a:ln>
-        </p:spPr>
-      </p:sp>
-      <p:sp>
-        <p:nvSpPr>
-          <p:cNvPr id="59" name="Text 55"/>
-          <p:cNvSpPr/>
-          <p:nvPr/>
-        </p:nvSpPr>
-        <p:spPr>
-          <a:xfrm>
-            <a:off x="4666572" y="4251960"/>
-            <a:ext cx="1269049" cy="731520"/>
-          </a:xfrm>
-          <a:prstGeom prst="rect">
-            <a:avLst/>
-          </a:prstGeom>
-          <a:noFill/>
-          <a:ln/>
-        </p:spPr>
-        <p:txBody>
-          <a:bodyPr wrap="square" lIns="0" tIns="0" rIns="0" bIns="0" rtlCol="0" anchor="ctr"/>
-          <a:lstStyle/>
-          <a:p>
-            <a:pPr algn="l" indent="0" marL="0">
-              <a:buNone/>
-            </a:pPr>
-            <a:r>
-              <a:rPr lang="en-US" sz="800" b="1" dirty="0">
-                <a:solidFill>
-                  <a:srgbClr val="1A1A1A"/>
-                </a:solidFill>
-                <a:latin typeface="Roboto" pitchFamily="34" charset="0"/>
-                <a:ea typeface="Roboto" pitchFamily="34" charset="-122"/>
-                <a:cs typeface="Roboto" pitchFamily="34" charset="-120"/>
-              </a:rPr>
-              <a:t>BMKG Sep 2026: Kalbar 27 sortie berhasil memicu hujan</a:t>
-            </a:r>
-            <a:endParaRPr lang="en-US" sz="800" dirty="0"/>
-          </a:p>
-        </p:txBody>
-      </p:sp>
-      <p:sp>
-        <p:nvSpPr>
-          <p:cNvPr id="60" name="Text 56"/>
-          <p:cNvSpPr/>
-          <p:nvPr/>
-        </p:nvSpPr>
-        <p:spPr>
-          <a:xfrm>
-            <a:off x="5990485" y="4251960"/>
-            <a:ext cx="953832" cy="731520"/>
-          </a:xfrm>
-          <a:prstGeom prst="rect">
-            <a:avLst/>
-          </a:prstGeom>
-          <a:noFill/>
-          <a:ln/>
-        </p:spPr>
-        <p:txBody>
-          <a:bodyPr wrap="square" lIns="0" tIns="0" rIns="0" bIns="0" rtlCol="0" anchor="ctr"/>
-          <a:lstStyle/>
-          <a:p>
-            <a:pPr algn="l" indent="0" marL="0">
-              <a:buNone/>
-            </a:pPr>
-            <a:r>
-              <a:rPr lang="en-US" sz="800" dirty="0">
-                <a:solidFill>
-                  <a:srgbClr val="2E3440"/>
-                </a:solidFill>
-                <a:latin typeface="Roboto" pitchFamily="34" charset="0"/>
-                <a:ea typeface="Roboto" pitchFamily="34" charset="-122"/>
-                <a:cs typeface="Roboto" pitchFamily="34" charset="-120"/>
-              </a:rPr>
-              <a:t>Tanpa metrik</a:t>
-            </a:r>
-            <a:endParaRPr lang="en-US" sz="800" dirty="0"/>
-          </a:p>
-        </p:txBody>
-      </p:sp>
-      <p:sp>
-        <p:nvSpPr>
-          <p:cNvPr id="61" name="Text 57"/>
-          <p:cNvSpPr/>
-          <p:nvPr/>
-        </p:nvSpPr>
-        <p:spPr>
-          <a:xfrm>
-            <a:off x="6999181" y="4251960"/>
-            <a:ext cx="764701" cy="731520"/>
-          </a:xfrm>
-          <a:prstGeom prst="rect">
-            <a:avLst/>
-          </a:prstGeom>
-          <a:noFill/>
-          <a:ln/>
-        </p:spPr>
-        <p:txBody>
-          <a:bodyPr wrap="square" lIns="0" tIns="0" rIns="0" bIns="0" rtlCol="0" anchor="ctr"/>
-          <a:lstStyle/>
-          <a:p>
-            <a:pPr algn="l" indent="0" marL="0">
-              <a:buNone/>
-            </a:pPr>
-            <a:r>
-              <a:rPr lang="en-US" sz="800" dirty="0">
-                <a:solidFill>
-                  <a:srgbClr val="2E3440"/>
-                </a:solidFill>
-                <a:latin typeface="Roboto" pitchFamily="34" charset="0"/>
-                <a:ea typeface="Roboto" pitchFamily="34" charset="-122"/>
-                <a:cs typeface="Roboto" pitchFamily="34" charset="-120"/>
-              </a:rPr>
-              <a:t>Klaim</a:t>
-            </a:r>
-            <a:endParaRPr lang="en-US" sz="800" dirty="0"/>
-          </a:p>
-        </p:txBody>
-      </p:sp>
-      <p:sp>
-        <p:nvSpPr>
-          <p:cNvPr id="62" name="Shape 58"/>
-          <p:cNvSpPr/>
-          <p:nvPr/>
-        </p:nvSpPr>
-        <p:spPr>
-          <a:xfrm>
-            <a:off x="4666572" y="4983480"/>
-            <a:ext cx="3152175" cy="0"/>
-          </a:xfrm>
-          <a:prstGeom prst="line">
-            <a:avLst/>
-          </a:prstGeom>
-          <a:noFill/>
-          <a:ln w="6350">
-            <a:solidFill>
-              <a:srgbClr val="E3E6EA"/>
-            </a:solidFill>
-            <a:prstDash val="solid"/>
-          </a:ln>
-        </p:spPr>
-      </p:sp>
-      <p:sp>
-        <p:nvSpPr>
-          <p:cNvPr id="63" name="Text 59"/>
-          <p:cNvSpPr/>
-          <p:nvPr/>
-        </p:nvSpPr>
-        <p:spPr>
-          <a:xfrm>
-            <a:off x="4666572" y="4983480"/>
-            <a:ext cx="1269049" cy="731520"/>
-          </a:xfrm>
-          <a:prstGeom prst="rect">
-            <a:avLst/>
-          </a:prstGeom>
-          <a:noFill/>
-          <a:ln/>
-        </p:spPr>
-        <p:txBody>
-          <a:bodyPr wrap="square" lIns="0" tIns="0" rIns="0" bIns="0" rtlCol="0" anchor="ctr"/>
-          <a:lstStyle/>
-          <a:p>
-            <a:pPr algn="l" indent="0" marL="0">
-              <a:buNone/>
-            </a:pPr>
-            <a:r>
-              <a:rPr lang="en-US" sz="800" b="1" dirty="0">
-                <a:solidFill>
-                  <a:srgbClr val="1A1A1A"/>
-                </a:solidFill>
-                <a:latin typeface="Roboto" pitchFamily="34" charset="0"/>
-                <a:ea typeface="Roboto" pitchFamily="34" charset="-122"/>
-                <a:cs typeface="Roboto" pitchFamily="34" charset="-120"/>
-              </a:rPr>
-              <a:t>Pola umum</a:t>
-            </a:r>
-            <a:endParaRPr lang="en-US" sz="800" dirty="0"/>
-          </a:p>
-        </p:txBody>
-      </p:sp>
-      <p:sp>
-        <p:nvSpPr>
-          <p:cNvPr id="64" name="Text 60"/>
-          <p:cNvSpPr/>
-          <p:nvPr/>
-        </p:nvSpPr>
-        <p:spPr>
-          <a:xfrm>
-            <a:off x="5990485" y="4983480"/>
-            <a:ext cx="953832" cy="731520"/>
-          </a:xfrm>
-          <a:prstGeom prst="rect">
-            <a:avLst/>
-          </a:prstGeom>
-          <a:noFill/>
-          <a:ln/>
-        </p:spPr>
-        <p:txBody>
-          <a:bodyPr wrap="square" lIns="0" tIns="0" rIns="0" bIns="0" rtlCol="0" anchor="ctr"/>
-          <a:lstStyle/>
-          <a:p>
-            <a:pPr algn="l" indent="0" marL="0">
-              <a:buNone/>
-            </a:pPr>
-            <a:r>
-              <a:rPr lang="en-US" sz="800" dirty="0">
-                <a:solidFill>
-                  <a:srgbClr val="2E3440"/>
-                </a:solidFill>
-                <a:latin typeface="Roboto" pitchFamily="34" charset="0"/>
-                <a:ea typeface="Roboto" pitchFamily="34" charset="-122"/>
-                <a:cs typeface="Roboto" pitchFamily="34" charset="-120"/>
-              </a:rPr>
-              <a:t>Hari atau kabupaten hujan tanpa pembanding</a:t>
-            </a:r>
-            <a:endParaRPr lang="en-US" sz="800" dirty="0"/>
-          </a:p>
-        </p:txBody>
-      </p:sp>
-      <p:sp>
-        <p:nvSpPr>
-          <p:cNvPr id="65" name="Text 61"/>
-          <p:cNvSpPr/>
-          <p:nvPr/>
-        </p:nvSpPr>
-        <p:spPr>
-          <a:xfrm>
-            <a:off x="6999181" y="4983480"/>
-            <a:ext cx="764701" cy="731520"/>
-          </a:xfrm>
-          <a:prstGeom prst="rect">
-            <a:avLst/>
-          </a:prstGeom>
-          <a:noFill/>
-          <a:ln/>
-        </p:spPr>
-        <p:txBody>
-          <a:bodyPr wrap="square" lIns="0" tIns="0" rIns="0" bIns="0" rtlCol="0" anchor="ctr"/>
-          <a:lstStyle/>
-          <a:p>
-            <a:pPr algn="l" indent="0" marL="0">
-              <a:buNone/>
-            </a:pPr>
-            <a:r>
-              <a:rPr lang="en-US" sz="800" dirty="0">
-                <a:solidFill>
-                  <a:srgbClr val="2E3440"/>
-                </a:solidFill>
-                <a:latin typeface="Roboto" pitchFamily="34" charset="0"/>
-                <a:ea typeface="Roboto" pitchFamily="34" charset="-122"/>
-                <a:cs typeface="Roboto" pitchFamily="34" charset="-120"/>
-              </a:rPr>
-              <a:t>Hujan di musim peralihan tampak sukses tanpa semai</a:t>
-            </a:r>
-            <a:endParaRPr lang="en-US" sz="800" dirty="0"/>
-          </a:p>
-        </p:txBody>
-      </p:sp>
-      <p:sp>
-        <p:nvSpPr>
-          <p:cNvPr id="66" name="Shape 62"/>
-          <p:cNvSpPr/>
-          <p:nvPr/>
-        </p:nvSpPr>
-        <p:spPr>
-          <a:xfrm>
-            <a:off x="8083922" y="1280160"/>
-            <a:ext cx="3556390" cy="4809744"/>
+              <a:t>hitungan kabupaten dan jarak pandang</a:t>
+            </a:r>
+            <a:endParaRPr lang="en-US" sz="800" dirty="0"/>
+          </a:p>
+        </p:txBody>
+      </p:sp>
+      <p:sp>
+        <p:nvSpPr>
+          <p:cNvPr id="60" name="Shape 47"/>
+          <p:cNvSpPr/>
+          <p:nvPr/>
+        </p:nvSpPr>
+        <p:spPr>
+          <a:xfrm>
+            <a:off x="4891024" y="5340096"/>
+            <a:ext cx="1199693" cy="201168"/>
           </a:xfrm>
           <a:prstGeom prst="roundRect">
             <a:avLst>
-              <a:gd name="adj" fmla="val 1543"/>
+              <a:gd name="adj" fmla="val 50000"/>
+            </a:avLst>
+          </a:prstGeom>
+          <a:solidFill>
+            <a:srgbClr val="C05509"/>
+          </a:solidFill>
+          <a:ln/>
+        </p:spPr>
+      </p:sp>
+      <p:pic>
+        <p:nvPicPr>
+          <p:cNvPr id="61" name="Image 10" descr="/Users/priyankaalfatehan28/.claude/skills/ppt-konsultan/mesin/cache-ikon/warning-regular-FFFFFF.png">    </p:cNvPr>
+          <p:cNvPicPr>
+            <a:picLocks noChangeAspect="1"/>
+          </p:cNvPicPr>
+          <p:nvPr/>
+        </p:nvPicPr>
+        <p:blipFill>
+          <a:blip r:embed="rId12"/>
+          <a:stretch>
+            <a:fillRect/>
+          </a:stretch>
+        </p:blipFill>
+        <p:spPr>
+          <a:xfrm>
+            <a:off x="4964176" y="5376306"/>
+            <a:ext cx="128748" cy="128748"/>
+          </a:xfrm>
+          <a:prstGeom prst="rect">
+            <a:avLst/>
+          </a:prstGeom>
+        </p:spPr>
+      </p:pic>
+      <p:sp>
+        <p:nvSpPr>
+          <p:cNvPr id="62" name="Text 48"/>
+          <p:cNvSpPr/>
+          <p:nvPr/>
+        </p:nvSpPr>
+        <p:spPr>
+          <a:xfrm>
+            <a:off x="5128768" y="5340096"/>
+            <a:ext cx="907085" cy="201168"/>
+          </a:xfrm>
+          <a:prstGeom prst="rect">
+            <a:avLst/>
+          </a:prstGeom>
+          <a:noFill/>
+          <a:ln/>
+        </p:spPr>
+        <p:txBody>
+          <a:bodyPr wrap="square" lIns="0" tIns="0" rIns="0" bIns="0" rtlCol="0" anchor="ctr"/>
+          <a:lstStyle/>
+          <a:p>
+            <a:pPr algn="ctr" indent="0" marL="0">
+              <a:buNone/>
+            </a:pPr>
+            <a:r>
+              <a:rPr lang="en-US" sz="800" b="1" dirty="0">
+                <a:solidFill>
+                  <a:srgbClr val="FFFFFF"/>
+                </a:solidFill>
+                <a:latin typeface="Roboto" pitchFamily="34" charset="0"/>
+                <a:ea typeface="Roboto" pitchFamily="34" charset="-122"/>
+                <a:cs typeface="Roboto" pitchFamily="34" charset="-120"/>
+              </a:rPr>
+              <a:t>Tanpa pembanding</a:t>
+            </a:r>
+            <a:endParaRPr lang="en-US" sz="800" dirty="0"/>
+          </a:p>
+        </p:txBody>
+      </p:sp>
+      <p:sp>
+        <p:nvSpPr>
+          <p:cNvPr id="63" name="Shape 49"/>
+          <p:cNvSpPr/>
+          <p:nvPr/>
+        </p:nvSpPr>
+        <p:spPr>
+          <a:xfrm>
+            <a:off x="8206232" y="1280160"/>
+            <a:ext cx="3434080" cy="4809744"/>
+          </a:xfrm>
+          <a:prstGeom prst="roundRect">
+            <a:avLst>
+              <a:gd name="adj" fmla="val 1598"/>
             </a:avLst>
           </a:prstGeom>
           <a:solidFill>
@@ -13375,14 +13391,14 @@
       </p:sp>
       <p:sp>
         <p:nvSpPr>
-          <p:cNvPr id="67" name="Shape 63"/>
-          <p:cNvSpPr/>
-          <p:nvPr/>
-        </p:nvSpPr>
-        <p:spPr>
-          <a:xfrm>
-            <a:off x="8083922" y="1280160"/>
-            <a:ext cx="3556390" cy="457200"/>
+          <p:cNvPr id="64" name="Shape 50"/>
+          <p:cNvSpPr/>
+          <p:nvPr/>
+        </p:nvSpPr>
+        <p:spPr>
+          <a:xfrm>
+            <a:off x="8206232" y="1280160"/>
+            <a:ext cx="3434080" cy="457200"/>
           </a:xfrm>
           <a:prstGeom prst="roundRect">
             <a:avLst>
@@ -13397,14 +13413,14 @@
       </p:sp>
       <p:sp>
         <p:nvSpPr>
-          <p:cNvPr id="68" name="Shape 64"/>
-          <p:cNvSpPr/>
-          <p:nvPr/>
-        </p:nvSpPr>
-        <p:spPr>
-          <a:xfrm>
-            <a:off x="8083922" y="1508760"/>
-            <a:ext cx="3556390" cy="228600"/>
+          <p:cNvPr id="65" name="Shape 51"/>
+          <p:cNvSpPr/>
+          <p:nvPr/>
+        </p:nvSpPr>
+        <p:spPr>
+          <a:xfrm>
+            <a:off x="8206232" y="1508760"/>
+            <a:ext cx="3434080" cy="228600"/>
           </a:xfrm>
           <a:prstGeom prst="rect">
             <a:avLst/>
@@ -13417,13 +13433,13 @@
       </p:sp>
       <p:sp>
         <p:nvSpPr>
-          <p:cNvPr id="69" name="Shape 65"/>
-          <p:cNvSpPr/>
-          <p:nvPr/>
-        </p:nvSpPr>
-        <p:spPr>
-          <a:xfrm>
-            <a:off x="8211938" y="1362456"/>
+          <p:cNvPr id="66" name="Shape 52"/>
+          <p:cNvSpPr/>
+          <p:nvPr/>
+        </p:nvSpPr>
+        <p:spPr>
+          <a:xfrm>
+            <a:off x="8334248" y="1362456"/>
             <a:ext cx="292608" cy="292608"/>
           </a:xfrm>
           <a:prstGeom prst="ellipse">
@@ -13437,21 +13453,21 @@
       </p:sp>
       <p:pic>
         <p:nvPicPr>
-          <p:cNvPr id="70" name="Image 2" descr="/Users/priyankaalfatehan28/.claude/skills/ppt-konsultan/mesin/cache-ikon/list-checks-regular-FFFFFF.png">    </p:cNvPr>
+          <p:cNvPr id="67" name="Image 11" descr="/Users/priyankaalfatehan28/.claude/skills/ppt-konsultan/mesin/cache-ikon/list-checks-regular-FFFFFF.png">    </p:cNvPr>
           <p:cNvPicPr>
             <a:picLocks noChangeAspect="1"/>
           </p:cNvPicPr>
           <p:nvPr/>
         </p:nvPicPr>
         <p:blipFill>
-          <a:blip r:embed="rId3"/>
+          <a:blip r:embed="rId13"/>
           <a:stretch>
             <a:fillRect/>
           </a:stretch>
         </p:blipFill>
         <p:spPr>
           <a:xfrm>
-            <a:off x="8275946" y="1426464"/>
+            <a:off x="8398256" y="1426464"/>
             <a:ext cx="164592" cy="164592"/>
           </a:xfrm>
           <a:prstGeom prst="rect">
@@ -13461,14 +13477,14 @@
       </p:pic>
       <p:sp>
         <p:nvSpPr>
-          <p:cNvPr id="71" name="Text 66"/>
-          <p:cNvSpPr/>
-          <p:nvPr/>
-        </p:nvSpPr>
-        <p:spPr>
-          <a:xfrm>
-            <a:off x="8595986" y="1280160"/>
-            <a:ext cx="2907166" cy="457200"/>
+          <p:cNvPr id="68" name="Text 53"/>
+          <p:cNvSpPr/>
+          <p:nvPr/>
+        </p:nvSpPr>
+        <p:spPr>
+          <a:xfrm>
+            <a:off x="8718296" y="1280160"/>
+            <a:ext cx="2784856" cy="457200"/>
           </a:xfrm>
           <a:prstGeom prst="rect">
             <a:avLst/>
@@ -13492,7 +13508,7 @@
                 <a:ea typeface="Roboto" pitchFamily="34" charset="-122"/>
                 <a:cs typeface="Roboto" pitchFamily="34" charset="-120"/>
               </a:rPr>
-              <a:t>Kesimpulan untuk OMC Oktober 2026</a:t>
+              <a:t>Kesimpulan OMC Okt 2026</a:t>
             </a:r>
             <a:endParaRPr lang="en-US" sz="1000" dirty="0"/>
           </a:p>
@@ -13500,14 +13516,14 @@
       </p:sp>
       <p:sp>
         <p:nvSpPr>
-          <p:cNvPr id="72" name="Text 67"/>
-          <p:cNvSpPr/>
-          <p:nvPr/>
-        </p:nvSpPr>
-        <p:spPr>
-          <a:xfrm>
-            <a:off x="8211938" y="1828800"/>
-            <a:ext cx="1188720" cy="365760"/>
+          <p:cNvPr id="69" name="Text 54"/>
+          <p:cNvSpPr/>
+          <p:nvPr/>
+        </p:nvSpPr>
+        <p:spPr>
+          <a:xfrm>
+            <a:off x="8334248" y="1828800"/>
+            <a:ext cx="1188720" cy="749808"/>
           </a:xfrm>
           <a:prstGeom prst="rect">
             <a:avLst/>
@@ -13523,7 +13539,7 @@
               <a:buNone/>
             </a:pPr>
             <a:r>
-              <a:rPr lang="en-US" sz="1400" b="1" dirty="0">
+              <a:rPr lang="en-US" sz="1600" b="1" dirty="0">
                 <a:solidFill>
                   <a:srgbClr val="D9600B"/>
                 </a:solidFill>
@@ -13533,20 +13549,20 @@
               </a:rPr>
               <a:t>7 dari 7</a:t>
             </a:r>
-            <a:endParaRPr lang="en-US" sz="1400" dirty="0"/>
-          </a:p>
-        </p:txBody>
-      </p:sp>
-      <p:sp>
-        <p:nvSpPr>
-          <p:cNvPr id="73" name="Text 68"/>
-          <p:cNvSpPr/>
-          <p:nvPr/>
-        </p:nvSpPr>
-        <p:spPr>
-          <a:xfrm>
-            <a:off x="9446378" y="1828800"/>
-            <a:ext cx="2065918" cy="365760"/>
+            <a:endParaRPr lang="en-US" sz="1600" dirty="0"/>
+          </a:p>
+        </p:txBody>
+      </p:sp>
+      <p:sp>
+        <p:nvSpPr>
+          <p:cNvPr id="70" name="Text 55"/>
+          <p:cNvSpPr/>
+          <p:nvPr/>
+        </p:nvSpPr>
+        <p:spPr>
+          <a:xfrm>
+            <a:off x="9568688" y="1828800"/>
+            <a:ext cx="1943608" cy="749808"/>
           </a:xfrm>
           <a:prstGeom prst="rect">
             <a:avLst/>
@@ -13562,7 +13578,7 @@
               <a:buNone/>
             </a:pPr>
             <a:r>
-              <a:rPr lang="en-US" sz="800" dirty="0">
+              <a:rPr lang="en-US" sz="900" dirty="0">
                 <a:solidFill>
                   <a:srgbClr val="2E3440"/>
                 </a:solidFill>
@@ -13570,22 +13586,22 @@
                 <a:ea typeface="Roboto" pitchFamily="34" charset="-122"/>
                 <a:cs typeface="Roboto" pitchFamily="34" charset="-120"/>
               </a:rPr>
-              <a:t>hari operasi Kalbar dengan hujan di Ketapang</a:t>
-            </a:r>
-            <a:endParaRPr lang="en-US" sz="800" dirty="0"/>
-          </a:p>
-        </p:txBody>
-      </p:sp>
-      <p:sp>
-        <p:nvSpPr>
-          <p:cNvPr id="74" name="Shape 69"/>
-          <p:cNvSpPr/>
-          <p:nvPr/>
-        </p:nvSpPr>
-        <p:spPr>
-          <a:xfrm>
-            <a:off x="8211938" y="2221992"/>
-            <a:ext cx="3300358" cy="0"/>
+              <a:t>hari OMC di Kalbar, Ketapang dilaporkan hujan</a:t>
+            </a:r>
+            <a:endParaRPr lang="en-US" sz="900" dirty="0"/>
+          </a:p>
+        </p:txBody>
+      </p:sp>
+      <p:sp>
+        <p:nvSpPr>
+          <p:cNvPr id="71" name="Shape 56"/>
+          <p:cNvSpPr/>
+          <p:nvPr/>
+        </p:nvSpPr>
+        <p:spPr>
+          <a:xfrm>
+            <a:off x="8334248" y="2606040"/>
+            <a:ext cx="3178048" cy="0"/>
           </a:xfrm>
           <a:prstGeom prst="line">
             <a:avLst/>
@@ -13601,14 +13617,14 @@
       </p:sp>
       <p:sp>
         <p:nvSpPr>
-          <p:cNvPr id="75" name="Text 70"/>
-          <p:cNvSpPr/>
-          <p:nvPr/>
-        </p:nvSpPr>
-        <p:spPr>
-          <a:xfrm>
-            <a:off x="8211938" y="2249424"/>
-            <a:ext cx="1188720" cy="365760"/>
+          <p:cNvPr id="72" name="Text 57"/>
+          <p:cNvSpPr/>
+          <p:nvPr/>
+        </p:nvSpPr>
+        <p:spPr>
+          <a:xfrm>
+            <a:off x="8334248" y="2633472"/>
+            <a:ext cx="1188720" cy="749808"/>
           </a:xfrm>
           <a:prstGeom prst="rect">
             <a:avLst/>
@@ -13624,7 +13640,7 @@
               <a:buNone/>
             </a:pPr>
             <a:r>
-              <a:rPr lang="en-US" sz="1400" b="1" dirty="0">
+              <a:rPr lang="en-US" sz="1600" b="1" dirty="0">
                 <a:solidFill>
                   <a:srgbClr val="051C2C"/>
                 </a:solidFill>
@@ -13634,20 +13650,20 @@
               </a:rPr>
               <a:t>6 dari 11</a:t>
             </a:r>
-            <a:endParaRPr lang="en-US" sz="1400" dirty="0"/>
-          </a:p>
-        </p:txBody>
-      </p:sp>
-      <p:sp>
-        <p:nvSpPr>
-          <p:cNvPr id="76" name="Text 71"/>
-          <p:cNvSpPr/>
-          <p:nvPr/>
-        </p:nvSpPr>
-        <p:spPr>
-          <a:xfrm>
-            <a:off x="9446378" y="2249424"/>
-            <a:ext cx="2065918" cy="365760"/>
+            <a:endParaRPr lang="en-US" sz="1600" dirty="0"/>
+          </a:p>
+        </p:txBody>
+      </p:sp>
+      <p:sp>
+        <p:nvSpPr>
+          <p:cNvPr id="73" name="Text 58"/>
+          <p:cNvSpPr/>
+          <p:nvPr/>
+        </p:nvSpPr>
+        <p:spPr>
+          <a:xfrm>
+            <a:off x="9568688" y="2633472"/>
+            <a:ext cx="1943608" cy="749808"/>
           </a:xfrm>
           <a:prstGeom prst="rect">
             <a:avLst/>
@@ -13663,7 +13679,7 @@
               <a:buNone/>
             </a:pPr>
             <a:r>
-              <a:rPr lang="en-US" sz="800" dirty="0">
+              <a:rPr lang="en-US" sz="900" dirty="0">
                 <a:solidFill>
                   <a:srgbClr val="2E3440"/>
                 </a:solidFill>
@@ -13671,22 +13687,22 @@
                 <a:ea typeface="Roboto" pitchFamily="34" charset="-122"/>
                 <a:cs typeface="Roboto" pitchFamily="34" charset="-120"/>
               </a:rPr>
-              <a:t>hari operasi Kalteng dengan hujan di Kotawaringin Barat</a:t>
-            </a:r>
-            <a:endParaRPr lang="en-US" sz="800" dirty="0"/>
-          </a:p>
-        </p:txBody>
-      </p:sp>
-      <p:sp>
-        <p:nvSpPr>
-          <p:cNvPr id="77" name="Shape 72"/>
-          <p:cNvSpPr/>
-          <p:nvPr/>
-        </p:nvSpPr>
-        <p:spPr>
-          <a:xfrm>
-            <a:off x="8211938" y="2642616"/>
-            <a:ext cx="3300358" cy="0"/>
+              <a:t>hari OMC di Kalteng, Kotawaringin Barat dilaporkan hujan</a:t>
+            </a:r>
+            <a:endParaRPr lang="en-US" sz="900" dirty="0"/>
+          </a:p>
+        </p:txBody>
+      </p:sp>
+      <p:sp>
+        <p:nvSpPr>
+          <p:cNvPr id="74" name="Shape 59"/>
+          <p:cNvSpPr/>
+          <p:nvPr/>
+        </p:nvSpPr>
+        <p:spPr>
+          <a:xfrm>
+            <a:off x="8334248" y="3410712"/>
+            <a:ext cx="3178048" cy="0"/>
           </a:xfrm>
           <a:prstGeom prst="line">
             <a:avLst/>
@@ -13702,14 +13718,14 @@
       </p:sp>
       <p:sp>
         <p:nvSpPr>
-          <p:cNvPr id="78" name="Text 73"/>
-          <p:cNvSpPr/>
-          <p:nvPr/>
-        </p:nvSpPr>
-        <p:spPr>
-          <a:xfrm>
-            <a:off x="8211938" y="2670048"/>
-            <a:ext cx="1188720" cy="365760"/>
+          <p:cNvPr id="75" name="Text 60"/>
+          <p:cNvSpPr/>
+          <p:nvPr/>
+        </p:nvSpPr>
+        <p:spPr>
+          <a:xfrm>
+            <a:off x="8334248" y="3438144"/>
+            <a:ext cx="1188720" cy="749808"/>
           </a:xfrm>
           <a:prstGeom prst="rect">
             <a:avLst/>
@@ -13725,7 +13741,7 @@
               <a:buNone/>
             </a:pPr>
             <a:r>
-              <a:rPr lang="en-US" sz="1400" b="1" dirty="0">
+              <a:rPr lang="en-US" sz="1600" b="1" dirty="0">
                 <a:solidFill>
                   <a:srgbClr val="051C2C"/>
                 </a:solidFill>
@@ -13735,20 +13751,20 @@
               </a:rPr>
               <a:t>sekitar 700</a:t>
             </a:r>
-            <a:endParaRPr lang="en-US" sz="1400" dirty="0"/>
-          </a:p>
-        </p:txBody>
-      </p:sp>
-      <p:sp>
-        <p:nvSpPr>
-          <p:cNvPr id="79" name="Text 74"/>
-          <p:cNvSpPr/>
-          <p:nvPr/>
-        </p:nvSpPr>
-        <p:spPr>
-          <a:xfrm>
-            <a:off x="9446378" y="2670048"/>
-            <a:ext cx="2065918" cy="365760"/>
+            <a:endParaRPr lang="en-US" sz="1600" dirty="0"/>
+          </a:p>
+        </p:txBody>
+      </p:sp>
+      <p:sp>
+        <p:nvSpPr>
+          <p:cNvPr id="76" name="Text 61"/>
+          <p:cNvSpPr/>
+          <p:nvPr/>
+        </p:nvSpPr>
+        <p:spPr>
+          <a:xfrm>
+            <a:off x="9568688" y="3438144"/>
+            <a:ext cx="1943608" cy="749808"/>
           </a:xfrm>
           <a:prstGeom prst="rect">
             <a:avLst/>
@@ -13764,7 +13780,7 @@
               <a:buNone/>
             </a:pPr>
             <a:r>
-              <a:rPr lang="en-US" sz="800" dirty="0">
+              <a:rPr lang="en-US" sz="900" dirty="0">
                 <a:solidFill>
                   <a:srgbClr val="2E3440"/>
                 </a:solidFill>
@@ -13772,123 +13788,22 @@
                 <a:ea typeface="Roboto" pitchFamily="34" charset="-122"/>
                 <a:cs typeface="Roboto" pitchFamily="34" charset="-120"/>
               </a:rPr>
-              <a:t>kasus per kelompok untuk mendeteksi efek 15% (perkiraan kasar)</a:t>
-            </a:r>
-            <a:endParaRPr lang="en-US" sz="800" dirty="0"/>
-          </a:p>
-        </p:txBody>
-      </p:sp>
-      <p:sp>
-        <p:nvSpPr>
-          <p:cNvPr id="80" name="Shape 75"/>
-          <p:cNvSpPr/>
-          <p:nvPr/>
-        </p:nvSpPr>
-        <p:spPr>
-          <a:xfrm>
-            <a:off x="8211938" y="3063240"/>
-            <a:ext cx="3300358" cy="0"/>
-          </a:xfrm>
-          <a:prstGeom prst="line">
-            <a:avLst/>
-          </a:prstGeom>
-          <a:noFill/>
-          <a:ln w="6350">
-            <a:solidFill>
-              <a:srgbClr val="E3E6EA"/>
-            </a:solidFill>
-            <a:prstDash val="solid"/>
-          </a:ln>
-        </p:spPr>
-      </p:sp>
-      <p:sp>
-        <p:nvSpPr>
-          <p:cNvPr id="81" name="Text 76"/>
-          <p:cNvSpPr/>
-          <p:nvPr/>
-        </p:nvSpPr>
-        <p:spPr>
-          <a:xfrm>
-            <a:off x="8211938" y="3090672"/>
-            <a:ext cx="1188720" cy="365760"/>
-          </a:xfrm>
-          <a:prstGeom prst="rect">
-            <a:avLst/>
-          </a:prstGeom>
-          <a:noFill/>
-          <a:ln/>
-        </p:spPr>
-        <p:txBody>
-          <a:bodyPr wrap="square" lIns="0" tIns="0" rIns="0" bIns="0" rtlCol="0" anchor="ctr"/>
-          <a:lstStyle/>
-          <a:p>
-            <a:pPr indent="0" marL="0">
-              <a:buNone/>
-            </a:pPr>
-            <a:r>
-              <a:rPr lang="en-US" sz="1400" b="1" dirty="0">
-                <a:solidFill>
-                  <a:srgbClr val="051C2C"/>
-                </a:solidFill>
-                <a:latin typeface="Roboto" pitchFamily="34" charset="0"/>
-                <a:ea typeface="Roboto" pitchFamily="34" charset="-122"/>
-                <a:cs typeface="Roboto" pitchFamily="34" charset="-120"/>
-              </a:rPr>
-              <a:t>11 hari</a:t>
-            </a:r>
-            <a:endParaRPr lang="en-US" sz="1400" dirty="0"/>
-          </a:p>
-        </p:txBody>
-      </p:sp>
-      <p:sp>
-        <p:nvSpPr>
-          <p:cNvPr id="82" name="Text 77"/>
-          <p:cNvSpPr/>
-          <p:nvPr/>
-        </p:nvSpPr>
-        <p:spPr>
-          <a:xfrm>
-            <a:off x="9446378" y="3090672"/>
-            <a:ext cx="2065918" cy="365760"/>
-          </a:xfrm>
-          <a:prstGeom prst="rect">
-            <a:avLst/>
-          </a:prstGeom>
-          <a:noFill/>
-          <a:ln/>
-        </p:spPr>
-        <p:txBody>
-          <a:bodyPr wrap="square" lIns="0" tIns="0" rIns="0" bIns="0" rtlCol="0" anchor="ctr"/>
-          <a:lstStyle/>
-          <a:p>
-            <a:pPr indent="0" marL="0">
-              <a:buNone/>
-            </a:pPr>
-            <a:r>
-              <a:rPr lang="en-US" sz="800" dirty="0">
-                <a:solidFill>
-                  <a:srgbClr val="2E3440"/>
-                </a:solidFill>
-                <a:latin typeface="Roboto" pitchFamily="34" charset="0"/>
-                <a:ea typeface="Roboto" pitchFamily="34" charset="-122"/>
-                <a:cs typeface="Roboto" pitchFamily="34" charset="-120"/>
-              </a:rPr>
-              <a:t>operasi Kalteng dan Sumsel, jauh di bawah kebutuhan sampel</a:t>
-            </a:r>
-            <a:endParaRPr lang="en-US" sz="800" dirty="0"/>
-          </a:p>
-        </p:txBody>
-      </p:sp>
-      <p:sp>
-        <p:nvSpPr>
-          <p:cNvPr id="83" name="Text 78"/>
-          <p:cNvSpPr/>
-          <p:nvPr/>
-        </p:nvSpPr>
-        <p:spPr>
-          <a:xfrm>
-            <a:off x="8211938" y="3639312"/>
-            <a:ext cx="3300358" cy="1577340"/>
+              <a:t>kasus per kelompok untuk mendeteksi efek 15% (perkiraan kasar hitungan sendiri)</a:t>
+            </a:r>
+            <a:endParaRPr lang="en-US" sz="900" dirty="0"/>
+          </a:p>
+        </p:txBody>
+      </p:sp>
+      <p:sp>
+        <p:nvSpPr>
+          <p:cNvPr id="77" name="Text 62"/>
+          <p:cNvSpPr/>
+          <p:nvPr/>
+        </p:nvSpPr>
+        <p:spPr>
+          <a:xfrm>
+            <a:off x="8334248" y="4370832"/>
+            <a:ext cx="3178048" cy="1210437"/>
           </a:xfrm>
           <a:prstGeom prst="rect">
             <a:avLst/>
@@ -13905,7 +13820,7 @@
               <a:buChar char="•"/>
             </a:pPr>
             <a:r>
-              <a:rPr lang="en-US" sz="800" b="1" dirty="0">
+              <a:rPr lang="en-US" sz="900" b="1" dirty="0">
                 <a:solidFill>
                   <a:srgbClr val="1A1A1A"/>
                 </a:solidFill>
@@ -13913,10 +13828,10 @@
                 <a:ea typeface="Roboto" pitchFamily="34" charset="-122"/>
                 <a:cs typeface="Roboto" pitchFamily="34" charset="-120"/>
               </a:rPr>
-              <a:t>Yang bisa dikatakan:</a:t>
-            </a:r>
-            <a:r>
-              <a:rPr lang="en-US" sz="800" dirty="0">
+              <a:t>Bisa dikatakan:</a:t>
+            </a:r>
+            <a:r>
+              <a:rPr lang="en-US" sz="900" dirty="0">
                 <a:solidFill>
                   <a:srgbClr val="2E3440"/>
                 </a:solidFill>
@@ -13924,9 +13839,9 @@
                 <a:ea typeface="Roboto" pitchFamily="34" charset="-122"/>
                 <a:cs typeface="Roboto" pitchFamily="34" charset="-120"/>
               </a:rPr>
-              <a:t> hujan dilaporkan di wilayah sasaran pada sejumlah hari operasi (slide 2).</a:t>
-            </a:r>
-            <a:endParaRPr lang="en-US" sz="800" dirty="0"/>
+              <a:t> hujan dilaporkan di wilayah sasaran pada sejumlah hari operasi.</a:t>
+            </a:r>
+            <a:endParaRPr lang="en-US" sz="900" dirty="0"/>
           </a:p>
           <a:p>
             <a:pPr marL="114300" indent="-114300">
@@ -13937,7 +13852,7 @@
               <a:buChar char="•"/>
             </a:pPr>
             <a:r>
-              <a:rPr lang="en-US" sz="800" b="1" dirty="0">
+              <a:rPr lang="en-US" sz="900" b="1" dirty="0">
                 <a:solidFill>
                   <a:srgbClr val="1A1A1A"/>
                 </a:solidFill>
@@ -13945,10 +13860,10 @@
                 <a:ea typeface="Roboto" pitchFamily="34" charset="-122"/>
                 <a:cs typeface="Roboto" pitchFamily="34" charset="-120"/>
               </a:rPr>
-              <a:t>Yang tidak bisa dikatakan:</a:t>
-            </a:r>
-            <a:r>
-              <a:rPr lang="en-US" sz="800" dirty="0">
+              <a:t>Belum bisa dikatakan:</a:t>
+            </a:r>
+            <a:r>
+              <a:rPr lang="en-US" sz="900" dirty="0">
                 <a:solidFill>
                   <a:srgbClr val="2E3440"/>
                 </a:solidFill>
@@ -13956,9 +13871,9 @@
                 <a:ea typeface="Roboto" pitchFamily="34" charset="-122"/>
                 <a:cs typeface="Roboto" pitchFamily="34" charset="-120"/>
               </a:rPr>
-              <a:t> persentase hujan akibat OMC. Wilayah yang tidak disemai sebagai pembanding belum ada, dan Oktober adalah musim peralihan.</a:t>
-            </a:r>
-            <a:endParaRPr lang="en-US" sz="800" dirty="0"/>
+              <a:t> berapa persen hujan akibat OMC, karena belum ada wilayah pembanding tanpa penyemaian.</a:t>
+            </a:r>
+            <a:endParaRPr lang="en-US" sz="900" dirty="0"/>
           </a:p>
           <a:p>
             <a:pPr marL="114300" indent="-114300">
@@ -13969,7 +13884,7 @@
               <a:buChar char="•"/>
             </a:pPr>
             <a:r>
-              <a:rPr lang="en-US" sz="800" b="1" dirty="0">
+              <a:rPr lang="en-US" sz="900" b="1" dirty="0">
                 <a:solidFill>
                   <a:srgbClr val="1A1A1A"/>
                 </a:solidFill>
@@ -13977,10 +13892,10 @@
                 <a:ea typeface="Roboto" pitchFamily="34" charset="-122"/>
                 <a:cs typeface="Roboto" pitchFamily="34" charset="-120"/>
               </a:rPr>
-              <a:t>Kebutuhan data:</a:t>
-            </a:r>
-            <a:r>
-              <a:rPr lang="en-US" sz="800" dirty="0">
+              <a:t>Ke depan:</a:t>
+            </a:r>
+            <a:r>
+              <a:rPr lang="en-US" sz="900" dirty="0">
                 <a:solidFill>
                   <a:srgbClr val="2E3440"/>
                 </a:solidFill>
@@ -13988,73 +13903,9 @@
                 <a:ea typeface="Roboto" pitchFamily="34" charset="-122"/>
                 <a:cs typeface="Roboto" pitchFamily="34" charset="-120"/>
               </a:rPr>
-              <a:t> mendeteksi efek sekitar 15% butuh ratusan kab-hari per kelompok; 11 hari operasi tidak cukup.</a:t>
-            </a:r>
-            <a:endParaRPr lang="en-US" sz="800" dirty="0"/>
-          </a:p>
-          <a:p>
-            <a:pPr marL="114300" indent="-114300">
-              <a:spcBef>
-                <a:spcPts val="400"/>
-              </a:spcBef>
-              <a:buSzPct val="100000"/>
-              <a:buChar char="•"/>
-            </a:pPr>
-            <a:r>
-              <a:rPr lang="en-US" sz="800" b="1" dirty="0">
-                <a:solidFill>
-                  <a:srgbClr val="1A1A1A"/>
-                </a:solidFill>
-                <a:latin typeface="Roboto" pitchFamily="34" charset="0"/>
-                <a:ea typeface="Roboto" pitchFamily="34" charset="-122"/>
-                <a:cs typeface="Roboto" pitchFamily="34" charset="-120"/>
-              </a:rPr>
-              <a:t>Ke depan:</a:t>
-            </a:r>
-            <a:r>
-              <a:rPr lang="en-US" sz="800" dirty="0">
-                <a:solidFill>
-                  <a:srgbClr val="2E3440"/>
-                </a:solidFill>
-                <a:latin typeface="Roboto" pitchFamily="34" charset="0"/>
-                <a:ea typeface="Roboto" pitchFamily="34" charset="-122"/>
-                <a:cs typeface="Roboto" pitchFamily="34" charset="-120"/>
-              </a:rPr>
-              <a:t> catat jam dan koordinat lintasan semai tiap sortie, tetapkan wilayah kontrol tiap hari, pulihkan arsip PM2,5 BMKG.</a:t>
-            </a:r>
-            <a:endParaRPr lang="en-US" sz="800" dirty="0"/>
-          </a:p>
-          <a:p>
-            <a:pPr marL="114300" indent="-114300">
-              <a:spcBef>
-                <a:spcPts val="400"/>
-              </a:spcBef>
-              <a:buSzPct val="100000"/>
-              <a:buChar char="•"/>
-            </a:pPr>
-            <a:r>
-              <a:rPr lang="en-US" sz="800" b="1" dirty="0">
-                <a:solidFill>
-                  <a:srgbClr val="1A1A1A"/>
-                </a:solidFill>
-                <a:latin typeface="Roboto" pitchFamily="34" charset="0"/>
-                <a:ea typeface="Roboto" pitchFamily="34" charset="-122"/>
-                <a:cs typeface="Roboto" pitchFamily="34" charset="-120"/>
-              </a:rPr>
-              <a:t>Sedang dihitung:</a:t>
-            </a:r>
-            <a:r>
-              <a:rPr lang="en-US" sz="800" dirty="0">
-                <a:solidFill>
-                  <a:srgbClr val="2E3440"/>
-                </a:solidFill>
-                <a:latin typeface="Roboto" pitchFamily="34" charset="0"/>
-                <a:ea typeface="Roboto" pitchFamily="34" charset="-122"/>
-                <a:cs typeface="Roboto" pitchFamily="34" charset="-120"/>
-              </a:rPr>
-              <a:t> uji wilayah sasaran lawan kontrol dengan data satelit; hasilnya ditambahkan.</a:t>
-            </a:r>
-            <a:endParaRPr lang="en-US" sz="800" dirty="0"/>
+              <a:t> catat jam dan lintasan tiap sortie, tetapkan wilayah kontrol harian, pulihkan arsip PM2,5.</a:t>
+            </a:r>
+            <a:endParaRPr lang="en-US" sz="900" dirty="0"/>
           </a:p>
         </p:txBody>
       </p:sp>

--- a/data/laporan-bnpb/omc/OMC_Karhutla_16-27Okt2026.pptx
+++ b/data/laporan-bnpb/omc/OMC_Karhutla_16-27Okt2026.pptx
@@ -11554,7 +11554,7 @@
                 <a:ea typeface="Roboto" pitchFamily="34" charset="-122"/>
                 <a:cs typeface="Roboto" pitchFamily="34" charset="-120"/>
               </a:rPr>
-              <a:t>Bukti dunia: penyemaian garam paling banyak menambah sekitar </a:t>
+              <a:t>Bukti dunia paling banyak sekitar </a:t>
             </a:r>
             <a:r>
               <a:rPr lang="en-US" sz="2200" b="1" dirty="0">
@@ -11576,7 +11576,7 @@
                 <a:ea typeface="Roboto" pitchFamily="34" charset="-122"/>
                 <a:cs typeface="Roboto" pitchFamily="34" charset="-120"/>
               </a:rPr>
-              <a:t> hujan, dry ice untuk asap belum terbukti</a:t>
+              <a:t> tambahan hujan; uji satelit OMC Oktober 2026 belum mendeteksi efek</a:t>
             </a:r>
             <a:endParaRPr lang="en-US" sz="2200" dirty="0"/>
           </a:p>
@@ -11757,7 +11757,7 @@
                 <a:ea typeface="Roboto" pitchFamily="34" charset="-122"/>
                 <a:cs typeface="Roboto" pitchFamily="34" charset="-120"/>
               </a:rPr>
-              <a:t>WMO 2025; IITM 2023 (CAIPEEX-IV); Israel-4; Silverman 2003; BRIN 19 Okt 2026; BMKG Jul 2025; BNPB 21 Okt 2026</a:t>
+              <a:t>WMO 2025; IITM 2023 (CAIPEEX-IV); Israel-4; Silverman 2003; BRIN 19 Okt 2026; BMKG Jul 2025; BNPB 21 Okt 2026; CHIRPS prelim (CHC UCSB); prakiraan ECMWF IFS</a:t>
             </a:r>
             <a:endParaRPr lang="en-US" sz="900" dirty="0"/>
           </a:p>
@@ -13523,7 +13523,7 @@
         <p:spPr>
           <a:xfrm>
             <a:off x="8334248" y="1828800"/>
-            <a:ext cx="1188720" cy="749808"/>
+            <a:ext cx="1371600" cy="749808"/>
           </a:xfrm>
           <a:prstGeom prst="rect">
             <a:avLst/>
@@ -13539,7 +13539,7 @@
               <a:buNone/>
             </a:pPr>
             <a:r>
-              <a:rPr lang="en-US" sz="1600" b="1" dirty="0">
+              <a:rPr lang="en-US" sz="1400" b="1" dirty="0">
                 <a:solidFill>
                   <a:srgbClr val="D9600B"/>
                 </a:solidFill>
@@ -13547,9 +13547,9 @@
                 <a:ea typeface="Roboto" pitchFamily="34" charset="-122"/>
                 <a:cs typeface="Roboto" pitchFamily="34" charset="-120"/>
               </a:rPr>
-              <a:t>7 dari 7</a:t>
-            </a:r>
-            <a:endParaRPr lang="en-US" sz="1600" dirty="0"/>
+              <a:t>83 dari 113</a:t>
+            </a:r>
+            <a:endParaRPr lang="en-US" sz="1400" dirty="0"/>
           </a:p>
         </p:txBody>
       </p:sp>
@@ -13561,8 +13561,8 @@
         </p:nvSpPr>
         <p:spPr>
           <a:xfrm>
-            <a:off x="9568688" y="1828800"/>
-            <a:ext cx="1943608" cy="749808"/>
+            <a:off x="9751568" y="1828800"/>
+            <a:ext cx="1760728" cy="749808"/>
           </a:xfrm>
           <a:prstGeom prst="rect">
             <a:avLst/>
@@ -13586,7 +13586,7 @@
                 <a:ea typeface="Roboto" pitchFamily="34" charset="-122"/>
                 <a:cs typeface="Roboto" pitchFamily="34" charset="-120"/>
               </a:rPr>
-              <a:t>hari OMC di Kalbar, Ketapang dilaporkan hujan</a:t>
+              <a:t>klaim hujan di laporan harian terkonfirmasi data satelit (CHIRPS)</a:t>
             </a:r>
             <a:endParaRPr lang="en-US" sz="900" dirty="0"/>
           </a:p>
@@ -13624,7 +13624,7 @@
         <p:spPr>
           <a:xfrm>
             <a:off x="8334248" y="2633472"/>
-            <a:ext cx="1188720" cy="749808"/>
+            <a:ext cx="1371600" cy="749808"/>
           </a:xfrm>
           <a:prstGeom prst="rect">
             <a:avLst/>
@@ -13640,7 +13640,7 @@
               <a:buNone/>
             </a:pPr>
             <a:r>
-              <a:rPr lang="en-US" sz="1600" b="1" dirty="0">
+              <a:rPr lang="en-US" sz="1400" b="1" dirty="0">
                 <a:solidFill>
                   <a:srgbClr val="051C2C"/>
                 </a:solidFill>
@@ -13648,9 +13648,9 @@
                 <a:ea typeface="Roboto" pitchFamily="34" charset="-122"/>
                 <a:cs typeface="Roboto" pitchFamily="34" charset="-120"/>
               </a:rPr>
-              <a:t>6 dari 11</a:t>
-            </a:r>
-            <a:endParaRPr lang="en-US" sz="1600" dirty="0"/>
+              <a:t>Tidak terdeteksi</a:t>
+            </a:r>
+            <a:endParaRPr lang="en-US" sz="1400" dirty="0"/>
           </a:p>
         </p:txBody>
       </p:sp>
@@ -13662,8 +13662,8 @@
         </p:nvSpPr>
         <p:spPr>
           <a:xfrm>
-            <a:off x="9568688" y="2633472"/>
-            <a:ext cx="1943608" cy="749808"/>
+            <a:off x="9751568" y="2633472"/>
+            <a:ext cx="1760728" cy="749808"/>
           </a:xfrm>
           <a:prstGeom prst="rect">
             <a:avLst/>
@@ -13687,7 +13687,7 @@
                 <a:ea typeface="Roboto" pitchFamily="34" charset="-122"/>
                 <a:cs typeface="Roboto" pitchFamily="34" charset="-120"/>
               </a:rPr>
-              <a:t>hari OMC di Kalteng, Kotawaringin Barat dilaporkan hujan</a:t>
+              <a:t>efek OMC ke hujan: kabupaten disemai lawan tidak disemai -24%, rentang -121% sampai +73%</a:t>
             </a:r>
             <a:endParaRPr lang="en-US" sz="900" dirty="0"/>
           </a:p>
@@ -13725,7 +13725,7 @@
         <p:spPr>
           <a:xfrm>
             <a:off x="8334248" y="3438144"/>
-            <a:ext cx="1188720" cy="749808"/>
+            <a:ext cx="1371600" cy="749808"/>
           </a:xfrm>
           <a:prstGeom prst="rect">
             <a:avLst/>
@@ -13741,7 +13741,7 @@
               <a:buNone/>
             </a:pPr>
             <a:r>
-              <a:rPr lang="en-US" sz="1600" b="1" dirty="0">
+              <a:rPr lang="en-US" sz="1400" b="1" dirty="0">
                 <a:solidFill>
                   <a:srgbClr val="051C2C"/>
                 </a:solidFill>
@@ -13749,9 +13749,9 @@
                 <a:ea typeface="Roboto" pitchFamily="34" charset="-122"/>
                 <a:cs typeface="Roboto" pitchFamily="34" charset="-120"/>
               </a:rPr>
-              <a:t>sekitar 700</a:t>
-            </a:r>
-            <a:endParaRPr lang="en-US" sz="1600" dirty="0"/>
+              <a:t>2 kali lipat</a:t>
+            </a:r>
+            <a:endParaRPr lang="en-US" sz="1400" dirty="0"/>
           </a:p>
         </p:txBody>
       </p:sp>
@@ -13763,8 +13763,8 @@
         </p:nvSpPr>
         <p:spPr>
           <a:xfrm>
-            <a:off x="9568688" y="3438144"/>
-            <a:ext cx="1943608" cy="749808"/>
+            <a:off x="9751568" y="3438144"/>
+            <a:ext cx="1760728" cy="749808"/>
           </a:xfrm>
           <a:prstGeom prst="rect">
             <a:avLst/>
@@ -13788,7 +13788,7 @@
                 <a:ea typeface="Roboto" pitchFamily="34" charset="-122"/>
                 <a:cs typeface="Roboto" pitchFamily="34" charset="-120"/>
               </a:rPr>
-              <a:t>kasus per kelompok untuk mendeteksi efek 15% (perkiraan kasar hitungan sendiri)</a:t>
+              <a:t>efek terkecil yang bisa terlihat dengan data 9 hari operasi</a:t>
             </a:r>
             <a:endParaRPr lang="en-US" sz="900" dirty="0"/>
           </a:p>
@@ -13803,7 +13803,7 @@
         <p:spPr>
           <a:xfrm>
             <a:off x="8334248" y="4370832"/>
-            <a:ext cx="3178048" cy="1210437"/>
+            <a:ext cx="3178048" cy="1353312"/>
           </a:xfrm>
           <a:prstGeom prst="rect">
             <a:avLst/>
@@ -13828,7 +13828,7 @@
                 <a:ea typeface="Roboto" pitchFamily="34" charset="-122"/>
                 <a:cs typeface="Roboto" pitchFamily="34" charset="-120"/>
               </a:rPr>
-              <a:t>Bisa dikatakan:</a:t>
+              <a:t>Dry ice disemai di hari dan tempat yang memang kering:</a:t>
             </a:r>
             <a:r>
               <a:rPr lang="en-US" sz="900" dirty="0">
@@ -13839,7 +13839,7 @@
                 <a:ea typeface="Roboto" pitchFamily="34" charset="-122"/>
                 <a:cs typeface="Roboto" pitchFamily="34" charset="-120"/>
               </a:rPr>
-              <a:t> hujan dilaporkan di wilayah sasaran pada sejumlah hari operasi.</a:t>
+              <a:t> prakiraan 2,2 mm lawan 8,0 mm di wilayah lain, jadi angka dry ice tidak boleh dibaca sebagai efek.</a:t>
             </a:r>
             <a:endParaRPr lang="en-US" sz="900" dirty="0"/>
           </a:p>
@@ -13860,7 +13860,7 @@
                 <a:ea typeface="Roboto" pitchFamily="34" charset="-122"/>
                 <a:cs typeface="Roboto" pitchFamily="34" charset="-120"/>
               </a:rPr>
-              <a:t>Belum bisa dikatakan:</a:t>
+              <a:t>Sumsel hampir tidak teruji:</a:t>
             </a:r>
             <a:r>
               <a:rPr lang="en-US" sz="900" dirty="0">
@@ -13871,7 +13871,7 @@
                 <a:ea typeface="Roboto" pitchFamily="34" charset="-122"/>
                 <a:cs typeface="Roboto" pitchFamily="34" charset="-120"/>
               </a:rPr>
-              <a:t> berapa persen hujan akibat OMC, karena belum ada wilayah pembanding tanpa penyemaian.</a:t>
+              <a:t> sasarannya ditulis sebagai arah, misalnya timur laut Palembang, tidak sebagai kabupaten.</a:t>
             </a:r>
             <a:endParaRPr lang="en-US" sz="900" dirty="0"/>
           </a:p>
@@ -13903,7 +13903,7 @@
                 <a:ea typeface="Roboto" pitchFamily="34" charset="-122"/>
                 <a:cs typeface="Roboto" pitchFamily="34" charset="-120"/>
               </a:rPr>
-              <a:t> catat jam dan lintasan tiap sortie, tetapkan wilayah kontrol harian, pulihkan arsip PM2,5.</a:t>
+              <a:t> catat jam dan lintasan tiap sortie, tetapkan wilayah kontrol, gunakan data satelit per jam.</a:t>
             </a:r>
             <a:endParaRPr lang="en-US" sz="900" dirty="0"/>
           </a:p>
